--- a/output/presentations/cinderblock-contract-billing-dev-handoff-presentation.pptx
+++ b/output/presentations/cinderblock-contract-billing-dev-handoff-presentation.pptx
@@ -2,41 +2,41 @@
 <file path=ppt/presentation.xml><?xml version="1.0" encoding="utf-8"?>
 <p:presentation xmlns:p="http://schemas.openxmlformats.org/presentationml/2006/main">
   <p:sldMasterIdLst>
-    <p:sldMasterId xmlns:r="http://schemas.openxmlformats.org/officeDocument/2006/relationships" id="2147483648" r:id="R9d549d7f8acd42aa"/>
+    <p:sldMasterId xmlns:r="http://schemas.openxmlformats.org/officeDocument/2006/relationships" id="2147483648" r:id="Rdd82c7eb2b0848ee"/>
   </p:sldMasterIdLst>
   <p:notesMasterIdLst>
-    <p:notesMasterId xmlns:r="http://schemas.openxmlformats.org/officeDocument/2006/relationships" r:id="R6ed62c8a4e004723"/>
+    <p:notesMasterId xmlns:r="http://schemas.openxmlformats.org/officeDocument/2006/relationships" r:id="R2eceecbab4cb49b4"/>
   </p:notesMasterIdLst>
   <p:sldIdLst>
-    <p:sldId xmlns:r="http://schemas.openxmlformats.org/officeDocument/2006/relationships" id="256" r:id="R5da5010675e74c3b"/>
-    <p:sldId xmlns:r="http://schemas.openxmlformats.org/officeDocument/2006/relationships" id="257" r:id="Re7cf4949e8444e13"/>
-    <p:sldId xmlns:r="http://schemas.openxmlformats.org/officeDocument/2006/relationships" id="258" r:id="Rc9188b11bed04e61"/>
-    <p:sldId xmlns:r="http://schemas.openxmlformats.org/officeDocument/2006/relationships" id="259" r:id="Rf142d98cbf684cdb"/>
-    <p:sldId xmlns:r="http://schemas.openxmlformats.org/officeDocument/2006/relationships" id="260" r:id="R8040e04d2e55404a"/>
-    <p:sldId xmlns:r="http://schemas.openxmlformats.org/officeDocument/2006/relationships" id="261" r:id="R79c06945f4f849a8"/>
-    <p:sldId xmlns:r="http://schemas.openxmlformats.org/officeDocument/2006/relationships" id="262" r:id="Raaeb9b7c84af4c2b"/>
-    <p:sldId xmlns:r="http://schemas.openxmlformats.org/officeDocument/2006/relationships" id="263" r:id="Ra060cbf948ea4b61"/>
-    <p:sldId xmlns:r="http://schemas.openxmlformats.org/officeDocument/2006/relationships" id="264" r:id="R7698bd3b08754848"/>
-    <p:sldId xmlns:r="http://schemas.openxmlformats.org/officeDocument/2006/relationships" id="265" r:id="R30408a6f5444447c"/>
-    <p:sldId xmlns:r="http://schemas.openxmlformats.org/officeDocument/2006/relationships" id="266" r:id="R00561c3db7ff4a73"/>
-    <p:sldId xmlns:r="http://schemas.openxmlformats.org/officeDocument/2006/relationships" id="267" r:id="R564890e5d9e1433e"/>
-    <p:sldId xmlns:r="http://schemas.openxmlformats.org/officeDocument/2006/relationships" id="268" r:id="Rf9958a15a5314300"/>
-    <p:sldId xmlns:r="http://schemas.openxmlformats.org/officeDocument/2006/relationships" id="269" r:id="R924628101f7f4093"/>
-    <p:sldId xmlns:r="http://schemas.openxmlformats.org/officeDocument/2006/relationships" id="270" r:id="Re6383dfd02114534"/>
-    <p:sldId xmlns:r="http://schemas.openxmlformats.org/officeDocument/2006/relationships" id="271" r:id="R5fd5db603dc94b34"/>
-    <p:sldId xmlns:r="http://schemas.openxmlformats.org/officeDocument/2006/relationships" id="272" r:id="R8b5bf321357e4bb3"/>
-    <p:sldId xmlns:r="http://schemas.openxmlformats.org/officeDocument/2006/relationships" id="273" r:id="R59754851518548c1"/>
-    <p:sldId xmlns:r="http://schemas.openxmlformats.org/officeDocument/2006/relationships" id="274" r:id="Rd3df07244b774e65"/>
-    <p:sldId xmlns:r="http://schemas.openxmlformats.org/officeDocument/2006/relationships" id="275" r:id="R283cbd9c7873412d"/>
-    <p:sldId xmlns:r="http://schemas.openxmlformats.org/officeDocument/2006/relationships" id="276" r:id="R7a908a53512540ac"/>
-    <p:sldId xmlns:r="http://schemas.openxmlformats.org/officeDocument/2006/relationships" id="277" r:id="Ree64cf32cc014508"/>
-    <p:sldId xmlns:r="http://schemas.openxmlformats.org/officeDocument/2006/relationships" id="278" r:id="R2cf4e688b0714684"/>
-    <p:sldId xmlns:r="http://schemas.openxmlformats.org/officeDocument/2006/relationships" id="279" r:id="Rb2307d95f7b14ae3"/>
-    <p:sldId xmlns:r="http://schemas.openxmlformats.org/officeDocument/2006/relationships" id="280" r:id="R0ca7ddd124fe466b"/>
-    <p:sldId xmlns:r="http://schemas.openxmlformats.org/officeDocument/2006/relationships" id="281" r:id="Rd36973f015cf4f4e"/>
-    <p:sldId xmlns:r="http://schemas.openxmlformats.org/officeDocument/2006/relationships" id="282" r:id="Rf2b1cfa2ee4f44e0"/>
-    <p:sldId xmlns:r="http://schemas.openxmlformats.org/officeDocument/2006/relationships" id="283" r:id="R6036607144954094"/>
-    <p:sldId xmlns:r="http://schemas.openxmlformats.org/officeDocument/2006/relationships" id="284" r:id="R7f3b9c31676c4e9f"/>
+    <p:sldId xmlns:r="http://schemas.openxmlformats.org/officeDocument/2006/relationships" id="256" r:id="Red02d3c27a1f43e3"/>
+    <p:sldId xmlns:r="http://schemas.openxmlformats.org/officeDocument/2006/relationships" id="257" r:id="R0b29872052cd437d"/>
+    <p:sldId xmlns:r="http://schemas.openxmlformats.org/officeDocument/2006/relationships" id="258" r:id="Rd4fd0751457649b8"/>
+    <p:sldId xmlns:r="http://schemas.openxmlformats.org/officeDocument/2006/relationships" id="259" r:id="Rf173a8ce6bec40ad"/>
+    <p:sldId xmlns:r="http://schemas.openxmlformats.org/officeDocument/2006/relationships" id="260" r:id="Ra52e66a68c034715"/>
+    <p:sldId xmlns:r="http://schemas.openxmlformats.org/officeDocument/2006/relationships" id="261" r:id="Rc0f3923c80e1440f"/>
+    <p:sldId xmlns:r="http://schemas.openxmlformats.org/officeDocument/2006/relationships" id="262" r:id="R715581e3c1b448ee"/>
+    <p:sldId xmlns:r="http://schemas.openxmlformats.org/officeDocument/2006/relationships" id="263" r:id="R36b5d6c7e4554f84"/>
+    <p:sldId xmlns:r="http://schemas.openxmlformats.org/officeDocument/2006/relationships" id="264" r:id="R254a1cd4d47b4482"/>
+    <p:sldId xmlns:r="http://schemas.openxmlformats.org/officeDocument/2006/relationships" id="265" r:id="Rbf3c7c9ae6df4ccc"/>
+    <p:sldId xmlns:r="http://schemas.openxmlformats.org/officeDocument/2006/relationships" id="266" r:id="Ra14f19a93de24530"/>
+    <p:sldId xmlns:r="http://schemas.openxmlformats.org/officeDocument/2006/relationships" id="267" r:id="R8b3594e1dd9449c3"/>
+    <p:sldId xmlns:r="http://schemas.openxmlformats.org/officeDocument/2006/relationships" id="268" r:id="Rf041d1cce4ee49dc"/>
+    <p:sldId xmlns:r="http://schemas.openxmlformats.org/officeDocument/2006/relationships" id="269" r:id="R8b2c5300684c42e9"/>
+    <p:sldId xmlns:r="http://schemas.openxmlformats.org/officeDocument/2006/relationships" id="270" r:id="Re063ec45b97a4d75"/>
+    <p:sldId xmlns:r="http://schemas.openxmlformats.org/officeDocument/2006/relationships" id="271" r:id="R7cf9821c45dd4b40"/>
+    <p:sldId xmlns:r="http://schemas.openxmlformats.org/officeDocument/2006/relationships" id="272" r:id="R017f66f667a54b7f"/>
+    <p:sldId xmlns:r="http://schemas.openxmlformats.org/officeDocument/2006/relationships" id="273" r:id="R37c1739c071e4607"/>
+    <p:sldId xmlns:r="http://schemas.openxmlformats.org/officeDocument/2006/relationships" id="274" r:id="R4863041441a14102"/>
+    <p:sldId xmlns:r="http://schemas.openxmlformats.org/officeDocument/2006/relationships" id="275" r:id="Re6260b30fe40438b"/>
+    <p:sldId xmlns:r="http://schemas.openxmlformats.org/officeDocument/2006/relationships" id="276" r:id="R6d975fa8db5440b8"/>
+    <p:sldId xmlns:r="http://schemas.openxmlformats.org/officeDocument/2006/relationships" id="277" r:id="Rf6c2ca08300a44e4"/>
+    <p:sldId xmlns:r="http://schemas.openxmlformats.org/officeDocument/2006/relationships" id="278" r:id="R3f8e3356000d4a2b"/>
+    <p:sldId xmlns:r="http://schemas.openxmlformats.org/officeDocument/2006/relationships" id="279" r:id="R21f9b0c8708142d7"/>
+    <p:sldId xmlns:r="http://schemas.openxmlformats.org/officeDocument/2006/relationships" id="280" r:id="Rad6df3c257654e22"/>
+    <p:sldId xmlns:r="http://schemas.openxmlformats.org/officeDocument/2006/relationships" id="281" r:id="R65b9787733fb4808"/>
+    <p:sldId xmlns:r="http://schemas.openxmlformats.org/officeDocument/2006/relationships" id="282" r:id="R1cb37643bffa4c99"/>
+    <p:sldId xmlns:r="http://schemas.openxmlformats.org/officeDocument/2006/relationships" id="283" r:id="R9c5142b19b154604"/>
+    <p:sldId xmlns:r="http://schemas.openxmlformats.org/officeDocument/2006/relationships" id="284" r:id="R042bb76a20fe42a3"/>
   </p:sldIdLst>
   <p:sldSz cx="12192000" cy="6858000"/>
   <p:notesSz cx="6858000" cy="9144000"/>
@@ -2498,7 +2498,7 @@
   </p:cSld>
   <p:clrMap bg1="lt1" tx1="dk1" bg2="lt2" tx2="dk2" accent1="accent1" accent2="accent2" accent3="accent3" accent4="accent4" accent5="accent5" accent6="accent6" hlink="hlink" folHlink="folHlink"/>
   <p:sldLayoutIdLst>
-    <p:sldLayoutId xmlns:r="http://schemas.openxmlformats.org/officeDocument/2006/relationships" id="2147483649" r:id="R8e011c312d32477e"/>
+    <p:sldLayoutId xmlns:r="http://schemas.openxmlformats.org/officeDocument/2006/relationships" id="2147483649" r:id="Rdf58b198646e4407"/>
   </p:sldLayoutIdLst>
   <p:txStyles>
     <p:titleStyle>
@@ -3049,7 +3049,7 @@
           <p:cNvPr id="9" name="">
             <a:extLst xmlns:a="http://schemas.openxmlformats.org/drawingml/2006/main">
               <a:ext uri="{FF2B5EF4-FFF2-40B4-BE49-F238E27FC236}">
-                <a16:creationId xmlns:a16="http://schemas.microsoft.com/office/drawing/2014/main" id="{4FF690A3-726F-4767-B613-7D5F7D65453D}"/>
+                <a16:creationId xmlns:a16="http://schemas.microsoft.com/office/drawing/2014/main" id="{0AEB2FA2-6B17-4363-83DD-F73834783A3A}"/>
               </a:ext>
             </a:extLst>
           </p:cNvPr>
@@ -3106,7 +3106,7 @@
           <p:cNvPr id="2" name="">
             <a:extLst xmlns:a="http://schemas.openxmlformats.org/drawingml/2006/main">
               <a:ext uri="{FF2B5EF4-FFF2-40B4-BE49-F238E27FC236}">
-                <a16:creationId xmlns:a16="http://schemas.microsoft.com/office/drawing/2014/main" id="{596F34C2-9782-4474-B585-57D067AA5263}"/>
+                <a16:creationId xmlns:a16="http://schemas.microsoft.com/office/drawing/2014/main" id="{A598C2F5-E64C-422E-BF1C-7FB06BE19699}"/>
               </a:ext>
             </a:extLst>
           </p:cNvPr>
@@ -3186,7 +3186,7 @@
           <p:cNvPr id="3" name="">
             <a:extLst xmlns:a="http://schemas.openxmlformats.org/drawingml/2006/main">
               <a:ext uri="{FF2B5EF4-FFF2-40B4-BE49-F238E27FC236}">
-                <a16:creationId xmlns:a16="http://schemas.microsoft.com/office/drawing/2014/main" id="{9837217A-0D63-4ABF-B928-25628C744C56}"/>
+                <a16:creationId xmlns:a16="http://schemas.microsoft.com/office/drawing/2014/main" id="{6BD00524-A048-4F29-A002-A903B097DB92}"/>
               </a:ext>
             </a:extLst>
           </p:cNvPr>
@@ -3243,7 +3243,7 @@
           <p:cNvPr id="4" name="">
             <a:extLst xmlns:a="http://schemas.openxmlformats.org/drawingml/2006/main">
               <a:ext uri="{FF2B5EF4-FFF2-40B4-BE49-F238E27FC236}">
-                <a16:creationId xmlns:a16="http://schemas.microsoft.com/office/drawing/2014/main" id="{61448654-E021-4D7C-9364-61D316C5DE68}"/>
+                <a16:creationId xmlns:a16="http://schemas.microsoft.com/office/drawing/2014/main" id="{11B892D6-1747-4075-9B80-FF9A2AEEB409}"/>
               </a:ext>
             </a:extLst>
           </p:cNvPr>
@@ -3273,7 +3273,7 @@
           <p:cNvPr id="5" name="">
             <a:extLst xmlns:a="http://schemas.openxmlformats.org/drawingml/2006/main">
               <a:ext uri="{FF2B5EF4-FFF2-40B4-BE49-F238E27FC236}">
-                <a16:creationId xmlns:a16="http://schemas.microsoft.com/office/drawing/2014/main" id="{DE006364-DC0D-45E4-996B-3295A4AE1D4F}"/>
+                <a16:creationId xmlns:a16="http://schemas.microsoft.com/office/drawing/2014/main" id="{AA71430D-180F-4998-90BA-712255DE5C26}"/>
               </a:ext>
             </a:extLst>
           </p:cNvPr>
@@ -3330,7 +3330,7 @@
           <p:cNvPr id="6" name="">
             <a:extLst xmlns:a="http://schemas.openxmlformats.org/drawingml/2006/main">
               <a:ext uri="{FF2B5EF4-FFF2-40B4-BE49-F238E27FC236}">
-                <a16:creationId xmlns:a16="http://schemas.microsoft.com/office/drawing/2014/main" id="{9A9208D8-DBED-4F67-A1D1-04FA44977BF1}"/>
+                <a16:creationId xmlns:a16="http://schemas.microsoft.com/office/drawing/2014/main" id="{89A9BBEE-E92F-4A4F-98BE-A5A8BCF72BCA}"/>
               </a:ext>
             </a:extLst>
           </p:cNvPr>
@@ -3387,7 +3387,7 @@
           <p:cNvPr id="7" name="">
             <a:extLst xmlns:a="http://schemas.openxmlformats.org/drawingml/2006/main">
               <a:ext uri="{FF2B5EF4-FFF2-40B4-BE49-F238E27FC236}">
-                <a16:creationId xmlns:a16="http://schemas.microsoft.com/office/drawing/2014/main" id="{911A0DA8-4EB1-4216-B5E6-9B0D04736EF2}"/>
+                <a16:creationId xmlns:a16="http://schemas.microsoft.com/office/drawing/2014/main" id="{65AC7638-4BF2-4FBF-817A-EDA4AC16E607}"/>
               </a:ext>
             </a:extLst>
           </p:cNvPr>
@@ -3444,7 +3444,7 @@
           <p:cNvPr id="8" name="">
             <a:extLst xmlns:a="http://schemas.openxmlformats.org/drawingml/2006/main">
               <a:ext uri="{FF2B5EF4-FFF2-40B4-BE49-F238E27FC236}">
-                <a16:creationId xmlns:a16="http://schemas.microsoft.com/office/drawing/2014/main" id="{5819799A-1511-4257-B436-2E5E855AE0E3}"/>
+                <a16:creationId xmlns:a16="http://schemas.microsoft.com/office/drawing/2014/main" id="{9DE66DFE-77C9-4631-9437-7BA5B747D232}"/>
               </a:ext>
             </a:extLst>
           </p:cNvPr>
@@ -3499,7 +3499,7 @@
     </p:spTree>
     <p:extLst>
       <p:ext uri="{BB962C8B-B14F-4D97-AF65-F5344CB8AC3E}">
-        <p14:creationId xmlns:p14="http://schemas.microsoft.com/office/powerpoint/2010/main" val="1224176454"/>
+        <p14:creationId xmlns:p14="http://schemas.microsoft.com/office/powerpoint/2010/main" val="1504310604"/>
       </p:ext>
     </p:extLst>
   </p:cSld>
@@ -3530,7 +3530,7 @@
           <p:cNvPr id="30" name="">
             <a:extLst xmlns:a="http://schemas.openxmlformats.org/drawingml/2006/main">
               <a:ext uri="{FF2B5EF4-FFF2-40B4-BE49-F238E27FC236}">
-                <a16:creationId xmlns:a16="http://schemas.microsoft.com/office/drawing/2014/main" id="{206C9026-A905-456E-8F37-45CA928DD90E}"/>
+                <a16:creationId xmlns:a16="http://schemas.microsoft.com/office/drawing/2014/main" id="{63E5B669-FEB1-435E-AB6C-0C89A2208592}"/>
               </a:ext>
             </a:extLst>
           </p:cNvPr>
@@ -3587,7 +3587,7 @@
           <p:cNvPr id="2" name="">
             <a:extLst xmlns:a="http://schemas.openxmlformats.org/drawingml/2006/main">
               <a:ext uri="{FF2B5EF4-FFF2-40B4-BE49-F238E27FC236}">
-                <a16:creationId xmlns:a16="http://schemas.microsoft.com/office/drawing/2014/main" id="{C4EF621D-D668-42E5-9590-DBF148D81E4A}"/>
+                <a16:creationId xmlns:a16="http://schemas.microsoft.com/office/drawing/2014/main" id="{2B59E738-C022-463A-8563-73CB010803DD}"/>
               </a:ext>
             </a:extLst>
           </p:cNvPr>
@@ -3644,7 +3644,7 @@
           <p:cNvPr id="3" name="">
             <a:extLst xmlns:a="http://schemas.openxmlformats.org/drawingml/2006/main">
               <a:ext uri="{FF2B5EF4-FFF2-40B4-BE49-F238E27FC236}">
-                <a16:creationId xmlns:a16="http://schemas.microsoft.com/office/drawing/2014/main" id="{DE5CD8E7-48B3-47FC-923B-A6EB35E334AE}"/>
+                <a16:creationId xmlns:a16="http://schemas.microsoft.com/office/drawing/2014/main" id="{C6169BE6-5F93-46C1-83D8-DE5BD65AF209}"/>
               </a:ext>
             </a:extLst>
           </p:cNvPr>
@@ -3674,7 +3674,7 @@
           <p:cNvPr id="4" name="">
             <a:extLst xmlns:a="http://schemas.openxmlformats.org/drawingml/2006/main">
               <a:ext uri="{FF2B5EF4-FFF2-40B4-BE49-F238E27FC236}">
-                <a16:creationId xmlns:a16="http://schemas.microsoft.com/office/drawing/2014/main" id="{2C57A9D4-8833-4E96-9FA3-F1EC992B4B4A}"/>
+                <a16:creationId xmlns:a16="http://schemas.microsoft.com/office/drawing/2014/main" id="{7ED4E511-7F7B-4570-8998-60368BA236E9}"/>
               </a:ext>
             </a:extLst>
           </p:cNvPr>
@@ -3731,7 +3731,7 @@
           <p:cNvPr id="5" name="">
             <a:extLst xmlns:a="http://schemas.openxmlformats.org/drawingml/2006/main">
               <a:ext uri="{FF2B5EF4-FFF2-40B4-BE49-F238E27FC236}">
-                <a16:creationId xmlns:a16="http://schemas.microsoft.com/office/drawing/2014/main" id="{DFBA2075-BDD4-40A2-BD37-E59A996253D6}"/>
+                <a16:creationId xmlns:a16="http://schemas.microsoft.com/office/drawing/2014/main" id="{72E1A6C3-EFA2-4D61-9B87-B38814E60D26}"/>
               </a:ext>
             </a:extLst>
           </p:cNvPr>
@@ -3788,7 +3788,7 @@
           <p:cNvPr id="6" name="">
             <a:extLst xmlns:a="http://schemas.openxmlformats.org/drawingml/2006/main">
               <a:ext uri="{FF2B5EF4-FFF2-40B4-BE49-F238E27FC236}">
-                <a16:creationId xmlns:a16="http://schemas.microsoft.com/office/drawing/2014/main" id="{61215D54-3FB5-42A5-B040-FD15E84A9079}"/>
+                <a16:creationId xmlns:a16="http://schemas.microsoft.com/office/drawing/2014/main" id="{6312C968-3081-4311-8509-B4F482507813}"/>
               </a:ext>
             </a:extLst>
           </p:cNvPr>
@@ -3845,7 +3845,7 @@
           <p:cNvPr id="7" name="">
             <a:extLst xmlns:a="http://schemas.openxmlformats.org/drawingml/2006/main">
               <a:ext uri="{FF2B5EF4-FFF2-40B4-BE49-F238E27FC236}">
-                <a16:creationId xmlns:a16="http://schemas.microsoft.com/office/drawing/2014/main" id="{65667268-A030-412A-99D0-BF810737FF2B}"/>
+                <a16:creationId xmlns:a16="http://schemas.microsoft.com/office/drawing/2014/main" id="{B334A4D5-4770-4705-93AC-8299CBA44E99}"/>
               </a:ext>
             </a:extLst>
           </p:cNvPr>
@@ -3875,7 +3875,7 @@
           <p:cNvPr id="8" name="">
             <a:extLst xmlns:a="http://schemas.openxmlformats.org/drawingml/2006/main">
               <a:ext uri="{FF2B5EF4-FFF2-40B4-BE49-F238E27FC236}">
-                <a16:creationId xmlns:a16="http://schemas.microsoft.com/office/drawing/2014/main" id="{4D072BC0-86F3-403D-8B34-558AD1C41990}"/>
+                <a16:creationId xmlns:a16="http://schemas.microsoft.com/office/drawing/2014/main" id="{C6C091DC-C606-4BA2-9760-AF24883E7068}"/>
               </a:ext>
             </a:extLst>
           </p:cNvPr>
@@ -3932,7 +3932,7 @@
           <p:cNvPr id="9" name="">
             <a:extLst xmlns:a="http://schemas.openxmlformats.org/drawingml/2006/main">
               <a:ext uri="{FF2B5EF4-FFF2-40B4-BE49-F238E27FC236}">
-                <a16:creationId xmlns:a16="http://schemas.microsoft.com/office/drawing/2014/main" id="{F48BC8DD-C676-49AE-89CB-398CA797F9CE}"/>
+                <a16:creationId xmlns:a16="http://schemas.microsoft.com/office/drawing/2014/main" id="{290F7C00-51CD-4F8C-9E77-37E7D46B3ED5}"/>
               </a:ext>
             </a:extLst>
           </p:cNvPr>
@@ -3962,7 +3962,7 @@
           <p:cNvPr id="10" name="">
             <a:extLst xmlns:a="http://schemas.openxmlformats.org/drawingml/2006/main">
               <a:ext uri="{FF2B5EF4-FFF2-40B4-BE49-F238E27FC236}">
-                <a16:creationId xmlns:a16="http://schemas.microsoft.com/office/drawing/2014/main" id="{291B5E6F-F7C5-4DB0-9CCB-E1E4F0FEDDA0}"/>
+                <a16:creationId xmlns:a16="http://schemas.microsoft.com/office/drawing/2014/main" id="{4EEF95A1-EC67-4611-9F8C-8AF20BFEF5DF}"/>
               </a:ext>
             </a:extLst>
           </p:cNvPr>
@@ -4019,7 +4019,7 @@
           <p:cNvPr id="11" name="">
             <a:extLst xmlns:a="http://schemas.openxmlformats.org/drawingml/2006/main">
               <a:ext uri="{FF2B5EF4-FFF2-40B4-BE49-F238E27FC236}">
-                <a16:creationId xmlns:a16="http://schemas.microsoft.com/office/drawing/2014/main" id="{21D036B9-20D9-4866-AFC6-A2A89D572ED0}"/>
+                <a16:creationId xmlns:a16="http://schemas.microsoft.com/office/drawing/2014/main" id="{E976A9D4-84F8-4536-8CF7-0B51970B26D3}"/>
               </a:ext>
             </a:extLst>
           </p:cNvPr>
@@ -4049,7 +4049,7 @@
           <p:cNvPr id="12" name="">
             <a:extLst xmlns:a="http://schemas.openxmlformats.org/drawingml/2006/main">
               <a:ext uri="{FF2B5EF4-FFF2-40B4-BE49-F238E27FC236}">
-                <a16:creationId xmlns:a16="http://schemas.microsoft.com/office/drawing/2014/main" id="{4478AD33-4D3A-4FE7-91A5-F0B1333AA08C}"/>
+                <a16:creationId xmlns:a16="http://schemas.microsoft.com/office/drawing/2014/main" id="{EC50D4FC-573B-4363-A32A-68E598CA840D}"/>
               </a:ext>
             </a:extLst>
           </p:cNvPr>
@@ -4106,7 +4106,7 @@
           <p:cNvPr id="13" name="">
             <a:extLst xmlns:a="http://schemas.openxmlformats.org/drawingml/2006/main">
               <a:ext uri="{FF2B5EF4-FFF2-40B4-BE49-F238E27FC236}">
-                <a16:creationId xmlns:a16="http://schemas.microsoft.com/office/drawing/2014/main" id="{5782BAC3-E318-4AF4-BB98-8A0C00A531D3}"/>
+                <a16:creationId xmlns:a16="http://schemas.microsoft.com/office/drawing/2014/main" id="{3905E05F-DF87-413C-BE18-E05152DE4F20}"/>
               </a:ext>
             </a:extLst>
           </p:cNvPr>
@@ -4136,7 +4136,7 @@
           <p:cNvPr id="14" name="">
             <a:extLst xmlns:a="http://schemas.openxmlformats.org/drawingml/2006/main">
               <a:ext uri="{FF2B5EF4-FFF2-40B4-BE49-F238E27FC236}">
-                <a16:creationId xmlns:a16="http://schemas.microsoft.com/office/drawing/2014/main" id="{19A1B38B-4018-4724-A2FC-617C1812EAD7}"/>
+                <a16:creationId xmlns:a16="http://schemas.microsoft.com/office/drawing/2014/main" id="{6038C800-73B3-434B-BDAF-A3673A6A5E52}"/>
               </a:ext>
             </a:extLst>
           </p:cNvPr>
@@ -4193,7 +4193,7 @@
           <p:cNvPr id="15" name="">
             <a:extLst xmlns:a="http://schemas.openxmlformats.org/drawingml/2006/main">
               <a:ext uri="{FF2B5EF4-FFF2-40B4-BE49-F238E27FC236}">
-                <a16:creationId xmlns:a16="http://schemas.microsoft.com/office/drawing/2014/main" id="{82045A9A-17AF-41D4-95C5-64433F2CEF51}"/>
+                <a16:creationId xmlns:a16="http://schemas.microsoft.com/office/drawing/2014/main" id="{B222118D-15A0-4FAD-A3ED-DA2167A42F99}"/>
               </a:ext>
             </a:extLst>
           </p:cNvPr>
@@ -4223,7 +4223,7 @@
           <p:cNvPr id="16" name="">
             <a:extLst xmlns:a="http://schemas.openxmlformats.org/drawingml/2006/main">
               <a:ext uri="{FF2B5EF4-FFF2-40B4-BE49-F238E27FC236}">
-                <a16:creationId xmlns:a16="http://schemas.microsoft.com/office/drawing/2014/main" id="{D2B2A3FA-A40A-47B9-B34C-9A56952C8322}"/>
+                <a16:creationId xmlns:a16="http://schemas.microsoft.com/office/drawing/2014/main" id="{35DE33F0-33C9-430A-B37F-09FDBFB474E1}"/>
               </a:ext>
             </a:extLst>
           </p:cNvPr>
@@ -4280,7 +4280,7 @@
           <p:cNvPr id="17" name="">
             <a:extLst xmlns:a="http://schemas.openxmlformats.org/drawingml/2006/main">
               <a:ext uri="{FF2B5EF4-FFF2-40B4-BE49-F238E27FC236}">
-                <a16:creationId xmlns:a16="http://schemas.microsoft.com/office/drawing/2014/main" id="{672E2252-0477-47D8-A6A6-9C84190AE678}"/>
+                <a16:creationId xmlns:a16="http://schemas.microsoft.com/office/drawing/2014/main" id="{DEA26EB4-D6B9-4FC0-99D4-17ED5C0B351B}"/>
               </a:ext>
             </a:extLst>
           </p:cNvPr>
@@ -4337,7 +4337,7 @@
           <p:cNvPr id="18" name="">
             <a:extLst xmlns:a="http://schemas.openxmlformats.org/drawingml/2006/main">
               <a:ext uri="{FF2B5EF4-FFF2-40B4-BE49-F238E27FC236}">
-                <a16:creationId xmlns:a16="http://schemas.microsoft.com/office/drawing/2014/main" id="{61B0B165-80EC-4C2C-8650-57D4C05F339B}"/>
+                <a16:creationId xmlns:a16="http://schemas.microsoft.com/office/drawing/2014/main" id="{E1ADAB5D-6C24-491C-9358-DBD9C80FA52E}"/>
               </a:ext>
             </a:extLst>
           </p:cNvPr>
@@ -4367,7 +4367,7 @@
           <p:cNvPr id="19" name="">
             <a:extLst xmlns:a="http://schemas.openxmlformats.org/drawingml/2006/main">
               <a:ext uri="{FF2B5EF4-FFF2-40B4-BE49-F238E27FC236}">
-                <a16:creationId xmlns:a16="http://schemas.microsoft.com/office/drawing/2014/main" id="{F814BA2A-F9D3-4DB8-99F0-8641B7E36E7F}"/>
+                <a16:creationId xmlns:a16="http://schemas.microsoft.com/office/drawing/2014/main" id="{1109916C-98FD-45BC-8823-4ECD735DF55A}"/>
               </a:ext>
             </a:extLst>
           </p:cNvPr>
@@ -4424,7 +4424,7 @@
           <p:cNvPr id="20" name="">
             <a:extLst xmlns:a="http://schemas.openxmlformats.org/drawingml/2006/main">
               <a:ext uri="{FF2B5EF4-FFF2-40B4-BE49-F238E27FC236}">
-                <a16:creationId xmlns:a16="http://schemas.microsoft.com/office/drawing/2014/main" id="{C18C6B0B-4216-4ED0-ACF5-73729555116F}"/>
+                <a16:creationId xmlns:a16="http://schemas.microsoft.com/office/drawing/2014/main" id="{BB6BC213-7393-4779-B5FC-FA2B42DC0BE3}"/>
               </a:ext>
             </a:extLst>
           </p:cNvPr>
@@ -4454,7 +4454,7 @@
           <p:cNvPr id="21" name="">
             <a:extLst xmlns:a="http://schemas.openxmlformats.org/drawingml/2006/main">
               <a:ext uri="{FF2B5EF4-FFF2-40B4-BE49-F238E27FC236}">
-                <a16:creationId xmlns:a16="http://schemas.microsoft.com/office/drawing/2014/main" id="{9906D7D3-A0F5-4A80-82AA-86F01C4DDD7F}"/>
+                <a16:creationId xmlns:a16="http://schemas.microsoft.com/office/drawing/2014/main" id="{8F8C0823-B5E3-4D79-8A0E-46CD424A2ED1}"/>
               </a:ext>
             </a:extLst>
           </p:cNvPr>
@@ -4511,7 +4511,7 @@
           <p:cNvPr id="22" name="">
             <a:extLst xmlns:a="http://schemas.openxmlformats.org/drawingml/2006/main">
               <a:ext uri="{FF2B5EF4-FFF2-40B4-BE49-F238E27FC236}">
-                <a16:creationId xmlns:a16="http://schemas.microsoft.com/office/drawing/2014/main" id="{B96AB70D-3108-4F6C-8CE2-3B943ADE69A2}"/>
+                <a16:creationId xmlns:a16="http://schemas.microsoft.com/office/drawing/2014/main" id="{20ED6411-DFA8-4515-974B-625253B0D75E}"/>
               </a:ext>
             </a:extLst>
           </p:cNvPr>
@@ -4541,7 +4541,7 @@
           <p:cNvPr id="23" name="">
             <a:extLst xmlns:a="http://schemas.openxmlformats.org/drawingml/2006/main">
               <a:ext uri="{FF2B5EF4-FFF2-40B4-BE49-F238E27FC236}">
-                <a16:creationId xmlns:a16="http://schemas.microsoft.com/office/drawing/2014/main" id="{DBC1179B-39FB-4F7C-A303-60E787822E97}"/>
+                <a16:creationId xmlns:a16="http://schemas.microsoft.com/office/drawing/2014/main" id="{CAFA83CA-D84E-4107-B235-100DE680690F}"/>
               </a:ext>
             </a:extLst>
           </p:cNvPr>
@@ -4598,7 +4598,7 @@
           <p:cNvPr id="24" name="">
             <a:extLst xmlns:a="http://schemas.openxmlformats.org/drawingml/2006/main">
               <a:ext uri="{FF2B5EF4-FFF2-40B4-BE49-F238E27FC236}">
-                <a16:creationId xmlns:a16="http://schemas.microsoft.com/office/drawing/2014/main" id="{9CFF5F55-2D11-4D77-A8B3-8D5EAC81909B}"/>
+                <a16:creationId xmlns:a16="http://schemas.microsoft.com/office/drawing/2014/main" id="{277D22B8-D0F3-46B9-82A9-82B1B09BB1EE}"/>
               </a:ext>
             </a:extLst>
           </p:cNvPr>
@@ -4628,7 +4628,7 @@
           <p:cNvPr id="25" name="">
             <a:extLst xmlns:a="http://schemas.openxmlformats.org/drawingml/2006/main">
               <a:ext uri="{FF2B5EF4-FFF2-40B4-BE49-F238E27FC236}">
-                <a16:creationId xmlns:a16="http://schemas.microsoft.com/office/drawing/2014/main" id="{748EED17-B551-43AD-B96B-99879288A82A}"/>
+                <a16:creationId xmlns:a16="http://schemas.microsoft.com/office/drawing/2014/main" id="{52F8DACE-D632-468E-BD0B-D7822229EBFF}"/>
               </a:ext>
             </a:extLst>
           </p:cNvPr>
@@ -4685,7 +4685,7 @@
           <p:cNvPr id="26" name="">
             <a:extLst xmlns:a="http://schemas.openxmlformats.org/drawingml/2006/main">
               <a:ext uri="{FF2B5EF4-FFF2-40B4-BE49-F238E27FC236}">
-                <a16:creationId xmlns:a16="http://schemas.microsoft.com/office/drawing/2014/main" id="{1396F042-F711-4263-9465-4525ECDA6DB9}"/>
+                <a16:creationId xmlns:a16="http://schemas.microsoft.com/office/drawing/2014/main" id="{29DF7BAF-2E65-4BF2-AA1F-E6073FB0BE4C}"/>
               </a:ext>
             </a:extLst>
           </p:cNvPr>
@@ -4715,7 +4715,7 @@
           <p:cNvPr id="27" name="">
             <a:extLst xmlns:a="http://schemas.openxmlformats.org/drawingml/2006/main">
               <a:ext uri="{FF2B5EF4-FFF2-40B4-BE49-F238E27FC236}">
-                <a16:creationId xmlns:a16="http://schemas.microsoft.com/office/drawing/2014/main" id="{BF965AF8-2C26-405E-9DA0-E5DD20C25C8B}"/>
+                <a16:creationId xmlns:a16="http://schemas.microsoft.com/office/drawing/2014/main" id="{D394EBC1-C525-47D1-BFD4-549C7BA54AEF}"/>
               </a:ext>
             </a:extLst>
           </p:cNvPr>
@@ -4772,7 +4772,7 @@
           <p:cNvPr id="28" name="">
             <a:extLst xmlns:a="http://schemas.openxmlformats.org/drawingml/2006/main">
               <a:ext uri="{FF2B5EF4-FFF2-40B4-BE49-F238E27FC236}">
-                <a16:creationId xmlns:a16="http://schemas.microsoft.com/office/drawing/2014/main" id="{242CFFDB-28FF-4819-9237-0CCA57087EB4}"/>
+                <a16:creationId xmlns:a16="http://schemas.microsoft.com/office/drawing/2014/main" id="{3C857667-7118-4C0A-8D1D-F53B766495DF}"/>
               </a:ext>
             </a:extLst>
           </p:cNvPr>
@@ -4804,7 +4804,7 @@
           <p:cNvPr id="29" name="">
             <a:extLst xmlns:a="http://schemas.openxmlformats.org/drawingml/2006/main">
               <a:ext uri="{FF2B5EF4-FFF2-40B4-BE49-F238E27FC236}">
-                <a16:creationId xmlns:a16="http://schemas.microsoft.com/office/drawing/2014/main" id="{065E07DB-2B9C-4AC6-92EB-53EFBA8DAAE1}"/>
+                <a16:creationId xmlns:a16="http://schemas.microsoft.com/office/drawing/2014/main" id="{EA5DE030-00F3-43EF-8AF3-000F59175A60}"/>
               </a:ext>
             </a:extLst>
           </p:cNvPr>
@@ -4859,7 +4859,7 @@
     </p:spTree>
     <p:extLst>
       <p:ext uri="{BB962C8B-B14F-4D97-AF65-F5344CB8AC3E}">
-        <p14:creationId xmlns:p14="http://schemas.microsoft.com/office/powerpoint/2010/main" val="103969578"/>
+        <p14:creationId xmlns:p14="http://schemas.microsoft.com/office/powerpoint/2010/main" val="2055466328"/>
       </p:ext>
     </p:extLst>
   </p:cSld>
@@ -4890,7 +4890,7 @@
           <p:cNvPr id="42" name="">
             <a:extLst xmlns:a="http://schemas.openxmlformats.org/drawingml/2006/main">
               <a:ext uri="{FF2B5EF4-FFF2-40B4-BE49-F238E27FC236}">
-                <a16:creationId xmlns:a16="http://schemas.microsoft.com/office/drawing/2014/main" id="{1C022E66-9D97-42E0-9162-5E6C983DACCD}"/>
+                <a16:creationId xmlns:a16="http://schemas.microsoft.com/office/drawing/2014/main" id="{51018EBA-AA08-432B-82D4-552A1A7A7CC0}"/>
               </a:ext>
             </a:extLst>
           </p:cNvPr>
@@ -4947,7 +4947,7 @@
           <p:cNvPr id="2" name="">
             <a:extLst xmlns:a="http://schemas.openxmlformats.org/drawingml/2006/main">
               <a:ext uri="{FF2B5EF4-FFF2-40B4-BE49-F238E27FC236}">
-                <a16:creationId xmlns:a16="http://schemas.microsoft.com/office/drawing/2014/main" id="{44696636-F8CD-4331-8AB1-E5C1896BF88E}"/>
+                <a16:creationId xmlns:a16="http://schemas.microsoft.com/office/drawing/2014/main" id="{48F6519B-08F7-4BA9-8AD6-8521341F8149}"/>
               </a:ext>
             </a:extLst>
           </p:cNvPr>
@@ -5004,7 +5004,7 @@
           <p:cNvPr id="3" name="">
             <a:extLst xmlns:a="http://schemas.openxmlformats.org/drawingml/2006/main">
               <a:ext uri="{FF2B5EF4-FFF2-40B4-BE49-F238E27FC236}">
-                <a16:creationId xmlns:a16="http://schemas.microsoft.com/office/drawing/2014/main" id="{82DACFBE-3701-441A-9ECB-CA6BDA41A10F}"/>
+                <a16:creationId xmlns:a16="http://schemas.microsoft.com/office/drawing/2014/main" id="{32278A3D-F0F2-4F37-B799-62684A869EF3}"/>
               </a:ext>
             </a:extLst>
           </p:cNvPr>
@@ -5034,7 +5034,7 @@
           <p:cNvPr id="4" name="">
             <a:extLst xmlns:a="http://schemas.openxmlformats.org/drawingml/2006/main">
               <a:ext uri="{FF2B5EF4-FFF2-40B4-BE49-F238E27FC236}">
-                <a16:creationId xmlns:a16="http://schemas.microsoft.com/office/drawing/2014/main" id="{B9A6033E-9C83-48DB-B278-96D9F6FA0173}"/>
+                <a16:creationId xmlns:a16="http://schemas.microsoft.com/office/drawing/2014/main" id="{6D99B334-8093-4486-8C45-124A044994DA}"/>
               </a:ext>
             </a:extLst>
           </p:cNvPr>
@@ -5091,7 +5091,7 @@
           <p:cNvPr id="5" name="">
             <a:extLst xmlns:a="http://schemas.openxmlformats.org/drawingml/2006/main">
               <a:ext uri="{FF2B5EF4-FFF2-40B4-BE49-F238E27FC236}">
-                <a16:creationId xmlns:a16="http://schemas.microsoft.com/office/drawing/2014/main" id="{4D7AC542-667C-4977-B38F-21A2016D25A9}"/>
+                <a16:creationId xmlns:a16="http://schemas.microsoft.com/office/drawing/2014/main" id="{FBD148EC-CA98-46BF-9671-4E74F07740AD}"/>
               </a:ext>
             </a:extLst>
           </p:cNvPr>
@@ -5148,7 +5148,7 @@
           <p:cNvPr id="6" name="">
             <a:extLst xmlns:a="http://schemas.openxmlformats.org/drawingml/2006/main">
               <a:ext uri="{FF2B5EF4-FFF2-40B4-BE49-F238E27FC236}">
-                <a16:creationId xmlns:a16="http://schemas.microsoft.com/office/drawing/2014/main" id="{7467009F-4756-42F6-B521-62AF196F9B72}"/>
+                <a16:creationId xmlns:a16="http://schemas.microsoft.com/office/drawing/2014/main" id="{0378D55B-2B7C-4F4B-8ABB-66494F053A2E}"/>
               </a:ext>
             </a:extLst>
           </p:cNvPr>
@@ -5205,7 +5205,7 @@
           <p:cNvPr id="7" name="">
             <a:extLst xmlns:a="http://schemas.openxmlformats.org/drawingml/2006/main">
               <a:ext uri="{FF2B5EF4-FFF2-40B4-BE49-F238E27FC236}">
-                <a16:creationId xmlns:a16="http://schemas.microsoft.com/office/drawing/2014/main" id="{84E0D9DF-9B03-4B09-8ACA-7B56A906720E}"/>
+                <a16:creationId xmlns:a16="http://schemas.microsoft.com/office/drawing/2014/main" id="{CE40835B-4A9C-4759-B67B-C613441A7AF6}"/>
               </a:ext>
             </a:extLst>
           </p:cNvPr>
@@ -5262,7 +5262,7 @@
           <p:cNvPr id="8" name="">
             <a:extLst xmlns:a="http://schemas.openxmlformats.org/drawingml/2006/main">
               <a:ext uri="{FF2B5EF4-FFF2-40B4-BE49-F238E27FC236}">
-                <a16:creationId xmlns:a16="http://schemas.microsoft.com/office/drawing/2014/main" id="{E2CE4FF3-1F2E-41CF-91FC-7EB9A2538AD6}"/>
+                <a16:creationId xmlns:a16="http://schemas.microsoft.com/office/drawing/2014/main" id="{876AF09B-3B69-4461-8563-01ACF39DD093}"/>
               </a:ext>
             </a:extLst>
           </p:cNvPr>
@@ -5292,7 +5292,7 @@
           <p:cNvPr id="9" name="">
             <a:extLst xmlns:a="http://schemas.openxmlformats.org/drawingml/2006/main">
               <a:ext uri="{FF2B5EF4-FFF2-40B4-BE49-F238E27FC236}">
-                <a16:creationId xmlns:a16="http://schemas.microsoft.com/office/drawing/2014/main" id="{51CFE0B9-ED53-4AC6-9823-6E3AF5E2C702}"/>
+                <a16:creationId xmlns:a16="http://schemas.microsoft.com/office/drawing/2014/main" id="{0D5A8B40-F354-4391-8317-F7748051F548}"/>
               </a:ext>
             </a:extLst>
           </p:cNvPr>
@@ -5349,7 +5349,7 @@
           <p:cNvPr id="10" name="">
             <a:extLst xmlns:a="http://schemas.openxmlformats.org/drawingml/2006/main">
               <a:ext uri="{FF2B5EF4-FFF2-40B4-BE49-F238E27FC236}">
-                <a16:creationId xmlns:a16="http://schemas.microsoft.com/office/drawing/2014/main" id="{E3BFCB15-78A2-48C3-8B76-D89D7D845711}"/>
+                <a16:creationId xmlns:a16="http://schemas.microsoft.com/office/drawing/2014/main" id="{E3C43303-CC64-4AAC-A721-92BC991FE977}"/>
               </a:ext>
             </a:extLst>
           </p:cNvPr>
@@ -5379,7 +5379,7 @@
           <p:cNvPr id="11" name="">
             <a:extLst xmlns:a="http://schemas.openxmlformats.org/drawingml/2006/main">
               <a:ext uri="{FF2B5EF4-FFF2-40B4-BE49-F238E27FC236}">
-                <a16:creationId xmlns:a16="http://schemas.microsoft.com/office/drawing/2014/main" id="{4E7F5D9D-0365-454B-A4DD-F6CEECCF8452}"/>
+                <a16:creationId xmlns:a16="http://schemas.microsoft.com/office/drawing/2014/main" id="{060D2191-68B2-40F9-99BF-150F287ED034}"/>
               </a:ext>
             </a:extLst>
           </p:cNvPr>
@@ -5436,7 +5436,7 @@
           <p:cNvPr id="12" name="">
             <a:extLst xmlns:a="http://schemas.openxmlformats.org/drawingml/2006/main">
               <a:ext uri="{FF2B5EF4-FFF2-40B4-BE49-F238E27FC236}">
-                <a16:creationId xmlns:a16="http://schemas.microsoft.com/office/drawing/2014/main" id="{D2F7D965-F79B-442F-8016-3F053A22BBEE}"/>
+                <a16:creationId xmlns:a16="http://schemas.microsoft.com/office/drawing/2014/main" id="{0AF07002-1D16-4D55-9B6A-FB70F0A29E57}"/>
               </a:ext>
             </a:extLst>
           </p:cNvPr>
@@ -5466,7 +5466,7 @@
           <p:cNvPr id="13" name="">
             <a:extLst xmlns:a="http://schemas.openxmlformats.org/drawingml/2006/main">
               <a:ext uri="{FF2B5EF4-FFF2-40B4-BE49-F238E27FC236}">
-                <a16:creationId xmlns:a16="http://schemas.microsoft.com/office/drawing/2014/main" id="{1852E6F1-158B-4698-9A5B-6B5305658B08}"/>
+                <a16:creationId xmlns:a16="http://schemas.microsoft.com/office/drawing/2014/main" id="{D0347796-8DA6-4AAF-9535-9CE9208A9B3C}"/>
               </a:ext>
             </a:extLst>
           </p:cNvPr>
@@ -5523,7 +5523,7 @@
           <p:cNvPr id="14" name="">
             <a:extLst xmlns:a="http://schemas.openxmlformats.org/drawingml/2006/main">
               <a:ext uri="{FF2B5EF4-FFF2-40B4-BE49-F238E27FC236}">
-                <a16:creationId xmlns:a16="http://schemas.microsoft.com/office/drawing/2014/main" id="{84FF6AC2-A107-4069-94C7-3B9D5E131849}"/>
+                <a16:creationId xmlns:a16="http://schemas.microsoft.com/office/drawing/2014/main" id="{0C25C410-0586-4646-A282-38FDDF89B995}"/>
               </a:ext>
             </a:extLst>
           </p:cNvPr>
@@ -5553,7 +5553,7 @@
           <p:cNvPr id="15" name="">
             <a:extLst xmlns:a="http://schemas.openxmlformats.org/drawingml/2006/main">
               <a:ext uri="{FF2B5EF4-FFF2-40B4-BE49-F238E27FC236}">
-                <a16:creationId xmlns:a16="http://schemas.microsoft.com/office/drawing/2014/main" id="{ED1F76DC-A374-45FC-93AE-2D50DF03A5A0}"/>
+                <a16:creationId xmlns:a16="http://schemas.microsoft.com/office/drawing/2014/main" id="{20BBD6E1-8607-4AA9-8966-03C06E3ADFB2}"/>
               </a:ext>
             </a:extLst>
           </p:cNvPr>
@@ -5610,7 +5610,7 @@
           <p:cNvPr id="16" name="">
             <a:extLst xmlns:a="http://schemas.openxmlformats.org/drawingml/2006/main">
               <a:ext uri="{FF2B5EF4-FFF2-40B4-BE49-F238E27FC236}">
-                <a16:creationId xmlns:a16="http://schemas.microsoft.com/office/drawing/2014/main" id="{BE42A940-2DF1-4C5E-9C52-4E67AF141AC1}"/>
+                <a16:creationId xmlns:a16="http://schemas.microsoft.com/office/drawing/2014/main" id="{C9C4605C-B80C-41F7-BCD0-0E4E9183580B}"/>
               </a:ext>
             </a:extLst>
           </p:cNvPr>
@@ -5640,7 +5640,7 @@
           <p:cNvPr id="17" name="">
             <a:extLst xmlns:a="http://schemas.openxmlformats.org/drawingml/2006/main">
               <a:ext uri="{FF2B5EF4-FFF2-40B4-BE49-F238E27FC236}">
-                <a16:creationId xmlns:a16="http://schemas.microsoft.com/office/drawing/2014/main" id="{5974B21D-71EF-49E9-B2EC-0DEFAFCE88AC}"/>
+                <a16:creationId xmlns:a16="http://schemas.microsoft.com/office/drawing/2014/main" id="{C54A22CB-9715-48E8-8748-D36AE50F3DFA}"/>
               </a:ext>
             </a:extLst>
           </p:cNvPr>
@@ -5697,7 +5697,7 @@
           <p:cNvPr id="18" name="">
             <a:extLst xmlns:a="http://schemas.openxmlformats.org/drawingml/2006/main">
               <a:ext uri="{FF2B5EF4-FFF2-40B4-BE49-F238E27FC236}">
-                <a16:creationId xmlns:a16="http://schemas.microsoft.com/office/drawing/2014/main" id="{81C25621-66D2-4EE3-976B-C3F5217ED455}"/>
+                <a16:creationId xmlns:a16="http://schemas.microsoft.com/office/drawing/2014/main" id="{77AFCBE5-A069-4331-9D25-8F0A82C63F1E}"/>
               </a:ext>
             </a:extLst>
           </p:cNvPr>
@@ -5754,7 +5754,7 @@
           <p:cNvPr id="19" name="">
             <a:extLst xmlns:a="http://schemas.openxmlformats.org/drawingml/2006/main">
               <a:ext uri="{FF2B5EF4-FFF2-40B4-BE49-F238E27FC236}">
-                <a16:creationId xmlns:a16="http://schemas.microsoft.com/office/drawing/2014/main" id="{5766C079-96EC-4BD2-BB95-31A4EFD65875}"/>
+                <a16:creationId xmlns:a16="http://schemas.microsoft.com/office/drawing/2014/main" id="{4AF79A54-4712-463C-939D-C3E66F8C5557}"/>
               </a:ext>
             </a:extLst>
           </p:cNvPr>
@@ -5784,7 +5784,7 @@
           <p:cNvPr id="20" name="">
             <a:extLst xmlns:a="http://schemas.openxmlformats.org/drawingml/2006/main">
               <a:ext uri="{FF2B5EF4-FFF2-40B4-BE49-F238E27FC236}">
-                <a16:creationId xmlns:a16="http://schemas.microsoft.com/office/drawing/2014/main" id="{4B4AF18C-7253-438A-B77B-7281673EDB50}"/>
+                <a16:creationId xmlns:a16="http://schemas.microsoft.com/office/drawing/2014/main" id="{D011F42A-F71C-429D-86E2-4D2B87F4F5EF}"/>
               </a:ext>
             </a:extLst>
           </p:cNvPr>
@@ -5841,7 +5841,7 @@
           <p:cNvPr id="21" name="">
             <a:extLst xmlns:a="http://schemas.openxmlformats.org/drawingml/2006/main">
               <a:ext uri="{FF2B5EF4-FFF2-40B4-BE49-F238E27FC236}">
-                <a16:creationId xmlns:a16="http://schemas.microsoft.com/office/drawing/2014/main" id="{BE2D280D-30DE-4BFD-97B2-C6A1079518E1}"/>
+                <a16:creationId xmlns:a16="http://schemas.microsoft.com/office/drawing/2014/main" id="{8DF11543-A16E-4B0D-8B35-3B1F613F29EC}"/>
               </a:ext>
             </a:extLst>
           </p:cNvPr>
@@ -5871,7 +5871,7 @@
           <p:cNvPr id="22" name="">
             <a:extLst xmlns:a="http://schemas.openxmlformats.org/drawingml/2006/main">
               <a:ext uri="{FF2B5EF4-FFF2-40B4-BE49-F238E27FC236}">
-                <a16:creationId xmlns:a16="http://schemas.microsoft.com/office/drawing/2014/main" id="{40430E76-CA03-4174-B77F-DDAAA2E68959}"/>
+                <a16:creationId xmlns:a16="http://schemas.microsoft.com/office/drawing/2014/main" id="{DE3C94E0-5FD0-4239-BDB0-0A60BDED863C}"/>
               </a:ext>
             </a:extLst>
           </p:cNvPr>
@@ -5928,7 +5928,7 @@
           <p:cNvPr id="23" name="">
             <a:extLst xmlns:a="http://schemas.openxmlformats.org/drawingml/2006/main">
               <a:ext uri="{FF2B5EF4-FFF2-40B4-BE49-F238E27FC236}">
-                <a16:creationId xmlns:a16="http://schemas.microsoft.com/office/drawing/2014/main" id="{4B560163-4B93-4ACC-85FB-E6DEA006E3A4}"/>
+                <a16:creationId xmlns:a16="http://schemas.microsoft.com/office/drawing/2014/main" id="{FE052846-3A57-440F-9E25-CC1F8CFD9CA6}"/>
               </a:ext>
             </a:extLst>
           </p:cNvPr>
@@ -5958,7 +5958,7 @@
           <p:cNvPr id="24" name="">
             <a:extLst xmlns:a="http://schemas.openxmlformats.org/drawingml/2006/main">
               <a:ext uri="{FF2B5EF4-FFF2-40B4-BE49-F238E27FC236}">
-                <a16:creationId xmlns:a16="http://schemas.microsoft.com/office/drawing/2014/main" id="{FD8299CB-632B-4D8C-A8E8-47EB8C5ACB74}"/>
+                <a16:creationId xmlns:a16="http://schemas.microsoft.com/office/drawing/2014/main" id="{07204EAF-E464-46B1-B02E-58D1894BF7E8}"/>
               </a:ext>
             </a:extLst>
           </p:cNvPr>
@@ -6015,7 +6015,7 @@
           <p:cNvPr id="25" name="">
             <a:extLst xmlns:a="http://schemas.openxmlformats.org/drawingml/2006/main">
               <a:ext uri="{FF2B5EF4-FFF2-40B4-BE49-F238E27FC236}">
-                <a16:creationId xmlns:a16="http://schemas.microsoft.com/office/drawing/2014/main" id="{7162454D-68DF-4B63-B9A4-882A47AC2A74}"/>
+                <a16:creationId xmlns:a16="http://schemas.microsoft.com/office/drawing/2014/main" id="{60DE8ACD-F6A4-423A-91C6-BFD3C95AB57C}"/>
               </a:ext>
             </a:extLst>
           </p:cNvPr>
@@ -6045,7 +6045,7 @@
           <p:cNvPr id="26" name="">
             <a:extLst xmlns:a="http://schemas.openxmlformats.org/drawingml/2006/main">
               <a:ext uri="{FF2B5EF4-FFF2-40B4-BE49-F238E27FC236}">
-                <a16:creationId xmlns:a16="http://schemas.microsoft.com/office/drawing/2014/main" id="{9FD85805-9DA4-4C66-8875-D78FC96D4117}"/>
+                <a16:creationId xmlns:a16="http://schemas.microsoft.com/office/drawing/2014/main" id="{238DD748-1596-46BD-8620-7C5871EA2857}"/>
               </a:ext>
             </a:extLst>
           </p:cNvPr>
@@ -6102,7 +6102,7 @@
           <p:cNvPr id="27" name="">
             <a:extLst xmlns:a="http://schemas.openxmlformats.org/drawingml/2006/main">
               <a:ext uri="{FF2B5EF4-FFF2-40B4-BE49-F238E27FC236}">
-                <a16:creationId xmlns:a16="http://schemas.microsoft.com/office/drawing/2014/main" id="{F99A6E03-B65F-4089-AEFD-D868D9EE7255}"/>
+                <a16:creationId xmlns:a16="http://schemas.microsoft.com/office/drawing/2014/main" id="{622EEF30-411B-4185-942D-BF9AF9F89D48}"/>
               </a:ext>
             </a:extLst>
           </p:cNvPr>
@@ -6132,7 +6132,7 @@
           <p:cNvPr id="28" name="">
             <a:extLst xmlns:a="http://schemas.openxmlformats.org/drawingml/2006/main">
               <a:ext uri="{FF2B5EF4-FFF2-40B4-BE49-F238E27FC236}">
-                <a16:creationId xmlns:a16="http://schemas.microsoft.com/office/drawing/2014/main" id="{40438CAC-9550-4D9C-8A92-2A5454B75ED3}"/>
+                <a16:creationId xmlns:a16="http://schemas.microsoft.com/office/drawing/2014/main" id="{9E3EB42A-17C3-46CD-A055-B0F8E08F6CCF}"/>
               </a:ext>
             </a:extLst>
           </p:cNvPr>
@@ -6189,7 +6189,7 @@
           <p:cNvPr id="29" name="">
             <a:extLst xmlns:a="http://schemas.openxmlformats.org/drawingml/2006/main">
               <a:ext uri="{FF2B5EF4-FFF2-40B4-BE49-F238E27FC236}">
-                <a16:creationId xmlns:a16="http://schemas.microsoft.com/office/drawing/2014/main" id="{0CC660BA-9848-43E0-B890-D92130E8750C}"/>
+                <a16:creationId xmlns:a16="http://schemas.microsoft.com/office/drawing/2014/main" id="{47D382D7-35E2-4B90-94F0-A895A90CE243}"/>
               </a:ext>
             </a:extLst>
           </p:cNvPr>
@@ -6246,7 +6246,7 @@
           <p:cNvPr id="30" name="">
             <a:extLst xmlns:a="http://schemas.openxmlformats.org/drawingml/2006/main">
               <a:ext uri="{FF2B5EF4-FFF2-40B4-BE49-F238E27FC236}">
-                <a16:creationId xmlns:a16="http://schemas.microsoft.com/office/drawing/2014/main" id="{FE4C0CA8-986A-466E-8B5A-ED935D6A28B1}"/>
+                <a16:creationId xmlns:a16="http://schemas.microsoft.com/office/drawing/2014/main" id="{A9D41D9B-B719-4D70-9805-9B2308339A26}"/>
               </a:ext>
             </a:extLst>
           </p:cNvPr>
@@ -6276,7 +6276,7 @@
           <p:cNvPr id="31" name="">
             <a:extLst xmlns:a="http://schemas.openxmlformats.org/drawingml/2006/main">
               <a:ext uri="{FF2B5EF4-FFF2-40B4-BE49-F238E27FC236}">
-                <a16:creationId xmlns:a16="http://schemas.microsoft.com/office/drawing/2014/main" id="{8EB11664-03A8-4A45-9C67-A624D78E9239}"/>
+                <a16:creationId xmlns:a16="http://schemas.microsoft.com/office/drawing/2014/main" id="{BBC7B8C6-231D-468C-A433-878053F960D2}"/>
               </a:ext>
             </a:extLst>
           </p:cNvPr>
@@ -6333,7 +6333,7 @@
           <p:cNvPr id="32" name="">
             <a:extLst xmlns:a="http://schemas.openxmlformats.org/drawingml/2006/main">
               <a:ext uri="{FF2B5EF4-FFF2-40B4-BE49-F238E27FC236}">
-                <a16:creationId xmlns:a16="http://schemas.microsoft.com/office/drawing/2014/main" id="{7CFA0AD5-DE4F-4ECC-B344-70FF513737F9}"/>
+                <a16:creationId xmlns:a16="http://schemas.microsoft.com/office/drawing/2014/main" id="{2A1B2F25-3E52-4593-A6F1-746B9EA28CF5}"/>
               </a:ext>
             </a:extLst>
           </p:cNvPr>
@@ -6363,7 +6363,7 @@
           <p:cNvPr id="33" name="">
             <a:extLst xmlns:a="http://schemas.openxmlformats.org/drawingml/2006/main">
               <a:ext uri="{FF2B5EF4-FFF2-40B4-BE49-F238E27FC236}">
-                <a16:creationId xmlns:a16="http://schemas.microsoft.com/office/drawing/2014/main" id="{9107C633-90A6-44A4-9F63-154E0748B37F}"/>
+                <a16:creationId xmlns:a16="http://schemas.microsoft.com/office/drawing/2014/main" id="{4E5BD6CD-21BC-4AD2-9523-140C59EA5906}"/>
               </a:ext>
             </a:extLst>
           </p:cNvPr>
@@ -6420,7 +6420,7 @@
           <p:cNvPr id="34" name="">
             <a:extLst xmlns:a="http://schemas.openxmlformats.org/drawingml/2006/main">
               <a:ext uri="{FF2B5EF4-FFF2-40B4-BE49-F238E27FC236}">
-                <a16:creationId xmlns:a16="http://schemas.microsoft.com/office/drawing/2014/main" id="{7F43492E-EA5A-4475-AD27-38F8BF317346}"/>
+                <a16:creationId xmlns:a16="http://schemas.microsoft.com/office/drawing/2014/main" id="{5197B23D-5BBF-426A-9607-A740BEB9279B}"/>
               </a:ext>
             </a:extLst>
           </p:cNvPr>
@@ -6450,7 +6450,7 @@
           <p:cNvPr id="35" name="">
             <a:extLst xmlns:a="http://schemas.openxmlformats.org/drawingml/2006/main">
               <a:ext uri="{FF2B5EF4-FFF2-40B4-BE49-F238E27FC236}">
-                <a16:creationId xmlns:a16="http://schemas.microsoft.com/office/drawing/2014/main" id="{E5DC7FD0-7EEB-48C0-841B-4218AE2FA3DA}"/>
+                <a16:creationId xmlns:a16="http://schemas.microsoft.com/office/drawing/2014/main" id="{294279E1-2679-4D3A-A9E1-57F9DA32947F}"/>
               </a:ext>
             </a:extLst>
           </p:cNvPr>
@@ -6507,7 +6507,7 @@
           <p:cNvPr id="36" name="">
             <a:extLst xmlns:a="http://schemas.openxmlformats.org/drawingml/2006/main">
               <a:ext uri="{FF2B5EF4-FFF2-40B4-BE49-F238E27FC236}">
-                <a16:creationId xmlns:a16="http://schemas.microsoft.com/office/drawing/2014/main" id="{196613DA-520B-46A7-8DE2-DE5568D298E3}"/>
+                <a16:creationId xmlns:a16="http://schemas.microsoft.com/office/drawing/2014/main" id="{870DC69D-E1A7-4295-B71C-3DEA687F09A4}"/>
               </a:ext>
             </a:extLst>
           </p:cNvPr>
@@ -6537,7 +6537,7 @@
           <p:cNvPr id="37" name="">
             <a:extLst xmlns:a="http://schemas.openxmlformats.org/drawingml/2006/main">
               <a:ext uri="{FF2B5EF4-FFF2-40B4-BE49-F238E27FC236}">
-                <a16:creationId xmlns:a16="http://schemas.microsoft.com/office/drawing/2014/main" id="{3A7DB8DD-2240-4496-918B-5B0FA0A8C1DE}"/>
+                <a16:creationId xmlns:a16="http://schemas.microsoft.com/office/drawing/2014/main" id="{907ED50A-33E9-4EC0-B975-CF26F5BDCD80}"/>
               </a:ext>
             </a:extLst>
           </p:cNvPr>
@@ -6594,7 +6594,7 @@
           <p:cNvPr id="38" name="">
             <a:extLst xmlns:a="http://schemas.openxmlformats.org/drawingml/2006/main">
               <a:ext uri="{FF2B5EF4-FFF2-40B4-BE49-F238E27FC236}">
-                <a16:creationId xmlns:a16="http://schemas.microsoft.com/office/drawing/2014/main" id="{49C86421-6D1B-4FC4-A10A-7561A9517A57}"/>
+                <a16:creationId xmlns:a16="http://schemas.microsoft.com/office/drawing/2014/main" id="{136F4CDF-6457-40EA-AB13-19B4A558AD67}"/>
               </a:ext>
             </a:extLst>
           </p:cNvPr>
@@ -6624,7 +6624,7 @@
           <p:cNvPr id="39" name="">
             <a:extLst xmlns:a="http://schemas.openxmlformats.org/drawingml/2006/main">
               <a:ext uri="{FF2B5EF4-FFF2-40B4-BE49-F238E27FC236}">
-                <a16:creationId xmlns:a16="http://schemas.microsoft.com/office/drawing/2014/main" id="{BE9C72F0-E8FB-4435-8989-943D7D3D409A}"/>
+                <a16:creationId xmlns:a16="http://schemas.microsoft.com/office/drawing/2014/main" id="{9ACB9005-EDB9-4274-B9FF-2D0185E2117F}"/>
               </a:ext>
             </a:extLst>
           </p:cNvPr>
@@ -6681,7 +6681,7 @@
           <p:cNvPr id="40" name="">
             <a:extLst xmlns:a="http://schemas.openxmlformats.org/drawingml/2006/main">
               <a:ext uri="{FF2B5EF4-FFF2-40B4-BE49-F238E27FC236}">
-                <a16:creationId xmlns:a16="http://schemas.microsoft.com/office/drawing/2014/main" id="{91C84F83-A9F6-44AF-B5DE-23174AB83CE1}"/>
+                <a16:creationId xmlns:a16="http://schemas.microsoft.com/office/drawing/2014/main" id="{AE17DCF1-FF6C-448F-A28D-17C0B3E710F3}"/>
               </a:ext>
             </a:extLst>
           </p:cNvPr>
@@ -6713,7 +6713,7 @@
           <p:cNvPr id="41" name="">
             <a:extLst xmlns:a="http://schemas.openxmlformats.org/drawingml/2006/main">
               <a:ext uri="{FF2B5EF4-FFF2-40B4-BE49-F238E27FC236}">
-                <a16:creationId xmlns:a16="http://schemas.microsoft.com/office/drawing/2014/main" id="{46E61A45-5B31-4385-ABE1-3AE558D57253}"/>
+                <a16:creationId xmlns:a16="http://schemas.microsoft.com/office/drawing/2014/main" id="{CFE3F308-743F-401A-8C16-7492880C3D7F}"/>
               </a:ext>
             </a:extLst>
           </p:cNvPr>
@@ -6768,7 +6768,7 @@
     </p:spTree>
     <p:extLst>
       <p:ext uri="{BB962C8B-B14F-4D97-AF65-F5344CB8AC3E}">
-        <p14:creationId xmlns:p14="http://schemas.microsoft.com/office/powerpoint/2010/main" val="2051203967"/>
+        <p14:creationId xmlns:p14="http://schemas.microsoft.com/office/powerpoint/2010/main" val="1178748980"/>
       </p:ext>
     </p:extLst>
   </p:cSld>
@@ -6799,7 +6799,7 @@
           <p:cNvPr id="38" name="">
             <a:extLst xmlns:a="http://schemas.openxmlformats.org/drawingml/2006/main">
               <a:ext uri="{FF2B5EF4-FFF2-40B4-BE49-F238E27FC236}">
-                <a16:creationId xmlns:a16="http://schemas.microsoft.com/office/drawing/2014/main" id="{BA339730-EDD3-4CE5-8642-F45F28B617BC}"/>
+                <a16:creationId xmlns:a16="http://schemas.microsoft.com/office/drawing/2014/main" id="{829E7E5E-AFE6-4675-B979-7B41AEB4FB8E}"/>
               </a:ext>
             </a:extLst>
           </p:cNvPr>
@@ -6856,7 +6856,7 @@
           <p:cNvPr id="2" name="">
             <a:extLst xmlns:a="http://schemas.openxmlformats.org/drawingml/2006/main">
               <a:ext uri="{FF2B5EF4-FFF2-40B4-BE49-F238E27FC236}">
-                <a16:creationId xmlns:a16="http://schemas.microsoft.com/office/drawing/2014/main" id="{332B4062-3C00-40B7-BCFB-785D32801DB5}"/>
+                <a16:creationId xmlns:a16="http://schemas.microsoft.com/office/drawing/2014/main" id="{6B340867-40D0-4D7A-8BEB-5FD489D21909}"/>
               </a:ext>
             </a:extLst>
           </p:cNvPr>
@@ -6913,7 +6913,7 @@
           <p:cNvPr id="3" name="">
             <a:extLst xmlns:a="http://schemas.openxmlformats.org/drawingml/2006/main">
               <a:ext uri="{FF2B5EF4-FFF2-40B4-BE49-F238E27FC236}">
-                <a16:creationId xmlns:a16="http://schemas.microsoft.com/office/drawing/2014/main" id="{2DC7FFFA-2961-4737-97F3-01E84999D955}"/>
+                <a16:creationId xmlns:a16="http://schemas.microsoft.com/office/drawing/2014/main" id="{E72B4DE5-74B8-45CE-8884-1064721F26D0}"/>
               </a:ext>
             </a:extLst>
           </p:cNvPr>
@@ -6943,7 +6943,7 @@
           <p:cNvPr id="4" name="">
             <a:extLst xmlns:a="http://schemas.openxmlformats.org/drawingml/2006/main">
               <a:ext uri="{FF2B5EF4-FFF2-40B4-BE49-F238E27FC236}">
-                <a16:creationId xmlns:a16="http://schemas.microsoft.com/office/drawing/2014/main" id="{65949194-3D6D-4C6A-9055-C61A8FBE622A}"/>
+                <a16:creationId xmlns:a16="http://schemas.microsoft.com/office/drawing/2014/main" id="{010A2A15-3E84-440C-8490-247D9142FFEE}"/>
               </a:ext>
             </a:extLst>
           </p:cNvPr>
@@ -7000,7 +7000,7 @@
           <p:cNvPr id="5" name="">
             <a:extLst xmlns:a="http://schemas.openxmlformats.org/drawingml/2006/main">
               <a:ext uri="{FF2B5EF4-FFF2-40B4-BE49-F238E27FC236}">
-                <a16:creationId xmlns:a16="http://schemas.microsoft.com/office/drawing/2014/main" id="{D2214CA1-883F-4EC9-B5E2-EF1A7FF919AB}"/>
+                <a16:creationId xmlns:a16="http://schemas.microsoft.com/office/drawing/2014/main" id="{D6F5EC61-910C-4770-9D17-589F1B670D82}"/>
               </a:ext>
             </a:extLst>
           </p:cNvPr>
@@ -7057,7 +7057,7 @@
           <p:cNvPr id="6" name="">
             <a:extLst xmlns:a="http://schemas.openxmlformats.org/drawingml/2006/main">
               <a:ext uri="{FF2B5EF4-FFF2-40B4-BE49-F238E27FC236}">
-                <a16:creationId xmlns:a16="http://schemas.microsoft.com/office/drawing/2014/main" id="{AF9DCE5F-3920-430B-A38C-6A20C0D41F56}"/>
+                <a16:creationId xmlns:a16="http://schemas.microsoft.com/office/drawing/2014/main" id="{932C4041-8831-4E04-BD26-CAF449A9C1C6}"/>
               </a:ext>
             </a:extLst>
           </p:cNvPr>
@@ -7091,7 +7091,7 @@
           <p:cNvPr id="7" name="">
             <a:extLst xmlns:a="http://schemas.openxmlformats.org/drawingml/2006/main">
               <a:ext uri="{FF2B5EF4-FFF2-40B4-BE49-F238E27FC236}">
-                <a16:creationId xmlns:a16="http://schemas.microsoft.com/office/drawing/2014/main" id="{7434B6DE-7662-4E5C-A583-9C105FC42A94}"/>
+                <a16:creationId xmlns:a16="http://schemas.microsoft.com/office/drawing/2014/main" id="{402BDB31-FE3C-4F4A-8FC6-CD4A50BE5A1D}"/>
               </a:ext>
             </a:extLst>
           </p:cNvPr>
@@ -7148,7 +7148,7 @@
           <p:cNvPr id="8" name="">
             <a:extLst xmlns:a="http://schemas.openxmlformats.org/drawingml/2006/main">
               <a:ext uri="{FF2B5EF4-FFF2-40B4-BE49-F238E27FC236}">
-                <a16:creationId xmlns:a16="http://schemas.microsoft.com/office/drawing/2014/main" id="{AAB83D9E-99EA-430F-9405-609AE8FE9B52}"/>
+                <a16:creationId xmlns:a16="http://schemas.microsoft.com/office/drawing/2014/main" id="{FE724CC0-4210-418A-BD6E-687AA76C6E38}"/>
               </a:ext>
             </a:extLst>
           </p:cNvPr>
@@ -7182,7 +7182,7 @@
           <p:cNvPr id="9" name="">
             <a:extLst xmlns:a="http://schemas.openxmlformats.org/drawingml/2006/main">
               <a:ext uri="{FF2B5EF4-FFF2-40B4-BE49-F238E27FC236}">
-                <a16:creationId xmlns:a16="http://schemas.microsoft.com/office/drawing/2014/main" id="{3DE1CA4E-2A74-41A3-BEB5-CA31E70F1099}"/>
+                <a16:creationId xmlns:a16="http://schemas.microsoft.com/office/drawing/2014/main" id="{0D09D549-530B-4AE7-9D82-F278EA03C90D}"/>
               </a:ext>
             </a:extLst>
           </p:cNvPr>
@@ -7239,7 +7239,7 @@
           <p:cNvPr id="10" name="">
             <a:extLst xmlns:a="http://schemas.openxmlformats.org/drawingml/2006/main">
               <a:ext uri="{FF2B5EF4-FFF2-40B4-BE49-F238E27FC236}">
-                <a16:creationId xmlns:a16="http://schemas.microsoft.com/office/drawing/2014/main" id="{C193C320-8E49-4A75-8DD5-2D3560CA9B84}"/>
+                <a16:creationId xmlns:a16="http://schemas.microsoft.com/office/drawing/2014/main" id="{4362CEB1-0164-4AC1-B780-8BCC503DD1E3}"/>
               </a:ext>
             </a:extLst>
           </p:cNvPr>
@@ -7273,7 +7273,7 @@
           <p:cNvPr id="11" name="">
             <a:extLst xmlns:a="http://schemas.openxmlformats.org/drawingml/2006/main">
               <a:ext uri="{FF2B5EF4-FFF2-40B4-BE49-F238E27FC236}">
-                <a16:creationId xmlns:a16="http://schemas.microsoft.com/office/drawing/2014/main" id="{0644315B-C460-4C1D-A7D4-05DB51DA23A8}"/>
+                <a16:creationId xmlns:a16="http://schemas.microsoft.com/office/drawing/2014/main" id="{E1925F91-CB47-4C13-8A81-A12417CC16A1}"/>
               </a:ext>
             </a:extLst>
           </p:cNvPr>
@@ -7330,7 +7330,7 @@
           <p:cNvPr id="12" name="">
             <a:extLst xmlns:a="http://schemas.openxmlformats.org/drawingml/2006/main">
               <a:ext uri="{FF2B5EF4-FFF2-40B4-BE49-F238E27FC236}">
-                <a16:creationId xmlns:a16="http://schemas.microsoft.com/office/drawing/2014/main" id="{683FA568-F15D-4668-A72B-022B2C2F6C93}"/>
+                <a16:creationId xmlns:a16="http://schemas.microsoft.com/office/drawing/2014/main" id="{6B27D4BA-30F1-41C1-AB14-D8C5A0A32894}"/>
               </a:ext>
             </a:extLst>
           </p:cNvPr>
@@ -7364,7 +7364,7 @@
           <p:cNvPr id="13" name="">
             <a:extLst xmlns:a="http://schemas.openxmlformats.org/drawingml/2006/main">
               <a:ext uri="{FF2B5EF4-FFF2-40B4-BE49-F238E27FC236}">
-                <a16:creationId xmlns:a16="http://schemas.microsoft.com/office/drawing/2014/main" id="{294F0364-EABA-467C-9959-5FBCABB88398}"/>
+                <a16:creationId xmlns:a16="http://schemas.microsoft.com/office/drawing/2014/main" id="{5CDC4274-3E20-476C-9788-A99CCA682F7C}"/>
               </a:ext>
             </a:extLst>
           </p:cNvPr>
@@ -7421,7 +7421,7 @@
           <p:cNvPr id="14" name="">
             <a:extLst xmlns:a="http://schemas.openxmlformats.org/drawingml/2006/main">
               <a:ext uri="{FF2B5EF4-FFF2-40B4-BE49-F238E27FC236}">
-                <a16:creationId xmlns:a16="http://schemas.microsoft.com/office/drawing/2014/main" id="{9F4E1BD5-EAC9-4203-8763-CF99E7BB0443}"/>
+                <a16:creationId xmlns:a16="http://schemas.microsoft.com/office/drawing/2014/main" id="{8578E9B7-7CFA-4F0C-AB11-A70C01E45ECB}"/>
               </a:ext>
             </a:extLst>
           </p:cNvPr>
@@ -7455,7 +7455,7 @@
           <p:cNvPr id="15" name="">
             <a:extLst xmlns:a="http://schemas.openxmlformats.org/drawingml/2006/main">
               <a:ext uri="{FF2B5EF4-FFF2-40B4-BE49-F238E27FC236}">
-                <a16:creationId xmlns:a16="http://schemas.microsoft.com/office/drawing/2014/main" id="{7C40A562-B396-4BC4-B4E4-B7505CC98515}"/>
+                <a16:creationId xmlns:a16="http://schemas.microsoft.com/office/drawing/2014/main" id="{3F65B260-A455-4994-9FA8-9C0D4FDCFD18}"/>
               </a:ext>
             </a:extLst>
           </p:cNvPr>
@@ -7612,7 +7612,7 @@
           <p:cNvPr id="20" name="">
             <a:extLst xmlns:a="http://schemas.openxmlformats.org/drawingml/2006/main">
               <a:ext uri="{FF2B5EF4-FFF2-40B4-BE49-F238E27FC236}">
-                <a16:creationId xmlns:a16="http://schemas.microsoft.com/office/drawing/2014/main" id="{DABCB55B-AB31-49B9-BB25-938B4DBFF9F2}"/>
+                <a16:creationId xmlns:a16="http://schemas.microsoft.com/office/drawing/2014/main" id="{41A1A9C5-22D2-4979-AE4B-1BD3F65C676B}"/>
               </a:ext>
             </a:extLst>
           </p:cNvPr>
@@ -7669,7 +7669,7 @@
           <p:cNvPr id="21" name="">
             <a:extLst xmlns:a="http://schemas.openxmlformats.org/drawingml/2006/main">
               <a:ext uri="{FF2B5EF4-FFF2-40B4-BE49-F238E27FC236}">
-                <a16:creationId xmlns:a16="http://schemas.microsoft.com/office/drawing/2014/main" id="{682563C5-5574-4C59-BC2B-2BFAF82BFE61}"/>
+                <a16:creationId xmlns:a16="http://schemas.microsoft.com/office/drawing/2014/main" id="{0E52DEED-C467-4050-92C9-85D9E6AAAB9F}"/>
               </a:ext>
             </a:extLst>
           </p:cNvPr>
@@ -7699,7 +7699,7 @@
           <p:cNvPr id="22" name="">
             <a:extLst xmlns:a="http://schemas.openxmlformats.org/drawingml/2006/main">
               <a:ext uri="{FF2B5EF4-FFF2-40B4-BE49-F238E27FC236}">
-                <a16:creationId xmlns:a16="http://schemas.microsoft.com/office/drawing/2014/main" id="{306967D7-B0D0-474F-81C8-A4EC737D7871}"/>
+                <a16:creationId xmlns:a16="http://schemas.microsoft.com/office/drawing/2014/main" id="{C903030A-EFF7-47EF-92C7-1670DA2A9E24}"/>
               </a:ext>
             </a:extLst>
           </p:cNvPr>
@@ -7756,7 +7756,7 @@
           <p:cNvPr id="23" name="">
             <a:extLst xmlns:a="http://schemas.openxmlformats.org/drawingml/2006/main">
               <a:ext uri="{FF2B5EF4-FFF2-40B4-BE49-F238E27FC236}">
-                <a16:creationId xmlns:a16="http://schemas.microsoft.com/office/drawing/2014/main" id="{B32336C6-F9EE-4D4C-B9DB-D05D68B88AA2}"/>
+                <a16:creationId xmlns:a16="http://schemas.microsoft.com/office/drawing/2014/main" id="{59C8EDF5-2188-474B-81D9-AA386DC2C7C0}"/>
               </a:ext>
             </a:extLst>
           </p:cNvPr>
@@ -7786,7 +7786,7 @@
           <p:cNvPr id="24" name="">
             <a:extLst xmlns:a="http://schemas.openxmlformats.org/drawingml/2006/main">
               <a:ext uri="{FF2B5EF4-FFF2-40B4-BE49-F238E27FC236}">
-                <a16:creationId xmlns:a16="http://schemas.microsoft.com/office/drawing/2014/main" id="{38DCF80D-9C19-4A0C-B53D-E25E19367840}"/>
+                <a16:creationId xmlns:a16="http://schemas.microsoft.com/office/drawing/2014/main" id="{84F12DCF-26A6-46AF-BE08-8F9FE42C8E6A}"/>
               </a:ext>
             </a:extLst>
           </p:cNvPr>
@@ -7843,7 +7843,7 @@
           <p:cNvPr id="25" name="">
             <a:extLst xmlns:a="http://schemas.openxmlformats.org/drawingml/2006/main">
               <a:ext uri="{FF2B5EF4-FFF2-40B4-BE49-F238E27FC236}">
-                <a16:creationId xmlns:a16="http://schemas.microsoft.com/office/drawing/2014/main" id="{732734A4-3C3C-4522-A230-B56B6FDCB6D8}"/>
+                <a16:creationId xmlns:a16="http://schemas.microsoft.com/office/drawing/2014/main" id="{E24B285B-DC7D-4017-8A16-CAEBB9B2D78D}"/>
               </a:ext>
             </a:extLst>
           </p:cNvPr>
@@ -7873,7 +7873,7 @@
           <p:cNvPr id="26" name="">
             <a:extLst xmlns:a="http://schemas.openxmlformats.org/drawingml/2006/main">
               <a:ext uri="{FF2B5EF4-FFF2-40B4-BE49-F238E27FC236}">
-                <a16:creationId xmlns:a16="http://schemas.microsoft.com/office/drawing/2014/main" id="{23915565-6D51-4A7E-A69E-072F59C9F8FF}"/>
+                <a16:creationId xmlns:a16="http://schemas.microsoft.com/office/drawing/2014/main" id="{79722D94-1D1F-4097-A7B7-F1F789A70D87}"/>
               </a:ext>
             </a:extLst>
           </p:cNvPr>
@@ -7930,7 +7930,7 @@
           <p:cNvPr id="27" name="">
             <a:extLst xmlns:a="http://schemas.openxmlformats.org/drawingml/2006/main">
               <a:ext uri="{FF2B5EF4-FFF2-40B4-BE49-F238E27FC236}">
-                <a16:creationId xmlns:a16="http://schemas.microsoft.com/office/drawing/2014/main" id="{B81FF239-8BC1-41A1-81ED-C33963DB2E2E}"/>
+                <a16:creationId xmlns:a16="http://schemas.microsoft.com/office/drawing/2014/main" id="{5BC36500-5C79-451B-A648-9DA0B91D9C6B}"/>
               </a:ext>
             </a:extLst>
           </p:cNvPr>
@@ -7960,7 +7960,7 @@
           <p:cNvPr id="28" name="">
             <a:extLst xmlns:a="http://schemas.openxmlformats.org/drawingml/2006/main">
               <a:ext uri="{FF2B5EF4-FFF2-40B4-BE49-F238E27FC236}">
-                <a16:creationId xmlns:a16="http://schemas.microsoft.com/office/drawing/2014/main" id="{262EA8F9-3927-41AE-88E1-13E2B26B111C}"/>
+                <a16:creationId xmlns:a16="http://schemas.microsoft.com/office/drawing/2014/main" id="{53A355A3-8A5C-453B-9D58-89534CAD2D39}"/>
               </a:ext>
             </a:extLst>
           </p:cNvPr>
@@ -8017,7 +8017,7 @@
           <p:cNvPr id="29" name="">
             <a:extLst xmlns:a="http://schemas.openxmlformats.org/drawingml/2006/main">
               <a:ext uri="{FF2B5EF4-FFF2-40B4-BE49-F238E27FC236}">
-                <a16:creationId xmlns:a16="http://schemas.microsoft.com/office/drawing/2014/main" id="{AA04E591-D74A-4FEC-BF91-0E015D8AE428}"/>
+                <a16:creationId xmlns:a16="http://schemas.microsoft.com/office/drawing/2014/main" id="{6F5A131D-D2C7-45CB-8565-5075170628D7}"/>
               </a:ext>
             </a:extLst>
           </p:cNvPr>
@@ -8074,7 +8074,7 @@
           <p:cNvPr id="30" name="">
             <a:extLst xmlns:a="http://schemas.openxmlformats.org/drawingml/2006/main">
               <a:ext uri="{FF2B5EF4-FFF2-40B4-BE49-F238E27FC236}">
-                <a16:creationId xmlns:a16="http://schemas.microsoft.com/office/drawing/2014/main" id="{529825E0-0213-412B-9442-19599959BF73}"/>
+                <a16:creationId xmlns:a16="http://schemas.microsoft.com/office/drawing/2014/main" id="{3A065985-141B-4670-BB07-3F1ADFF24DEF}"/>
               </a:ext>
             </a:extLst>
           </p:cNvPr>
@@ -8104,7 +8104,7 @@
           <p:cNvPr id="31" name="">
             <a:extLst xmlns:a="http://schemas.openxmlformats.org/drawingml/2006/main">
               <a:ext uri="{FF2B5EF4-FFF2-40B4-BE49-F238E27FC236}">
-                <a16:creationId xmlns:a16="http://schemas.microsoft.com/office/drawing/2014/main" id="{226F8265-E7CE-4D74-A530-41C430745F93}"/>
+                <a16:creationId xmlns:a16="http://schemas.microsoft.com/office/drawing/2014/main" id="{D1CBC9B5-CAD4-4900-B1D1-49E3DC51D0D8}"/>
               </a:ext>
             </a:extLst>
           </p:cNvPr>
@@ -8161,7 +8161,7 @@
           <p:cNvPr id="32" name="">
             <a:extLst xmlns:a="http://schemas.openxmlformats.org/drawingml/2006/main">
               <a:ext uri="{FF2B5EF4-FFF2-40B4-BE49-F238E27FC236}">
-                <a16:creationId xmlns:a16="http://schemas.microsoft.com/office/drawing/2014/main" id="{C2561B8D-9064-4A1A-A9B5-C20A3DDB0E27}"/>
+                <a16:creationId xmlns:a16="http://schemas.microsoft.com/office/drawing/2014/main" id="{A03C5C2E-1553-414E-89CE-64037874DB91}"/>
               </a:ext>
             </a:extLst>
           </p:cNvPr>
@@ -8191,7 +8191,7 @@
           <p:cNvPr id="33" name="">
             <a:extLst xmlns:a="http://schemas.openxmlformats.org/drawingml/2006/main">
               <a:ext uri="{FF2B5EF4-FFF2-40B4-BE49-F238E27FC236}">
-                <a16:creationId xmlns:a16="http://schemas.microsoft.com/office/drawing/2014/main" id="{CF649510-81E4-4A0B-A81F-08E05108171E}"/>
+                <a16:creationId xmlns:a16="http://schemas.microsoft.com/office/drawing/2014/main" id="{DE7CF704-EC7C-4C07-AD06-99A2C9FD56D6}"/>
               </a:ext>
             </a:extLst>
           </p:cNvPr>
@@ -8248,7 +8248,7 @@
           <p:cNvPr id="34" name="">
             <a:extLst xmlns:a="http://schemas.openxmlformats.org/drawingml/2006/main">
               <a:ext uri="{FF2B5EF4-FFF2-40B4-BE49-F238E27FC236}">
-                <a16:creationId xmlns:a16="http://schemas.microsoft.com/office/drawing/2014/main" id="{4882E356-D8FE-48A5-963C-1C6B2546E9C2}"/>
+                <a16:creationId xmlns:a16="http://schemas.microsoft.com/office/drawing/2014/main" id="{098596FB-1A95-4341-8288-89D51B80B7E6}"/>
               </a:ext>
             </a:extLst>
           </p:cNvPr>
@@ -8278,7 +8278,7 @@
           <p:cNvPr id="35" name="">
             <a:extLst xmlns:a="http://schemas.openxmlformats.org/drawingml/2006/main">
               <a:ext uri="{FF2B5EF4-FFF2-40B4-BE49-F238E27FC236}">
-                <a16:creationId xmlns:a16="http://schemas.microsoft.com/office/drawing/2014/main" id="{D8F3897C-6ACB-4786-930D-58AF23505AC1}"/>
+                <a16:creationId xmlns:a16="http://schemas.microsoft.com/office/drawing/2014/main" id="{E4A6C3AC-9590-4EAD-82F9-3E4FE9817DBB}"/>
               </a:ext>
             </a:extLst>
           </p:cNvPr>
@@ -8335,7 +8335,7 @@
           <p:cNvPr id="36" name="">
             <a:extLst xmlns:a="http://schemas.openxmlformats.org/drawingml/2006/main">
               <a:ext uri="{FF2B5EF4-FFF2-40B4-BE49-F238E27FC236}">
-                <a16:creationId xmlns:a16="http://schemas.microsoft.com/office/drawing/2014/main" id="{9308D5D0-11D5-4661-BC67-F68703D7AFF0}"/>
+                <a16:creationId xmlns:a16="http://schemas.microsoft.com/office/drawing/2014/main" id="{612A1534-F881-4BD4-9924-6F4387FA33B6}"/>
               </a:ext>
             </a:extLst>
           </p:cNvPr>
@@ -8365,7 +8365,7 @@
           <p:cNvPr id="37" name="">
             <a:extLst xmlns:a="http://schemas.openxmlformats.org/drawingml/2006/main">
               <a:ext uri="{FF2B5EF4-FFF2-40B4-BE49-F238E27FC236}">
-                <a16:creationId xmlns:a16="http://schemas.microsoft.com/office/drawing/2014/main" id="{8F97BAC2-19C4-42C2-98BC-2871A843BECD}"/>
+                <a16:creationId xmlns:a16="http://schemas.microsoft.com/office/drawing/2014/main" id="{D26A5AD4-8FA3-45EE-8D4E-2FBDB05739D3}"/>
               </a:ext>
             </a:extLst>
           </p:cNvPr>
@@ -8420,7 +8420,7 @@
     </p:spTree>
     <p:extLst>
       <p:ext uri="{BB962C8B-B14F-4D97-AF65-F5344CB8AC3E}">
-        <p14:creationId xmlns:p14="http://schemas.microsoft.com/office/powerpoint/2010/main" val="1170458738"/>
+        <p14:creationId xmlns:p14="http://schemas.microsoft.com/office/powerpoint/2010/main" val="1324884963"/>
       </p:ext>
     </p:extLst>
   </p:cSld>
@@ -8451,7 +8451,7 @@
           <p:cNvPr id="29" name="">
             <a:extLst xmlns:a="http://schemas.openxmlformats.org/drawingml/2006/main">
               <a:ext uri="{FF2B5EF4-FFF2-40B4-BE49-F238E27FC236}">
-                <a16:creationId xmlns:a16="http://schemas.microsoft.com/office/drawing/2014/main" id="{C6059977-F06A-4E28-ABC8-F2756CD4B9F4}"/>
+                <a16:creationId xmlns:a16="http://schemas.microsoft.com/office/drawing/2014/main" id="{684585F3-21A7-40EA-B83F-09626CBD15E4}"/>
               </a:ext>
             </a:extLst>
           </p:cNvPr>
@@ -8508,7 +8508,7 @@
           <p:cNvPr id="2" name="">
             <a:extLst xmlns:a="http://schemas.openxmlformats.org/drawingml/2006/main">
               <a:ext uri="{FF2B5EF4-FFF2-40B4-BE49-F238E27FC236}">
-                <a16:creationId xmlns:a16="http://schemas.microsoft.com/office/drawing/2014/main" id="{FD3A870C-6568-489D-8DEB-E949C8B86B7B}"/>
+                <a16:creationId xmlns:a16="http://schemas.microsoft.com/office/drawing/2014/main" id="{B207DF48-A00B-4C2E-8318-503C57044A12}"/>
               </a:ext>
             </a:extLst>
           </p:cNvPr>
@@ -8565,7 +8565,7 @@
           <p:cNvPr id="3" name="">
             <a:extLst xmlns:a="http://schemas.openxmlformats.org/drawingml/2006/main">
               <a:ext uri="{FF2B5EF4-FFF2-40B4-BE49-F238E27FC236}">
-                <a16:creationId xmlns:a16="http://schemas.microsoft.com/office/drawing/2014/main" id="{2AC889D0-FF6A-448A-B5BC-6D0BD1DF2935}"/>
+                <a16:creationId xmlns:a16="http://schemas.microsoft.com/office/drawing/2014/main" id="{3572814F-9D8C-4CD3-A761-5FA404D6F4F2}"/>
               </a:ext>
             </a:extLst>
           </p:cNvPr>
@@ -8595,7 +8595,7 @@
           <p:cNvPr id="4" name="">
             <a:extLst xmlns:a="http://schemas.openxmlformats.org/drawingml/2006/main">
               <a:ext uri="{FF2B5EF4-FFF2-40B4-BE49-F238E27FC236}">
-                <a16:creationId xmlns:a16="http://schemas.microsoft.com/office/drawing/2014/main" id="{6ED34FC0-023F-4D5C-95AD-9C8F269B38CE}"/>
+                <a16:creationId xmlns:a16="http://schemas.microsoft.com/office/drawing/2014/main" id="{DAC94B29-6384-4157-8098-A355CEAC77B4}"/>
               </a:ext>
             </a:extLst>
           </p:cNvPr>
@@ -8652,7 +8652,7 @@
           <p:cNvPr id="5" name="">
             <a:extLst xmlns:a="http://schemas.openxmlformats.org/drawingml/2006/main">
               <a:ext uri="{FF2B5EF4-FFF2-40B4-BE49-F238E27FC236}">
-                <a16:creationId xmlns:a16="http://schemas.microsoft.com/office/drawing/2014/main" id="{C5EBF25E-1727-4984-B07F-D01F12178CBF}"/>
+                <a16:creationId xmlns:a16="http://schemas.microsoft.com/office/drawing/2014/main" id="{E9415AAE-C81C-49B0-8323-2574B81FEE42}"/>
               </a:ext>
             </a:extLst>
           </p:cNvPr>
@@ -8709,7 +8709,7 @@
           <p:cNvPr id="6" name="">
             <a:extLst xmlns:a="http://schemas.openxmlformats.org/drawingml/2006/main">
               <a:ext uri="{FF2B5EF4-FFF2-40B4-BE49-F238E27FC236}">
-                <a16:creationId xmlns:a16="http://schemas.microsoft.com/office/drawing/2014/main" id="{D32460A8-FA2B-4378-AFB8-86DCB785FC9C}"/>
+                <a16:creationId xmlns:a16="http://schemas.microsoft.com/office/drawing/2014/main" id="{BB91EB97-F1DF-4C4D-9FDD-4D425A053601}"/>
               </a:ext>
             </a:extLst>
           </p:cNvPr>
@@ -8766,7 +8766,7 @@
           <p:cNvPr id="7" name="">
             <a:extLst xmlns:a="http://schemas.openxmlformats.org/drawingml/2006/main">
               <a:ext uri="{FF2B5EF4-FFF2-40B4-BE49-F238E27FC236}">
-                <a16:creationId xmlns:a16="http://schemas.microsoft.com/office/drawing/2014/main" id="{A59382BC-8556-4505-8E07-148FDDF2F850}"/>
+                <a16:creationId xmlns:a16="http://schemas.microsoft.com/office/drawing/2014/main" id="{4ECD53D1-0549-4D92-A09A-6A7CEB4B0C31}"/>
               </a:ext>
             </a:extLst>
           </p:cNvPr>
@@ -8823,7 +8823,7 @@
           <p:cNvPr id="8" name="">
             <a:extLst xmlns:a="http://schemas.openxmlformats.org/drawingml/2006/main">
               <a:ext uri="{FF2B5EF4-FFF2-40B4-BE49-F238E27FC236}">
-                <a16:creationId xmlns:a16="http://schemas.microsoft.com/office/drawing/2014/main" id="{4E84016F-F2C1-418F-8FFB-4C6BAC6DF41B}"/>
+                <a16:creationId xmlns:a16="http://schemas.microsoft.com/office/drawing/2014/main" id="{F8601203-D63E-4A96-A81D-E0E4DEEE92BB}"/>
               </a:ext>
             </a:extLst>
           </p:cNvPr>
@@ -8880,7 +8880,7 @@
           <p:cNvPr id="9" name="">
             <a:extLst xmlns:a="http://schemas.openxmlformats.org/drawingml/2006/main">
               <a:ext uri="{FF2B5EF4-FFF2-40B4-BE49-F238E27FC236}">
-                <a16:creationId xmlns:a16="http://schemas.microsoft.com/office/drawing/2014/main" id="{5FBC75FF-B15D-464A-856A-5DF2A8C69794}"/>
+                <a16:creationId xmlns:a16="http://schemas.microsoft.com/office/drawing/2014/main" id="{F2CBD937-3215-4CE0-9C8D-766DBF051A58}"/>
               </a:ext>
             </a:extLst>
           </p:cNvPr>
@@ -8910,7 +8910,7 @@
           <p:cNvPr id="10" name="">
             <a:extLst xmlns:a="http://schemas.openxmlformats.org/drawingml/2006/main">
               <a:ext uri="{FF2B5EF4-FFF2-40B4-BE49-F238E27FC236}">
-                <a16:creationId xmlns:a16="http://schemas.microsoft.com/office/drawing/2014/main" id="{6D27B79F-4E5E-43EC-8299-2FC3419BF1DB}"/>
+                <a16:creationId xmlns:a16="http://schemas.microsoft.com/office/drawing/2014/main" id="{ADC9A8A4-C203-4C94-A82B-35417A81D3EB}"/>
               </a:ext>
             </a:extLst>
           </p:cNvPr>
@@ -8967,7 +8967,7 @@
           <p:cNvPr id="11" name="">
             <a:extLst xmlns:a="http://schemas.openxmlformats.org/drawingml/2006/main">
               <a:ext uri="{FF2B5EF4-FFF2-40B4-BE49-F238E27FC236}">
-                <a16:creationId xmlns:a16="http://schemas.microsoft.com/office/drawing/2014/main" id="{FD965357-1078-424D-9FD1-E221A0BE7397}"/>
+                <a16:creationId xmlns:a16="http://schemas.microsoft.com/office/drawing/2014/main" id="{EAE4347A-71A3-4952-AABE-43BD76A84C29}"/>
               </a:ext>
             </a:extLst>
           </p:cNvPr>
@@ -9024,7 +9024,7 @@
           <p:cNvPr id="12" name="">
             <a:extLst xmlns:a="http://schemas.openxmlformats.org/drawingml/2006/main">
               <a:ext uri="{FF2B5EF4-FFF2-40B4-BE49-F238E27FC236}">
-                <a16:creationId xmlns:a16="http://schemas.microsoft.com/office/drawing/2014/main" id="{BFA46814-F70B-4A51-A022-BFA755BDE434}"/>
+                <a16:creationId xmlns:a16="http://schemas.microsoft.com/office/drawing/2014/main" id="{7FD4D65A-2885-49C3-A8EB-BABEB1C2191B}"/>
               </a:ext>
             </a:extLst>
           </p:cNvPr>
@@ -9081,7 +9081,7 @@
           <p:cNvPr id="13" name="">
             <a:extLst xmlns:a="http://schemas.openxmlformats.org/drawingml/2006/main">
               <a:ext uri="{FF2B5EF4-FFF2-40B4-BE49-F238E27FC236}">
-                <a16:creationId xmlns:a16="http://schemas.microsoft.com/office/drawing/2014/main" id="{5EA0E82F-012C-440F-A1A9-7280779CEC10}"/>
+                <a16:creationId xmlns:a16="http://schemas.microsoft.com/office/drawing/2014/main" id="{F48CD61A-860D-4692-A640-4F5D44B28C8B}"/>
               </a:ext>
             </a:extLst>
           </p:cNvPr>
@@ -9111,7 +9111,7 @@
           <p:cNvPr id="14" name="">
             <a:extLst xmlns:a="http://schemas.openxmlformats.org/drawingml/2006/main">
               <a:ext uri="{FF2B5EF4-FFF2-40B4-BE49-F238E27FC236}">
-                <a16:creationId xmlns:a16="http://schemas.microsoft.com/office/drawing/2014/main" id="{7441BA5D-AB7E-43E0-A4F6-5879BFC0B09A}"/>
+                <a16:creationId xmlns:a16="http://schemas.microsoft.com/office/drawing/2014/main" id="{87C7220C-74C3-42B6-BDBC-841F35F6E1A6}"/>
               </a:ext>
             </a:extLst>
           </p:cNvPr>
@@ -9168,7 +9168,7 @@
           <p:cNvPr id="15" name="">
             <a:extLst xmlns:a="http://schemas.openxmlformats.org/drawingml/2006/main">
               <a:ext uri="{FF2B5EF4-FFF2-40B4-BE49-F238E27FC236}">
-                <a16:creationId xmlns:a16="http://schemas.microsoft.com/office/drawing/2014/main" id="{73923629-6731-4EE3-BBA9-4E68E91D074A}"/>
+                <a16:creationId xmlns:a16="http://schemas.microsoft.com/office/drawing/2014/main" id="{6E2DE8FA-CD00-4EFF-B49F-3EA97EF466F9}"/>
               </a:ext>
             </a:extLst>
           </p:cNvPr>
@@ -9225,7 +9225,7 @@
           <p:cNvPr id="16" name="">
             <a:extLst xmlns:a="http://schemas.openxmlformats.org/drawingml/2006/main">
               <a:ext uri="{FF2B5EF4-FFF2-40B4-BE49-F238E27FC236}">
-                <a16:creationId xmlns:a16="http://schemas.microsoft.com/office/drawing/2014/main" id="{BBEC7178-543E-4CF4-AE71-1CBF8EB48607}"/>
+                <a16:creationId xmlns:a16="http://schemas.microsoft.com/office/drawing/2014/main" id="{C587A924-28F5-4B24-B937-4D90F1DDED40}"/>
               </a:ext>
             </a:extLst>
           </p:cNvPr>
@@ -9282,7 +9282,7 @@
           <p:cNvPr id="17" name="">
             <a:extLst xmlns:a="http://schemas.openxmlformats.org/drawingml/2006/main">
               <a:ext uri="{FF2B5EF4-FFF2-40B4-BE49-F238E27FC236}">
-                <a16:creationId xmlns:a16="http://schemas.microsoft.com/office/drawing/2014/main" id="{FF6DB82C-1C5E-4181-A55A-A1484B176CC4}"/>
+                <a16:creationId xmlns:a16="http://schemas.microsoft.com/office/drawing/2014/main" id="{C56DFF5B-5F8C-4C52-95AD-33760C03E558}"/>
               </a:ext>
             </a:extLst>
           </p:cNvPr>
@@ -9312,7 +9312,7 @@
           <p:cNvPr id="18" name="">
             <a:extLst xmlns:a="http://schemas.openxmlformats.org/drawingml/2006/main">
               <a:ext uri="{FF2B5EF4-FFF2-40B4-BE49-F238E27FC236}">
-                <a16:creationId xmlns:a16="http://schemas.microsoft.com/office/drawing/2014/main" id="{B49A6C5B-6F87-421E-A9C6-29C3F68A5AE3}"/>
+                <a16:creationId xmlns:a16="http://schemas.microsoft.com/office/drawing/2014/main" id="{84CF9DA2-85D6-4344-8F52-493BFB1B0BAF}"/>
               </a:ext>
             </a:extLst>
           </p:cNvPr>
@@ -9369,7 +9369,7 @@
           <p:cNvPr id="19" name="">
             <a:extLst xmlns:a="http://schemas.openxmlformats.org/drawingml/2006/main">
               <a:ext uri="{FF2B5EF4-FFF2-40B4-BE49-F238E27FC236}">
-                <a16:creationId xmlns:a16="http://schemas.microsoft.com/office/drawing/2014/main" id="{33796D58-F01D-4C90-A6B9-04190372B6A6}"/>
+                <a16:creationId xmlns:a16="http://schemas.microsoft.com/office/drawing/2014/main" id="{C1B38215-A3BC-4BB3-9F14-9D9939268CDF}"/>
               </a:ext>
             </a:extLst>
           </p:cNvPr>
@@ -9426,7 +9426,7 @@
           <p:cNvPr id="20" name="">
             <a:extLst xmlns:a="http://schemas.openxmlformats.org/drawingml/2006/main">
               <a:ext uri="{FF2B5EF4-FFF2-40B4-BE49-F238E27FC236}">
-                <a16:creationId xmlns:a16="http://schemas.microsoft.com/office/drawing/2014/main" id="{93DCE13A-A910-4DC0-A8A6-908D419EE208}"/>
+                <a16:creationId xmlns:a16="http://schemas.microsoft.com/office/drawing/2014/main" id="{04DAE5E9-4FCD-4B4B-AD3D-0E3EB85B3F6F}"/>
               </a:ext>
             </a:extLst>
           </p:cNvPr>
@@ -9483,7 +9483,7 @@
           <p:cNvPr id="21" name="">
             <a:extLst xmlns:a="http://schemas.openxmlformats.org/drawingml/2006/main">
               <a:ext uri="{FF2B5EF4-FFF2-40B4-BE49-F238E27FC236}">
-                <a16:creationId xmlns:a16="http://schemas.microsoft.com/office/drawing/2014/main" id="{0C11363F-7730-4F0B-9F64-75901487A695}"/>
+                <a16:creationId xmlns:a16="http://schemas.microsoft.com/office/drawing/2014/main" id="{872CA4A8-212D-4D9A-B24C-7489BF0F0E8C}"/>
               </a:ext>
             </a:extLst>
           </p:cNvPr>
@@ -9513,7 +9513,7 @@
           <p:cNvPr id="22" name="">
             <a:extLst xmlns:a="http://schemas.openxmlformats.org/drawingml/2006/main">
               <a:ext uri="{FF2B5EF4-FFF2-40B4-BE49-F238E27FC236}">
-                <a16:creationId xmlns:a16="http://schemas.microsoft.com/office/drawing/2014/main" id="{B70921A4-6DB9-41B3-8271-B77802DD0F51}"/>
+                <a16:creationId xmlns:a16="http://schemas.microsoft.com/office/drawing/2014/main" id="{7AFB67D4-942D-460E-828D-2685D44932DE}"/>
               </a:ext>
             </a:extLst>
           </p:cNvPr>
@@ -9570,7 +9570,7 @@
           <p:cNvPr id="23" name="">
             <a:extLst xmlns:a="http://schemas.openxmlformats.org/drawingml/2006/main">
               <a:ext uri="{FF2B5EF4-FFF2-40B4-BE49-F238E27FC236}">
-                <a16:creationId xmlns:a16="http://schemas.microsoft.com/office/drawing/2014/main" id="{B9D6E605-87F8-4DCD-A079-A40ABE9DCF69}"/>
+                <a16:creationId xmlns:a16="http://schemas.microsoft.com/office/drawing/2014/main" id="{A75CA8B8-68C9-419B-9469-A26D47007923}"/>
               </a:ext>
             </a:extLst>
           </p:cNvPr>
@@ -9627,7 +9627,7 @@
           <p:cNvPr id="24" name="">
             <a:extLst xmlns:a="http://schemas.openxmlformats.org/drawingml/2006/main">
               <a:ext uri="{FF2B5EF4-FFF2-40B4-BE49-F238E27FC236}">
-                <a16:creationId xmlns:a16="http://schemas.microsoft.com/office/drawing/2014/main" id="{548349BA-5922-4061-9278-790F84E5B1D7}"/>
+                <a16:creationId xmlns:a16="http://schemas.microsoft.com/office/drawing/2014/main" id="{8FF09BA3-17C7-4EBC-8C5E-13DCFC418521}"/>
               </a:ext>
             </a:extLst>
           </p:cNvPr>
@@ -9684,7 +9684,7 @@
           <p:cNvPr id="25" name="">
             <a:extLst xmlns:a="http://schemas.openxmlformats.org/drawingml/2006/main">
               <a:ext uri="{FF2B5EF4-FFF2-40B4-BE49-F238E27FC236}">
-                <a16:creationId xmlns:a16="http://schemas.microsoft.com/office/drawing/2014/main" id="{A442121F-5189-415A-9D7A-2EC56C9688AB}"/>
+                <a16:creationId xmlns:a16="http://schemas.microsoft.com/office/drawing/2014/main" id="{64C43FAE-0793-4ED4-8297-93DCE77363A9}"/>
               </a:ext>
             </a:extLst>
           </p:cNvPr>
@@ -9716,7 +9716,7 @@
           <p:cNvPr id="26" name="">
             <a:extLst xmlns:a="http://schemas.openxmlformats.org/drawingml/2006/main">
               <a:ext uri="{FF2B5EF4-FFF2-40B4-BE49-F238E27FC236}">
-                <a16:creationId xmlns:a16="http://schemas.microsoft.com/office/drawing/2014/main" id="{8387EE0A-424A-453C-AF8E-C076EDD9063C}"/>
+                <a16:creationId xmlns:a16="http://schemas.microsoft.com/office/drawing/2014/main" id="{9552A073-4CFE-4FC1-8C81-74E3D4179C1D}"/>
               </a:ext>
             </a:extLst>
           </p:cNvPr>
@@ -9819,7 +9819,7 @@
           <p:cNvPr id="27" name="">
             <a:extLst xmlns:a="http://schemas.openxmlformats.org/drawingml/2006/main">
               <a:ext uri="{FF2B5EF4-FFF2-40B4-BE49-F238E27FC236}">
-                <a16:creationId xmlns:a16="http://schemas.microsoft.com/office/drawing/2014/main" id="{662081BB-4B3C-4B50-90FB-ADFEA559E997}"/>
+                <a16:creationId xmlns:a16="http://schemas.microsoft.com/office/drawing/2014/main" id="{6976B0C2-3B56-4EDE-AF52-7CFCF4D709CE}"/>
               </a:ext>
             </a:extLst>
           </p:cNvPr>
@@ -9851,7 +9851,7 @@
           <p:cNvPr id="28" name="">
             <a:extLst xmlns:a="http://schemas.openxmlformats.org/drawingml/2006/main">
               <a:ext uri="{FF2B5EF4-FFF2-40B4-BE49-F238E27FC236}">
-                <a16:creationId xmlns:a16="http://schemas.microsoft.com/office/drawing/2014/main" id="{64B197D6-5332-4856-BFBC-BB9D5155CCF2}"/>
+                <a16:creationId xmlns:a16="http://schemas.microsoft.com/office/drawing/2014/main" id="{F1693825-8A77-4EB1-BF8B-F83F1A198DAE}"/>
               </a:ext>
             </a:extLst>
           </p:cNvPr>
@@ -9906,7 +9906,7 @@
     </p:spTree>
     <p:extLst>
       <p:ext uri="{BB962C8B-B14F-4D97-AF65-F5344CB8AC3E}">
-        <p14:creationId xmlns:p14="http://schemas.microsoft.com/office/powerpoint/2010/main" val="2140301439"/>
+        <p14:creationId xmlns:p14="http://schemas.microsoft.com/office/powerpoint/2010/main" val="78805016"/>
       </p:ext>
     </p:extLst>
   </p:cSld>
@@ -9937,7 +9937,7 @@
           <p:cNvPr id="30" name="">
             <a:extLst xmlns:a="http://schemas.openxmlformats.org/drawingml/2006/main">
               <a:ext uri="{FF2B5EF4-FFF2-40B4-BE49-F238E27FC236}">
-                <a16:creationId xmlns:a16="http://schemas.microsoft.com/office/drawing/2014/main" id="{5BC6C97A-B0D3-42E6-858F-FDB103139BBB}"/>
+                <a16:creationId xmlns:a16="http://schemas.microsoft.com/office/drawing/2014/main" id="{A982CD73-ABD9-4C74-826B-34446526D006}"/>
               </a:ext>
             </a:extLst>
           </p:cNvPr>
@@ -9994,7 +9994,7 @@
           <p:cNvPr id="2" name="">
             <a:extLst xmlns:a="http://schemas.openxmlformats.org/drawingml/2006/main">
               <a:ext uri="{FF2B5EF4-FFF2-40B4-BE49-F238E27FC236}">
-                <a16:creationId xmlns:a16="http://schemas.microsoft.com/office/drawing/2014/main" id="{8EC501E9-178E-4233-BCB2-2443ABC961B9}"/>
+                <a16:creationId xmlns:a16="http://schemas.microsoft.com/office/drawing/2014/main" id="{3D31D79B-B901-45F5-9E4C-C186854F2778}"/>
               </a:ext>
             </a:extLst>
           </p:cNvPr>
@@ -10051,7 +10051,7 @@
           <p:cNvPr id="3" name="">
             <a:extLst xmlns:a="http://schemas.openxmlformats.org/drawingml/2006/main">
               <a:ext uri="{FF2B5EF4-FFF2-40B4-BE49-F238E27FC236}">
-                <a16:creationId xmlns:a16="http://schemas.microsoft.com/office/drawing/2014/main" id="{76339B75-9D04-4672-8B65-44233FB9C4C2}"/>
+                <a16:creationId xmlns:a16="http://schemas.microsoft.com/office/drawing/2014/main" id="{870B41CC-BF28-41A6-B186-7A8D1DD769DD}"/>
               </a:ext>
             </a:extLst>
           </p:cNvPr>
@@ -10081,7 +10081,7 @@
           <p:cNvPr id="4" name="">
             <a:extLst xmlns:a="http://schemas.openxmlformats.org/drawingml/2006/main">
               <a:ext uri="{FF2B5EF4-FFF2-40B4-BE49-F238E27FC236}">
-                <a16:creationId xmlns:a16="http://schemas.microsoft.com/office/drawing/2014/main" id="{B2EEB053-F4B1-4983-84F0-E4E7B20F7DA3}"/>
+                <a16:creationId xmlns:a16="http://schemas.microsoft.com/office/drawing/2014/main" id="{90A820E5-F4DD-4239-88CC-B1C74D11B286}"/>
               </a:ext>
             </a:extLst>
           </p:cNvPr>
@@ -10138,7 +10138,7 @@
           <p:cNvPr id="5" name="">
             <a:extLst xmlns:a="http://schemas.openxmlformats.org/drawingml/2006/main">
               <a:ext uri="{FF2B5EF4-FFF2-40B4-BE49-F238E27FC236}">
-                <a16:creationId xmlns:a16="http://schemas.microsoft.com/office/drawing/2014/main" id="{FC441626-912E-47CC-9F6C-F2DBD206FD82}"/>
+                <a16:creationId xmlns:a16="http://schemas.microsoft.com/office/drawing/2014/main" id="{C03CBE73-28F7-4B9C-9AA6-B068634CCEFF}"/>
               </a:ext>
             </a:extLst>
           </p:cNvPr>
@@ -10195,7 +10195,7 @@
           <p:cNvPr id="6" name="">
             <a:extLst xmlns:a="http://schemas.openxmlformats.org/drawingml/2006/main">
               <a:ext uri="{FF2B5EF4-FFF2-40B4-BE49-F238E27FC236}">
-                <a16:creationId xmlns:a16="http://schemas.microsoft.com/office/drawing/2014/main" id="{B6701202-CA0A-4264-8C50-98C9A704C50F}"/>
+                <a16:creationId xmlns:a16="http://schemas.microsoft.com/office/drawing/2014/main" id="{706F9988-871D-4B36-95B6-2B24E35FE831}"/>
               </a:ext>
             </a:extLst>
           </p:cNvPr>
@@ -10252,7 +10252,7 @@
           <p:cNvPr id="7" name="">
             <a:extLst xmlns:a="http://schemas.openxmlformats.org/drawingml/2006/main">
               <a:ext uri="{FF2B5EF4-FFF2-40B4-BE49-F238E27FC236}">
-                <a16:creationId xmlns:a16="http://schemas.microsoft.com/office/drawing/2014/main" id="{0CDE6113-0A60-421C-ABC3-9FE18501E467}"/>
+                <a16:creationId xmlns:a16="http://schemas.microsoft.com/office/drawing/2014/main" id="{5A641C6A-5E3D-45F3-92C4-7695CD05975E}"/>
               </a:ext>
             </a:extLst>
           </p:cNvPr>
@@ -10282,7 +10282,7 @@
           <p:cNvPr id="8" name="">
             <a:extLst xmlns:a="http://schemas.openxmlformats.org/drawingml/2006/main">
               <a:ext uri="{FF2B5EF4-FFF2-40B4-BE49-F238E27FC236}">
-                <a16:creationId xmlns:a16="http://schemas.microsoft.com/office/drawing/2014/main" id="{91A50A31-B652-4811-BA8C-0E455990167E}"/>
+                <a16:creationId xmlns:a16="http://schemas.microsoft.com/office/drawing/2014/main" id="{EDEA3FAE-9C6C-4201-9964-4EECC91663B3}"/>
               </a:ext>
             </a:extLst>
           </p:cNvPr>
@@ -10339,7 +10339,7 @@
           <p:cNvPr id="9" name="">
             <a:extLst xmlns:a="http://schemas.openxmlformats.org/drawingml/2006/main">
               <a:ext uri="{FF2B5EF4-FFF2-40B4-BE49-F238E27FC236}">
-                <a16:creationId xmlns:a16="http://schemas.microsoft.com/office/drawing/2014/main" id="{09424667-8C70-457D-84B7-D4797DB5F4F2}"/>
+                <a16:creationId xmlns:a16="http://schemas.microsoft.com/office/drawing/2014/main" id="{CF76AAE5-2F0D-42D2-AB6C-AB98C3F05712}"/>
               </a:ext>
             </a:extLst>
           </p:cNvPr>
@@ -10369,7 +10369,7 @@
           <p:cNvPr id="10" name="">
             <a:extLst xmlns:a="http://schemas.openxmlformats.org/drawingml/2006/main">
               <a:ext uri="{FF2B5EF4-FFF2-40B4-BE49-F238E27FC236}">
-                <a16:creationId xmlns:a16="http://schemas.microsoft.com/office/drawing/2014/main" id="{775F80C6-7D3B-4D71-A8DE-B8ED9E53E2FB}"/>
+                <a16:creationId xmlns:a16="http://schemas.microsoft.com/office/drawing/2014/main" id="{59551A3B-B119-4EEB-991F-75EA9FF48158}"/>
               </a:ext>
             </a:extLst>
           </p:cNvPr>
@@ -10426,7 +10426,7 @@
           <p:cNvPr id="11" name="">
             <a:extLst xmlns:a="http://schemas.openxmlformats.org/drawingml/2006/main">
               <a:ext uri="{FF2B5EF4-FFF2-40B4-BE49-F238E27FC236}">
-                <a16:creationId xmlns:a16="http://schemas.microsoft.com/office/drawing/2014/main" id="{C32714BE-528F-4B60-8BB4-07401A2AE4BF}"/>
+                <a16:creationId xmlns:a16="http://schemas.microsoft.com/office/drawing/2014/main" id="{6D4B04DD-0429-430B-8D56-D136D6F602A8}"/>
               </a:ext>
             </a:extLst>
           </p:cNvPr>
@@ -10456,7 +10456,7 @@
           <p:cNvPr id="12" name="">
             <a:extLst xmlns:a="http://schemas.openxmlformats.org/drawingml/2006/main">
               <a:ext uri="{FF2B5EF4-FFF2-40B4-BE49-F238E27FC236}">
-                <a16:creationId xmlns:a16="http://schemas.microsoft.com/office/drawing/2014/main" id="{D01B8695-2795-4CC1-93BE-0A8D2D235B96}"/>
+                <a16:creationId xmlns:a16="http://schemas.microsoft.com/office/drawing/2014/main" id="{F83C6932-3792-42A4-9702-25804AD13E20}"/>
               </a:ext>
             </a:extLst>
           </p:cNvPr>
@@ -10513,7 +10513,7 @@
           <p:cNvPr id="13" name="">
             <a:extLst xmlns:a="http://schemas.openxmlformats.org/drawingml/2006/main">
               <a:ext uri="{FF2B5EF4-FFF2-40B4-BE49-F238E27FC236}">
-                <a16:creationId xmlns:a16="http://schemas.microsoft.com/office/drawing/2014/main" id="{23B84FFA-37B3-4401-BCFA-AE93D4A3763D}"/>
+                <a16:creationId xmlns:a16="http://schemas.microsoft.com/office/drawing/2014/main" id="{697EE15E-2811-4205-92BE-14A40C58096D}"/>
               </a:ext>
             </a:extLst>
           </p:cNvPr>
@@ -10543,7 +10543,7 @@
           <p:cNvPr id="14" name="">
             <a:extLst xmlns:a="http://schemas.openxmlformats.org/drawingml/2006/main">
               <a:ext uri="{FF2B5EF4-FFF2-40B4-BE49-F238E27FC236}">
-                <a16:creationId xmlns:a16="http://schemas.microsoft.com/office/drawing/2014/main" id="{842880EB-1D29-43F5-B119-A8D9C4167FAF}"/>
+                <a16:creationId xmlns:a16="http://schemas.microsoft.com/office/drawing/2014/main" id="{EB066219-B2F3-43CE-B8D6-DDDABC01779A}"/>
               </a:ext>
             </a:extLst>
           </p:cNvPr>
@@ -10600,7 +10600,7 @@
           <p:cNvPr id="15" name="">
             <a:extLst xmlns:a="http://schemas.openxmlformats.org/drawingml/2006/main">
               <a:ext uri="{FF2B5EF4-FFF2-40B4-BE49-F238E27FC236}">
-                <a16:creationId xmlns:a16="http://schemas.microsoft.com/office/drawing/2014/main" id="{BE672EAC-4F41-433C-9E73-778552F20A77}"/>
+                <a16:creationId xmlns:a16="http://schemas.microsoft.com/office/drawing/2014/main" id="{60CDEF32-0235-4CF0-B403-ACA8431BF468}"/>
               </a:ext>
             </a:extLst>
           </p:cNvPr>
@@ -10630,7 +10630,7 @@
           <p:cNvPr id="16" name="">
             <a:extLst xmlns:a="http://schemas.openxmlformats.org/drawingml/2006/main">
               <a:ext uri="{FF2B5EF4-FFF2-40B4-BE49-F238E27FC236}">
-                <a16:creationId xmlns:a16="http://schemas.microsoft.com/office/drawing/2014/main" id="{62412B47-4B2E-41D4-980D-6689F7C5AF70}"/>
+                <a16:creationId xmlns:a16="http://schemas.microsoft.com/office/drawing/2014/main" id="{29EDC2C1-EDF8-4C4A-91C1-3AE7C21183B0}"/>
               </a:ext>
             </a:extLst>
           </p:cNvPr>
@@ -10687,7 +10687,7 @@
           <p:cNvPr id="17" name="">
             <a:extLst xmlns:a="http://schemas.openxmlformats.org/drawingml/2006/main">
               <a:ext uri="{FF2B5EF4-FFF2-40B4-BE49-F238E27FC236}">
-                <a16:creationId xmlns:a16="http://schemas.microsoft.com/office/drawing/2014/main" id="{46F4CC1A-C86A-432B-B4E4-285801193F8D}"/>
+                <a16:creationId xmlns:a16="http://schemas.microsoft.com/office/drawing/2014/main" id="{36B55FE4-82EB-454B-87C3-7E0903D0A3CF}"/>
               </a:ext>
             </a:extLst>
           </p:cNvPr>
@@ -10744,7 +10744,7 @@
           <p:cNvPr id="18" name="">
             <a:extLst xmlns:a="http://schemas.openxmlformats.org/drawingml/2006/main">
               <a:ext uri="{FF2B5EF4-FFF2-40B4-BE49-F238E27FC236}">
-                <a16:creationId xmlns:a16="http://schemas.microsoft.com/office/drawing/2014/main" id="{508F6DBD-FCFC-4DA7-8685-9ABDAAA6EA9D}"/>
+                <a16:creationId xmlns:a16="http://schemas.microsoft.com/office/drawing/2014/main" id="{7FD1EBAB-8D22-4EA6-8A8C-8758E64781E1}"/>
               </a:ext>
             </a:extLst>
           </p:cNvPr>
@@ -10774,7 +10774,7 @@
           <p:cNvPr id="19" name="">
             <a:extLst xmlns:a="http://schemas.openxmlformats.org/drawingml/2006/main">
               <a:ext uri="{FF2B5EF4-FFF2-40B4-BE49-F238E27FC236}">
-                <a16:creationId xmlns:a16="http://schemas.microsoft.com/office/drawing/2014/main" id="{619C4CE6-3D71-4E5B-B4BA-780AC5FF9BAB}"/>
+                <a16:creationId xmlns:a16="http://schemas.microsoft.com/office/drawing/2014/main" id="{EC60FA90-1513-4EF0-B475-50456458A573}"/>
               </a:ext>
             </a:extLst>
           </p:cNvPr>
@@ -10831,7 +10831,7 @@
           <p:cNvPr id="20" name="">
             <a:extLst xmlns:a="http://schemas.openxmlformats.org/drawingml/2006/main">
               <a:ext uri="{FF2B5EF4-FFF2-40B4-BE49-F238E27FC236}">
-                <a16:creationId xmlns:a16="http://schemas.microsoft.com/office/drawing/2014/main" id="{F0A70916-8FA6-4BC9-BB6D-DCC3EB71D7B1}"/>
+                <a16:creationId xmlns:a16="http://schemas.microsoft.com/office/drawing/2014/main" id="{507F4B4C-E370-4C69-9A77-BB6D02EF40BE}"/>
               </a:ext>
             </a:extLst>
           </p:cNvPr>
@@ -10861,7 +10861,7 @@
           <p:cNvPr id="21" name="">
             <a:extLst xmlns:a="http://schemas.openxmlformats.org/drawingml/2006/main">
               <a:ext uri="{FF2B5EF4-FFF2-40B4-BE49-F238E27FC236}">
-                <a16:creationId xmlns:a16="http://schemas.microsoft.com/office/drawing/2014/main" id="{7270C50E-C235-4C7F-9416-95290B1B8CB1}"/>
+                <a16:creationId xmlns:a16="http://schemas.microsoft.com/office/drawing/2014/main" id="{5EA50202-17EE-44C0-B2CD-A24D5F29C52F}"/>
               </a:ext>
             </a:extLst>
           </p:cNvPr>
@@ -10918,7 +10918,7 @@
           <p:cNvPr id="22" name="">
             <a:extLst xmlns:a="http://schemas.openxmlformats.org/drawingml/2006/main">
               <a:ext uri="{FF2B5EF4-FFF2-40B4-BE49-F238E27FC236}">
-                <a16:creationId xmlns:a16="http://schemas.microsoft.com/office/drawing/2014/main" id="{89F55B22-CEB2-4754-9798-6D46E9B90CD5}"/>
+                <a16:creationId xmlns:a16="http://schemas.microsoft.com/office/drawing/2014/main" id="{751E78B2-37B8-4F82-A9C9-3BB2018584E5}"/>
               </a:ext>
             </a:extLst>
           </p:cNvPr>
@@ -10948,7 +10948,7 @@
           <p:cNvPr id="23" name="">
             <a:extLst xmlns:a="http://schemas.openxmlformats.org/drawingml/2006/main">
               <a:ext uri="{FF2B5EF4-FFF2-40B4-BE49-F238E27FC236}">
-                <a16:creationId xmlns:a16="http://schemas.microsoft.com/office/drawing/2014/main" id="{ED6E1BDE-6F25-41E4-A5D8-6630D451A329}"/>
+                <a16:creationId xmlns:a16="http://schemas.microsoft.com/office/drawing/2014/main" id="{AFE105C9-D1B5-4E85-865B-2CAE006E8E2C}"/>
               </a:ext>
             </a:extLst>
           </p:cNvPr>
@@ -11005,7 +11005,7 @@
           <p:cNvPr id="24" name="">
             <a:extLst xmlns:a="http://schemas.openxmlformats.org/drawingml/2006/main">
               <a:ext uri="{FF2B5EF4-FFF2-40B4-BE49-F238E27FC236}">
-                <a16:creationId xmlns:a16="http://schemas.microsoft.com/office/drawing/2014/main" id="{10F02729-9EFA-4FD9-B1E0-12C625D95CAC}"/>
+                <a16:creationId xmlns:a16="http://schemas.microsoft.com/office/drawing/2014/main" id="{484F2064-43E4-40DA-AC7C-B7A82C038318}"/>
               </a:ext>
             </a:extLst>
           </p:cNvPr>
@@ -11035,7 +11035,7 @@
           <p:cNvPr id="25" name="">
             <a:extLst xmlns:a="http://schemas.openxmlformats.org/drawingml/2006/main">
               <a:ext uri="{FF2B5EF4-FFF2-40B4-BE49-F238E27FC236}">
-                <a16:creationId xmlns:a16="http://schemas.microsoft.com/office/drawing/2014/main" id="{060FB133-4028-4F82-B0DA-B258EB91BFBC}"/>
+                <a16:creationId xmlns:a16="http://schemas.microsoft.com/office/drawing/2014/main" id="{F083D4E0-CCFA-4253-BB4C-B34E1B5C63D8}"/>
               </a:ext>
             </a:extLst>
           </p:cNvPr>
@@ -11092,7 +11092,7 @@
           <p:cNvPr id="26" name="">
             <a:extLst xmlns:a="http://schemas.openxmlformats.org/drawingml/2006/main">
               <a:ext uri="{FF2B5EF4-FFF2-40B4-BE49-F238E27FC236}">
-                <a16:creationId xmlns:a16="http://schemas.microsoft.com/office/drawing/2014/main" id="{7E001BEA-19B2-49B7-AD51-9749D33F595D}"/>
+                <a16:creationId xmlns:a16="http://schemas.microsoft.com/office/drawing/2014/main" id="{C87CEE6B-F3BF-40D3-AF66-A48BE765D5AB}"/>
               </a:ext>
             </a:extLst>
           </p:cNvPr>
@@ -11122,7 +11122,7 @@
           <p:cNvPr id="27" name="">
             <a:extLst xmlns:a="http://schemas.openxmlformats.org/drawingml/2006/main">
               <a:ext uri="{FF2B5EF4-FFF2-40B4-BE49-F238E27FC236}">
-                <a16:creationId xmlns:a16="http://schemas.microsoft.com/office/drawing/2014/main" id="{00691087-7032-4FDC-8EAA-0694C49CB1DB}"/>
+                <a16:creationId xmlns:a16="http://schemas.microsoft.com/office/drawing/2014/main" id="{215DF18A-C5E1-45DB-82BC-BBA413738DBB}"/>
               </a:ext>
             </a:extLst>
           </p:cNvPr>
@@ -11179,7 +11179,7 @@
           <p:cNvPr id="28" name="">
             <a:extLst xmlns:a="http://schemas.openxmlformats.org/drawingml/2006/main">
               <a:ext uri="{FF2B5EF4-FFF2-40B4-BE49-F238E27FC236}">
-                <a16:creationId xmlns:a16="http://schemas.microsoft.com/office/drawing/2014/main" id="{4FDF8F60-6E02-4F68-8FE8-D969C1020714}"/>
+                <a16:creationId xmlns:a16="http://schemas.microsoft.com/office/drawing/2014/main" id="{C73AA412-96C1-43C4-BE51-4BAA9CCBCD0D}"/>
               </a:ext>
             </a:extLst>
           </p:cNvPr>
@@ -11211,7 +11211,7 @@
           <p:cNvPr id="29" name="">
             <a:extLst xmlns:a="http://schemas.openxmlformats.org/drawingml/2006/main">
               <a:ext uri="{FF2B5EF4-FFF2-40B4-BE49-F238E27FC236}">
-                <a16:creationId xmlns:a16="http://schemas.microsoft.com/office/drawing/2014/main" id="{3CA60CB0-76DF-4F74-8F87-7CAA4EF08EA7}"/>
+                <a16:creationId xmlns:a16="http://schemas.microsoft.com/office/drawing/2014/main" id="{198E87D8-239D-4663-A761-E0409967DDC0}"/>
               </a:ext>
             </a:extLst>
           </p:cNvPr>
@@ -11266,7 +11266,7 @@
     </p:spTree>
     <p:extLst>
       <p:ext uri="{BB962C8B-B14F-4D97-AF65-F5344CB8AC3E}">
-        <p14:creationId xmlns:p14="http://schemas.microsoft.com/office/powerpoint/2010/main" val="1910807446"/>
+        <p14:creationId xmlns:p14="http://schemas.microsoft.com/office/powerpoint/2010/main" val="378734777"/>
       </p:ext>
     </p:extLst>
   </p:cSld>
@@ -11297,7 +11297,7 @@
           <p:cNvPr id="33" name="">
             <a:extLst xmlns:a="http://schemas.openxmlformats.org/drawingml/2006/main">
               <a:ext uri="{FF2B5EF4-FFF2-40B4-BE49-F238E27FC236}">
-                <a16:creationId xmlns:a16="http://schemas.microsoft.com/office/drawing/2014/main" id="{E7232FB3-DFB1-4925-91E9-EA986794B3CF}"/>
+                <a16:creationId xmlns:a16="http://schemas.microsoft.com/office/drawing/2014/main" id="{9E74CB62-27D3-477F-96EA-C2CC4715D285}"/>
               </a:ext>
             </a:extLst>
           </p:cNvPr>
@@ -11354,7 +11354,7 @@
           <p:cNvPr id="2" name="">
             <a:extLst xmlns:a="http://schemas.openxmlformats.org/drawingml/2006/main">
               <a:ext uri="{FF2B5EF4-FFF2-40B4-BE49-F238E27FC236}">
-                <a16:creationId xmlns:a16="http://schemas.microsoft.com/office/drawing/2014/main" id="{35D5930A-1296-4C76-9EB4-FC2A51B46736}"/>
+                <a16:creationId xmlns:a16="http://schemas.microsoft.com/office/drawing/2014/main" id="{CE949042-C2F2-4FA1-8C9F-F4E14D11DD8A}"/>
               </a:ext>
             </a:extLst>
           </p:cNvPr>
@@ -11411,7 +11411,7 @@
           <p:cNvPr id="3" name="">
             <a:extLst xmlns:a="http://schemas.openxmlformats.org/drawingml/2006/main">
               <a:ext uri="{FF2B5EF4-FFF2-40B4-BE49-F238E27FC236}">
-                <a16:creationId xmlns:a16="http://schemas.microsoft.com/office/drawing/2014/main" id="{C2CD7DFE-24D6-44C5-939B-BE375C27C5A1}"/>
+                <a16:creationId xmlns:a16="http://schemas.microsoft.com/office/drawing/2014/main" id="{02381D3C-7EC8-4DAA-BC34-AF38788D0398}"/>
               </a:ext>
             </a:extLst>
           </p:cNvPr>
@@ -11441,7 +11441,7 @@
           <p:cNvPr id="4" name="">
             <a:extLst xmlns:a="http://schemas.openxmlformats.org/drawingml/2006/main">
               <a:ext uri="{FF2B5EF4-FFF2-40B4-BE49-F238E27FC236}">
-                <a16:creationId xmlns:a16="http://schemas.microsoft.com/office/drawing/2014/main" id="{27E1C27B-F585-4228-AA9E-F8A355932EF8}"/>
+                <a16:creationId xmlns:a16="http://schemas.microsoft.com/office/drawing/2014/main" id="{3026969A-71BB-4B9A-BBF5-D739B1B78D0B}"/>
               </a:ext>
             </a:extLst>
           </p:cNvPr>
@@ -11498,7 +11498,7 @@
           <p:cNvPr id="5" name="">
             <a:extLst xmlns:a="http://schemas.openxmlformats.org/drawingml/2006/main">
               <a:ext uri="{FF2B5EF4-FFF2-40B4-BE49-F238E27FC236}">
-                <a16:creationId xmlns:a16="http://schemas.microsoft.com/office/drawing/2014/main" id="{040490C4-9774-4445-9921-5E9223AF81F0}"/>
+                <a16:creationId xmlns:a16="http://schemas.microsoft.com/office/drawing/2014/main" id="{DFE33A36-7356-4050-822D-3F5799CA5CB9}"/>
               </a:ext>
             </a:extLst>
           </p:cNvPr>
@@ -11555,7 +11555,7 @@
           <p:cNvPr id="6" name="">
             <a:extLst xmlns:a="http://schemas.openxmlformats.org/drawingml/2006/main">
               <a:ext uri="{FF2B5EF4-FFF2-40B4-BE49-F238E27FC236}">
-                <a16:creationId xmlns:a16="http://schemas.microsoft.com/office/drawing/2014/main" id="{B4983BE0-F2E2-44F4-8EF6-4E0C89EA7A08}"/>
+                <a16:creationId xmlns:a16="http://schemas.microsoft.com/office/drawing/2014/main" id="{ED6B8459-C7BC-46DF-90BA-55F6EDBA54AC}"/>
               </a:ext>
             </a:extLst>
           </p:cNvPr>
@@ -11589,7 +11589,7 @@
           <p:cNvPr id="7" name="">
             <a:extLst xmlns:a="http://schemas.openxmlformats.org/drawingml/2006/main">
               <a:ext uri="{FF2B5EF4-FFF2-40B4-BE49-F238E27FC236}">
-                <a16:creationId xmlns:a16="http://schemas.microsoft.com/office/drawing/2014/main" id="{465E2ADB-52C4-4D40-A98F-A23D3393B339}"/>
+                <a16:creationId xmlns:a16="http://schemas.microsoft.com/office/drawing/2014/main" id="{78199227-CFC3-49D2-85BB-CF31EB6DB0B3}"/>
               </a:ext>
             </a:extLst>
           </p:cNvPr>
@@ -11646,7 +11646,7 @@
           <p:cNvPr id="8" name="">
             <a:extLst xmlns:a="http://schemas.openxmlformats.org/drawingml/2006/main">
               <a:ext uri="{FF2B5EF4-FFF2-40B4-BE49-F238E27FC236}">
-                <a16:creationId xmlns:a16="http://schemas.microsoft.com/office/drawing/2014/main" id="{4C1F2962-808B-4F77-BA28-A50FAD441114}"/>
+                <a16:creationId xmlns:a16="http://schemas.microsoft.com/office/drawing/2014/main" id="{DBAEA927-58AC-498D-89B6-818B1D97320A}"/>
               </a:ext>
             </a:extLst>
           </p:cNvPr>
@@ -11680,7 +11680,7 @@
           <p:cNvPr id="9" name="">
             <a:extLst xmlns:a="http://schemas.openxmlformats.org/drawingml/2006/main">
               <a:ext uri="{FF2B5EF4-FFF2-40B4-BE49-F238E27FC236}">
-                <a16:creationId xmlns:a16="http://schemas.microsoft.com/office/drawing/2014/main" id="{9336DFDF-E8D1-4BD1-A9D6-7E7CC40CDC1A}"/>
+                <a16:creationId xmlns:a16="http://schemas.microsoft.com/office/drawing/2014/main" id="{4F406770-1254-4448-A9D5-960E1C8527A7}"/>
               </a:ext>
             </a:extLst>
           </p:cNvPr>
@@ -11737,7 +11737,7 @@
           <p:cNvPr id="10" name="">
             <a:extLst xmlns:a="http://schemas.openxmlformats.org/drawingml/2006/main">
               <a:ext uri="{FF2B5EF4-FFF2-40B4-BE49-F238E27FC236}">
-                <a16:creationId xmlns:a16="http://schemas.microsoft.com/office/drawing/2014/main" id="{0C202530-11F5-4F9F-9E0D-032CE5DED9C4}"/>
+                <a16:creationId xmlns:a16="http://schemas.microsoft.com/office/drawing/2014/main" id="{BA5C6CB7-0AA2-46A8-B4F3-7176A9328040}"/>
               </a:ext>
             </a:extLst>
           </p:cNvPr>
@@ -11771,7 +11771,7 @@
           <p:cNvPr id="11" name="">
             <a:extLst xmlns:a="http://schemas.openxmlformats.org/drawingml/2006/main">
               <a:ext uri="{FF2B5EF4-FFF2-40B4-BE49-F238E27FC236}">
-                <a16:creationId xmlns:a16="http://schemas.microsoft.com/office/drawing/2014/main" id="{316D0462-E200-4CC9-81D5-80B37412E036}"/>
+                <a16:creationId xmlns:a16="http://schemas.microsoft.com/office/drawing/2014/main" id="{BB02FC45-9DE3-429E-B249-0396896B6EE1}"/>
               </a:ext>
             </a:extLst>
           </p:cNvPr>
@@ -11828,7 +11828,7 @@
           <p:cNvPr id="12" name="">
             <a:extLst xmlns:a="http://schemas.openxmlformats.org/drawingml/2006/main">
               <a:ext uri="{FF2B5EF4-FFF2-40B4-BE49-F238E27FC236}">
-                <a16:creationId xmlns:a16="http://schemas.microsoft.com/office/drawing/2014/main" id="{7CC76301-AB5C-478D-974E-0E495A555567}"/>
+                <a16:creationId xmlns:a16="http://schemas.microsoft.com/office/drawing/2014/main" id="{FE6C9755-AE2C-4FBA-B581-4DEB2263D62E}"/>
               </a:ext>
             </a:extLst>
           </p:cNvPr>
@@ -11862,7 +11862,7 @@
           <p:cNvPr id="13" name="">
             <a:extLst xmlns:a="http://schemas.openxmlformats.org/drawingml/2006/main">
               <a:ext uri="{FF2B5EF4-FFF2-40B4-BE49-F238E27FC236}">
-                <a16:creationId xmlns:a16="http://schemas.microsoft.com/office/drawing/2014/main" id="{AB36F79F-D791-4233-BD0E-5A657226BA5E}"/>
+                <a16:creationId xmlns:a16="http://schemas.microsoft.com/office/drawing/2014/main" id="{3E8BCA45-50C7-45D9-8F67-849311411C64}"/>
               </a:ext>
             </a:extLst>
           </p:cNvPr>
@@ -11994,7 +11994,7 @@
           <p:cNvPr id="17" name="">
             <a:extLst xmlns:a="http://schemas.openxmlformats.org/drawingml/2006/main">
               <a:ext uri="{FF2B5EF4-FFF2-40B4-BE49-F238E27FC236}">
-                <a16:creationId xmlns:a16="http://schemas.microsoft.com/office/drawing/2014/main" id="{757673C5-FA76-44F9-A21D-6B64E64CFF8E}"/>
+                <a16:creationId xmlns:a16="http://schemas.microsoft.com/office/drawing/2014/main" id="{5D21226C-8FF7-4173-B763-FFE1A819DE6B}"/>
               </a:ext>
             </a:extLst>
           </p:cNvPr>
@@ -12051,7 +12051,7 @@
           <p:cNvPr id="18" name="">
             <a:extLst xmlns:a="http://schemas.openxmlformats.org/drawingml/2006/main">
               <a:ext uri="{FF2B5EF4-FFF2-40B4-BE49-F238E27FC236}">
-                <a16:creationId xmlns:a16="http://schemas.microsoft.com/office/drawing/2014/main" id="{A30F1BB6-39C0-48AF-9744-5CC75E3AFAF3}"/>
+                <a16:creationId xmlns:a16="http://schemas.microsoft.com/office/drawing/2014/main" id="{22D7ACE5-3EF4-4DA4-8AE5-FF05C9FEE5F2}"/>
               </a:ext>
             </a:extLst>
           </p:cNvPr>
@@ -12081,7 +12081,7 @@
           <p:cNvPr id="19" name="">
             <a:extLst xmlns:a="http://schemas.openxmlformats.org/drawingml/2006/main">
               <a:ext uri="{FF2B5EF4-FFF2-40B4-BE49-F238E27FC236}">
-                <a16:creationId xmlns:a16="http://schemas.microsoft.com/office/drawing/2014/main" id="{3EE2A4F6-4533-493D-87C1-1310417D74D1}"/>
+                <a16:creationId xmlns:a16="http://schemas.microsoft.com/office/drawing/2014/main" id="{C1E485B3-3217-4C5B-841E-33C9E24D99BB}"/>
               </a:ext>
             </a:extLst>
           </p:cNvPr>
@@ -12138,7 +12138,7 @@
           <p:cNvPr id="20" name="">
             <a:extLst xmlns:a="http://schemas.openxmlformats.org/drawingml/2006/main">
               <a:ext uri="{FF2B5EF4-FFF2-40B4-BE49-F238E27FC236}">
-                <a16:creationId xmlns:a16="http://schemas.microsoft.com/office/drawing/2014/main" id="{948B2E24-C7C2-4526-9CDC-3CA63ACFDCAD}"/>
+                <a16:creationId xmlns:a16="http://schemas.microsoft.com/office/drawing/2014/main" id="{48B019BF-4996-40DA-9E5A-5159970170D9}"/>
               </a:ext>
             </a:extLst>
           </p:cNvPr>
@@ -12168,7 +12168,7 @@
           <p:cNvPr id="21" name="">
             <a:extLst xmlns:a="http://schemas.openxmlformats.org/drawingml/2006/main">
               <a:ext uri="{FF2B5EF4-FFF2-40B4-BE49-F238E27FC236}">
-                <a16:creationId xmlns:a16="http://schemas.microsoft.com/office/drawing/2014/main" id="{37B207ED-66AB-4438-B08E-5E8A996A7D29}"/>
+                <a16:creationId xmlns:a16="http://schemas.microsoft.com/office/drawing/2014/main" id="{C3C1ACFC-CF47-4477-9710-8A84C53F0E5F}"/>
               </a:ext>
             </a:extLst>
           </p:cNvPr>
@@ -12225,7 +12225,7 @@
           <p:cNvPr id="22" name="">
             <a:extLst xmlns:a="http://schemas.openxmlformats.org/drawingml/2006/main">
               <a:ext uri="{FF2B5EF4-FFF2-40B4-BE49-F238E27FC236}">
-                <a16:creationId xmlns:a16="http://schemas.microsoft.com/office/drawing/2014/main" id="{A99668DC-A0C5-4AF1-ADE8-DDE5F4BCD16B}"/>
+                <a16:creationId xmlns:a16="http://schemas.microsoft.com/office/drawing/2014/main" id="{DB4B6C14-D280-4E02-8EB7-6832C85F63C0}"/>
               </a:ext>
             </a:extLst>
           </p:cNvPr>
@@ -12255,7 +12255,7 @@
           <p:cNvPr id="23" name="">
             <a:extLst xmlns:a="http://schemas.openxmlformats.org/drawingml/2006/main">
               <a:ext uri="{FF2B5EF4-FFF2-40B4-BE49-F238E27FC236}">
-                <a16:creationId xmlns:a16="http://schemas.microsoft.com/office/drawing/2014/main" id="{E9ED7DF5-5DCE-492D-B3E0-48B88E8FB1E8}"/>
+                <a16:creationId xmlns:a16="http://schemas.microsoft.com/office/drawing/2014/main" id="{96592665-F54D-4313-BD8F-C194DD00783D}"/>
               </a:ext>
             </a:extLst>
           </p:cNvPr>
@@ -12312,7 +12312,7 @@
           <p:cNvPr id="24" name="">
             <a:extLst xmlns:a="http://schemas.openxmlformats.org/drawingml/2006/main">
               <a:ext uri="{FF2B5EF4-FFF2-40B4-BE49-F238E27FC236}">
-                <a16:creationId xmlns:a16="http://schemas.microsoft.com/office/drawing/2014/main" id="{476C5799-F861-4D61-B09A-A49BABC86096}"/>
+                <a16:creationId xmlns:a16="http://schemas.microsoft.com/office/drawing/2014/main" id="{2C52D57F-D661-4BCD-BA60-02CD41AAAAD1}"/>
               </a:ext>
             </a:extLst>
           </p:cNvPr>
@@ -12369,7 +12369,7 @@
           <p:cNvPr id="25" name="">
             <a:extLst xmlns:a="http://schemas.openxmlformats.org/drawingml/2006/main">
               <a:ext uri="{FF2B5EF4-FFF2-40B4-BE49-F238E27FC236}">
-                <a16:creationId xmlns:a16="http://schemas.microsoft.com/office/drawing/2014/main" id="{6F18D365-9BF5-48EC-B752-10F040F48C7F}"/>
+                <a16:creationId xmlns:a16="http://schemas.microsoft.com/office/drawing/2014/main" id="{725FEF80-2EDD-4EBC-A87C-2FA6DB640F68}"/>
               </a:ext>
             </a:extLst>
           </p:cNvPr>
@@ -12399,7 +12399,7 @@
           <p:cNvPr id="26" name="">
             <a:extLst xmlns:a="http://schemas.openxmlformats.org/drawingml/2006/main">
               <a:ext uri="{FF2B5EF4-FFF2-40B4-BE49-F238E27FC236}">
-                <a16:creationId xmlns:a16="http://schemas.microsoft.com/office/drawing/2014/main" id="{345DC661-4B44-4DC3-9A95-545B211323A9}"/>
+                <a16:creationId xmlns:a16="http://schemas.microsoft.com/office/drawing/2014/main" id="{EA782AE8-4DC0-42E7-80D2-11EE65E4E9B0}"/>
               </a:ext>
             </a:extLst>
           </p:cNvPr>
@@ -12456,7 +12456,7 @@
           <p:cNvPr id="27" name="">
             <a:extLst xmlns:a="http://schemas.openxmlformats.org/drawingml/2006/main">
               <a:ext uri="{FF2B5EF4-FFF2-40B4-BE49-F238E27FC236}">
-                <a16:creationId xmlns:a16="http://schemas.microsoft.com/office/drawing/2014/main" id="{925AE410-3149-420F-B4CA-FE05E2F09417}"/>
+                <a16:creationId xmlns:a16="http://schemas.microsoft.com/office/drawing/2014/main" id="{4FD1929E-F003-4D8E-A360-73E698F634E0}"/>
               </a:ext>
             </a:extLst>
           </p:cNvPr>
@@ -12486,7 +12486,7 @@
           <p:cNvPr id="28" name="">
             <a:extLst xmlns:a="http://schemas.openxmlformats.org/drawingml/2006/main">
               <a:ext uri="{FF2B5EF4-FFF2-40B4-BE49-F238E27FC236}">
-                <a16:creationId xmlns:a16="http://schemas.microsoft.com/office/drawing/2014/main" id="{0AFCBF20-CFDB-46C0-BBBD-B49CD28B8CCE}"/>
+                <a16:creationId xmlns:a16="http://schemas.microsoft.com/office/drawing/2014/main" id="{A200310F-E115-4707-8219-E9293DBB9FF3}"/>
               </a:ext>
             </a:extLst>
           </p:cNvPr>
@@ -12543,7 +12543,7 @@
           <p:cNvPr id="29" name="">
             <a:extLst xmlns:a="http://schemas.openxmlformats.org/drawingml/2006/main">
               <a:ext uri="{FF2B5EF4-FFF2-40B4-BE49-F238E27FC236}">
-                <a16:creationId xmlns:a16="http://schemas.microsoft.com/office/drawing/2014/main" id="{3CD3AC20-BB62-41A3-AA9C-03FAEB7DE62F}"/>
+                <a16:creationId xmlns:a16="http://schemas.microsoft.com/office/drawing/2014/main" id="{DD18382D-1882-487E-861B-8138BA6DD6BD}"/>
               </a:ext>
             </a:extLst>
           </p:cNvPr>
@@ -12573,7 +12573,7 @@
           <p:cNvPr id="30" name="">
             <a:extLst xmlns:a="http://schemas.openxmlformats.org/drawingml/2006/main">
               <a:ext uri="{FF2B5EF4-FFF2-40B4-BE49-F238E27FC236}">
-                <a16:creationId xmlns:a16="http://schemas.microsoft.com/office/drawing/2014/main" id="{327CAAC1-69B9-48DA-A92E-BF1575EF3CB3}"/>
+                <a16:creationId xmlns:a16="http://schemas.microsoft.com/office/drawing/2014/main" id="{6CDEDD4B-3949-4D12-808B-F5F29093D362}"/>
               </a:ext>
             </a:extLst>
           </p:cNvPr>
@@ -12630,7 +12630,7 @@
           <p:cNvPr id="31" name="">
             <a:extLst xmlns:a="http://schemas.openxmlformats.org/drawingml/2006/main">
               <a:ext uri="{FF2B5EF4-FFF2-40B4-BE49-F238E27FC236}">
-                <a16:creationId xmlns:a16="http://schemas.microsoft.com/office/drawing/2014/main" id="{1C7BF320-9EE6-4016-9B61-2DDAC277A9ED}"/>
+                <a16:creationId xmlns:a16="http://schemas.microsoft.com/office/drawing/2014/main" id="{0A091FC1-AFBF-4CEE-9DDD-215B8E51A586}"/>
               </a:ext>
             </a:extLst>
           </p:cNvPr>
@@ -12662,7 +12662,7 @@
           <p:cNvPr id="32" name="">
             <a:extLst xmlns:a="http://schemas.openxmlformats.org/drawingml/2006/main">
               <a:ext uri="{FF2B5EF4-FFF2-40B4-BE49-F238E27FC236}">
-                <a16:creationId xmlns:a16="http://schemas.microsoft.com/office/drawing/2014/main" id="{024AB374-CF51-4862-9CFF-0C400D029332}"/>
+                <a16:creationId xmlns:a16="http://schemas.microsoft.com/office/drawing/2014/main" id="{666286C4-5BFE-4080-A7EA-FCDC01A378AD}"/>
               </a:ext>
             </a:extLst>
           </p:cNvPr>
@@ -12717,7 +12717,7 @@
     </p:spTree>
     <p:extLst>
       <p:ext uri="{BB962C8B-B14F-4D97-AF65-F5344CB8AC3E}">
-        <p14:creationId xmlns:p14="http://schemas.microsoft.com/office/powerpoint/2010/main" val="1583264159"/>
+        <p14:creationId xmlns:p14="http://schemas.microsoft.com/office/powerpoint/2010/main" val="658855018"/>
       </p:ext>
     </p:extLst>
   </p:cSld>
@@ -12748,7 +12748,7 @@
           <p:cNvPr id="30" name="">
             <a:extLst xmlns:a="http://schemas.openxmlformats.org/drawingml/2006/main">
               <a:ext uri="{FF2B5EF4-FFF2-40B4-BE49-F238E27FC236}">
-                <a16:creationId xmlns:a16="http://schemas.microsoft.com/office/drawing/2014/main" id="{9259BF97-BC24-4981-8B73-0F1894853C52}"/>
+                <a16:creationId xmlns:a16="http://schemas.microsoft.com/office/drawing/2014/main" id="{86D0E085-C116-47EE-B57E-998998E74C6F}"/>
               </a:ext>
             </a:extLst>
           </p:cNvPr>
@@ -12805,7 +12805,7 @@
           <p:cNvPr id="2" name="">
             <a:extLst xmlns:a="http://schemas.openxmlformats.org/drawingml/2006/main">
               <a:ext uri="{FF2B5EF4-FFF2-40B4-BE49-F238E27FC236}">
-                <a16:creationId xmlns:a16="http://schemas.microsoft.com/office/drawing/2014/main" id="{8644E254-9171-4822-A835-975F77E17CC9}"/>
+                <a16:creationId xmlns:a16="http://schemas.microsoft.com/office/drawing/2014/main" id="{2A6E7ED2-F51C-4B48-8F12-CB956641466A}"/>
               </a:ext>
             </a:extLst>
           </p:cNvPr>
@@ -12862,7 +12862,7 @@
           <p:cNvPr id="3" name="">
             <a:extLst xmlns:a="http://schemas.openxmlformats.org/drawingml/2006/main">
               <a:ext uri="{FF2B5EF4-FFF2-40B4-BE49-F238E27FC236}">
-                <a16:creationId xmlns:a16="http://schemas.microsoft.com/office/drawing/2014/main" id="{E5FE4ECE-59F8-4524-A4AC-7128A17D07BF}"/>
+                <a16:creationId xmlns:a16="http://schemas.microsoft.com/office/drawing/2014/main" id="{D1967A4A-05A8-468C-BBE3-11B53735BC72}"/>
               </a:ext>
             </a:extLst>
           </p:cNvPr>
@@ -12892,7 +12892,7 @@
           <p:cNvPr id="4" name="">
             <a:extLst xmlns:a="http://schemas.openxmlformats.org/drawingml/2006/main">
               <a:ext uri="{FF2B5EF4-FFF2-40B4-BE49-F238E27FC236}">
-                <a16:creationId xmlns:a16="http://schemas.microsoft.com/office/drawing/2014/main" id="{0A566C3E-D583-4D9A-A27F-1BAEC5993617}"/>
+                <a16:creationId xmlns:a16="http://schemas.microsoft.com/office/drawing/2014/main" id="{7F20A355-0A7D-477C-8C62-9C6039563225}"/>
               </a:ext>
             </a:extLst>
           </p:cNvPr>
@@ -12949,7 +12949,7 @@
           <p:cNvPr id="5" name="">
             <a:extLst xmlns:a="http://schemas.openxmlformats.org/drawingml/2006/main">
               <a:ext uri="{FF2B5EF4-FFF2-40B4-BE49-F238E27FC236}">
-                <a16:creationId xmlns:a16="http://schemas.microsoft.com/office/drawing/2014/main" id="{A98E9C5B-8DC2-42E7-9503-E6684EAFA2C7}"/>
+                <a16:creationId xmlns:a16="http://schemas.microsoft.com/office/drawing/2014/main" id="{4CDD6CFB-D77C-42B8-AB03-96FD1D20A1CD}"/>
               </a:ext>
             </a:extLst>
           </p:cNvPr>
@@ -13006,7 +13006,7 @@
           <p:cNvPr id="6" name="">
             <a:extLst xmlns:a="http://schemas.openxmlformats.org/drawingml/2006/main">
               <a:ext uri="{FF2B5EF4-FFF2-40B4-BE49-F238E27FC236}">
-                <a16:creationId xmlns:a16="http://schemas.microsoft.com/office/drawing/2014/main" id="{7E85A8E3-C5CD-4DF4-B829-13AC62A2FEB2}"/>
+                <a16:creationId xmlns:a16="http://schemas.microsoft.com/office/drawing/2014/main" id="{C0B65C5D-AB3A-446C-84A3-0978E73483A2}"/>
               </a:ext>
             </a:extLst>
           </p:cNvPr>
@@ -13063,7 +13063,7 @@
           <p:cNvPr id="7" name="">
             <a:extLst xmlns:a="http://schemas.openxmlformats.org/drawingml/2006/main">
               <a:ext uri="{FF2B5EF4-FFF2-40B4-BE49-F238E27FC236}">
-                <a16:creationId xmlns:a16="http://schemas.microsoft.com/office/drawing/2014/main" id="{B6352BD1-43FC-4F1A-97BC-CCA3A189CF26}"/>
+                <a16:creationId xmlns:a16="http://schemas.microsoft.com/office/drawing/2014/main" id="{14BBEBB6-22D1-4E1C-8FEA-AC224BD34F8C}"/>
               </a:ext>
             </a:extLst>
           </p:cNvPr>
@@ -13093,7 +13093,7 @@
           <p:cNvPr id="8" name="">
             <a:extLst xmlns:a="http://schemas.openxmlformats.org/drawingml/2006/main">
               <a:ext uri="{FF2B5EF4-FFF2-40B4-BE49-F238E27FC236}">
-                <a16:creationId xmlns:a16="http://schemas.microsoft.com/office/drawing/2014/main" id="{4E931A52-4BD8-4F4B-9104-BE844607149A}"/>
+                <a16:creationId xmlns:a16="http://schemas.microsoft.com/office/drawing/2014/main" id="{B6544D1F-CE7A-4421-B1CC-7905A3F413C1}"/>
               </a:ext>
             </a:extLst>
           </p:cNvPr>
@@ -13150,7 +13150,7 @@
           <p:cNvPr id="9" name="">
             <a:extLst xmlns:a="http://schemas.openxmlformats.org/drawingml/2006/main">
               <a:ext uri="{FF2B5EF4-FFF2-40B4-BE49-F238E27FC236}">
-                <a16:creationId xmlns:a16="http://schemas.microsoft.com/office/drawing/2014/main" id="{25549E64-813C-499D-B509-F6F7EFA36EDF}"/>
+                <a16:creationId xmlns:a16="http://schemas.microsoft.com/office/drawing/2014/main" id="{2DB9FCA4-F38F-4340-BE2F-88B1CA4B028E}"/>
               </a:ext>
             </a:extLst>
           </p:cNvPr>
@@ -13180,7 +13180,7 @@
           <p:cNvPr id="10" name="">
             <a:extLst xmlns:a="http://schemas.openxmlformats.org/drawingml/2006/main">
               <a:ext uri="{FF2B5EF4-FFF2-40B4-BE49-F238E27FC236}">
-                <a16:creationId xmlns:a16="http://schemas.microsoft.com/office/drawing/2014/main" id="{0B6FFAF6-49EE-49F1-ACA0-D41C0716DE1E}"/>
+                <a16:creationId xmlns:a16="http://schemas.microsoft.com/office/drawing/2014/main" id="{B7091B67-4FAF-49BF-B938-E15F1CBE3492}"/>
               </a:ext>
             </a:extLst>
           </p:cNvPr>
@@ -13237,7 +13237,7 @@
           <p:cNvPr id="11" name="">
             <a:extLst xmlns:a="http://schemas.openxmlformats.org/drawingml/2006/main">
               <a:ext uri="{FF2B5EF4-FFF2-40B4-BE49-F238E27FC236}">
-                <a16:creationId xmlns:a16="http://schemas.microsoft.com/office/drawing/2014/main" id="{E63944CF-9D4B-4B92-9BAC-0318FCD71DBD}"/>
+                <a16:creationId xmlns:a16="http://schemas.microsoft.com/office/drawing/2014/main" id="{C3BF20A6-B1EF-4A5F-A8AF-028BA388548D}"/>
               </a:ext>
             </a:extLst>
           </p:cNvPr>
@@ -13267,7 +13267,7 @@
           <p:cNvPr id="12" name="">
             <a:extLst xmlns:a="http://schemas.openxmlformats.org/drawingml/2006/main">
               <a:ext uri="{FF2B5EF4-FFF2-40B4-BE49-F238E27FC236}">
-                <a16:creationId xmlns:a16="http://schemas.microsoft.com/office/drawing/2014/main" id="{7271E11A-AF95-40C7-BAB8-6ADAF53BF7EE}"/>
+                <a16:creationId xmlns:a16="http://schemas.microsoft.com/office/drawing/2014/main" id="{2D0D3265-37EA-47CE-BFE9-2F5EE36521C9}"/>
               </a:ext>
             </a:extLst>
           </p:cNvPr>
@@ -13324,7 +13324,7 @@
           <p:cNvPr id="13" name="">
             <a:extLst xmlns:a="http://schemas.openxmlformats.org/drawingml/2006/main">
               <a:ext uri="{FF2B5EF4-FFF2-40B4-BE49-F238E27FC236}">
-                <a16:creationId xmlns:a16="http://schemas.microsoft.com/office/drawing/2014/main" id="{D86E243F-5108-4C68-BDC2-56A9AE92441E}"/>
+                <a16:creationId xmlns:a16="http://schemas.microsoft.com/office/drawing/2014/main" id="{3E03CC23-A632-4F1C-9718-A59888762C87}"/>
               </a:ext>
             </a:extLst>
           </p:cNvPr>
@@ -13354,7 +13354,7 @@
           <p:cNvPr id="14" name="">
             <a:extLst xmlns:a="http://schemas.openxmlformats.org/drawingml/2006/main">
               <a:ext uri="{FF2B5EF4-FFF2-40B4-BE49-F238E27FC236}">
-                <a16:creationId xmlns:a16="http://schemas.microsoft.com/office/drawing/2014/main" id="{149A49D4-B796-4232-8692-C88BC85411DB}"/>
+                <a16:creationId xmlns:a16="http://schemas.microsoft.com/office/drawing/2014/main" id="{BD81D9F7-47B5-4516-B74C-042044B4F9AF}"/>
               </a:ext>
             </a:extLst>
           </p:cNvPr>
@@ -13411,7 +13411,7 @@
           <p:cNvPr id="15" name="">
             <a:extLst xmlns:a="http://schemas.openxmlformats.org/drawingml/2006/main">
               <a:ext uri="{FF2B5EF4-FFF2-40B4-BE49-F238E27FC236}">
-                <a16:creationId xmlns:a16="http://schemas.microsoft.com/office/drawing/2014/main" id="{F2DB1011-68CF-493A-9691-FF005CBC350F}"/>
+                <a16:creationId xmlns:a16="http://schemas.microsoft.com/office/drawing/2014/main" id="{10BA14BA-0B93-41DA-A7A4-110FA737B188}"/>
               </a:ext>
             </a:extLst>
           </p:cNvPr>
@@ -13441,7 +13441,7 @@
           <p:cNvPr id="16" name="">
             <a:extLst xmlns:a="http://schemas.openxmlformats.org/drawingml/2006/main">
               <a:ext uri="{FF2B5EF4-FFF2-40B4-BE49-F238E27FC236}">
-                <a16:creationId xmlns:a16="http://schemas.microsoft.com/office/drawing/2014/main" id="{F963FB50-B07B-4A8E-B826-A76627F0E853}"/>
+                <a16:creationId xmlns:a16="http://schemas.microsoft.com/office/drawing/2014/main" id="{C31ECE58-8978-41CD-A4BC-FCEB30E0586F}"/>
               </a:ext>
             </a:extLst>
           </p:cNvPr>
@@ -13498,7 +13498,7 @@
           <p:cNvPr id="17" name="">
             <a:extLst xmlns:a="http://schemas.openxmlformats.org/drawingml/2006/main">
               <a:ext uri="{FF2B5EF4-FFF2-40B4-BE49-F238E27FC236}">
-                <a16:creationId xmlns:a16="http://schemas.microsoft.com/office/drawing/2014/main" id="{B006DCCE-9BB9-46E2-B701-D1DFA26A9CBF}"/>
+                <a16:creationId xmlns:a16="http://schemas.microsoft.com/office/drawing/2014/main" id="{F0924DF0-F50F-4E08-AAFD-B9296C9E46A5}"/>
               </a:ext>
             </a:extLst>
           </p:cNvPr>
@@ -13555,7 +13555,7 @@
           <p:cNvPr id="18" name="">
             <a:extLst xmlns:a="http://schemas.openxmlformats.org/drawingml/2006/main">
               <a:ext uri="{FF2B5EF4-FFF2-40B4-BE49-F238E27FC236}">
-                <a16:creationId xmlns:a16="http://schemas.microsoft.com/office/drawing/2014/main" id="{50AB82D8-F1BF-44EB-AA4D-45C9F2A142F2}"/>
+                <a16:creationId xmlns:a16="http://schemas.microsoft.com/office/drawing/2014/main" id="{50522383-0C8E-4964-A77E-7BF2325D1862}"/>
               </a:ext>
             </a:extLst>
           </p:cNvPr>
@@ -13585,7 +13585,7 @@
           <p:cNvPr id="19" name="">
             <a:extLst xmlns:a="http://schemas.openxmlformats.org/drawingml/2006/main">
               <a:ext uri="{FF2B5EF4-FFF2-40B4-BE49-F238E27FC236}">
-                <a16:creationId xmlns:a16="http://schemas.microsoft.com/office/drawing/2014/main" id="{6B2AE132-F0F6-41B4-A908-6E9084516A3A}"/>
+                <a16:creationId xmlns:a16="http://schemas.microsoft.com/office/drawing/2014/main" id="{D6DAF34A-7306-4C19-B3E9-4EF0EBF23DD3}"/>
               </a:ext>
             </a:extLst>
           </p:cNvPr>
@@ -13642,7 +13642,7 @@
           <p:cNvPr id="20" name="">
             <a:extLst xmlns:a="http://schemas.openxmlformats.org/drawingml/2006/main">
               <a:ext uri="{FF2B5EF4-FFF2-40B4-BE49-F238E27FC236}">
-                <a16:creationId xmlns:a16="http://schemas.microsoft.com/office/drawing/2014/main" id="{118DB599-7B94-4BB5-B6C4-A65D8AFF8D2A}"/>
+                <a16:creationId xmlns:a16="http://schemas.microsoft.com/office/drawing/2014/main" id="{83D26649-22A7-48B9-83F1-3CCFBC147BAD}"/>
               </a:ext>
             </a:extLst>
           </p:cNvPr>
@@ -13672,7 +13672,7 @@
           <p:cNvPr id="21" name="">
             <a:extLst xmlns:a="http://schemas.openxmlformats.org/drawingml/2006/main">
               <a:ext uri="{FF2B5EF4-FFF2-40B4-BE49-F238E27FC236}">
-                <a16:creationId xmlns:a16="http://schemas.microsoft.com/office/drawing/2014/main" id="{64BD48C3-91DE-4584-B0CA-7D888E13DE7D}"/>
+                <a16:creationId xmlns:a16="http://schemas.microsoft.com/office/drawing/2014/main" id="{883E5A99-2044-4806-9C97-C5B024A53766}"/>
               </a:ext>
             </a:extLst>
           </p:cNvPr>
@@ -13729,7 +13729,7 @@
           <p:cNvPr id="22" name="">
             <a:extLst xmlns:a="http://schemas.openxmlformats.org/drawingml/2006/main">
               <a:ext uri="{FF2B5EF4-FFF2-40B4-BE49-F238E27FC236}">
-                <a16:creationId xmlns:a16="http://schemas.microsoft.com/office/drawing/2014/main" id="{3928D7CC-7B02-4214-A323-FDCA702A53AE}"/>
+                <a16:creationId xmlns:a16="http://schemas.microsoft.com/office/drawing/2014/main" id="{F0646A33-AFFD-4DB2-B8BC-36D0435324FD}"/>
               </a:ext>
             </a:extLst>
           </p:cNvPr>
@@ -13759,7 +13759,7 @@
           <p:cNvPr id="23" name="">
             <a:extLst xmlns:a="http://schemas.openxmlformats.org/drawingml/2006/main">
               <a:ext uri="{FF2B5EF4-FFF2-40B4-BE49-F238E27FC236}">
-                <a16:creationId xmlns:a16="http://schemas.microsoft.com/office/drawing/2014/main" id="{B72A273B-76DB-4900-9F2F-6021D15FA3AE}"/>
+                <a16:creationId xmlns:a16="http://schemas.microsoft.com/office/drawing/2014/main" id="{800259A5-7972-4310-A47C-84BAB1058CEC}"/>
               </a:ext>
             </a:extLst>
           </p:cNvPr>
@@ -13816,7 +13816,7 @@
           <p:cNvPr id="24" name="">
             <a:extLst xmlns:a="http://schemas.openxmlformats.org/drawingml/2006/main">
               <a:ext uri="{FF2B5EF4-FFF2-40B4-BE49-F238E27FC236}">
-                <a16:creationId xmlns:a16="http://schemas.microsoft.com/office/drawing/2014/main" id="{BD329855-B3C8-4F9E-84FE-7019B3498C02}"/>
+                <a16:creationId xmlns:a16="http://schemas.microsoft.com/office/drawing/2014/main" id="{F5C3EC1A-0D4B-4F6E-93F4-5C0A9D058046}"/>
               </a:ext>
             </a:extLst>
           </p:cNvPr>
@@ -13846,7 +13846,7 @@
           <p:cNvPr id="25" name="">
             <a:extLst xmlns:a="http://schemas.openxmlformats.org/drawingml/2006/main">
               <a:ext uri="{FF2B5EF4-FFF2-40B4-BE49-F238E27FC236}">
-                <a16:creationId xmlns:a16="http://schemas.microsoft.com/office/drawing/2014/main" id="{243AB9AD-FEDC-4776-9D96-E97C6DCCFDAE}"/>
+                <a16:creationId xmlns:a16="http://schemas.microsoft.com/office/drawing/2014/main" id="{D8BB3157-E9EE-4490-8CB8-A00CA707BED0}"/>
               </a:ext>
             </a:extLst>
           </p:cNvPr>
@@ -13903,7 +13903,7 @@
           <p:cNvPr id="26" name="">
             <a:extLst xmlns:a="http://schemas.openxmlformats.org/drawingml/2006/main">
               <a:ext uri="{FF2B5EF4-FFF2-40B4-BE49-F238E27FC236}">
-                <a16:creationId xmlns:a16="http://schemas.microsoft.com/office/drawing/2014/main" id="{E1C5207C-46C5-4C30-A64C-FE2419428ABD}"/>
+                <a16:creationId xmlns:a16="http://schemas.microsoft.com/office/drawing/2014/main" id="{E79242F6-507C-4667-9582-2842084239FD}"/>
               </a:ext>
             </a:extLst>
           </p:cNvPr>
@@ -13933,7 +13933,7 @@
           <p:cNvPr id="27" name="">
             <a:extLst xmlns:a="http://schemas.openxmlformats.org/drawingml/2006/main">
               <a:ext uri="{FF2B5EF4-FFF2-40B4-BE49-F238E27FC236}">
-                <a16:creationId xmlns:a16="http://schemas.microsoft.com/office/drawing/2014/main" id="{100C292C-CC75-4A45-9792-85343CB8991C}"/>
+                <a16:creationId xmlns:a16="http://schemas.microsoft.com/office/drawing/2014/main" id="{A7B62635-BFCF-4A5D-A4F4-0123478697C8}"/>
               </a:ext>
             </a:extLst>
           </p:cNvPr>
@@ -13990,7 +13990,7 @@
           <p:cNvPr id="28" name="">
             <a:extLst xmlns:a="http://schemas.openxmlformats.org/drawingml/2006/main">
               <a:ext uri="{FF2B5EF4-FFF2-40B4-BE49-F238E27FC236}">
-                <a16:creationId xmlns:a16="http://schemas.microsoft.com/office/drawing/2014/main" id="{3AD69CDC-8AA2-43F5-84D8-C23546B14ECB}"/>
+                <a16:creationId xmlns:a16="http://schemas.microsoft.com/office/drawing/2014/main" id="{F81F087A-0E28-4814-9CDF-F9D961D94CAF}"/>
               </a:ext>
             </a:extLst>
           </p:cNvPr>
@@ -14022,7 +14022,7 @@
           <p:cNvPr id="29" name="">
             <a:extLst xmlns:a="http://schemas.openxmlformats.org/drawingml/2006/main">
               <a:ext uri="{FF2B5EF4-FFF2-40B4-BE49-F238E27FC236}">
-                <a16:creationId xmlns:a16="http://schemas.microsoft.com/office/drawing/2014/main" id="{C4C66251-00AF-48D0-ADF2-F4DE8D8E3CC9}"/>
+                <a16:creationId xmlns:a16="http://schemas.microsoft.com/office/drawing/2014/main" id="{08D58207-15F7-47CE-91CB-B8D7C747D1A4}"/>
               </a:ext>
             </a:extLst>
           </p:cNvPr>
@@ -14077,7 +14077,7 @@
     </p:spTree>
     <p:extLst>
       <p:ext uri="{BB962C8B-B14F-4D97-AF65-F5344CB8AC3E}">
-        <p14:creationId xmlns:p14="http://schemas.microsoft.com/office/powerpoint/2010/main" val="1236917701"/>
+        <p14:creationId xmlns:p14="http://schemas.microsoft.com/office/powerpoint/2010/main" val="717640662"/>
       </p:ext>
     </p:extLst>
   </p:cSld>
@@ -14108,7 +14108,7 @@
           <p:cNvPr id="27" name="">
             <a:extLst xmlns:a="http://schemas.openxmlformats.org/drawingml/2006/main">
               <a:ext uri="{FF2B5EF4-FFF2-40B4-BE49-F238E27FC236}">
-                <a16:creationId xmlns:a16="http://schemas.microsoft.com/office/drawing/2014/main" id="{072446BB-CCAA-4BDC-BC00-F5C1A26368F3}"/>
+                <a16:creationId xmlns:a16="http://schemas.microsoft.com/office/drawing/2014/main" id="{0858D8EA-56E6-4D08-9CBB-64792E487460}"/>
               </a:ext>
             </a:extLst>
           </p:cNvPr>
@@ -14165,7 +14165,7 @@
           <p:cNvPr id="2" name="">
             <a:extLst xmlns:a="http://schemas.openxmlformats.org/drawingml/2006/main">
               <a:ext uri="{FF2B5EF4-FFF2-40B4-BE49-F238E27FC236}">
-                <a16:creationId xmlns:a16="http://schemas.microsoft.com/office/drawing/2014/main" id="{DAAD03C5-CD80-4012-A543-76AD164636DA}"/>
+                <a16:creationId xmlns:a16="http://schemas.microsoft.com/office/drawing/2014/main" id="{0A1A9652-16C2-48C2-98DD-5A70E2150997}"/>
               </a:ext>
             </a:extLst>
           </p:cNvPr>
@@ -14222,7 +14222,7 @@
           <p:cNvPr id="3" name="">
             <a:extLst xmlns:a="http://schemas.openxmlformats.org/drawingml/2006/main">
               <a:ext uri="{FF2B5EF4-FFF2-40B4-BE49-F238E27FC236}">
-                <a16:creationId xmlns:a16="http://schemas.microsoft.com/office/drawing/2014/main" id="{301FABE5-A60D-4929-806B-522ADF4AB914}"/>
+                <a16:creationId xmlns:a16="http://schemas.microsoft.com/office/drawing/2014/main" id="{2A8843C6-4167-4C93-AB59-A22FA2AD5327}"/>
               </a:ext>
             </a:extLst>
           </p:cNvPr>
@@ -14252,7 +14252,7 @@
           <p:cNvPr id="4" name="">
             <a:extLst xmlns:a="http://schemas.openxmlformats.org/drawingml/2006/main">
               <a:ext uri="{FF2B5EF4-FFF2-40B4-BE49-F238E27FC236}">
-                <a16:creationId xmlns:a16="http://schemas.microsoft.com/office/drawing/2014/main" id="{596093C2-2855-4686-BE93-2459F5FCE8CC}"/>
+                <a16:creationId xmlns:a16="http://schemas.microsoft.com/office/drawing/2014/main" id="{ECBD7946-5FF3-4F30-9620-B72D495B3F7A}"/>
               </a:ext>
             </a:extLst>
           </p:cNvPr>
@@ -14309,7 +14309,7 @@
           <p:cNvPr id="5" name="">
             <a:extLst xmlns:a="http://schemas.openxmlformats.org/drawingml/2006/main">
               <a:ext uri="{FF2B5EF4-FFF2-40B4-BE49-F238E27FC236}">
-                <a16:creationId xmlns:a16="http://schemas.microsoft.com/office/drawing/2014/main" id="{5BFA49A9-F2F8-47EC-A62F-E97D4CC962F9}"/>
+                <a16:creationId xmlns:a16="http://schemas.microsoft.com/office/drawing/2014/main" id="{B2382E97-D4BA-49E9-9842-47C09D40086A}"/>
               </a:ext>
             </a:extLst>
           </p:cNvPr>
@@ -14366,7 +14366,7 @@
           <p:cNvPr id="6" name="">
             <a:extLst xmlns:a="http://schemas.openxmlformats.org/drawingml/2006/main">
               <a:ext uri="{FF2B5EF4-FFF2-40B4-BE49-F238E27FC236}">
-                <a16:creationId xmlns:a16="http://schemas.microsoft.com/office/drawing/2014/main" id="{07F7BD26-C648-4EA0-A251-24F7A9A0F43E}"/>
+                <a16:creationId xmlns:a16="http://schemas.microsoft.com/office/drawing/2014/main" id="{329205AF-73ED-4A32-97E4-246A84F0F081}"/>
               </a:ext>
             </a:extLst>
           </p:cNvPr>
@@ -14423,7 +14423,7 @@
           <p:cNvPr id="7" name="">
             <a:extLst xmlns:a="http://schemas.openxmlformats.org/drawingml/2006/main">
               <a:ext uri="{FF2B5EF4-FFF2-40B4-BE49-F238E27FC236}">
-                <a16:creationId xmlns:a16="http://schemas.microsoft.com/office/drawing/2014/main" id="{99F797DA-C6BC-4BC5-B37A-D519B513B8E2}"/>
+                <a16:creationId xmlns:a16="http://schemas.microsoft.com/office/drawing/2014/main" id="{B8686948-6CB6-4A4B-9ABD-A05F4B2D5ADE}"/>
               </a:ext>
             </a:extLst>
           </p:cNvPr>
@@ -14457,7 +14457,7 @@
           <p:cNvPr id="8" name="">
             <a:extLst xmlns:a="http://schemas.openxmlformats.org/drawingml/2006/main">
               <a:ext uri="{FF2B5EF4-FFF2-40B4-BE49-F238E27FC236}">
-                <a16:creationId xmlns:a16="http://schemas.microsoft.com/office/drawing/2014/main" id="{4BF98084-FD87-42A6-BDA6-AECCCA0CE269}"/>
+                <a16:creationId xmlns:a16="http://schemas.microsoft.com/office/drawing/2014/main" id="{FB3DD236-D353-4A95-9B38-97BA4F2A38CC}"/>
               </a:ext>
             </a:extLst>
           </p:cNvPr>
@@ -14514,7 +14514,7 @@
           <p:cNvPr id="9" name="">
             <a:extLst xmlns:a="http://schemas.openxmlformats.org/drawingml/2006/main">
               <a:ext uri="{FF2B5EF4-FFF2-40B4-BE49-F238E27FC236}">
-                <a16:creationId xmlns:a16="http://schemas.microsoft.com/office/drawing/2014/main" id="{F54F5641-4A1C-4F4D-80BA-A8D8C18D0F78}"/>
+                <a16:creationId xmlns:a16="http://schemas.microsoft.com/office/drawing/2014/main" id="{92B81938-F7C1-4752-8480-9437144FC268}"/>
               </a:ext>
             </a:extLst>
           </p:cNvPr>
@@ -14548,7 +14548,7 @@
           <p:cNvPr id="10" name="">
             <a:extLst xmlns:a="http://schemas.openxmlformats.org/drawingml/2006/main">
               <a:ext uri="{FF2B5EF4-FFF2-40B4-BE49-F238E27FC236}">
-                <a16:creationId xmlns:a16="http://schemas.microsoft.com/office/drawing/2014/main" id="{0385A701-D865-456C-B41A-64F21D6C0ADE}"/>
+                <a16:creationId xmlns:a16="http://schemas.microsoft.com/office/drawing/2014/main" id="{14D3786D-C034-4F95-86A5-CC06CC3764D0}"/>
               </a:ext>
             </a:extLst>
           </p:cNvPr>
@@ -14605,7 +14605,7 @@
           <p:cNvPr id="11" name="">
             <a:extLst xmlns:a="http://schemas.openxmlformats.org/drawingml/2006/main">
               <a:ext uri="{FF2B5EF4-FFF2-40B4-BE49-F238E27FC236}">
-                <a16:creationId xmlns:a16="http://schemas.microsoft.com/office/drawing/2014/main" id="{CC309172-8F1A-43D7-B09A-4DF152574D38}"/>
+                <a16:creationId xmlns:a16="http://schemas.microsoft.com/office/drawing/2014/main" id="{35E13B64-0A10-423F-ACE2-5360C9FFF1A8}"/>
               </a:ext>
             </a:extLst>
           </p:cNvPr>
@@ -14639,7 +14639,7 @@
           <p:cNvPr id="12" name="">
             <a:extLst xmlns:a="http://schemas.openxmlformats.org/drawingml/2006/main">
               <a:ext uri="{FF2B5EF4-FFF2-40B4-BE49-F238E27FC236}">
-                <a16:creationId xmlns:a16="http://schemas.microsoft.com/office/drawing/2014/main" id="{48D0571C-062F-4E8F-8D8E-3F550F68EDBF}"/>
+                <a16:creationId xmlns:a16="http://schemas.microsoft.com/office/drawing/2014/main" id="{C548F53F-BD24-469B-9B5A-4861A80F4DD9}"/>
               </a:ext>
             </a:extLst>
           </p:cNvPr>
@@ -14696,7 +14696,7 @@
           <p:cNvPr id="13" name="">
             <a:extLst xmlns:a="http://schemas.openxmlformats.org/drawingml/2006/main">
               <a:ext uri="{FF2B5EF4-FFF2-40B4-BE49-F238E27FC236}">
-                <a16:creationId xmlns:a16="http://schemas.microsoft.com/office/drawing/2014/main" id="{CEBED672-E7D6-4B66-97B0-F0D40CEA3129}"/>
+                <a16:creationId xmlns:a16="http://schemas.microsoft.com/office/drawing/2014/main" id="{E12A64E7-B663-4C29-BC87-7D0AE8AA19F2}"/>
               </a:ext>
             </a:extLst>
           </p:cNvPr>
@@ -14730,7 +14730,7 @@
           <p:cNvPr id="14" name="">
             <a:extLst xmlns:a="http://schemas.openxmlformats.org/drawingml/2006/main">
               <a:ext uri="{FF2B5EF4-FFF2-40B4-BE49-F238E27FC236}">
-                <a16:creationId xmlns:a16="http://schemas.microsoft.com/office/drawing/2014/main" id="{CC3170B6-F3BE-48B6-AFF3-08F288A94498}"/>
+                <a16:creationId xmlns:a16="http://schemas.microsoft.com/office/drawing/2014/main" id="{2ACDE784-F760-44D0-B53F-838DA1033ECF}"/>
               </a:ext>
             </a:extLst>
           </p:cNvPr>
@@ -14787,7 +14787,7 @@
           <p:cNvPr id="15" name="">
             <a:extLst xmlns:a="http://schemas.openxmlformats.org/drawingml/2006/main">
               <a:ext uri="{FF2B5EF4-FFF2-40B4-BE49-F238E27FC236}">
-                <a16:creationId xmlns:a16="http://schemas.microsoft.com/office/drawing/2014/main" id="{0CC4F364-3D81-4D3B-A83F-779A5375A7C6}"/>
+                <a16:creationId xmlns:a16="http://schemas.microsoft.com/office/drawing/2014/main" id="{8FFAAF6C-ADEF-4ED3-8AC2-DAE14432241C}"/>
               </a:ext>
             </a:extLst>
           </p:cNvPr>
@@ -14821,7 +14821,7 @@
           <p:cNvPr id="16" name="">
             <a:extLst xmlns:a="http://schemas.openxmlformats.org/drawingml/2006/main">
               <a:ext uri="{FF2B5EF4-FFF2-40B4-BE49-F238E27FC236}">
-                <a16:creationId xmlns:a16="http://schemas.microsoft.com/office/drawing/2014/main" id="{CB54D7BA-647D-4771-A211-2776F489809C}"/>
+                <a16:creationId xmlns:a16="http://schemas.microsoft.com/office/drawing/2014/main" id="{8AA31C3E-A5A9-419A-9CAE-7D3B3BC5C863}"/>
               </a:ext>
             </a:extLst>
           </p:cNvPr>
@@ -14978,7 +14978,7 @@
           <p:cNvPr id="21" name="">
             <a:extLst xmlns:a="http://schemas.openxmlformats.org/drawingml/2006/main">
               <a:ext uri="{FF2B5EF4-FFF2-40B4-BE49-F238E27FC236}">
-                <a16:creationId xmlns:a16="http://schemas.microsoft.com/office/drawing/2014/main" id="{E0979C23-09D4-4677-A0DF-AF5F8C319C7C}"/>
+                <a16:creationId xmlns:a16="http://schemas.microsoft.com/office/drawing/2014/main" id="{BAAC23CB-D254-4E24-9EAE-0197D0EC3A61}"/>
               </a:ext>
             </a:extLst>
           </p:cNvPr>
@@ -15035,7 +15035,7 @@
           <p:cNvPr id="22" name="">
             <a:extLst xmlns:a="http://schemas.openxmlformats.org/drawingml/2006/main">
               <a:ext uri="{FF2B5EF4-FFF2-40B4-BE49-F238E27FC236}">
-                <a16:creationId xmlns:a16="http://schemas.microsoft.com/office/drawing/2014/main" id="{714D2C6D-00D6-4F8A-B1D2-B572CE742E68}"/>
+                <a16:creationId xmlns:a16="http://schemas.microsoft.com/office/drawing/2014/main" id="{06E4F30C-5B54-4596-BD4D-47F09618008B}"/>
               </a:ext>
             </a:extLst>
           </p:cNvPr>
@@ -15092,7 +15092,7 @@
           <p:cNvPr id="23" name="">
             <a:extLst xmlns:a="http://schemas.openxmlformats.org/drawingml/2006/main">
               <a:ext uri="{FF2B5EF4-FFF2-40B4-BE49-F238E27FC236}">
-                <a16:creationId xmlns:a16="http://schemas.microsoft.com/office/drawing/2014/main" id="{584064AA-E679-45BF-BA49-A3D41DBD5E53}"/>
+                <a16:creationId xmlns:a16="http://schemas.microsoft.com/office/drawing/2014/main" id="{BE19AF1B-AF13-4B3B-BE61-B1448011C499}"/>
               </a:ext>
             </a:extLst>
           </p:cNvPr>
@@ -15149,7 +15149,7 @@
           <p:cNvPr id="24" name="">
             <a:extLst xmlns:a="http://schemas.openxmlformats.org/drawingml/2006/main">
               <a:ext uri="{FF2B5EF4-FFF2-40B4-BE49-F238E27FC236}">
-                <a16:creationId xmlns:a16="http://schemas.microsoft.com/office/drawing/2014/main" id="{3FB2A635-B57C-4B1F-A168-79134EAA62F8}"/>
+                <a16:creationId xmlns:a16="http://schemas.microsoft.com/office/drawing/2014/main" id="{3DF8C3B2-0E08-4AFC-A522-263C851773B1}"/>
               </a:ext>
             </a:extLst>
           </p:cNvPr>
@@ -15206,7 +15206,7 @@
           <p:cNvPr id="25" name="">
             <a:extLst xmlns:a="http://schemas.openxmlformats.org/drawingml/2006/main">
               <a:ext uri="{FF2B5EF4-FFF2-40B4-BE49-F238E27FC236}">
-                <a16:creationId xmlns:a16="http://schemas.microsoft.com/office/drawing/2014/main" id="{2CB83C97-89F7-421C-997F-485F65D95420}"/>
+                <a16:creationId xmlns:a16="http://schemas.microsoft.com/office/drawing/2014/main" id="{3FFD1BA6-DD6D-444E-9CEA-B06013E76652}"/>
               </a:ext>
             </a:extLst>
           </p:cNvPr>
@@ -15238,7 +15238,7 @@
           <p:cNvPr id="26" name="">
             <a:extLst xmlns:a="http://schemas.openxmlformats.org/drawingml/2006/main">
               <a:ext uri="{FF2B5EF4-FFF2-40B4-BE49-F238E27FC236}">
-                <a16:creationId xmlns:a16="http://schemas.microsoft.com/office/drawing/2014/main" id="{D6BCC700-4024-4604-BC7E-8795DA353FE7}"/>
+                <a16:creationId xmlns:a16="http://schemas.microsoft.com/office/drawing/2014/main" id="{287850CA-C4C0-448A-90B0-A6D94904307B}"/>
               </a:ext>
             </a:extLst>
           </p:cNvPr>
@@ -15293,7 +15293,7 @@
     </p:spTree>
     <p:extLst>
       <p:ext uri="{BB962C8B-B14F-4D97-AF65-F5344CB8AC3E}">
-        <p14:creationId xmlns:p14="http://schemas.microsoft.com/office/powerpoint/2010/main" val="1124816846"/>
+        <p14:creationId xmlns:p14="http://schemas.microsoft.com/office/powerpoint/2010/main" val="591105502"/>
       </p:ext>
     </p:extLst>
   </p:cSld>
@@ -15324,7 +15324,7 @@
           <p:cNvPr id="22" name="">
             <a:extLst xmlns:a="http://schemas.openxmlformats.org/drawingml/2006/main">
               <a:ext uri="{FF2B5EF4-FFF2-40B4-BE49-F238E27FC236}">
-                <a16:creationId xmlns:a16="http://schemas.microsoft.com/office/drawing/2014/main" id="{F352443A-0BEE-4421-8C75-CFDE610BA4C7}"/>
+                <a16:creationId xmlns:a16="http://schemas.microsoft.com/office/drawing/2014/main" id="{2339BBEC-A177-4B9E-BD7F-B1C74ABBE45A}"/>
               </a:ext>
             </a:extLst>
           </p:cNvPr>
@@ -15381,7 +15381,7 @@
           <p:cNvPr id="2" name="">
             <a:extLst xmlns:a="http://schemas.openxmlformats.org/drawingml/2006/main">
               <a:ext uri="{FF2B5EF4-FFF2-40B4-BE49-F238E27FC236}">
-                <a16:creationId xmlns:a16="http://schemas.microsoft.com/office/drawing/2014/main" id="{4637C215-072F-4F44-97F2-5BA1646F73E7}"/>
+                <a16:creationId xmlns:a16="http://schemas.microsoft.com/office/drawing/2014/main" id="{1FC57F14-0466-4A62-BCAD-012A6836476F}"/>
               </a:ext>
             </a:extLst>
           </p:cNvPr>
@@ -15438,7 +15438,7 @@
           <p:cNvPr id="3" name="">
             <a:extLst xmlns:a="http://schemas.openxmlformats.org/drawingml/2006/main">
               <a:ext uri="{FF2B5EF4-FFF2-40B4-BE49-F238E27FC236}">
-                <a16:creationId xmlns:a16="http://schemas.microsoft.com/office/drawing/2014/main" id="{DD563876-915B-46C8-937D-81736742F6AE}"/>
+                <a16:creationId xmlns:a16="http://schemas.microsoft.com/office/drawing/2014/main" id="{047BA5CA-849F-4FC7-835A-CBDFD244393E}"/>
               </a:ext>
             </a:extLst>
           </p:cNvPr>
@@ -15468,7 +15468,7 @@
           <p:cNvPr id="4" name="">
             <a:extLst xmlns:a="http://schemas.openxmlformats.org/drawingml/2006/main">
               <a:ext uri="{FF2B5EF4-FFF2-40B4-BE49-F238E27FC236}">
-                <a16:creationId xmlns:a16="http://schemas.microsoft.com/office/drawing/2014/main" id="{C96ACCCF-EDB6-4888-9732-4D3F6E9DB808}"/>
+                <a16:creationId xmlns:a16="http://schemas.microsoft.com/office/drawing/2014/main" id="{459A504D-3A77-4E10-944C-38A97AE4A4AA}"/>
               </a:ext>
             </a:extLst>
           </p:cNvPr>
@@ -15525,7 +15525,7 @@
           <p:cNvPr id="5" name="">
             <a:extLst xmlns:a="http://schemas.openxmlformats.org/drawingml/2006/main">
               <a:ext uri="{FF2B5EF4-FFF2-40B4-BE49-F238E27FC236}">
-                <a16:creationId xmlns:a16="http://schemas.microsoft.com/office/drawing/2014/main" id="{0577F992-CDD2-4775-9BAC-B8388E18B647}"/>
+                <a16:creationId xmlns:a16="http://schemas.microsoft.com/office/drawing/2014/main" id="{FA7FF80A-3206-4125-AC81-733E7715CAB7}"/>
               </a:ext>
             </a:extLst>
           </p:cNvPr>
@@ -15582,7 +15582,7 @@
           <p:cNvPr id="6" name="">
             <a:extLst xmlns:a="http://schemas.openxmlformats.org/drawingml/2006/main">
               <a:ext uri="{FF2B5EF4-FFF2-40B4-BE49-F238E27FC236}">
-                <a16:creationId xmlns:a16="http://schemas.microsoft.com/office/drawing/2014/main" id="{533FA260-875F-4A16-8DC1-5767B6513224}"/>
+                <a16:creationId xmlns:a16="http://schemas.microsoft.com/office/drawing/2014/main" id="{AC8152D2-ADF9-44EB-95EC-83D9651694E0}"/>
               </a:ext>
             </a:extLst>
           </p:cNvPr>
@@ -15639,7 +15639,7 @@
           <p:cNvPr id="7" name="">
             <a:extLst xmlns:a="http://schemas.openxmlformats.org/drawingml/2006/main">
               <a:ext uri="{FF2B5EF4-FFF2-40B4-BE49-F238E27FC236}">
-                <a16:creationId xmlns:a16="http://schemas.microsoft.com/office/drawing/2014/main" id="{A7E088B7-E123-4166-A5A8-0BDEB35C7906}"/>
+                <a16:creationId xmlns:a16="http://schemas.microsoft.com/office/drawing/2014/main" id="{08D2469C-406F-4978-B620-0A27C94052CC}"/>
               </a:ext>
             </a:extLst>
           </p:cNvPr>
@@ -15696,7 +15696,7 @@
           <p:cNvPr id="8" name="">
             <a:extLst xmlns:a="http://schemas.openxmlformats.org/drawingml/2006/main">
               <a:ext uri="{FF2B5EF4-FFF2-40B4-BE49-F238E27FC236}">
-                <a16:creationId xmlns:a16="http://schemas.microsoft.com/office/drawing/2014/main" id="{00A6A19A-3CCA-4F57-B20B-826DD1BA1369}"/>
+                <a16:creationId xmlns:a16="http://schemas.microsoft.com/office/drawing/2014/main" id="{906D79D2-2744-4940-840B-8190E35185B2}"/>
               </a:ext>
             </a:extLst>
           </p:cNvPr>
@@ -15753,7 +15753,7 @@
           <p:cNvPr id="9" name="">
             <a:extLst xmlns:a="http://schemas.openxmlformats.org/drawingml/2006/main">
               <a:ext uri="{FF2B5EF4-FFF2-40B4-BE49-F238E27FC236}">
-                <a16:creationId xmlns:a16="http://schemas.microsoft.com/office/drawing/2014/main" id="{80E385E8-0420-41C5-ACFA-CD31A0A52C51}"/>
+                <a16:creationId xmlns:a16="http://schemas.microsoft.com/office/drawing/2014/main" id="{062AB3AA-B2CA-4511-8A9B-AC2A6B57239A}"/>
               </a:ext>
             </a:extLst>
           </p:cNvPr>
@@ -15783,7 +15783,7 @@
           <p:cNvPr id="10" name="">
             <a:extLst xmlns:a="http://schemas.openxmlformats.org/drawingml/2006/main">
               <a:ext uri="{FF2B5EF4-FFF2-40B4-BE49-F238E27FC236}">
-                <a16:creationId xmlns:a16="http://schemas.microsoft.com/office/drawing/2014/main" id="{5FE210DB-71A9-40DF-AD6A-AFD29168870A}"/>
+                <a16:creationId xmlns:a16="http://schemas.microsoft.com/office/drawing/2014/main" id="{675933A1-6923-4C82-9977-70C29F48B6DE}"/>
               </a:ext>
             </a:extLst>
           </p:cNvPr>
@@ -15840,7 +15840,7 @@
           <p:cNvPr id="11" name="">
             <a:extLst xmlns:a="http://schemas.openxmlformats.org/drawingml/2006/main">
               <a:ext uri="{FF2B5EF4-FFF2-40B4-BE49-F238E27FC236}">
-                <a16:creationId xmlns:a16="http://schemas.microsoft.com/office/drawing/2014/main" id="{CB07A0B4-7712-400C-87A3-28BAC7D54EFA}"/>
+                <a16:creationId xmlns:a16="http://schemas.microsoft.com/office/drawing/2014/main" id="{77117004-44B3-4221-9180-FCA6D039747F}"/>
               </a:ext>
             </a:extLst>
           </p:cNvPr>
@@ -15897,7 +15897,7 @@
           <p:cNvPr id="12" name="">
             <a:extLst xmlns:a="http://schemas.openxmlformats.org/drawingml/2006/main">
               <a:ext uri="{FF2B5EF4-FFF2-40B4-BE49-F238E27FC236}">
-                <a16:creationId xmlns:a16="http://schemas.microsoft.com/office/drawing/2014/main" id="{324B99EA-4754-4DCE-9944-913222227E8E}"/>
+                <a16:creationId xmlns:a16="http://schemas.microsoft.com/office/drawing/2014/main" id="{9494ADE9-0F79-4E18-99BB-85831D269C16}"/>
               </a:ext>
             </a:extLst>
           </p:cNvPr>
@@ -15954,7 +15954,7 @@
           <p:cNvPr id="13" name="">
             <a:extLst xmlns:a="http://schemas.openxmlformats.org/drawingml/2006/main">
               <a:ext uri="{FF2B5EF4-FFF2-40B4-BE49-F238E27FC236}">
-                <a16:creationId xmlns:a16="http://schemas.microsoft.com/office/drawing/2014/main" id="{42B02261-6B9B-428D-A2B8-CA5B41C23464}"/>
+                <a16:creationId xmlns:a16="http://schemas.microsoft.com/office/drawing/2014/main" id="{5AF00766-08BA-42B2-A3D5-C0BCB5653628}"/>
               </a:ext>
             </a:extLst>
           </p:cNvPr>
@@ -15984,7 +15984,7 @@
           <p:cNvPr id="14" name="">
             <a:extLst xmlns:a="http://schemas.openxmlformats.org/drawingml/2006/main">
               <a:ext uri="{FF2B5EF4-FFF2-40B4-BE49-F238E27FC236}">
-                <a16:creationId xmlns:a16="http://schemas.microsoft.com/office/drawing/2014/main" id="{863AF3E6-9E93-43AA-ACFB-4B31FED4CA63}"/>
+                <a16:creationId xmlns:a16="http://schemas.microsoft.com/office/drawing/2014/main" id="{5404A957-A8CF-465F-BE18-3011DC062919}"/>
               </a:ext>
             </a:extLst>
           </p:cNvPr>
@@ -16041,7 +16041,7 @@
           <p:cNvPr id="15" name="">
             <a:extLst xmlns:a="http://schemas.openxmlformats.org/drawingml/2006/main">
               <a:ext uri="{FF2B5EF4-FFF2-40B4-BE49-F238E27FC236}">
-                <a16:creationId xmlns:a16="http://schemas.microsoft.com/office/drawing/2014/main" id="{B02FC65F-4855-4479-8C82-3CE17409B743}"/>
+                <a16:creationId xmlns:a16="http://schemas.microsoft.com/office/drawing/2014/main" id="{BEDA1837-8EB8-4873-B512-F815BFC2383F}"/>
               </a:ext>
             </a:extLst>
           </p:cNvPr>
@@ -16098,7 +16098,7 @@
           <p:cNvPr id="16" name="">
             <a:extLst xmlns:a="http://schemas.openxmlformats.org/drawingml/2006/main">
               <a:ext uri="{FF2B5EF4-FFF2-40B4-BE49-F238E27FC236}">
-                <a16:creationId xmlns:a16="http://schemas.microsoft.com/office/drawing/2014/main" id="{920FF2B2-A939-4EF0-A557-9F9F179C98E5}"/>
+                <a16:creationId xmlns:a16="http://schemas.microsoft.com/office/drawing/2014/main" id="{7043354B-84CE-4409-8440-8561F6FFF992}"/>
               </a:ext>
             </a:extLst>
           </p:cNvPr>
@@ -16155,7 +16155,7 @@
           <p:cNvPr id="17" name="">
             <a:extLst xmlns:a="http://schemas.openxmlformats.org/drawingml/2006/main">
               <a:ext uri="{FF2B5EF4-FFF2-40B4-BE49-F238E27FC236}">
-                <a16:creationId xmlns:a16="http://schemas.microsoft.com/office/drawing/2014/main" id="{6E31B748-20BF-49B8-B6D7-9CE1B7FA4E54}"/>
+                <a16:creationId xmlns:a16="http://schemas.microsoft.com/office/drawing/2014/main" id="{F04EA5B0-3F29-4688-8395-D12C6C60A7D4}"/>
               </a:ext>
             </a:extLst>
           </p:cNvPr>
@@ -16185,7 +16185,7 @@
           <p:cNvPr id="18" name="">
             <a:extLst xmlns:a="http://schemas.openxmlformats.org/drawingml/2006/main">
               <a:ext uri="{FF2B5EF4-FFF2-40B4-BE49-F238E27FC236}">
-                <a16:creationId xmlns:a16="http://schemas.microsoft.com/office/drawing/2014/main" id="{8D55413F-29B8-4FA3-A02F-65EE30E9A282}"/>
+                <a16:creationId xmlns:a16="http://schemas.microsoft.com/office/drawing/2014/main" id="{94630792-67E9-43C3-9865-E4AE2008B876}"/>
               </a:ext>
             </a:extLst>
           </p:cNvPr>
@@ -16242,7 +16242,7 @@
           <p:cNvPr id="19" name="">
             <a:extLst xmlns:a="http://schemas.openxmlformats.org/drawingml/2006/main">
               <a:ext uri="{FF2B5EF4-FFF2-40B4-BE49-F238E27FC236}">
-                <a16:creationId xmlns:a16="http://schemas.microsoft.com/office/drawing/2014/main" id="{11037196-0B7B-4AE2-B9EE-7FAFFC701321}"/>
+                <a16:creationId xmlns:a16="http://schemas.microsoft.com/office/drawing/2014/main" id="{E3FF6142-9BB6-46B4-8EF5-D687A5DB044B}"/>
               </a:ext>
             </a:extLst>
           </p:cNvPr>
@@ -16299,7 +16299,7 @@
           <p:cNvPr id="20" name="">
             <a:extLst xmlns:a="http://schemas.openxmlformats.org/drawingml/2006/main">
               <a:ext uri="{FF2B5EF4-FFF2-40B4-BE49-F238E27FC236}">
-                <a16:creationId xmlns:a16="http://schemas.microsoft.com/office/drawing/2014/main" id="{43605D66-8ABF-4C3A-ABDD-B685A35C042B}"/>
+                <a16:creationId xmlns:a16="http://schemas.microsoft.com/office/drawing/2014/main" id="{D57B8DA8-A054-4A33-B237-0E11605999A1}"/>
               </a:ext>
             </a:extLst>
           </p:cNvPr>
@@ -16356,7 +16356,7 @@
           <p:cNvPr id="21" name="">
             <a:extLst xmlns:a="http://schemas.openxmlformats.org/drawingml/2006/main">
               <a:ext uri="{FF2B5EF4-FFF2-40B4-BE49-F238E27FC236}">
-                <a16:creationId xmlns:a16="http://schemas.microsoft.com/office/drawing/2014/main" id="{8FA8170F-ECDC-4035-9B43-EEF7D159D2AF}"/>
+                <a16:creationId xmlns:a16="http://schemas.microsoft.com/office/drawing/2014/main" id="{6D120713-7DE0-46D7-8B5D-82003DABB9D3}"/>
               </a:ext>
             </a:extLst>
           </p:cNvPr>
@@ -16411,7 +16411,7 @@
     </p:spTree>
     <p:extLst>
       <p:ext uri="{BB962C8B-B14F-4D97-AF65-F5344CB8AC3E}">
-        <p14:creationId xmlns:p14="http://schemas.microsoft.com/office/powerpoint/2010/main" val="913326457"/>
+        <p14:creationId xmlns:p14="http://schemas.microsoft.com/office/powerpoint/2010/main" val="2007083515"/>
       </p:ext>
     </p:extLst>
   </p:cSld>
@@ -16442,7 +16442,7 @@
           <p:cNvPr id="30" name="">
             <a:extLst xmlns:a="http://schemas.openxmlformats.org/drawingml/2006/main">
               <a:ext uri="{FF2B5EF4-FFF2-40B4-BE49-F238E27FC236}">
-                <a16:creationId xmlns:a16="http://schemas.microsoft.com/office/drawing/2014/main" id="{E28F4276-5F99-418E-97D9-A47F102567DB}"/>
+                <a16:creationId xmlns:a16="http://schemas.microsoft.com/office/drawing/2014/main" id="{F3AAF377-D2A4-489A-825C-BC18C32F5505}"/>
               </a:ext>
             </a:extLst>
           </p:cNvPr>
@@ -16499,7 +16499,7 @@
           <p:cNvPr id="2" name="">
             <a:extLst xmlns:a="http://schemas.openxmlformats.org/drawingml/2006/main">
               <a:ext uri="{FF2B5EF4-FFF2-40B4-BE49-F238E27FC236}">
-                <a16:creationId xmlns:a16="http://schemas.microsoft.com/office/drawing/2014/main" id="{FB20A395-18AC-459D-8EC8-E092F8A72176}"/>
+                <a16:creationId xmlns:a16="http://schemas.microsoft.com/office/drawing/2014/main" id="{9DB9B608-3059-481A-BCA9-6EB941C1532E}"/>
               </a:ext>
             </a:extLst>
           </p:cNvPr>
@@ -16556,7 +16556,7 @@
           <p:cNvPr id="3" name="">
             <a:extLst xmlns:a="http://schemas.openxmlformats.org/drawingml/2006/main">
               <a:ext uri="{FF2B5EF4-FFF2-40B4-BE49-F238E27FC236}">
-                <a16:creationId xmlns:a16="http://schemas.microsoft.com/office/drawing/2014/main" id="{52E83343-FC54-48F2-B353-C3CFDCE5B548}"/>
+                <a16:creationId xmlns:a16="http://schemas.microsoft.com/office/drawing/2014/main" id="{D2B4CA56-BC60-4D15-B3DF-C240444782FF}"/>
               </a:ext>
             </a:extLst>
           </p:cNvPr>
@@ -16586,7 +16586,7 @@
           <p:cNvPr id="4" name="">
             <a:extLst xmlns:a="http://schemas.openxmlformats.org/drawingml/2006/main">
               <a:ext uri="{FF2B5EF4-FFF2-40B4-BE49-F238E27FC236}">
-                <a16:creationId xmlns:a16="http://schemas.microsoft.com/office/drawing/2014/main" id="{B3A8922E-721A-4C1A-8CB9-FAC99532DB94}"/>
+                <a16:creationId xmlns:a16="http://schemas.microsoft.com/office/drawing/2014/main" id="{EFEEDA8F-F71B-4B7F-B049-E78CB2F46108}"/>
               </a:ext>
             </a:extLst>
           </p:cNvPr>
@@ -16643,7 +16643,7 @@
           <p:cNvPr id="5" name="">
             <a:extLst xmlns:a="http://schemas.openxmlformats.org/drawingml/2006/main">
               <a:ext uri="{FF2B5EF4-FFF2-40B4-BE49-F238E27FC236}">
-                <a16:creationId xmlns:a16="http://schemas.microsoft.com/office/drawing/2014/main" id="{18B8E177-2CFD-4B8D-9DB0-930C60CF1181}"/>
+                <a16:creationId xmlns:a16="http://schemas.microsoft.com/office/drawing/2014/main" id="{4FAA5298-D028-4996-AE99-CF815F59520E}"/>
               </a:ext>
             </a:extLst>
           </p:cNvPr>
@@ -16700,7 +16700,7 @@
           <p:cNvPr id="6" name="">
             <a:extLst xmlns:a="http://schemas.openxmlformats.org/drawingml/2006/main">
               <a:ext uri="{FF2B5EF4-FFF2-40B4-BE49-F238E27FC236}">
-                <a16:creationId xmlns:a16="http://schemas.microsoft.com/office/drawing/2014/main" id="{2F353EC2-CA29-4A06-A904-DBB4524F1382}"/>
+                <a16:creationId xmlns:a16="http://schemas.microsoft.com/office/drawing/2014/main" id="{23C003FA-07B3-4830-8988-44A7E28CC7D9}"/>
               </a:ext>
             </a:extLst>
           </p:cNvPr>
@@ -16757,7 +16757,7 @@
           <p:cNvPr id="7" name="">
             <a:extLst xmlns:a="http://schemas.openxmlformats.org/drawingml/2006/main">
               <a:ext uri="{FF2B5EF4-FFF2-40B4-BE49-F238E27FC236}">
-                <a16:creationId xmlns:a16="http://schemas.microsoft.com/office/drawing/2014/main" id="{E56313C4-6412-43E5-95CB-8B1E1476A646}"/>
+                <a16:creationId xmlns:a16="http://schemas.microsoft.com/office/drawing/2014/main" id="{0A5603B8-C9B7-4142-9636-0435E2536AF2}"/>
               </a:ext>
             </a:extLst>
           </p:cNvPr>
@@ -16814,7 +16814,7 @@
           <p:cNvPr id="8" name="">
             <a:extLst xmlns:a="http://schemas.openxmlformats.org/drawingml/2006/main">
               <a:ext uri="{FF2B5EF4-FFF2-40B4-BE49-F238E27FC236}">
-                <a16:creationId xmlns:a16="http://schemas.microsoft.com/office/drawing/2014/main" id="{B534BA02-26D3-47CE-B050-BB7C7878FE76}"/>
+                <a16:creationId xmlns:a16="http://schemas.microsoft.com/office/drawing/2014/main" id="{191D2131-AB95-4783-8352-E6B1A8C2A40F}"/>
               </a:ext>
             </a:extLst>
           </p:cNvPr>
@@ -16844,7 +16844,7 @@
           <p:cNvPr id="9" name="">
             <a:extLst xmlns:a="http://schemas.openxmlformats.org/drawingml/2006/main">
               <a:ext uri="{FF2B5EF4-FFF2-40B4-BE49-F238E27FC236}">
-                <a16:creationId xmlns:a16="http://schemas.microsoft.com/office/drawing/2014/main" id="{AB059963-4372-4913-BC0F-74F9927FF51B}"/>
+                <a16:creationId xmlns:a16="http://schemas.microsoft.com/office/drawing/2014/main" id="{915BE85C-39A1-4A02-9F8A-AC457F7AE031}"/>
               </a:ext>
             </a:extLst>
           </p:cNvPr>
@@ -16901,7 +16901,7 @@
           <p:cNvPr id="10" name="">
             <a:extLst xmlns:a="http://schemas.openxmlformats.org/drawingml/2006/main">
               <a:ext uri="{FF2B5EF4-FFF2-40B4-BE49-F238E27FC236}">
-                <a16:creationId xmlns:a16="http://schemas.microsoft.com/office/drawing/2014/main" id="{4B4D30C1-3DA3-4388-AA90-B163734BB2BA}"/>
+                <a16:creationId xmlns:a16="http://schemas.microsoft.com/office/drawing/2014/main" id="{6E182D3B-A112-4B74-BD6A-3F1C0EC9733C}"/>
               </a:ext>
             </a:extLst>
           </p:cNvPr>
@@ -16958,7 +16958,7 @@
           <p:cNvPr id="11" name="">
             <a:extLst xmlns:a="http://schemas.openxmlformats.org/drawingml/2006/main">
               <a:ext uri="{FF2B5EF4-FFF2-40B4-BE49-F238E27FC236}">
-                <a16:creationId xmlns:a16="http://schemas.microsoft.com/office/drawing/2014/main" id="{BA679C24-2073-4A17-BDA3-CB92E3988D93}"/>
+                <a16:creationId xmlns:a16="http://schemas.microsoft.com/office/drawing/2014/main" id="{5C7BDD25-8E5B-4C02-9775-A24F1A3E6373}"/>
               </a:ext>
             </a:extLst>
           </p:cNvPr>
@@ -16988,7 +16988,7 @@
           <p:cNvPr id="12" name="">
             <a:extLst xmlns:a="http://schemas.openxmlformats.org/drawingml/2006/main">
               <a:ext uri="{FF2B5EF4-FFF2-40B4-BE49-F238E27FC236}">
-                <a16:creationId xmlns:a16="http://schemas.microsoft.com/office/drawing/2014/main" id="{D2379A66-ADB8-4200-AB60-6D8E78134565}"/>
+                <a16:creationId xmlns:a16="http://schemas.microsoft.com/office/drawing/2014/main" id="{6D021C9F-188A-40B4-B58A-55F987133D8D}"/>
               </a:ext>
             </a:extLst>
           </p:cNvPr>
@@ -17045,7 +17045,7 @@
           <p:cNvPr id="13" name="">
             <a:extLst xmlns:a="http://schemas.openxmlformats.org/drawingml/2006/main">
               <a:ext uri="{FF2B5EF4-FFF2-40B4-BE49-F238E27FC236}">
-                <a16:creationId xmlns:a16="http://schemas.microsoft.com/office/drawing/2014/main" id="{2EA59D31-A7A9-45CC-83ED-BAC0760E6421}"/>
+                <a16:creationId xmlns:a16="http://schemas.microsoft.com/office/drawing/2014/main" id="{64DFAE64-D72B-4E6A-B46F-A0E19C0A2FB7}"/>
               </a:ext>
             </a:extLst>
           </p:cNvPr>
@@ -17102,7 +17102,7 @@
           <p:cNvPr id="14" name="">
             <a:extLst xmlns:a="http://schemas.openxmlformats.org/drawingml/2006/main">
               <a:ext uri="{FF2B5EF4-FFF2-40B4-BE49-F238E27FC236}">
-                <a16:creationId xmlns:a16="http://schemas.microsoft.com/office/drawing/2014/main" id="{53ADD35A-6992-4A7A-8896-C714EA585D7A}"/>
+                <a16:creationId xmlns:a16="http://schemas.microsoft.com/office/drawing/2014/main" id="{EB27C0AD-6ECB-4136-A594-D9E7210B2661}"/>
               </a:ext>
             </a:extLst>
           </p:cNvPr>
@@ -17132,7 +17132,7 @@
           <p:cNvPr id="15" name="">
             <a:extLst xmlns:a="http://schemas.openxmlformats.org/drawingml/2006/main">
               <a:ext uri="{FF2B5EF4-FFF2-40B4-BE49-F238E27FC236}">
-                <a16:creationId xmlns:a16="http://schemas.microsoft.com/office/drawing/2014/main" id="{2F11F35C-398F-474A-97BD-B7F3D0520DA2}"/>
+                <a16:creationId xmlns:a16="http://schemas.microsoft.com/office/drawing/2014/main" id="{E5929D5C-9DEF-4C74-B209-B06E5E4CB679}"/>
               </a:ext>
             </a:extLst>
           </p:cNvPr>
@@ -17189,7 +17189,7 @@
           <p:cNvPr id="16" name="">
             <a:extLst xmlns:a="http://schemas.openxmlformats.org/drawingml/2006/main">
               <a:ext uri="{FF2B5EF4-FFF2-40B4-BE49-F238E27FC236}">
-                <a16:creationId xmlns:a16="http://schemas.microsoft.com/office/drawing/2014/main" id="{AE8EBBA8-94E9-4F02-B51D-3112A95A1772}"/>
+                <a16:creationId xmlns:a16="http://schemas.microsoft.com/office/drawing/2014/main" id="{5C3370E4-E445-440F-B15A-F697972251FA}"/>
               </a:ext>
             </a:extLst>
           </p:cNvPr>
@@ -17246,7 +17246,7 @@
           <p:cNvPr id="17" name="">
             <a:extLst xmlns:a="http://schemas.openxmlformats.org/drawingml/2006/main">
               <a:ext uri="{FF2B5EF4-FFF2-40B4-BE49-F238E27FC236}">
-                <a16:creationId xmlns:a16="http://schemas.microsoft.com/office/drawing/2014/main" id="{1514D4B0-3692-4C66-8BA1-C4547B7FEC22}"/>
+                <a16:creationId xmlns:a16="http://schemas.microsoft.com/office/drawing/2014/main" id="{E3108B5C-C6A4-4233-8820-7A2103C45B4C}"/>
               </a:ext>
             </a:extLst>
           </p:cNvPr>
@@ -17303,7 +17303,7 @@
           <p:cNvPr id="18" name="">
             <a:extLst xmlns:a="http://schemas.openxmlformats.org/drawingml/2006/main">
               <a:ext uri="{FF2B5EF4-FFF2-40B4-BE49-F238E27FC236}">
-                <a16:creationId xmlns:a16="http://schemas.microsoft.com/office/drawing/2014/main" id="{1F6D0FEC-9B68-4323-AA04-DDECD4CEFB0A}"/>
+                <a16:creationId xmlns:a16="http://schemas.microsoft.com/office/drawing/2014/main" id="{DAB91721-A5F0-4902-B27A-F4D6D43FB976}"/>
               </a:ext>
             </a:extLst>
           </p:cNvPr>
@@ -17360,7 +17360,7 @@
           <p:cNvPr id="19" name="">
             <a:extLst xmlns:a="http://schemas.openxmlformats.org/drawingml/2006/main">
               <a:ext uri="{FF2B5EF4-FFF2-40B4-BE49-F238E27FC236}">
-                <a16:creationId xmlns:a16="http://schemas.microsoft.com/office/drawing/2014/main" id="{08B73146-3F2A-408E-A553-BFD4BB3E11EB}"/>
+                <a16:creationId xmlns:a16="http://schemas.microsoft.com/office/drawing/2014/main" id="{DA1CD159-98F2-4D13-AF88-BF5C3DD4F5EB}"/>
               </a:ext>
             </a:extLst>
           </p:cNvPr>
@@ -17390,7 +17390,7 @@
           <p:cNvPr id="20" name="">
             <a:extLst xmlns:a="http://schemas.openxmlformats.org/drawingml/2006/main">
               <a:ext uri="{FF2B5EF4-FFF2-40B4-BE49-F238E27FC236}">
-                <a16:creationId xmlns:a16="http://schemas.microsoft.com/office/drawing/2014/main" id="{A071273C-719B-452B-BE64-7603A46E0C9E}"/>
+                <a16:creationId xmlns:a16="http://schemas.microsoft.com/office/drawing/2014/main" id="{DF506172-1A4B-43F0-9947-DFA3F388FB4A}"/>
               </a:ext>
             </a:extLst>
           </p:cNvPr>
@@ -17447,7 +17447,7 @@
           <p:cNvPr id="21" name="">
             <a:extLst xmlns:a="http://schemas.openxmlformats.org/drawingml/2006/main">
               <a:ext uri="{FF2B5EF4-FFF2-40B4-BE49-F238E27FC236}">
-                <a16:creationId xmlns:a16="http://schemas.microsoft.com/office/drawing/2014/main" id="{D4E81F4D-0B58-495D-92F0-9230F5EA14A4}"/>
+                <a16:creationId xmlns:a16="http://schemas.microsoft.com/office/drawing/2014/main" id="{58EC90D7-313C-403B-9C5C-A34437D6BF7A}"/>
               </a:ext>
             </a:extLst>
           </p:cNvPr>
@@ -17504,7 +17504,7 @@
           <p:cNvPr id="22" name="">
             <a:extLst xmlns:a="http://schemas.openxmlformats.org/drawingml/2006/main">
               <a:ext uri="{FF2B5EF4-FFF2-40B4-BE49-F238E27FC236}">
-                <a16:creationId xmlns:a16="http://schemas.microsoft.com/office/drawing/2014/main" id="{06CE2793-1C6A-48D9-91AF-A8509B474B54}"/>
+                <a16:creationId xmlns:a16="http://schemas.microsoft.com/office/drawing/2014/main" id="{E777E16E-27D2-4A5D-81C5-A37B3C62A7F1}"/>
               </a:ext>
             </a:extLst>
           </p:cNvPr>
@@ -17534,7 +17534,7 @@
           <p:cNvPr id="23" name="">
             <a:extLst xmlns:a="http://schemas.openxmlformats.org/drawingml/2006/main">
               <a:ext uri="{FF2B5EF4-FFF2-40B4-BE49-F238E27FC236}">
-                <a16:creationId xmlns:a16="http://schemas.microsoft.com/office/drawing/2014/main" id="{DCDECE12-2A89-4EFC-AEED-8C7DE349432D}"/>
+                <a16:creationId xmlns:a16="http://schemas.microsoft.com/office/drawing/2014/main" id="{EC3F17C8-9D46-43C5-9EBE-89AB5C4490D3}"/>
               </a:ext>
             </a:extLst>
           </p:cNvPr>
@@ -17591,7 +17591,7 @@
           <p:cNvPr id="24" name="">
             <a:extLst xmlns:a="http://schemas.openxmlformats.org/drawingml/2006/main">
               <a:ext uri="{FF2B5EF4-FFF2-40B4-BE49-F238E27FC236}">
-                <a16:creationId xmlns:a16="http://schemas.microsoft.com/office/drawing/2014/main" id="{88A9658E-118D-41CF-A070-4F1506BA6CF1}"/>
+                <a16:creationId xmlns:a16="http://schemas.microsoft.com/office/drawing/2014/main" id="{AB8071FD-46BD-4678-B67A-C5B37D16A412}"/>
               </a:ext>
             </a:extLst>
           </p:cNvPr>
@@ -17648,7 +17648,7 @@
           <p:cNvPr id="25" name="">
             <a:extLst xmlns:a="http://schemas.openxmlformats.org/drawingml/2006/main">
               <a:ext uri="{FF2B5EF4-FFF2-40B4-BE49-F238E27FC236}">
-                <a16:creationId xmlns:a16="http://schemas.microsoft.com/office/drawing/2014/main" id="{6D1EC4CB-17EA-4602-A687-AF819E029922}"/>
+                <a16:creationId xmlns:a16="http://schemas.microsoft.com/office/drawing/2014/main" id="{DADF7032-AC37-4E01-B0DE-5D27D95C4951}"/>
               </a:ext>
             </a:extLst>
           </p:cNvPr>
@@ -17678,7 +17678,7 @@
           <p:cNvPr id="26" name="">
             <a:extLst xmlns:a="http://schemas.openxmlformats.org/drawingml/2006/main">
               <a:ext uri="{FF2B5EF4-FFF2-40B4-BE49-F238E27FC236}">
-                <a16:creationId xmlns:a16="http://schemas.microsoft.com/office/drawing/2014/main" id="{434C030C-BA14-413C-9D04-26C8C5A6D71D}"/>
+                <a16:creationId xmlns:a16="http://schemas.microsoft.com/office/drawing/2014/main" id="{87C5411F-E544-4C96-B280-3098423A877D}"/>
               </a:ext>
             </a:extLst>
           </p:cNvPr>
@@ -17735,7 +17735,7 @@
           <p:cNvPr id="27" name="">
             <a:extLst xmlns:a="http://schemas.openxmlformats.org/drawingml/2006/main">
               <a:ext uri="{FF2B5EF4-FFF2-40B4-BE49-F238E27FC236}">
-                <a16:creationId xmlns:a16="http://schemas.microsoft.com/office/drawing/2014/main" id="{8D86B03C-18D8-499B-AA93-21BB161BFE0C}"/>
+                <a16:creationId xmlns:a16="http://schemas.microsoft.com/office/drawing/2014/main" id="{32EFABF8-3859-46CA-AD07-E8E44FCCD24B}"/>
               </a:ext>
             </a:extLst>
           </p:cNvPr>
@@ -17792,7 +17792,7 @@
           <p:cNvPr id="28" name="">
             <a:extLst xmlns:a="http://schemas.openxmlformats.org/drawingml/2006/main">
               <a:ext uri="{FF2B5EF4-FFF2-40B4-BE49-F238E27FC236}">
-                <a16:creationId xmlns:a16="http://schemas.microsoft.com/office/drawing/2014/main" id="{F202A742-B089-4221-A924-4D94BDFCC6BC}"/>
+                <a16:creationId xmlns:a16="http://schemas.microsoft.com/office/drawing/2014/main" id="{35CF9551-6212-42B0-991E-180185DD8562}"/>
               </a:ext>
             </a:extLst>
           </p:cNvPr>
@@ -17824,7 +17824,7 @@
           <p:cNvPr id="29" name="">
             <a:extLst xmlns:a="http://schemas.openxmlformats.org/drawingml/2006/main">
               <a:ext uri="{FF2B5EF4-FFF2-40B4-BE49-F238E27FC236}">
-                <a16:creationId xmlns:a16="http://schemas.microsoft.com/office/drawing/2014/main" id="{20041414-0B5A-4037-B1E1-51849E4B881E}"/>
+                <a16:creationId xmlns:a16="http://schemas.microsoft.com/office/drawing/2014/main" id="{A5FB7206-ED02-4679-95A9-A5F246C980C3}"/>
               </a:ext>
             </a:extLst>
           </p:cNvPr>
@@ -17879,7 +17879,7 @@
     </p:spTree>
     <p:extLst>
       <p:ext uri="{BB962C8B-B14F-4D97-AF65-F5344CB8AC3E}">
-        <p14:creationId xmlns:p14="http://schemas.microsoft.com/office/powerpoint/2010/main" val="1614683177"/>
+        <p14:creationId xmlns:p14="http://schemas.microsoft.com/office/powerpoint/2010/main" val="635999458"/>
       </p:ext>
     </p:extLst>
   </p:cSld>
@@ -17910,7 +17910,7 @@
           <p:cNvPr id="23" name="">
             <a:extLst xmlns:a="http://schemas.openxmlformats.org/drawingml/2006/main">
               <a:ext uri="{FF2B5EF4-FFF2-40B4-BE49-F238E27FC236}">
-                <a16:creationId xmlns:a16="http://schemas.microsoft.com/office/drawing/2014/main" id="{DD463333-C207-40A9-997A-EDABD92AF416}"/>
+                <a16:creationId xmlns:a16="http://schemas.microsoft.com/office/drawing/2014/main" id="{F2B12053-82B2-49CF-9902-4C6CE5360448}"/>
               </a:ext>
             </a:extLst>
           </p:cNvPr>
@@ -17967,7 +17967,7 @@
           <p:cNvPr id="2" name="">
             <a:extLst xmlns:a="http://schemas.openxmlformats.org/drawingml/2006/main">
               <a:ext uri="{FF2B5EF4-FFF2-40B4-BE49-F238E27FC236}">
-                <a16:creationId xmlns:a16="http://schemas.microsoft.com/office/drawing/2014/main" id="{E70848BC-FE71-492D-ACC8-49B0A11BB5BD}"/>
+                <a16:creationId xmlns:a16="http://schemas.microsoft.com/office/drawing/2014/main" id="{0177530A-30BE-45D9-A4BE-99CD35262AE1}"/>
               </a:ext>
             </a:extLst>
           </p:cNvPr>
@@ -18024,7 +18024,7 @@
           <p:cNvPr id="3" name="">
             <a:extLst xmlns:a="http://schemas.openxmlformats.org/drawingml/2006/main">
               <a:ext uri="{FF2B5EF4-FFF2-40B4-BE49-F238E27FC236}">
-                <a16:creationId xmlns:a16="http://schemas.microsoft.com/office/drawing/2014/main" id="{81130796-A622-4754-8771-1E9DD33ECC4C}"/>
+                <a16:creationId xmlns:a16="http://schemas.microsoft.com/office/drawing/2014/main" id="{D0885157-3A91-4418-A6B5-DA5F770FCDD0}"/>
               </a:ext>
             </a:extLst>
           </p:cNvPr>
@@ -18054,7 +18054,7 @@
           <p:cNvPr id="4" name="">
             <a:extLst xmlns:a="http://schemas.openxmlformats.org/drawingml/2006/main">
               <a:ext uri="{FF2B5EF4-FFF2-40B4-BE49-F238E27FC236}">
-                <a16:creationId xmlns:a16="http://schemas.microsoft.com/office/drawing/2014/main" id="{ECD03EDF-CE35-4D52-A8D7-A8DC5FA6FAE2}"/>
+                <a16:creationId xmlns:a16="http://schemas.microsoft.com/office/drawing/2014/main" id="{C17AC5C1-D347-41A9-95A2-7C01AA90904A}"/>
               </a:ext>
             </a:extLst>
           </p:cNvPr>
@@ -18111,7 +18111,7 @@
           <p:cNvPr id="5" name="">
             <a:extLst xmlns:a="http://schemas.openxmlformats.org/drawingml/2006/main">
               <a:ext uri="{FF2B5EF4-FFF2-40B4-BE49-F238E27FC236}">
-                <a16:creationId xmlns:a16="http://schemas.microsoft.com/office/drawing/2014/main" id="{2A1054B7-984D-448A-B828-75EA6132AA18}"/>
+                <a16:creationId xmlns:a16="http://schemas.microsoft.com/office/drawing/2014/main" id="{727EB1F0-A29F-4157-8706-6096EADFFDE3}"/>
               </a:ext>
             </a:extLst>
           </p:cNvPr>
@@ -18168,7 +18168,7 @@
           <p:cNvPr id="6" name="">
             <a:extLst xmlns:a="http://schemas.openxmlformats.org/drawingml/2006/main">
               <a:ext uri="{FF2B5EF4-FFF2-40B4-BE49-F238E27FC236}">
-                <a16:creationId xmlns:a16="http://schemas.microsoft.com/office/drawing/2014/main" id="{D06D3A7E-CE6B-4699-AAC3-985CDDC0BA68}"/>
+                <a16:creationId xmlns:a16="http://schemas.microsoft.com/office/drawing/2014/main" id="{8034456C-076A-4928-BB1E-B4C35AC23ABA}"/>
               </a:ext>
             </a:extLst>
           </p:cNvPr>
@@ -18225,7 +18225,7 @@
           <p:cNvPr id="7" name="">
             <a:extLst xmlns:a="http://schemas.openxmlformats.org/drawingml/2006/main">
               <a:ext uri="{FF2B5EF4-FFF2-40B4-BE49-F238E27FC236}">
-                <a16:creationId xmlns:a16="http://schemas.microsoft.com/office/drawing/2014/main" id="{DC2AAAB8-D3AE-4159-91F2-ADAF1ABD59D7}"/>
+                <a16:creationId xmlns:a16="http://schemas.microsoft.com/office/drawing/2014/main" id="{81B98D4E-E723-464C-ADDF-7AB87BA5C4D4}"/>
               </a:ext>
             </a:extLst>
           </p:cNvPr>
@@ -18282,7 +18282,7 @@
           <p:cNvPr id="8" name="">
             <a:extLst xmlns:a="http://schemas.openxmlformats.org/drawingml/2006/main">
               <a:ext uri="{FF2B5EF4-FFF2-40B4-BE49-F238E27FC236}">
-                <a16:creationId xmlns:a16="http://schemas.microsoft.com/office/drawing/2014/main" id="{C12236D6-A51B-4F15-BFB5-461FBB34D149}"/>
+                <a16:creationId xmlns:a16="http://schemas.microsoft.com/office/drawing/2014/main" id="{EBA4D205-0B0E-49B3-B983-C1FD9D059409}"/>
               </a:ext>
             </a:extLst>
           </p:cNvPr>
@@ -18339,7 +18339,7 @@
           <p:cNvPr id="9" name="">
             <a:extLst xmlns:a="http://schemas.openxmlformats.org/drawingml/2006/main">
               <a:ext uri="{FF2B5EF4-FFF2-40B4-BE49-F238E27FC236}">
-                <a16:creationId xmlns:a16="http://schemas.microsoft.com/office/drawing/2014/main" id="{61D0EAC3-0A8E-49C4-9DF3-243C5B09A896}"/>
+                <a16:creationId xmlns:a16="http://schemas.microsoft.com/office/drawing/2014/main" id="{9CF49D6B-3500-4691-9C82-1C60C014BE9E}"/>
               </a:ext>
             </a:extLst>
           </p:cNvPr>
@@ -18369,7 +18369,7 @@
           <p:cNvPr id="10" name="">
             <a:extLst xmlns:a="http://schemas.openxmlformats.org/drawingml/2006/main">
               <a:ext uri="{FF2B5EF4-FFF2-40B4-BE49-F238E27FC236}">
-                <a16:creationId xmlns:a16="http://schemas.microsoft.com/office/drawing/2014/main" id="{E3A5FF26-CC8F-4484-8C7B-3C73E872365B}"/>
+                <a16:creationId xmlns:a16="http://schemas.microsoft.com/office/drawing/2014/main" id="{4B108A0E-38FD-40D8-8726-167C24E73396}"/>
               </a:ext>
             </a:extLst>
           </p:cNvPr>
@@ -18426,7 +18426,7 @@
           <p:cNvPr id="11" name="">
             <a:extLst xmlns:a="http://schemas.openxmlformats.org/drawingml/2006/main">
               <a:ext uri="{FF2B5EF4-FFF2-40B4-BE49-F238E27FC236}">
-                <a16:creationId xmlns:a16="http://schemas.microsoft.com/office/drawing/2014/main" id="{C81BA04C-BB7C-4D68-913C-FA02C0349098}"/>
+                <a16:creationId xmlns:a16="http://schemas.microsoft.com/office/drawing/2014/main" id="{081E4D47-DF2E-4867-96BA-3226A93C145F}"/>
               </a:ext>
             </a:extLst>
           </p:cNvPr>
@@ -18483,7 +18483,7 @@
           <p:cNvPr id="12" name="">
             <a:extLst xmlns:a="http://schemas.openxmlformats.org/drawingml/2006/main">
               <a:ext uri="{FF2B5EF4-FFF2-40B4-BE49-F238E27FC236}">
-                <a16:creationId xmlns:a16="http://schemas.microsoft.com/office/drawing/2014/main" id="{2EAA7AA0-AA08-4591-8258-CB7BF0D0A3FA}"/>
+                <a16:creationId xmlns:a16="http://schemas.microsoft.com/office/drawing/2014/main" id="{246EF373-7035-43BB-BF95-0533904D4908}"/>
               </a:ext>
             </a:extLst>
           </p:cNvPr>
@@ -18513,7 +18513,7 @@
           <p:cNvPr id="13" name="">
             <a:extLst xmlns:a="http://schemas.openxmlformats.org/drawingml/2006/main">
               <a:ext uri="{FF2B5EF4-FFF2-40B4-BE49-F238E27FC236}">
-                <a16:creationId xmlns:a16="http://schemas.microsoft.com/office/drawing/2014/main" id="{E43B1B24-0D73-4E04-A553-50695337CB2C}"/>
+                <a16:creationId xmlns:a16="http://schemas.microsoft.com/office/drawing/2014/main" id="{F91C2242-38CA-48E8-B019-5E608071FD0F}"/>
               </a:ext>
             </a:extLst>
           </p:cNvPr>
@@ -18570,7 +18570,7 @@
           <p:cNvPr id="14" name="">
             <a:extLst xmlns:a="http://schemas.openxmlformats.org/drawingml/2006/main">
               <a:ext uri="{FF2B5EF4-FFF2-40B4-BE49-F238E27FC236}">
-                <a16:creationId xmlns:a16="http://schemas.microsoft.com/office/drawing/2014/main" id="{681A44F7-AC2D-4151-ABC0-1BE4AA1FEBD5}"/>
+                <a16:creationId xmlns:a16="http://schemas.microsoft.com/office/drawing/2014/main" id="{FC9EB93B-16E7-4953-8C9E-8016D0A512E6}"/>
               </a:ext>
             </a:extLst>
           </p:cNvPr>
@@ -18627,7 +18627,7 @@
           <p:cNvPr id="15" name="">
             <a:extLst xmlns:a="http://schemas.openxmlformats.org/drawingml/2006/main">
               <a:ext uri="{FF2B5EF4-FFF2-40B4-BE49-F238E27FC236}">
-                <a16:creationId xmlns:a16="http://schemas.microsoft.com/office/drawing/2014/main" id="{2C354E92-195A-473D-BD29-308F9EEAC4FB}"/>
+                <a16:creationId xmlns:a16="http://schemas.microsoft.com/office/drawing/2014/main" id="{9BF4A37E-5B3D-494D-BDE4-B2D9500AB22D}"/>
               </a:ext>
             </a:extLst>
           </p:cNvPr>
@@ -18684,7 +18684,7 @@
           <p:cNvPr id="16" name="">
             <a:extLst xmlns:a="http://schemas.openxmlformats.org/drawingml/2006/main">
               <a:ext uri="{FF2B5EF4-FFF2-40B4-BE49-F238E27FC236}">
-                <a16:creationId xmlns:a16="http://schemas.microsoft.com/office/drawing/2014/main" id="{05BAED82-2B98-4366-A5C1-F71D4F8CCB1B}"/>
+                <a16:creationId xmlns:a16="http://schemas.microsoft.com/office/drawing/2014/main" id="{23277EA0-53EE-4C35-B1BF-C52A30C46564}"/>
               </a:ext>
             </a:extLst>
           </p:cNvPr>
@@ -18741,7 +18741,7 @@
           <p:cNvPr id="17" name="">
             <a:extLst xmlns:a="http://schemas.openxmlformats.org/drawingml/2006/main">
               <a:ext uri="{FF2B5EF4-FFF2-40B4-BE49-F238E27FC236}">
-                <a16:creationId xmlns:a16="http://schemas.microsoft.com/office/drawing/2014/main" id="{0057440B-8CD4-4D75-AD35-BC8B60536977}"/>
+                <a16:creationId xmlns:a16="http://schemas.microsoft.com/office/drawing/2014/main" id="{DDF61E4E-887A-4E06-93EE-BC9936D60B25}"/>
               </a:ext>
             </a:extLst>
           </p:cNvPr>
@@ -18771,7 +18771,7 @@
           <p:cNvPr id="18" name="">
             <a:extLst xmlns:a="http://schemas.openxmlformats.org/drawingml/2006/main">
               <a:ext uri="{FF2B5EF4-FFF2-40B4-BE49-F238E27FC236}">
-                <a16:creationId xmlns:a16="http://schemas.microsoft.com/office/drawing/2014/main" id="{10317132-59B0-4637-BEF6-9A9BB18E56C0}"/>
+                <a16:creationId xmlns:a16="http://schemas.microsoft.com/office/drawing/2014/main" id="{15AC314C-758D-4C9D-9E99-A8195A51B71D}"/>
               </a:ext>
             </a:extLst>
           </p:cNvPr>
@@ -18828,7 +18828,7 @@
           <p:cNvPr id="19" name="">
             <a:extLst xmlns:a="http://schemas.openxmlformats.org/drawingml/2006/main">
               <a:ext uri="{FF2B5EF4-FFF2-40B4-BE49-F238E27FC236}">
-                <a16:creationId xmlns:a16="http://schemas.microsoft.com/office/drawing/2014/main" id="{BEE78F75-C567-4CA2-B3E2-CE1F164FE11D}"/>
+                <a16:creationId xmlns:a16="http://schemas.microsoft.com/office/drawing/2014/main" id="{265F81D6-5D97-4E83-8344-26E57EA2E5E2}"/>
               </a:ext>
             </a:extLst>
           </p:cNvPr>
@@ -18885,7 +18885,7 @@
           <p:cNvPr id="20" name="">
             <a:extLst xmlns:a="http://schemas.openxmlformats.org/drawingml/2006/main">
               <a:ext uri="{FF2B5EF4-FFF2-40B4-BE49-F238E27FC236}">
-                <a16:creationId xmlns:a16="http://schemas.microsoft.com/office/drawing/2014/main" id="{E0160E7B-8F17-4846-993D-E9548CC7082D}"/>
+                <a16:creationId xmlns:a16="http://schemas.microsoft.com/office/drawing/2014/main" id="{3727211E-2F30-455C-AAEF-DDC77C303794}"/>
               </a:ext>
             </a:extLst>
           </p:cNvPr>
@@ -18915,7 +18915,7 @@
           <p:cNvPr id="21" name="">
             <a:extLst xmlns:a="http://schemas.openxmlformats.org/drawingml/2006/main">
               <a:ext uri="{FF2B5EF4-FFF2-40B4-BE49-F238E27FC236}">
-                <a16:creationId xmlns:a16="http://schemas.microsoft.com/office/drawing/2014/main" id="{E6118A5D-F20D-48ED-AEB3-531A97039B7B}"/>
+                <a16:creationId xmlns:a16="http://schemas.microsoft.com/office/drawing/2014/main" id="{761819CA-76D4-4E58-ADF0-436B5ACCB04E}"/>
               </a:ext>
             </a:extLst>
           </p:cNvPr>
@@ -18972,7 +18972,7 @@
           <p:cNvPr id="22" name="">
             <a:extLst xmlns:a="http://schemas.openxmlformats.org/drawingml/2006/main">
               <a:ext uri="{FF2B5EF4-FFF2-40B4-BE49-F238E27FC236}">
-                <a16:creationId xmlns:a16="http://schemas.microsoft.com/office/drawing/2014/main" id="{C0BE1DFD-4E66-448B-8105-358A0B32F672}"/>
+                <a16:creationId xmlns:a16="http://schemas.microsoft.com/office/drawing/2014/main" id="{B9BD8B18-74B6-4FAD-9FCE-8DF9AE4A1393}"/>
               </a:ext>
             </a:extLst>
           </p:cNvPr>
@@ -19027,7 +19027,7 @@
     </p:spTree>
     <p:extLst>
       <p:ext uri="{BB962C8B-B14F-4D97-AF65-F5344CB8AC3E}">
-        <p14:creationId xmlns:p14="http://schemas.microsoft.com/office/powerpoint/2010/main" val="605771556"/>
+        <p14:creationId xmlns:p14="http://schemas.microsoft.com/office/powerpoint/2010/main" val="1246419343"/>
       </p:ext>
     </p:extLst>
   </p:cSld>
@@ -19058,7 +19058,7 @@
           <p:cNvPr id="28" name="">
             <a:extLst xmlns:a="http://schemas.openxmlformats.org/drawingml/2006/main">
               <a:ext uri="{FF2B5EF4-FFF2-40B4-BE49-F238E27FC236}">
-                <a16:creationId xmlns:a16="http://schemas.microsoft.com/office/drawing/2014/main" id="{C1ED027C-6F11-446C-BC74-12C26D3E5292}"/>
+                <a16:creationId xmlns:a16="http://schemas.microsoft.com/office/drawing/2014/main" id="{92698191-F110-4D16-B2C9-DE8A7F0C513B}"/>
               </a:ext>
             </a:extLst>
           </p:cNvPr>
@@ -19115,7 +19115,7 @@
           <p:cNvPr id="2" name="">
             <a:extLst xmlns:a="http://schemas.openxmlformats.org/drawingml/2006/main">
               <a:ext uri="{FF2B5EF4-FFF2-40B4-BE49-F238E27FC236}">
-                <a16:creationId xmlns:a16="http://schemas.microsoft.com/office/drawing/2014/main" id="{2F294587-4B70-462B-B80F-D85931486BA7}"/>
+                <a16:creationId xmlns:a16="http://schemas.microsoft.com/office/drawing/2014/main" id="{70094C06-A04A-4920-B2E8-1A95B4486A7F}"/>
               </a:ext>
             </a:extLst>
           </p:cNvPr>
@@ -19172,7 +19172,7 @@
           <p:cNvPr id="3" name="">
             <a:extLst xmlns:a="http://schemas.openxmlformats.org/drawingml/2006/main">
               <a:ext uri="{FF2B5EF4-FFF2-40B4-BE49-F238E27FC236}">
-                <a16:creationId xmlns:a16="http://schemas.microsoft.com/office/drawing/2014/main" id="{8F784E3F-42D1-478A-A5E3-DC19FD928017}"/>
+                <a16:creationId xmlns:a16="http://schemas.microsoft.com/office/drawing/2014/main" id="{44B6B2C7-EB0C-4768-89CE-0D48C667AA9E}"/>
               </a:ext>
             </a:extLst>
           </p:cNvPr>
@@ -19202,7 +19202,7 @@
           <p:cNvPr id="4" name="">
             <a:extLst xmlns:a="http://schemas.openxmlformats.org/drawingml/2006/main">
               <a:ext uri="{FF2B5EF4-FFF2-40B4-BE49-F238E27FC236}">
-                <a16:creationId xmlns:a16="http://schemas.microsoft.com/office/drawing/2014/main" id="{95A2D11C-A23D-487C-B743-CB1F60498B7E}"/>
+                <a16:creationId xmlns:a16="http://schemas.microsoft.com/office/drawing/2014/main" id="{D3AAEEC9-9E5E-4C7B-AE87-680D72D35911}"/>
               </a:ext>
             </a:extLst>
           </p:cNvPr>
@@ -19259,7 +19259,7 @@
           <p:cNvPr id="5" name="">
             <a:extLst xmlns:a="http://schemas.openxmlformats.org/drawingml/2006/main">
               <a:ext uri="{FF2B5EF4-FFF2-40B4-BE49-F238E27FC236}">
-                <a16:creationId xmlns:a16="http://schemas.microsoft.com/office/drawing/2014/main" id="{403B2D8B-7F30-46A4-A397-48401AB8F98B}"/>
+                <a16:creationId xmlns:a16="http://schemas.microsoft.com/office/drawing/2014/main" id="{AD57A793-122A-43CD-93E3-4FDE4B5BE482}"/>
               </a:ext>
             </a:extLst>
           </p:cNvPr>
@@ -19316,7 +19316,7 @@
           <p:cNvPr id="6" name="">
             <a:extLst xmlns:a="http://schemas.openxmlformats.org/drawingml/2006/main">
               <a:ext uri="{FF2B5EF4-FFF2-40B4-BE49-F238E27FC236}">
-                <a16:creationId xmlns:a16="http://schemas.microsoft.com/office/drawing/2014/main" id="{22464916-95B9-4E21-BD3B-4B24DA33196F}"/>
+                <a16:creationId xmlns:a16="http://schemas.microsoft.com/office/drawing/2014/main" id="{0075E15A-2073-4910-B9BB-AD69F6AB3350}"/>
               </a:ext>
             </a:extLst>
           </p:cNvPr>
@@ -19373,7 +19373,7 @@
           <p:cNvPr id="7" name="">
             <a:extLst xmlns:a="http://schemas.openxmlformats.org/drawingml/2006/main">
               <a:ext uri="{FF2B5EF4-FFF2-40B4-BE49-F238E27FC236}">
-                <a16:creationId xmlns:a16="http://schemas.microsoft.com/office/drawing/2014/main" id="{AFC3B994-EBCC-4F07-ACF4-6B41F45DC373}"/>
+                <a16:creationId xmlns:a16="http://schemas.microsoft.com/office/drawing/2014/main" id="{9AC6738C-5185-48A1-ACFF-B0EEAFF76A28}"/>
               </a:ext>
             </a:extLst>
           </p:cNvPr>
@@ -19403,7 +19403,7 @@
           <p:cNvPr id="8" name="">
             <a:extLst xmlns:a="http://schemas.openxmlformats.org/drawingml/2006/main">
               <a:ext uri="{FF2B5EF4-FFF2-40B4-BE49-F238E27FC236}">
-                <a16:creationId xmlns:a16="http://schemas.microsoft.com/office/drawing/2014/main" id="{DCD9719A-A8F4-49F5-9D5C-076FA9681FD7}"/>
+                <a16:creationId xmlns:a16="http://schemas.microsoft.com/office/drawing/2014/main" id="{82463C98-315F-43F8-BEF0-FFD559A37E02}"/>
               </a:ext>
             </a:extLst>
           </p:cNvPr>
@@ -19460,7 +19460,7 @@
           <p:cNvPr id="9" name="">
             <a:extLst xmlns:a="http://schemas.openxmlformats.org/drawingml/2006/main">
               <a:ext uri="{FF2B5EF4-FFF2-40B4-BE49-F238E27FC236}">
-                <a16:creationId xmlns:a16="http://schemas.microsoft.com/office/drawing/2014/main" id="{DFD66534-D586-4110-B39F-EFC253B3674A}"/>
+                <a16:creationId xmlns:a16="http://schemas.microsoft.com/office/drawing/2014/main" id="{D68477E4-E72F-49A2-BB5C-B418F9A60E98}"/>
               </a:ext>
             </a:extLst>
           </p:cNvPr>
@@ -19490,7 +19490,7 @@
           <p:cNvPr id="10" name="">
             <a:extLst xmlns:a="http://schemas.openxmlformats.org/drawingml/2006/main">
               <a:ext uri="{FF2B5EF4-FFF2-40B4-BE49-F238E27FC236}">
-                <a16:creationId xmlns:a16="http://schemas.microsoft.com/office/drawing/2014/main" id="{5AAF01C9-CB56-4D5D-9A1E-32BDE3B01505}"/>
+                <a16:creationId xmlns:a16="http://schemas.microsoft.com/office/drawing/2014/main" id="{8C28DD83-0A1B-4481-AD88-878FB6251D07}"/>
               </a:ext>
             </a:extLst>
           </p:cNvPr>
@@ -19547,7 +19547,7 @@
           <p:cNvPr id="11" name="">
             <a:extLst xmlns:a="http://schemas.openxmlformats.org/drawingml/2006/main">
               <a:ext uri="{FF2B5EF4-FFF2-40B4-BE49-F238E27FC236}">
-                <a16:creationId xmlns:a16="http://schemas.microsoft.com/office/drawing/2014/main" id="{166F5ABA-7E45-45A2-BFF8-EE4D8BB83D14}"/>
+                <a16:creationId xmlns:a16="http://schemas.microsoft.com/office/drawing/2014/main" id="{FE19FA90-112B-4417-B35F-853493D77FD4}"/>
               </a:ext>
             </a:extLst>
           </p:cNvPr>
@@ -19577,7 +19577,7 @@
           <p:cNvPr id="12" name="">
             <a:extLst xmlns:a="http://schemas.openxmlformats.org/drawingml/2006/main">
               <a:ext uri="{FF2B5EF4-FFF2-40B4-BE49-F238E27FC236}">
-                <a16:creationId xmlns:a16="http://schemas.microsoft.com/office/drawing/2014/main" id="{64356681-FB63-41EE-83D8-0BD2AA47E46A}"/>
+                <a16:creationId xmlns:a16="http://schemas.microsoft.com/office/drawing/2014/main" id="{FA40BB50-74E2-4E9E-97B1-51FE1FA409DA}"/>
               </a:ext>
             </a:extLst>
           </p:cNvPr>
@@ -19634,7 +19634,7 @@
           <p:cNvPr id="13" name="">
             <a:extLst xmlns:a="http://schemas.openxmlformats.org/drawingml/2006/main">
               <a:ext uri="{FF2B5EF4-FFF2-40B4-BE49-F238E27FC236}">
-                <a16:creationId xmlns:a16="http://schemas.microsoft.com/office/drawing/2014/main" id="{1413F7A1-B4BC-4272-B195-2DBF7D9DC1E4}"/>
+                <a16:creationId xmlns:a16="http://schemas.microsoft.com/office/drawing/2014/main" id="{83ABCBD5-E1F1-406F-A6C2-598128989AE2}"/>
               </a:ext>
             </a:extLst>
           </p:cNvPr>
@@ -19664,7 +19664,7 @@
           <p:cNvPr id="14" name="">
             <a:extLst xmlns:a="http://schemas.openxmlformats.org/drawingml/2006/main">
               <a:ext uri="{FF2B5EF4-FFF2-40B4-BE49-F238E27FC236}">
-                <a16:creationId xmlns:a16="http://schemas.microsoft.com/office/drawing/2014/main" id="{28BE59B7-13DA-4BBC-9AF9-BE65F33C6813}"/>
+                <a16:creationId xmlns:a16="http://schemas.microsoft.com/office/drawing/2014/main" id="{D153E6DF-857B-43D6-B1BD-A66DE2602B98}"/>
               </a:ext>
             </a:extLst>
           </p:cNvPr>
@@ -19721,7 +19721,7 @@
           <p:cNvPr id="15" name="">
             <a:extLst xmlns:a="http://schemas.openxmlformats.org/drawingml/2006/main">
               <a:ext uri="{FF2B5EF4-FFF2-40B4-BE49-F238E27FC236}">
-                <a16:creationId xmlns:a16="http://schemas.microsoft.com/office/drawing/2014/main" id="{9B965FD1-D4EC-4882-A30B-3F593529995B}"/>
+                <a16:creationId xmlns:a16="http://schemas.microsoft.com/office/drawing/2014/main" id="{4C17478F-46DD-423E-804B-FA0092F8CC75}"/>
               </a:ext>
             </a:extLst>
           </p:cNvPr>
@@ -19751,7 +19751,7 @@
           <p:cNvPr id="16" name="">
             <a:extLst xmlns:a="http://schemas.openxmlformats.org/drawingml/2006/main">
               <a:ext uri="{FF2B5EF4-FFF2-40B4-BE49-F238E27FC236}">
-                <a16:creationId xmlns:a16="http://schemas.microsoft.com/office/drawing/2014/main" id="{166245B5-FBDF-41AA-8B45-72B663F86CBF}"/>
+                <a16:creationId xmlns:a16="http://schemas.microsoft.com/office/drawing/2014/main" id="{5E217FB0-1F2C-4214-954E-D40738A361D2}"/>
               </a:ext>
             </a:extLst>
           </p:cNvPr>
@@ -19808,7 +19808,7 @@
           <p:cNvPr id="17" name="">
             <a:extLst xmlns:a="http://schemas.openxmlformats.org/drawingml/2006/main">
               <a:ext uri="{FF2B5EF4-FFF2-40B4-BE49-F238E27FC236}">
-                <a16:creationId xmlns:a16="http://schemas.microsoft.com/office/drawing/2014/main" id="{A7BA79AC-7246-4DA7-93D8-F68839E58C65}"/>
+                <a16:creationId xmlns:a16="http://schemas.microsoft.com/office/drawing/2014/main" id="{DF1FD3F4-CFB3-4493-B8D0-017201C4EE08}"/>
               </a:ext>
             </a:extLst>
           </p:cNvPr>
@@ -19865,7 +19865,7 @@
           <p:cNvPr id="18" name="">
             <a:extLst xmlns:a="http://schemas.openxmlformats.org/drawingml/2006/main">
               <a:ext uri="{FF2B5EF4-FFF2-40B4-BE49-F238E27FC236}">
-                <a16:creationId xmlns:a16="http://schemas.microsoft.com/office/drawing/2014/main" id="{3B97226F-03F4-406F-B30D-F6D6F2EE6867}"/>
+                <a16:creationId xmlns:a16="http://schemas.microsoft.com/office/drawing/2014/main" id="{42047FFD-E52B-496E-9D22-55492F9957F5}"/>
               </a:ext>
             </a:extLst>
           </p:cNvPr>
@@ -19895,7 +19895,7 @@
           <p:cNvPr id="19" name="">
             <a:extLst xmlns:a="http://schemas.openxmlformats.org/drawingml/2006/main">
               <a:ext uri="{FF2B5EF4-FFF2-40B4-BE49-F238E27FC236}">
-                <a16:creationId xmlns:a16="http://schemas.microsoft.com/office/drawing/2014/main" id="{9A38B589-CB31-467F-8122-DDA30D50DE58}"/>
+                <a16:creationId xmlns:a16="http://schemas.microsoft.com/office/drawing/2014/main" id="{157C00CF-6B76-4093-A6EA-A45B118CC205}"/>
               </a:ext>
             </a:extLst>
           </p:cNvPr>
@@ -19952,7 +19952,7 @@
           <p:cNvPr id="20" name="">
             <a:extLst xmlns:a="http://schemas.openxmlformats.org/drawingml/2006/main">
               <a:ext uri="{FF2B5EF4-FFF2-40B4-BE49-F238E27FC236}">
-                <a16:creationId xmlns:a16="http://schemas.microsoft.com/office/drawing/2014/main" id="{4372254D-F60D-4965-BE10-9E99BB916945}"/>
+                <a16:creationId xmlns:a16="http://schemas.microsoft.com/office/drawing/2014/main" id="{87D0C118-A268-49D7-A709-DD373759D4A5}"/>
               </a:ext>
             </a:extLst>
           </p:cNvPr>
@@ -19982,7 +19982,7 @@
           <p:cNvPr id="21" name="">
             <a:extLst xmlns:a="http://schemas.openxmlformats.org/drawingml/2006/main">
               <a:ext uri="{FF2B5EF4-FFF2-40B4-BE49-F238E27FC236}">
-                <a16:creationId xmlns:a16="http://schemas.microsoft.com/office/drawing/2014/main" id="{85DDC879-0BC5-4A42-8409-38B184886E0C}"/>
+                <a16:creationId xmlns:a16="http://schemas.microsoft.com/office/drawing/2014/main" id="{F34A1DDB-9B95-4CAE-BA63-697D0EA173A0}"/>
               </a:ext>
             </a:extLst>
           </p:cNvPr>
@@ -20039,7 +20039,7 @@
           <p:cNvPr id="22" name="">
             <a:extLst xmlns:a="http://schemas.openxmlformats.org/drawingml/2006/main">
               <a:ext uri="{FF2B5EF4-FFF2-40B4-BE49-F238E27FC236}">
-                <a16:creationId xmlns:a16="http://schemas.microsoft.com/office/drawing/2014/main" id="{193E6AE4-3EAC-4507-89A1-D6DE2127BD54}"/>
+                <a16:creationId xmlns:a16="http://schemas.microsoft.com/office/drawing/2014/main" id="{3E07BD8F-8AE7-45C2-9458-F29E5763DBA6}"/>
               </a:ext>
             </a:extLst>
           </p:cNvPr>
@@ -20069,7 +20069,7 @@
           <p:cNvPr id="23" name="">
             <a:extLst xmlns:a="http://schemas.openxmlformats.org/drawingml/2006/main">
               <a:ext uri="{FF2B5EF4-FFF2-40B4-BE49-F238E27FC236}">
-                <a16:creationId xmlns:a16="http://schemas.microsoft.com/office/drawing/2014/main" id="{682320E6-F6B9-4407-82B8-F5A106D367EE}"/>
+                <a16:creationId xmlns:a16="http://schemas.microsoft.com/office/drawing/2014/main" id="{F4B6F8ED-F67B-451A-A617-DB79862C3521}"/>
               </a:ext>
             </a:extLst>
           </p:cNvPr>
@@ -20126,7 +20126,7 @@
           <p:cNvPr id="24" name="">
             <a:extLst xmlns:a="http://schemas.openxmlformats.org/drawingml/2006/main">
               <a:ext uri="{FF2B5EF4-FFF2-40B4-BE49-F238E27FC236}">
-                <a16:creationId xmlns:a16="http://schemas.microsoft.com/office/drawing/2014/main" id="{31AD44BE-508C-4A2F-AD1B-B89979B775CF}"/>
+                <a16:creationId xmlns:a16="http://schemas.microsoft.com/office/drawing/2014/main" id="{84E85454-70BD-4CBB-9FD1-49DF8EB22ECF}"/>
               </a:ext>
             </a:extLst>
           </p:cNvPr>
@@ -20156,7 +20156,7 @@
           <p:cNvPr id="25" name="">
             <a:extLst xmlns:a="http://schemas.openxmlformats.org/drawingml/2006/main">
               <a:ext uri="{FF2B5EF4-FFF2-40B4-BE49-F238E27FC236}">
-                <a16:creationId xmlns:a16="http://schemas.microsoft.com/office/drawing/2014/main" id="{9493D33F-E162-4A52-945F-15A7DDA2B69F}"/>
+                <a16:creationId xmlns:a16="http://schemas.microsoft.com/office/drawing/2014/main" id="{7E4FF886-1E00-4B03-B81B-3B13DB60DB64}"/>
               </a:ext>
             </a:extLst>
           </p:cNvPr>
@@ -20213,7 +20213,7 @@
           <p:cNvPr id="26" name="">
             <a:extLst xmlns:a="http://schemas.openxmlformats.org/drawingml/2006/main">
               <a:ext uri="{FF2B5EF4-FFF2-40B4-BE49-F238E27FC236}">
-                <a16:creationId xmlns:a16="http://schemas.microsoft.com/office/drawing/2014/main" id="{1DA064D7-52C4-48C5-BDCF-A546F263176C}"/>
+                <a16:creationId xmlns:a16="http://schemas.microsoft.com/office/drawing/2014/main" id="{9F549E99-7553-4538-933D-289608A5A7B2}"/>
               </a:ext>
             </a:extLst>
           </p:cNvPr>
@@ -20243,7 +20243,7 @@
           <p:cNvPr id="27" name="">
             <a:extLst xmlns:a="http://schemas.openxmlformats.org/drawingml/2006/main">
               <a:ext uri="{FF2B5EF4-FFF2-40B4-BE49-F238E27FC236}">
-                <a16:creationId xmlns:a16="http://schemas.microsoft.com/office/drawing/2014/main" id="{59079517-B9BE-4964-8442-F56A9C5B0983}"/>
+                <a16:creationId xmlns:a16="http://schemas.microsoft.com/office/drawing/2014/main" id="{91FF44DC-5BD9-4BCF-8196-F395F768F118}"/>
               </a:ext>
             </a:extLst>
           </p:cNvPr>
@@ -20298,7 +20298,7 @@
     </p:spTree>
     <p:extLst>
       <p:ext uri="{BB962C8B-B14F-4D97-AF65-F5344CB8AC3E}">
-        <p14:creationId xmlns:p14="http://schemas.microsoft.com/office/powerpoint/2010/main" val="787542257"/>
+        <p14:creationId xmlns:p14="http://schemas.microsoft.com/office/powerpoint/2010/main" val="963199957"/>
       </p:ext>
     </p:extLst>
   </p:cSld>
@@ -20329,7 +20329,7 @@
           <p:cNvPr id="30" name="">
             <a:extLst xmlns:a="http://schemas.openxmlformats.org/drawingml/2006/main">
               <a:ext uri="{FF2B5EF4-FFF2-40B4-BE49-F238E27FC236}">
-                <a16:creationId xmlns:a16="http://schemas.microsoft.com/office/drawing/2014/main" id="{CE5000EA-DC8B-425D-BC6B-E250C16C3992}"/>
+                <a16:creationId xmlns:a16="http://schemas.microsoft.com/office/drawing/2014/main" id="{9EC8EDE0-DEE8-4A05-9DA3-698FBAE91154}"/>
               </a:ext>
             </a:extLst>
           </p:cNvPr>
@@ -20386,7 +20386,7 @@
           <p:cNvPr id="2" name="">
             <a:extLst xmlns:a="http://schemas.openxmlformats.org/drawingml/2006/main">
               <a:ext uri="{FF2B5EF4-FFF2-40B4-BE49-F238E27FC236}">
-                <a16:creationId xmlns:a16="http://schemas.microsoft.com/office/drawing/2014/main" id="{EC2C3A88-A2E2-4148-8D0A-9F6480BFAB78}"/>
+                <a16:creationId xmlns:a16="http://schemas.microsoft.com/office/drawing/2014/main" id="{0E310E75-3CA5-4FDD-99E9-462053CE9462}"/>
               </a:ext>
             </a:extLst>
           </p:cNvPr>
@@ -20443,7 +20443,7 @@
           <p:cNvPr id="3" name="">
             <a:extLst xmlns:a="http://schemas.openxmlformats.org/drawingml/2006/main">
               <a:ext uri="{FF2B5EF4-FFF2-40B4-BE49-F238E27FC236}">
-                <a16:creationId xmlns:a16="http://schemas.microsoft.com/office/drawing/2014/main" id="{5445680D-B19A-420B-9627-A58A3AC0CC48}"/>
+                <a16:creationId xmlns:a16="http://schemas.microsoft.com/office/drawing/2014/main" id="{763E3E4D-47AE-4688-AECE-9E97BB3C05F4}"/>
               </a:ext>
             </a:extLst>
           </p:cNvPr>
@@ -20473,7 +20473,7 @@
           <p:cNvPr id="4" name="">
             <a:extLst xmlns:a="http://schemas.openxmlformats.org/drawingml/2006/main">
               <a:ext uri="{FF2B5EF4-FFF2-40B4-BE49-F238E27FC236}">
-                <a16:creationId xmlns:a16="http://schemas.microsoft.com/office/drawing/2014/main" id="{263CFB29-56D5-4AA1-9A21-C1D981A347B5}"/>
+                <a16:creationId xmlns:a16="http://schemas.microsoft.com/office/drawing/2014/main" id="{4BBADE03-27D6-4328-9BDE-8A091D58FD8B}"/>
               </a:ext>
             </a:extLst>
           </p:cNvPr>
@@ -20530,7 +20530,7 @@
           <p:cNvPr id="5" name="">
             <a:extLst xmlns:a="http://schemas.openxmlformats.org/drawingml/2006/main">
               <a:ext uri="{FF2B5EF4-FFF2-40B4-BE49-F238E27FC236}">
-                <a16:creationId xmlns:a16="http://schemas.microsoft.com/office/drawing/2014/main" id="{8F1B5103-8ADA-48C1-A8DB-EDA5BDE32C32}"/>
+                <a16:creationId xmlns:a16="http://schemas.microsoft.com/office/drawing/2014/main" id="{9E302921-BEF9-4790-80D0-624EE182643E}"/>
               </a:ext>
             </a:extLst>
           </p:cNvPr>
@@ -20587,7 +20587,7 @@
           <p:cNvPr id="6" name="">
             <a:extLst xmlns:a="http://schemas.openxmlformats.org/drawingml/2006/main">
               <a:ext uri="{FF2B5EF4-FFF2-40B4-BE49-F238E27FC236}">
-                <a16:creationId xmlns:a16="http://schemas.microsoft.com/office/drawing/2014/main" id="{990C99BF-1946-4B67-91A5-535B6368E720}"/>
+                <a16:creationId xmlns:a16="http://schemas.microsoft.com/office/drawing/2014/main" id="{5253B78D-55AE-4C5A-B5EE-FC533C0181A8}"/>
               </a:ext>
             </a:extLst>
           </p:cNvPr>
@@ -20644,7 +20644,7 @@
           <p:cNvPr id="7" name="">
             <a:extLst xmlns:a="http://schemas.openxmlformats.org/drawingml/2006/main">
               <a:ext uri="{FF2B5EF4-FFF2-40B4-BE49-F238E27FC236}">
-                <a16:creationId xmlns:a16="http://schemas.microsoft.com/office/drawing/2014/main" id="{2E5DB113-7754-4114-8106-1D91D776B55F}"/>
+                <a16:creationId xmlns:a16="http://schemas.microsoft.com/office/drawing/2014/main" id="{05C7A7C2-538F-4816-8D01-03244104DF79}"/>
               </a:ext>
             </a:extLst>
           </p:cNvPr>
@@ -20674,7 +20674,7 @@
           <p:cNvPr id="8" name="">
             <a:extLst xmlns:a="http://schemas.openxmlformats.org/drawingml/2006/main">
               <a:ext uri="{FF2B5EF4-FFF2-40B4-BE49-F238E27FC236}">
-                <a16:creationId xmlns:a16="http://schemas.microsoft.com/office/drawing/2014/main" id="{98E9E138-A199-4F3F-88BD-CDB3925FD40B}"/>
+                <a16:creationId xmlns:a16="http://schemas.microsoft.com/office/drawing/2014/main" id="{622B0447-3D87-48E0-94FF-2DA448A96C9E}"/>
               </a:ext>
             </a:extLst>
           </p:cNvPr>
@@ -20731,7 +20731,7 @@
           <p:cNvPr id="9" name="">
             <a:extLst xmlns:a="http://schemas.openxmlformats.org/drawingml/2006/main">
               <a:ext uri="{FF2B5EF4-FFF2-40B4-BE49-F238E27FC236}">
-                <a16:creationId xmlns:a16="http://schemas.microsoft.com/office/drawing/2014/main" id="{BF671042-E985-4001-989B-420BDABCC946}"/>
+                <a16:creationId xmlns:a16="http://schemas.microsoft.com/office/drawing/2014/main" id="{4150E330-7C71-46D4-BA09-A1E0C201F7C1}"/>
               </a:ext>
             </a:extLst>
           </p:cNvPr>
@@ -20761,7 +20761,7 @@
           <p:cNvPr id="10" name="">
             <a:extLst xmlns:a="http://schemas.openxmlformats.org/drawingml/2006/main">
               <a:ext uri="{FF2B5EF4-FFF2-40B4-BE49-F238E27FC236}">
-                <a16:creationId xmlns:a16="http://schemas.microsoft.com/office/drawing/2014/main" id="{8B4DEC65-E68D-48AD-A211-2E04B2F510FB}"/>
+                <a16:creationId xmlns:a16="http://schemas.microsoft.com/office/drawing/2014/main" id="{90D8882F-1F61-4583-A54C-AB11EE563088}"/>
               </a:ext>
             </a:extLst>
           </p:cNvPr>
@@ -20818,7 +20818,7 @@
           <p:cNvPr id="11" name="">
             <a:extLst xmlns:a="http://schemas.openxmlformats.org/drawingml/2006/main">
               <a:ext uri="{FF2B5EF4-FFF2-40B4-BE49-F238E27FC236}">
-                <a16:creationId xmlns:a16="http://schemas.microsoft.com/office/drawing/2014/main" id="{3FF20838-C487-46A5-8B0F-125948E1CA86}"/>
+                <a16:creationId xmlns:a16="http://schemas.microsoft.com/office/drawing/2014/main" id="{DAACD75A-CB48-4AFA-85AC-018ED7E8801A}"/>
               </a:ext>
             </a:extLst>
           </p:cNvPr>
@@ -20848,7 +20848,7 @@
           <p:cNvPr id="12" name="">
             <a:extLst xmlns:a="http://schemas.openxmlformats.org/drawingml/2006/main">
               <a:ext uri="{FF2B5EF4-FFF2-40B4-BE49-F238E27FC236}">
-                <a16:creationId xmlns:a16="http://schemas.microsoft.com/office/drawing/2014/main" id="{7BB4646A-54A9-4370-B751-4B27CB1FD0D9}"/>
+                <a16:creationId xmlns:a16="http://schemas.microsoft.com/office/drawing/2014/main" id="{607BBE23-D3DB-4F77-BDBE-27C485CFF560}"/>
               </a:ext>
             </a:extLst>
           </p:cNvPr>
@@ -20905,7 +20905,7 @@
           <p:cNvPr id="13" name="">
             <a:extLst xmlns:a="http://schemas.openxmlformats.org/drawingml/2006/main">
               <a:ext uri="{FF2B5EF4-FFF2-40B4-BE49-F238E27FC236}">
-                <a16:creationId xmlns:a16="http://schemas.microsoft.com/office/drawing/2014/main" id="{E8D7FFAC-2AF8-4B2A-8B48-A34711A72285}"/>
+                <a16:creationId xmlns:a16="http://schemas.microsoft.com/office/drawing/2014/main" id="{423414F1-6019-4E08-AAD2-4E2FBB3B7480}"/>
               </a:ext>
             </a:extLst>
           </p:cNvPr>
@@ -20935,7 +20935,7 @@
           <p:cNvPr id="14" name="">
             <a:extLst xmlns:a="http://schemas.openxmlformats.org/drawingml/2006/main">
               <a:ext uri="{FF2B5EF4-FFF2-40B4-BE49-F238E27FC236}">
-                <a16:creationId xmlns:a16="http://schemas.microsoft.com/office/drawing/2014/main" id="{B65AF9F1-5BBF-485C-A66F-2AF157F822C5}"/>
+                <a16:creationId xmlns:a16="http://schemas.microsoft.com/office/drawing/2014/main" id="{1113D799-F849-4376-BD84-5C37471D8D10}"/>
               </a:ext>
             </a:extLst>
           </p:cNvPr>
@@ -20992,7 +20992,7 @@
           <p:cNvPr id="15" name="">
             <a:extLst xmlns:a="http://schemas.openxmlformats.org/drawingml/2006/main">
               <a:ext uri="{FF2B5EF4-FFF2-40B4-BE49-F238E27FC236}">
-                <a16:creationId xmlns:a16="http://schemas.microsoft.com/office/drawing/2014/main" id="{2B6A6FDB-9866-4559-9E0D-6767FF91310E}"/>
+                <a16:creationId xmlns:a16="http://schemas.microsoft.com/office/drawing/2014/main" id="{3B994297-49D2-46C3-8F56-22B7029863CF}"/>
               </a:ext>
             </a:extLst>
           </p:cNvPr>
@@ -21022,7 +21022,7 @@
           <p:cNvPr id="16" name="">
             <a:extLst xmlns:a="http://schemas.openxmlformats.org/drawingml/2006/main">
               <a:ext uri="{FF2B5EF4-FFF2-40B4-BE49-F238E27FC236}">
-                <a16:creationId xmlns:a16="http://schemas.microsoft.com/office/drawing/2014/main" id="{689ED5BE-8E90-41F2-B6D0-1124E2082183}"/>
+                <a16:creationId xmlns:a16="http://schemas.microsoft.com/office/drawing/2014/main" id="{20FC7F89-5CEC-4325-9AD8-B6FF98529730}"/>
               </a:ext>
             </a:extLst>
           </p:cNvPr>
@@ -21079,7 +21079,7 @@
           <p:cNvPr id="17" name="">
             <a:extLst xmlns:a="http://schemas.openxmlformats.org/drawingml/2006/main">
               <a:ext uri="{FF2B5EF4-FFF2-40B4-BE49-F238E27FC236}">
-                <a16:creationId xmlns:a16="http://schemas.microsoft.com/office/drawing/2014/main" id="{4CCD6929-3F09-4A9C-857C-472D4AA929E5}"/>
+                <a16:creationId xmlns:a16="http://schemas.microsoft.com/office/drawing/2014/main" id="{F429157F-5F96-4AAA-983D-F9A93C64A170}"/>
               </a:ext>
             </a:extLst>
           </p:cNvPr>
@@ -21136,7 +21136,7 @@
           <p:cNvPr id="18" name="">
             <a:extLst xmlns:a="http://schemas.openxmlformats.org/drawingml/2006/main">
               <a:ext uri="{FF2B5EF4-FFF2-40B4-BE49-F238E27FC236}">
-                <a16:creationId xmlns:a16="http://schemas.microsoft.com/office/drawing/2014/main" id="{D8206F04-771D-4F91-9D35-D3D91434088C}"/>
+                <a16:creationId xmlns:a16="http://schemas.microsoft.com/office/drawing/2014/main" id="{3CAB0071-0D0F-4583-864D-0DBD938E9CBF}"/>
               </a:ext>
             </a:extLst>
           </p:cNvPr>
@@ -21166,7 +21166,7 @@
           <p:cNvPr id="19" name="">
             <a:extLst xmlns:a="http://schemas.openxmlformats.org/drawingml/2006/main">
               <a:ext uri="{FF2B5EF4-FFF2-40B4-BE49-F238E27FC236}">
-                <a16:creationId xmlns:a16="http://schemas.microsoft.com/office/drawing/2014/main" id="{A231E9B1-5E0A-4B60-AB52-65F262E6EED2}"/>
+                <a16:creationId xmlns:a16="http://schemas.microsoft.com/office/drawing/2014/main" id="{00710EC2-48D6-4FD8-BC13-E4468CA8FC4F}"/>
               </a:ext>
             </a:extLst>
           </p:cNvPr>
@@ -21223,7 +21223,7 @@
           <p:cNvPr id="20" name="">
             <a:extLst xmlns:a="http://schemas.openxmlformats.org/drawingml/2006/main">
               <a:ext uri="{FF2B5EF4-FFF2-40B4-BE49-F238E27FC236}">
-                <a16:creationId xmlns:a16="http://schemas.microsoft.com/office/drawing/2014/main" id="{A06D921B-A66A-4E33-A837-3C3A6A48FA5B}"/>
+                <a16:creationId xmlns:a16="http://schemas.microsoft.com/office/drawing/2014/main" id="{0068BC47-01F9-4A41-BF18-78E59A3111BD}"/>
               </a:ext>
             </a:extLst>
           </p:cNvPr>
@@ -21253,7 +21253,7 @@
           <p:cNvPr id="21" name="">
             <a:extLst xmlns:a="http://schemas.openxmlformats.org/drawingml/2006/main">
               <a:ext uri="{FF2B5EF4-FFF2-40B4-BE49-F238E27FC236}">
-                <a16:creationId xmlns:a16="http://schemas.microsoft.com/office/drawing/2014/main" id="{1623AAD8-57FC-4A83-BC18-2028D374AB61}"/>
+                <a16:creationId xmlns:a16="http://schemas.microsoft.com/office/drawing/2014/main" id="{11A182DB-1467-435B-A465-0E3B0251E17D}"/>
               </a:ext>
             </a:extLst>
           </p:cNvPr>
@@ -21310,7 +21310,7 @@
           <p:cNvPr id="22" name="">
             <a:extLst xmlns:a="http://schemas.openxmlformats.org/drawingml/2006/main">
               <a:ext uri="{FF2B5EF4-FFF2-40B4-BE49-F238E27FC236}">
-                <a16:creationId xmlns:a16="http://schemas.microsoft.com/office/drawing/2014/main" id="{5F770684-8038-45C8-A8CC-34CC4EA61954}"/>
+                <a16:creationId xmlns:a16="http://schemas.microsoft.com/office/drawing/2014/main" id="{6056C5CB-7CCF-42E0-83DA-F52B59DDD7FE}"/>
               </a:ext>
             </a:extLst>
           </p:cNvPr>
@@ -21340,7 +21340,7 @@
           <p:cNvPr id="23" name="">
             <a:extLst xmlns:a="http://schemas.openxmlformats.org/drawingml/2006/main">
               <a:ext uri="{FF2B5EF4-FFF2-40B4-BE49-F238E27FC236}">
-                <a16:creationId xmlns:a16="http://schemas.microsoft.com/office/drawing/2014/main" id="{B0E34ED8-2181-4CFC-B478-230F20064D71}"/>
+                <a16:creationId xmlns:a16="http://schemas.microsoft.com/office/drawing/2014/main" id="{40D037AE-E3C1-49E6-A4B3-7AE5DE137E23}"/>
               </a:ext>
             </a:extLst>
           </p:cNvPr>
@@ -21397,7 +21397,7 @@
           <p:cNvPr id="24" name="">
             <a:extLst xmlns:a="http://schemas.openxmlformats.org/drawingml/2006/main">
               <a:ext uri="{FF2B5EF4-FFF2-40B4-BE49-F238E27FC236}">
-                <a16:creationId xmlns:a16="http://schemas.microsoft.com/office/drawing/2014/main" id="{BFD60EA7-30B2-4F7B-8A7D-59E57648028D}"/>
+                <a16:creationId xmlns:a16="http://schemas.microsoft.com/office/drawing/2014/main" id="{261F9703-8A7C-45DC-A1B2-C19B13FEBE4A}"/>
               </a:ext>
             </a:extLst>
           </p:cNvPr>
@@ -21427,7 +21427,7 @@
           <p:cNvPr id="25" name="">
             <a:extLst xmlns:a="http://schemas.openxmlformats.org/drawingml/2006/main">
               <a:ext uri="{FF2B5EF4-FFF2-40B4-BE49-F238E27FC236}">
-                <a16:creationId xmlns:a16="http://schemas.microsoft.com/office/drawing/2014/main" id="{7232B65D-5C44-419B-968F-3380CD4AE385}"/>
+                <a16:creationId xmlns:a16="http://schemas.microsoft.com/office/drawing/2014/main" id="{3780CA4C-7E39-42BD-9B36-3525D14FCE79}"/>
               </a:ext>
             </a:extLst>
           </p:cNvPr>
@@ -21484,7 +21484,7 @@
           <p:cNvPr id="26" name="">
             <a:extLst xmlns:a="http://schemas.openxmlformats.org/drawingml/2006/main">
               <a:ext uri="{FF2B5EF4-FFF2-40B4-BE49-F238E27FC236}">
-                <a16:creationId xmlns:a16="http://schemas.microsoft.com/office/drawing/2014/main" id="{CA2688F3-6531-4282-A941-783DA55D3769}"/>
+                <a16:creationId xmlns:a16="http://schemas.microsoft.com/office/drawing/2014/main" id="{20C6FF23-525E-40E6-BD97-6FC249AD827A}"/>
               </a:ext>
             </a:extLst>
           </p:cNvPr>
@@ -21514,7 +21514,7 @@
           <p:cNvPr id="27" name="">
             <a:extLst xmlns:a="http://schemas.openxmlformats.org/drawingml/2006/main">
               <a:ext uri="{FF2B5EF4-FFF2-40B4-BE49-F238E27FC236}">
-                <a16:creationId xmlns:a16="http://schemas.microsoft.com/office/drawing/2014/main" id="{A9820451-C529-439E-8D57-FD79EEC85607}"/>
+                <a16:creationId xmlns:a16="http://schemas.microsoft.com/office/drawing/2014/main" id="{A04A958B-6F9E-4D4C-A170-2AE56E9E246E}"/>
               </a:ext>
             </a:extLst>
           </p:cNvPr>
@@ -21571,7 +21571,7 @@
           <p:cNvPr id="28" name="">
             <a:extLst xmlns:a="http://schemas.openxmlformats.org/drawingml/2006/main">
               <a:ext uri="{FF2B5EF4-FFF2-40B4-BE49-F238E27FC236}">
-                <a16:creationId xmlns:a16="http://schemas.microsoft.com/office/drawing/2014/main" id="{B618C2E4-A3A3-4291-9FD2-A77098B31567}"/>
+                <a16:creationId xmlns:a16="http://schemas.microsoft.com/office/drawing/2014/main" id="{3A960763-DF1B-4B2A-B7B7-13A0D5A7C307}"/>
               </a:ext>
             </a:extLst>
           </p:cNvPr>
@@ -21603,7 +21603,7 @@
           <p:cNvPr id="29" name="">
             <a:extLst xmlns:a="http://schemas.openxmlformats.org/drawingml/2006/main">
               <a:ext uri="{FF2B5EF4-FFF2-40B4-BE49-F238E27FC236}">
-                <a16:creationId xmlns:a16="http://schemas.microsoft.com/office/drawing/2014/main" id="{40EB8879-3FA7-4BF9-8B07-EF2F6297CEB6}"/>
+                <a16:creationId xmlns:a16="http://schemas.microsoft.com/office/drawing/2014/main" id="{DA74127A-5684-4243-9B22-C44DBE789B2B}"/>
               </a:ext>
             </a:extLst>
           </p:cNvPr>
@@ -21658,7 +21658,7 @@
     </p:spTree>
     <p:extLst>
       <p:ext uri="{BB962C8B-B14F-4D97-AF65-F5344CB8AC3E}">
-        <p14:creationId xmlns:p14="http://schemas.microsoft.com/office/powerpoint/2010/main" val="654479059"/>
+        <p14:creationId xmlns:p14="http://schemas.microsoft.com/office/powerpoint/2010/main" val="1683276528"/>
       </p:ext>
     </p:extLst>
   </p:cSld>
@@ -21689,7 +21689,7 @@
           <p:cNvPr id="8" name="">
             <a:extLst xmlns:a="http://schemas.openxmlformats.org/drawingml/2006/main">
               <a:ext uri="{FF2B5EF4-FFF2-40B4-BE49-F238E27FC236}">
-                <a16:creationId xmlns:a16="http://schemas.microsoft.com/office/drawing/2014/main" id="{F5E26247-D2CD-4EF4-9864-543587560AF1}"/>
+                <a16:creationId xmlns:a16="http://schemas.microsoft.com/office/drawing/2014/main" id="{CCA3142E-76F6-4A5C-B2B1-D464800E9E47}"/>
               </a:ext>
             </a:extLst>
           </p:cNvPr>
@@ -21746,7 +21746,7 @@
           <p:cNvPr id="2" name="">
             <a:extLst xmlns:a="http://schemas.openxmlformats.org/drawingml/2006/main">
               <a:ext uri="{FF2B5EF4-FFF2-40B4-BE49-F238E27FC236}">
-                <a16:creationId xmlns:a16="http://schemas.microsoft.com/office/drawing/2014/main" id="{848C5F6B-B0BF-43D4-8153-A2D071D0392C}"/>
+                <a16:creationId xmlns:a16="http://schemas.microsoft.com/office/drawing/2014/main" id="{DD9CC707-4FCE-4E53-8001-619AF81C5689}"/>
               </a:ext>
             </a:extLst>
           </p:cNvPr>
@@ -21803,7 +21803,7 @@
           <p:cNvPr id="3" name="">
             <a:extLst xmlns:a="http://schemas.openxmlformats.org/drawingml/2006/main">
               <a:ext uri="{FF2B5EF4-FFF2-40B4-BE49-F238E27FC236}">
-                <a16:creationId xmlns:a16="http://schemas.microsoft.com/office/drawing/2014/main" id="{4BB863D7-A2B0-4840-B046-AAADAB8610BA}"/>
+                <a16:creationId xmlns:a16="http://schemas.microsoft.com/office/drawing/2014/main" id="{DA7F1C81-E532-44B4-A2F3-B10A4AB2D1C8}"/>
               </a:ext>
             </a:extLst>
           </p:cNvPr>
@@ -21833,7 +21833,7 @@
           <p:cNvPr id="4" name="">
             <a:extLst xmlns:a="http://schemas.openxmlformats.org/drawingml/2006/main">
               <a:ext uri="{FF2B5EF4-FFF2-40B4-BE49-F238E27FC236}">
-                <a16:creationId xmlns:a16="http://schemas.microsoft.com/office/drawing/2014/main" id="{2DDDC7D3-B914-495E-8877-33FEC62A7D23}"/>
+                <a16:creationId xmlns:a16="http://schemas.microsoft.com/office/drawing/2014/main" id="{A7A2C7D4-20B1-4E25-8468-18FCCE02F136}"/>
               </a:ext>
             </a:extLst>
           </p:cNvPr>
@@ -21890,7 +21890,7 @@
           <p:cNvPr id="5" name="">
             <a:extLst xmlns:a="http://schemas.openxmlformats.org/drawingml/2006/main">
               <a:ext uri="{FF2B5EF4-FFF2-40B4-BE49-F238E27FC236}">
-                <a16:creationId xmlns:a16="http://schemas.microsoft.com/office/drawing/2014/main" id="{18EA3477-11A8-4A8F-BADB-37EB53C0C724}"/>
+                <a16:creationId xmlns:a16="http://schemas.microsoft.com/office/drawing/2014/main" id="{488B56EB-F46A-4B74-8ECC-35343A627889}"/>
               </a:ext>
             </a:extLst>
           </p:cNvPr>
@@ -22414,7 +22414,7 @@
           <p:cNvPr id="7" name="">
             <a:extLst xmlns:a="http://schemas.openxmlformats.org/drawingml/2006/main">
               <a:ext uri="{FF2B5EF4-FFF2-40B4-BE49-F238E27FC236}">
-                <a16:creationId xmlns:a16="http://schemas.microsoft.com/office/drawing/2014/main" id="{9339C8B5-136C-4583-A3DD-4D4D3789B161}"/>
+                <a16:creationId xmlns:a16="http://schemas.microsoft.com/office/drawing/2014/main" id="{8B98811B-7664-4AC0-8789-B7F6BCAD5314}"/>
               </a:ext>
             </a:extLst>
           </p:cNvPr>
@@ -22469,7 +22469,7 @@
     </p:spTree>
     <p:extLst>
       <p:ext uri="{BB962C8B-B14F-4D97-AF65-F5344CB8AC3E}">
-        <p14:creationId xmlns:p14="http://schemas.microsoft.com/office/powerpoint/2010/main" val="842423415"/>
+        <p14:creationId xmlns:p14="http://schemas.microsoft.com/office/powerpoint/2010/main" val="269890458"/>
       </p:ext>
     </p:extLst>
   </p:cSld>
@@ -22500,7 +22500,7 @@
           <p:cNvPr id="19" name="">
             <a:extLst xmlns:a="http://schemas.openxmlformats.org/drawingml/2006/main">
               <a:ext uri="{FF2B5EF4-FFF2-40B4-BE49-F238E27FC236}">
-                <a16:creationId xmlns:a16="http://schemas.microsoft.com/office/drawing/2014/main" id="{0E1141BF-6DAB-4D49-98E8-2CFF88A95958}"/>
+                <a16:creationId xmlns:a16="http://schemas.microsoft.com/office/drawing/2014/main" id="{4A1C021E-FBA9-419A-8501-81E468F0A45F}"/>
               </a:ext>
             </a:extLst>
           </p:cNvPr>
@@ -22557,7 +22557,7 @@
           <p:cNvPr id="2" name="">
             <a:extLst xmlns:a="http://schemas.openxmlformats.org/drawingml/2006/main">
               <a:ext uri="{FF2B5EF4-FFF2-40B4-BE49-F238E27FC236}">
-                <a16:creationId xmlns:a16="http://schemas.microsoft.com/office/drawing/2014/main" id="{F95C7FD3-2006-40D9-992A-4E016256F332}"/>
+                <a16:creationId xmlns:a16="http://schemas.microsoft.com/office/drawing/2014/main" id="{90FB93AA-6DCA-4C04-B993-BBB014FFBA56}"/>
               </a:ext>
             </a:extLst>
           </p:cNvPr>
@@ -22614,7 +22614,7 @@
           <p:cNvPr id="3" name="">
             <a:extLst xmlns:a="http://schemas.openxmlformats.org/drawingml/2006/main">
               <a:ext uri="{FF2B5EF4-FFF2-40B4-BE49-F238E27FC236}">
-                <a16:creationId xmlns:a16="http://schemas.microsoft.com/office/drawing/2014/main" id="{D1107392-6539-47A1-A088-4BF6D86BBFCA}"/>
+                <a16:creationId xmlns:a16="http://schemas.microsoft.com/office/drawing/2014/main" id="{FBAFB817-5E92-4B53-B961-10CBB61BE68D}"/>
               </a:ext>
             </a:extLst>
           </p:cNvPr>
@@ -22644,7 +22644,7 @@
           <p:cNvPr id="4" name="">
             <a:extLst xmlns:a="http://schemas.openxmlformats.org/drawingml/2006/main">
               <a:ext uri="{FF2B5EF4-FFF2-40B4-BE49-F238E27FC236}">
-                <a16:creationId xmlns:a16="http://schemas.microsoft.com/office/drawing/2014/main" id="{2C421C49-A907-4721-8860-D88FA139D2A9}"/>
+                <a16:creationId xmlns:a16="http://schemas.microsoft.com/office/drawing/2014/main" id="{2C85D447-0787-496A-94C6-1C2D97B4210F}"/>
               </a:ext>
             </a:extLst>
           </p:cNvPr>
@@ -22701,7 +22701,7 @@
           <p:cNvPr id="5" name="">
             <a:extLst xmlns:a="http://schemas.openxmlformats.org/drawingml/2006/main">
               <a:ext uri="{FF2B5EF4-FFF2-40B4-BE49-F238E27FC236}">
-                <a16:creationId xmlns:a16="http://schemas.microsoft.com/office/drawing/2014/main" id="{C80F70EA-832B-4ED1-A070-F88C4427846C}"/>
+                <a16:creationId xmlns:a16="http://schemas.microsoft.com/office/drawing/2014/main" id="{4F86191B-7C2C-4A6B-9106-1A16FB9153AB}"/>
               </a:ext>
             </a:extLst>
           </p:cNvPr>
@@ -22758,7 +22758,7 @@
           <p:cNvPr id="6" name="">
             <a:extLst xmlns:a="http://schemas.openxmlformats.org/drawingml/2006/main">
               <a:ext uri="{FF2B5EF4-FFF2-40B4-BE49-F238E27FC236}">
-                <a16:creationId xmlns:a16="http://schemas.microsoft.com/office/drawing/2014/main" id="{A3E4D68D-F945-4A9C-B1EC-82E64DAA486A}"/>
+                <a16:creationId xmlns:a16="http://schemas.microsoft.com/office/drawing/2014/main" id="{6072120E-98EC-4DA7-B729-E333A97BB7A2}"/>
               </a:ext>
             </a:extLst>
           </p:cNvPr>
@@ -22815,7 +22815,7 @@
           <p:cNvPr id="7" name="">
             <a:extLst xmlns:a="http://schemas.openxmlformats.org/drawingml/2006/main">
               <a:ext uri="{FF2B5EF4-FFF2-40B4-BE49-F238E27FC236}">
-                <a16:creationId xmlns:a16="http://schemas.microsoft.com/office/drawing/2014/main" id="{3354703C-6944-40C3-9663-2E5F4D670FBC}"/>
+                <a16:creationId xmlns:a16="http://schemas.microsoft.com/office/drawing/2014/main" id="{424C0017-A8BC-4DB3-B046-CFD8D0A50FA6}"/>
               </a:ext>
             </a:extLst>
           </p:cNvPr>
@@ -22946,7 +22946,7 @@
           <p:cNvPr id="8" name="">
             <a:extLst xmlns:a="http://schemas.openxmlformats.org/drawingml/2006/main">
               <a:ext uri="{FF2B5EF4-FFF2-40B4-BE49-F238E27FC236}">
-                <a16:creationId xmlns:a16="http://schemas.microsoft.com/office/drawing/2014/main" id="{864E20D7-97A4-42BF-ACD8-61F14316A0D3}"/>
+                <a16:creationId xmlns:a16="http://schemas.microsoft.com/office/drawing/2014/main" id="{53DDE67B-4057-4BF4-89EF-0F676154F533}"/>
               </a:ext>
             </a:extLst>
           </p:cNvPr>
@@ -23003,7 +23003,7 @@
           <p:cNvPr id="9" name="">
             <a:extLst xmlns:a="http://schemas.openxmlformats.org/drawingml/2006/main">
               <a:ext uri="{FF2B5EF4-FFF2-40B4-BE49-F238E27FC236}">
-                <a16:creationId xmlns:a16="http://schemas.microsoft.com/office/drawing/2014/main" id="{B211FA87-5E65-47B7-BECF-4ABDBE0F894D}"/>
+                <a16:creationId xmlns:a16="http://schemas.microsoft.com/office/drawing/2014/main" id="{2E8A198E-3520-4542-911F-53B9D3F9CB8D}"/>
               </a:ext>
             </a:extLst>
           </p:cNvPr>
@@ -23060,7 +23060,7 @@
           <p:cNvPr id="10" name="">
             <a:extLst xmlns:a="http://schemas.openxmlformats.org/drawingml/2006/main">
               <a:ext uri="{FF2B5EF4-FFF2-40B4-BE49-F238E27FC236}">
-                <a16:creationId xmlns:a16="http://schemas.microsoft.com/office/drawing/2014/main" id="{89C68F1C-83C8-408A-B4A6-049974904A41}"/>
+                <a16:creationId xmlns:a16="http://schemas.microsoft.com/office/drawing/2014/main" id="{806F5A6E-944E-4688-A479-F45239AE3B73}"/>
               </a:ext>
             </a:extLst>
           </p:cNvPr>
@@ -23092,7 +23092,7 @@
           <p:cNvPr id="11" name="">
             <a:extLst xmlns:a="http://schemas.openxmlformats.org/drawingml/2006/main">
               <a:ext uri="{FF2B5EF4-FFF2-40B4-BE49-F238E27FC236}">
-                <a16:creationId xmlns:a16="http://schemas.microsoft.com/office/drawing/2014/main" id="{9E419FD4-EFC0-4918-991F-F5280B881042}"/>
+                <a16:creationId xmlns:a16="http://schemas.microsoft.com/office/drawing/2014/main" id="{DC498D08-0B14-4F3F-8EE8-86DC3BD6BA4A}"/>
               </a:ext>
             </a:extLst>
           </p:cNvPr>
@@ -23149,7 +23149,7 @@
           <p:cNvPr id="12" name="">
             <a:extLst xmlns:a="http://schemas.openxmlformats.org/drawingml/2006/main">
               <a:ext uri="{FF2B5EF4-FFF2-40B4-BE49-F238E27FC236}">
-                <a16:creationId xmlns:a16="http://schemas.microsoft.com/office/drawing/2014/main" id="{8B0EB132-03DD-4110-AFA9-43AA2D124F89}"/>
+                <a16:creationId xmlns:a16="http://schemas.microsoft.com/office/drawing/2014/main" id="{E2C9747A-AA0C-435C-BFD5-E150B17AD247}"/>
               </a:ext>
             </a:extLst>
           </p:cNvPr>
@@ -23206,7 +23206,7 @@
           <p:cNvPr id="13" name="">
             <a:extLst xmlns:a="http://schemas.openxmlformats.org/drawingml/2006/main">
               <a:ext uri="{FF2B5EF4-FFF2-40B4-BE49-F238E27FC236}">
-                <a16:creationId xmlns:a16="http://schemas.microsoft.com/office/drawing/2014/main" id="{1CA1F548-FD33-4B8D-B854-52C143F95697}"/>
+                <a16:creationId xmlns:a16="http://schemas.microsoft.com/office/drawing/2014/main" id="{FD782C54-8120-48D5-83F5-1EAF5758B07A}"/>
               </a:ext>
             </a:extLst>
           </p:cNvPr>
@@ -23263,7 +23263,7 @@
           <p:cNvPr id="14" name="">
             <a:extLst xmlns:a="http://schemas.openxmlformats.org/drawingml/2006/main">
               <a:ext uri="{FF2B5EF4-FFF2-40B4-BE49-F238E27FC236}">
-                <a16:creationId xmlns:a16="http://schemas.microsoft.com/office/drawing/2014/main" id="{911B19F9-5E80-4414-85D4-E560EE036914}"/>
+                <a16:creationId xmlns:a16="http://schemas.microsoft.com/office/drawing/2014/main" id="{4FBB3ED8-B9CE-4A08-88F7-153AF84B6B3A}"/>
               </a:ext>
             </a:extLst>
           </p:cNvPr>
@@ -23295,7 +23295,7 @@
           <p:cNvPr id="15" name="">
             <a:extLst xmlns:a="http://schemas.openxmlformats.org/drawingml/2006/main">
               <a:ext uri="{FF2B5EF4-FFF2-40B4-BE49-F238E27FC236}">
-                <a16:creationId xmlns:a16="http://schemas.microsoft.com/office/drawing/2014/main" id="{11163C6C-6E13-4B5F-A35A-191D8C830E96}"/>
+                <a16:creationId xmlns:a16="http://schemas.microsoft.com/office/drawing/2014/main" id="{D5A4E499-363B-4A0E-95AA-12042D8E35AE}"/>
               </a:ext>
             </a:extLst>
           </p:cNvPr>
@@ -23352,7 +23352,7 @@
           <p:cNvPr id="16" name="">
             <a:extLst xmlns:a="http://schemas.openxmlformats.org/drawingml/2006/main">
               <a:ext uri="{FF2B5EF4-FFF2-40B4-BE49-F238E27FC236}">
-                <a16:creationId xmlns:a16="http://schemas.microsoft.com/office/drawing/2014/main" id="{C53578D8-2CB8-4D13-8F67-9BB2F372376B}"/>
+                <a16:creationId xmlns:a16="http://schemas.microsoft.com/office/drawing/2014/main" id="{72932E20-5E8C-4C97-8836-D700964B9BC5}"/>
               </a:ext>
             </a:extLst>
           </p:cNvPr>
@@ -23409,7 +23409,7 @@
           <p:cNvPr id="17" name="">
             <a:extLst xmlns:a="http://schemas.openxmlformats.org/drawingml/2006/main">
               <a:ext uri="{FF2B5EF4-FFF2-40B4-BE49-F238E27FC236}">
-                <a16:creationId xmlns:a16="http://schemas.microsoft.com/office/drawing/2014/main" id="{990EC46F-403A-4943-84B9-62717B1001FF}"/>
+                <a16:creationId xmlns:a16="http://schemas.microsoft.com/office/drawing/2014/main" id="{5B7C01CE-DE9A-4D36-80F4-8624D49E00D3}"/>
               </a:ext>
             </a:extLst>
           </p:cNvPr>
@@ -23441,7 +23441,7 @@
           <p:cNvPr id="18" name="">
             <a:extLst xmlns:a="http://schemas.openxmlformats.org/drawingml/2006/main">
               <a:ext uri="{FF2B5EF4-FFF2-40B4-BE49-F238E27FC236}">
-                <a16:creationId xmlns:a16="http://schemas.microsoft.com/office/drawing/2014/main" id="{60DA26B4-BAAF-4F14-A830-C3CEF703D4FB}"/>
+                <a16:creationId xmlns:a16="http://schemas.microsoft.com/office/drawing/2014/main" id="{05A1FA0F-7580-4B6B-B6B4-40EDBE959D14}"/>
               </a:ext>
             </a:extLst>
           </p:cNvPr>
@@ -23496,7 +23496,7 @@
     </p:spTree>
     <p:extLst>
       <p:ext uri="{BB962C8B-B14F-4D97-AF65-F5344CB8AC3E}">
-        <p14:creationId xmlns:p14="http://schemas.microsoft.com/office/powerpoint/2010/main" val="1972296896"/>
+        <p14:creationId xmlns:p14="http://schemas.microsoft.com/office/powerpoint/2010/main" val="1643034922"/>
       </p:ext>
     </p:extLst>
   </p:cSld>
@@ -23527,7 +23527,7 @@
           <p:cNvPr id="38" name="">
             <a:extLst xmlns:a="http://schemas.openxmlformats.org/drawingml/2006/main">
               <a:ext uri="{FF2B5EF4-FFF2-40B4-BE49-F238E27FC236}">
-                <a16:creationId xmlns:a16="http://schemas.microsoft.com/office/drawing/2014/main" id="{622BA25D-68D0-40AD-8D80-725B6EA52A64}"/>
+                <a16:creationId xmlns:a16="http://schemas.microsoft.com/office/drawing/2014/main" id="{D1871EE4-BEB5-40C4-88DD-85631FE1C9BB}"/>
               </a:ext>
             </a:extLst>
           </p:cNvPr>
@@ -23584,7 +23584,7 @@
           <p:cNvPr id="2" name="">
             <a:extLst xmlns:a="http://schemas.openxmlformats.org/drawingml/2006/main">
               <a:ext uri="{FF2B5EF4-FFF2-40B4-BE49-F238E27FC236}">
-                <a16:creationId xmlns:a16="http://schemas.microsoft.com/office/drawing/2014/main" id="{605D248B-89FE-4E12-A5A5-A8FA4244E1F6}"/>
+                <a16:creationId xmlns:a16="http://schemas.microsoft.com/office/drawing/2014/main" id="{AAEE7165-A3B1-4348-84E6-91C5BE5DFE57}"/>
               </a:ext>
             </a:extLst>
           </p:cNvPr>
@@ -23641,7 +23641,7 @@
           <p:cNvPr id="3" name="">
             <a:extLst xmlns:a="http://schemas.openxmlformats.org/drawingml/2006/main">
               <a:ext uri="{FF2B5EF4-FFF2-40B4-BE49-F238E27FC236}">
-                <a16:creationId xmlns:a16="http://schemas.microsoft.com/office/drawing/2014/main" id="{6057F604-A1DC-4B47-88EF-0F0FC1F7CC5D}"/>
+                <a16:creationId xmlns:a16="http://schemas.microsoft.com/office/drawing/2014/main" id="{3BCA4EE6-185F-4C43-AAB6-D0C33AFC9D94}"/>
               </a:ext>
             </a:extLst>
           </p:cNvPr>
@@ -23671,7 +23671,7 @@
           <p:cNvPr id="4" name="">
             <a:extLst xmlns:a="http://schemas.openxmlformats.org/drawingml/2006/main">
               <a:ext uri="{FF2B5EF4-FFF2-40B4-BE49-F238E27FC236}">
-                <a16:creationId xmlns:a16="http://schemas.microsoft.com/office/drawing/2014/main" id="{6105BFD5-8EE8-4E9E-A72A-3BB7CF02E813}"/>
+                <a16:creationId xmlns:a16="http://schemas.microsoft.com/office/drawing/2014/main" id="{BB962A1E-B729-4A40-B119-756DB43351F1}"/>
               </a:ext>
             </a:extLst>
           </p:cNvPr>
@@ -23728,7 +23728,7 @@
           <p:cNvPr id="5" name="">
             <a:extLst xmlns:a="http://schemas.openxmlformats.org/drawingml/2006/main">
               <a:ext uri="{FF2B5EF4-FFF2-40B4-BE49-F238E27FC236}">
-                <a16:creationId xmlns:a16="http://schemas.microsoft.com/office/drawing/2014/main" id="{D90ABE11-CD8B-40B1-85E9-1F703759EBBE}"/>
+                <a16:creationId xmlns:a16="http://schemas.microsoft.com/office/drawing/2014/main" id="{C22A3C63-19E9-489D-8645-52B1CAFA2610}"/>
               </a:ext>
             </a:extLst>
           </p:cNvPr>
@@ -23785,7 +23785,7 @@
           <p:cNvPr id="6" name="">
             <a:extLst xmlns:a="http://schemas.openxmlformats.org/drawingml/2006/main">
               <a:ext uri="{FF2B5EF4-FFF2-40B4-BE49-F238E27FC236}">
-                <a16:creationId xmlns:a16="http://schemas.microsoft.com/office/drawing/2014/main" id="{BCA24EA9-039D-4D3F-AF5B-399B74CA7550}"/>
+                <a16:creationId xmlns:a16="http://schemas.microsoft.com/office/drawing/2014/main" id="{B637DF88-D385-4ADB-BD37-412E0F605865}"/>
               </a:ext>
             </a:extLst>
           </p:cNvPr>
@@ -23842,7 +23842,7 @@
           <p:cNvPr id="7" name="">
             <a:extLst xmlns:a="http://schemas.openxmlformats.org/drawingml/2006/main">
               <a:ext uri="{FF2B5EF4-FFF2-40B4-BE49-F238E27FC236}">
-                <a16:creationId xmlns:a16="http://schemas.microsoft.com/office/drawing/2014/main" id="{69D48F19-BFB4-4812-8263-52A2739BF58A}"/>
+                <a16:creationId xmlns:a16="http://schemas.microsoft.com/office/drawing/2014/main" id="{938376FC-23BC-4D64-A6AD-2906018BA60E}"/>
               </a:ext>
             </a:extLst>
           </p:cNvPr>
@@ -23876,7 +23876,7 @@
           <p:cNvPr id="8" name="">
             <a:extLst xmlns:a="http://schemas.openxmlformats.org/drawingml/2006/main">
               <a:ext uri="{FF2B5EF4-FFF2-40B4-BE49-F238E27FC236}">
-                <a16:creationId xmlns:a16="http://schemas.microsoft.com/office/drawing/2014/main" id="{26A835EA-738E-46AB-8327-536E483F14FF}"/>
+                <a16:creationId xmlns:a16="http://schemas.microsoft.com/office/drawing/2014/main" id="{38AB5015-CEC8-4634-B5CA-7A4D67D685A3}"/>
               </a:ext>
             </a:extLst>
           </p:cNvPr>
@@ -23933,7 +23933,7 @@
           <p:cNvPr id="9" name="">
             <a:extLst xmlns:a="http://schemas.openxmlformats.org/drawingml/2006/main">
               <a:ext uri="{FF2B5EF4-FFF2-40B4-BE49-F238E27FC236}">
-                <a16:creationId xmlns:a16="http://schemas.microsoft.com/office/drawing/2014/main" id="{3A179ADE-240B-4149-9E93-B3BE671388CF}"/>
+                <a16:creationId xmlns:a16="http://schemas.microsoft.com/office/drawing/2014/main" id="{244DED9B-8E8E-4684-BF95-C35D98D0E981}"/>
               </a:ext>
             </a:extLst>
           </p:cNvPr>
@@ -23967,7 +23967,7 @@
           <p:cNvPr id="10" name="">
             <a:extLst xmlns:a="http://schemas.openxmlformats.org/drawingml/2006/main">
               <a:ext uri="{FF2B5EF4-FFF2-40B4-BE49-F238E27FC236}">
-                <a16:creationId xmlns:a16="http://schemas.microsoft.com/office/drawing/2014/main" id="{8235392D-6A56-4CA8-87E6-97F6F26210FC}"/>
+                <a16:creationId xmlns:a16="http://schemas.microsoft.com/office/drawing/2014/main" id="{F5153550-FEB6-4D17-A642-B09744368E95}"/>
               </a:ext>
             </a:extLst>
           </p:cNvPr>
@@ -24024,7 +24024,7 @@
           <p:cNvPr id="11" name="">
             <a:extLst xmlns:a="http://schemas.openxmlformats.org/drawingml/2006/main">
               <a:ext uri="{FF2B5EF4-FFF2-40B4-BE49-F238E27FC236}">
-                <a16:creationId xmlns:a16="http://schemas.microsoft.com/office/drawing/2014/main" id="{83EE0E5D-D076-425D-840F-05CCEF49E527}"/>
+                <a16:creationId xmlns:a16="http://schemas.microsoft.com/office/drawing/2014/main" id="{C32F2895-E0A4-479D-874D-2D01C8E8A3F3}"/>
               </a:ext>
             </a:extLst>
           </p:cNvPr>
@@ -24058,7 +24058,7 @@
           <p:cNvPr id="12" name="">
             <a:extLst xmlns:a="http://schemas.openxmlformats.org/drawingml/2006/main">
               <a:ext uri="{FF2B5EF4-FFF2-40B4-BE49-F238E27FC236}">
-                <a16:creationId xmlns:a16="http://schemas.microsoft.com/office/drawing/2014/main" id="{6E4EDE10-4BD0-44DD-9D85-FC418A419262}"/>
+                <a16:creationId xmlns:a16="http://schemas.microsoft.com/office/drawing/2014/main" id="{FEA89A80-8274-404F-9B9B-0E722F8F49FF}"/>
               </a:ext>
             </a:extLst>
           </p:cNvPr>
@@ -24115,7 +24115,7 @@
           <p:cNvPr id="13" name="">
             <a:extLst xmlns:a="http://schemas.openxmlformats.org/drawingml/2006/main">
               <a:ext uri="{FF2B5EF4-FFF2-40B4-BE49-F238E27FC236}">
-                <a16:creationId xmlns:a16="http://schemas.microsoft.com/office/drawing/2014/main" id="{44E66BE7-84CB-4982-B3CA-EB21252B6D06}"/>
+                <a16:creationId xmlns:a16="http://schemas.microsoft.com/office/drawing/2014/main" id="{B16F24A1-30DF-40BA-A532-5C8A060B29D3}"/>
               </a:ext>
             </a:extLst>
           </p:cNvPr>
@@ -24149,7 +24149,7 @@
           <p:cNvPr id="14" name="">
             <a:extLst xmlns:a="http://schemas.openxmlformats.org/drawingml/2006/main">
               <a:ext uri="{FF2B5EF4-FFF2-40B4-BE49-F238E27FC236}">
-                <a16:creationId xmlns:a16="http://schemas.microsoft.com/office/drawing/2014/main" id="{1B5FB62E-D6CD-4345-A320-2E4197943FB1}"/>
+                <a16:creationId xmlns:a16="http://schemas.microsoft.com/office/drawing/2014/main" id="{4FBDD577-A0AC-405D-BF66-54D5038DD667}"/>
               </a:ext>
             </a:extLst>
           </p:cNvPr>
@@ -24281,7 +24281,7 @@
           <p:cNvPr id="18" name="">
             <a:extLst xmlns:a="http://schemas.openxmlformats.org/drawingml/2006/main">
               <a:ext uri="{FF2B5EF4-FFF2-40B4-BE49-F238E27FC236}">
-                <a16:creationId xmlns:a16="http://schemas.microsoft.com/office/drawing/2014/main" id="{11D8B997-0C66-4C5D-8D3F-808DD8A43F69}"/>
+                <a16:creationId xmlns:a16="http://schemas.microsoft.com/office/drawing/2014/main" id="{DD69B683-7EB1-45DB-8423-84160F540BBA}"/>
               </a:ext>
             </a:extLst>
           </p:cNvPr>
@@ -24338,7 +24338,7 @@
           <p:cNvPr id="19" name="">
             <a:extLst xmlns:a="http://schemas.openxmlformats.org/drawingml/2006/main">
               <a:ext uri="{FF2B5EF4-FFF2-40B4-BE49-F238E27FC236}">
-                <a16:creationId xmlns:a16="http://schemas.microsoft.com/office/drawing/2014/main" id="{258D0A62-B4BD-49E4-BCBB-5A57E5892786}"/>
+                <a16:creationId xmlns:a16="http://schemas.microsoft.com/office/drawing/2014/main" id="{FD556F19-581E-4983-9D99-27618A84F549}"/>
               </a:ext>
             </a:extLst>
           </p:cNvPr>
@@ -24368,7 +24368,7 @@
           <p:cNvPr id="20" name="">
             <a:extLst xmlns:a="http://schemas.openxmlformats.org/drawingml/2006/main">
               <a:ext uri="{FF2B5EF4-FFF2-40B4-BE49-F238E27FC236}">
-                <a16:creationId xmlns:a16="http://schemas.microsoft.com/office/drawing/2014/main" id="{47EF5EEC-B5B2-4B23-BA51-4275DF187BB1}"/>
+                <a16:creationId xmlns:a16="http://schemas.microsoft.com/office/drawing/2014/main" id="{9319D985-AA78-43A9-8606-F779170AEED0}"/>
               </a:ext>
             </a:extLst>
           </p:cNvPr>
@@ -24425,7 +24425,7 @@
           <p:cNvPr id="21" name="">
             <a:extLst xmlns:a="http://schemas.openxmlformats.org/drawingml/2006/main">
               <a:ext uri="{FF2B5EF4-FFF2-40B4-BE49-F238E27FC236}">
-                <a16:creationId xmlns:a16="http://schemas.microsoft.com/office/drawing/2014/main" id="{C74444DC-CB01-4819-8C34-D574BC788994}"/>
+                <a16:creationId xmlns:a16="http://schemas.microsoft.com/office/drawing/2014/main" id="{EA514893-8D85-40F4-BB08-D6F1E91C5694}"/>
               </a:ext>
             </a:extLst>
           </p:cNvPr>
@@ -24455,7 +24455,7 @@
           <p:cNvPr id="22" name="">
             <a:extLst xmlns:a="http://schemas.openxmlformats.org/drawingml/2006/main">
               <a:ext uri="{FF2B5EF4-FFF2-40B4-BE49-F238E27FC236}">
-                <a16:creationId xmlns:a16="http://schemas.microsoft.com/office/drawing/2014/main" id="{FE1545B7-460D-4D2A-B037-CFB297F02C0F}"/>
+                <a16:creationId xmlns:a16="http://schemas.microsoft.com/office/drawing/2014/main" id="{C1CFF305-C2B6-48D5-9230-5C10E576B96B}"/>
               </a:ext>
             </a:extLst>
           </p:cNvPr>
@@ -24512,7 +24512,7 @@
           <p:cNvPr id="23" name="">
             <a:extLst xmlns:a="http://schemas.openxmlformats.org/drawingml/2006/main">
               <a:ext uri="{FF2B5EF4-FFF2-40B4-BE49-F238E27FC236}">
-                <a16:creationId xmlns:a16="http://schemas.microsoft.com/office/drawing/2014/main" id="{D49E0B5D-22AD-4AF4-B310-D74F8FF6C43A}"/>
+                <a16:creationId xmlns:a16="http://schemas.microsoft.com/office/drawing/2014/main" id="{817CA763-6961-4066-8917-25B83ECBF4B6}"/>
               </a:ext>
             </a:extLst>
           </p:cNvPr>
@@ -24542,7 +24542,7 @@
           <p:cNvPr id="24" name="">
             <a:extLst xmlns:a="http://schemas.openxmlformats.org/drawingml/2006/main">
               <a:ext uri="{FF2B5EF4-FFF2-40B4-BE49-F238E27FC236}">
-                <a16:creationId xmlns:a16="http://schemas.microsoft.com/office/drawing/2014/main" id="{5EBB4012-1EE4-4E3A-950A-53D69ECF67B7}"/>
+                <a16:creationId xmlns:a16="http://schemas.microsoft.com/office/drawing/2014/main" id="{EA954E4C-8D40-4F92-A0A7-DE8ED32B15AB}"/>
               </a:ext>
             </a:extLst>
           </p:cNvPr>
@@ -24599,7 +24599,7 @@
           <p:cNvPr id="25" name="">
             <a:extLst xmlns:a="http://schemas.openxmlformats.org/drawingml/2006/main">
               <a:ext uri="{FF2B5EF4-FFF2-40B4-BE49-F238E27FC236}">
-                <a16:creationId xmlns:a16="http://schemas.microsoft.com/office/drawing/2014/main" id="{9153AAF6-F06B-46F3-9662-97F1FCC9D6F0}"/>
+                <a16:creationId xmlns:a16="http://schemas.microsoft.com/office/drawing/2014/main" id="{96192AA6-2DB7-4112-8D4D-FD2527C78CB7}"/>
               </a:ext>
             </a:extLst>
           </p:cNvPr>
@@ -24629,7 +24629,7 @@
           <p:cNvPr id="26" name="">
             <a:extLst xmlns:a="http://schemas.openxmlformats.org/drawingml/2006/main">
               <a:ext uri="{FF2B5EF4-FFF2-40B4-BE49-F238E27FC236}">
-                <a16:creationId xmlns:a16="http://schemas.microsoft.com/office/drawing/2014/main" id="{52104A6E-9FD2-4856-9827-0D720F14EC00}"/>
+                <a16:creationId xmlns:a16="http://schemas.microsoft.com/office/drawing/2014/main" id="{C854BCC2-FB81-4D1F-84D3-4647FD24C9E8}"/>
               </a:ext>
             </a:extLst>
           </p:cNvPr>
@@ -24686,7 +24686,7 @@
           <p:cNvPr id="27" name="">
             <a:extLst xmlns:a="http://schemas.openxmlformats.org/drawingml/2006/main">
               <a:ext uri="{FF2B5EF4-FFF2-40B4-BE49-F238E27FC236}">
-                <a16:creationId xmlns:a16="http://schemas.microsoft.com/office/drawing/2014/main" id="{909CAB3A-1E66-4556-9508-F47074CB8B16}"/>
+                <a16:creationId xmlns:a16="http://schemas.microsoft.com/office/drawing/2014/main" id="{AA493CDB-2C15-42D4-B821-B5F6546980AB}"/>
               </a:ext>
             </a:extLst>
           </p:cNvPr>
@@ -24743,7 +24743,7 @@
           <p:cNvPr id="28" name="">
             <a:extLst xmlns:a="http://schemas.openxmlformats.org/drawingml/2006/main">
               <a:ext uri="{FF2B5EF4-FFF2-40B4-BE49-F238E27FC236}">
-                <a16:creationId xmlns:a16="http://schemas.microsoft.com/office/drawing/2014/main" id="{2FCA1400-AFFD-408F-A681-D112ACF77281}"/>
+                <a16:creationId xmlns:a16="http://schemas.microsoft.com/office/drawing/2014/main" id="{5E772B5D-5905-4DF3-B257-5B691691B687}"/>
               </a:ext>
             </a:extLst>
           </p:cNvPr>
@@ -24773,7 +24773,7 @@
           <p:cNvPr id="29" name="">
             <a:extLst xmlns:a="http://schemas.openxmlformats.org/drawingml/2006/main">
               <a:ext uri="{FF2B5EF4-FFF2-40B4-BE49-F238E27FC236}">
-                <a16:creationId xmlns:a16="http://schemas.microsoft.com/office/drawing/2014/main" id="{19836FD0-AE23-497E-BBFF-BD4B58367879}"/>
+                <a16:creationId xmlns:a16="http://schemas.microsoft.com/office/drawing/2014/main" id="{86E04DEF-D34C-4FA5-8459-93D5D76D5425}"/>
               </a:ext>
             </a:extLst>
           </p:cNvPr>
@@ -24830,7 +24830,7 @@
           <p:cNvPr id="30" name="">
             <a:extLst xmlns:a="http://schemas.openxmlformats.org/drawingml/2006/main">
               <a:ext uri="{FF2B5EF4-FFF2-40B4-BE49-F238E27FC236}">
-                <a16:creationId xmlns:a16="http://schemas.microsoft.com/office/drawing/2014/main" id="{DFF32BC6-6F31-4508-A6F4-FD91CDC7C968}"/>
+                <a16:creationId xmlns:a16="http://schemas.microsoft.com/office/drawing/2014/main" id="{2A82318D-B87C-4C71-B8EB-D8167F4CC0A7}"/>
               </a:ext>
             </a:extLst>
           </p:cNvPr>
@@ -24860,7 +24860,7 @@
           <p:cNvPr id="31" name="">
             <a:extLst xmlns:a="http://schemas.openxmlformats.org/drawingml/2006/main">
               <a:ext uri="{FF2B5EF4-FFF2-40B4-BE49-F238E27FC236}">
-                <a16:creationId xmlns:a16="http://schemas.microsoft.com/office/drawing/2014/main" id="{810F2E75-6B1C-4B2B-821E-F2096280896F}"/>
+                <a16:creationId xmlns:a16="http://schemas.microsoft.com/office/drawing/2014/main" id="{80AC5F8B-D4B0-4F74-A62D-7F6B88A2246A}"/>
               </a:ext>
             </a:extLst>
           </p:cNvPr>
@@ -24917,7 +24917,7 @@
           <p:cNvPr id="32" name="">
             <a:extLst xmlns:a="http://schemas.openxmlformats.org/drawingml/2006/main">
               <a:ext uri="{FF2B5EF4-FFF2-40B4-BE49-F238E27FC236}">
-                <a16:creationId xmlns:a16="http://schemas.microsoft.com/office/drawing/2014/main" id="{79927A59-7B3F-4169-B74D-8FB5886AB413}"/>
+                <a16:creationId xmlns:a16="http://schemas.microsoft.com/office/drawing/2014/main" id="{987F1420-D3AA-450D-8C73-124791A482AD}"/>
               </a:ext>
             </a:extLst>
           </p:cNvPr>
@@ -24947,7 +24947,7 @@
           <p:cNvPr id="33" name="">
             <a:extLst xmlns:a="http://schemas.openxmlformats.org/drawingml/2006/main">
               <a:ext uri="{FF2B5EF4-FFF2-40B4-BE49-F238E27FC236}">
-                <a16:creationId xmlns:a16="http://schemas.microsoft.com/office/drawing/2014/main" id="{C1230BFF-AC44-4B65-85A3-FBD5A2DB2681}"/>
+                <a16:creationId xmlns:a16="http://schemas.microsoft.com/office/drawing/2014/main" id="{5311AEFB-460F-48B9-9FE4-BBC66B76B36C}"/>
               </a:ext>
             </a:extLst>
           </p:cNvPr>
@@ -25004,7 +25004,7 @@
           <p:cNvPr id="34" name="">
             <a:extLst xmlns:a="http://schemas.openxmlformats.org/drawingml/2006/main">
               <a:ext uri="{FF2B5EF4-FFF2-40B4-BE49-F238E27FC236}">
-                <a16:creationId xmlns:a16="http://schemas.microsoft.com/office/drawing/2014/main" id="{04E9E505-E0CE-4577-A9BB-00AA6247A921}"/>
+                <a16:creationId xmlns:a16="http://schemas.microsoft.com/office/drawing/2014/main" id="{64FDEDD4-A4D1-4875-8A9B-69806037303C}"/>
               </a:ext>
             </a:extLst>
           </p:cNvPr>
@@ -25034,7 +25034,7 @@
           <p:cNvPr id="35" name="">
             <a:extLst xmlns:a="http://schemas.openxmlformats.org/drawingml/2006/main">
               <a:ext uri="{FF2B5EF4-FFF2-40B4-BE49-F238E27FC236}">
-                <a16:creationId xmlns:a16="http://schemas.microsoft.com/office/drawing/2014/main" id="{99557435-DB9B-4905-ADE2-1848457C45E0}"/>
+                <a16:creationId xmlns:a16="http://schemas.microsoft.com/office/drawing/2014/main" id="{A78B22AE-05F9-44CB-9504-E8469ED6133B}"/>
               </a:ext>
             </a:extLst>
           </p:cNvPr>
@@ -25091,7 +25091,7 @@
           <p:cNvPr id="36" name="">
             <a:extLst xmlns:a="http://schemas.openxmlformats.org/drawingml/2006/main">
               <a:ext uri="{FF2B5EF4-FFF2-40B4-BE49-F238E27FC236}">
-                <a16:creationId xmlns:a16="http://schemas.microsoft.com/office/drawing/2014/main" id="{AE1CF5D1-4A61-4A13-862F-DFD9FEA3EC14}"/>
+                <a16:creationId xmlns:a16="http://schemas.microsoft.com/office/drawing/2014/main" id="{1363F5DC-8225-4DC0-870E-5B3FCFF3050F}"/>
               </a:ext>
             </a:extLst>
           </p:cNvPr>
@@ -25123,7 +25123,7 @@
           <p:cNvPr id="37" name="">
             <a:extLst xmlns:a="http://schemas.openxmlformats.org/drawingml/2006/main">
               <a:ext uri="{FF2B5EF4-FFF2-40B4-BE49-F238E27FC236}">
-                <a16:creationId xmlns:a16="http://schemas.microsoft.com/office/drawing/2014/main" id="{087BCA8E-5D63-4719-AA11-A5EACA29A5A2}"/>
+                <a16:creationId xmlns:a16="http://schemas.microsoft.com/office/drawing/2014/main" id="{67A0B2AF-2F34-4C9E-A264-7CDA7C71F5C6}"/>
               </a:ext>
             </a:extLst>
           </p:cNvPr>
@@ -25178,7 +25178,7 @@
     </p:spTree>
     <p:extLst>
       <p:ext uri="{BB962C8B-B14F-4D97-AF65-F5344CB8AC3E}">
-        <p14:creationId xmlns:p14="http://schemas.microsoft.com/office/powerpoint/2010/main" val="1653303113"/>
+        <p14:creationId xmlns:p14="http://schemas.microsoft.com/office/powerpoint/2010/main" val="1135468132"/>
       </p:ext>
     </p:extLst>
   </p:cSld>
@@ -25209,7 +25209,7 @@
           <p:cNvPr id="50" name="">
             <a:extLst xmlns:a="http://schemas.openxmlformats.org/drawingml/2006/main">
               <a:ext uri="{FF2B5EF4-FFF2-40B4-BE49-F238E27FC236}">
-                <a16:creationId xmlns:a16="http://schemas.microsoft.com/office/drawing/2014/main" id="{F31F8609-387D-4ED7-BFE7-9BC832BBB3FE}"/>
+                <a16:creationId xmlns:a16="http://schemas.microsoft.com/office/drawing/2014/main" id="{001B413C-BC0F-43A5-9E57-6950096979F9}"/>
               </a:ext>
             </a:extLst>
           </p:cNvPr>
@@ -25266,7 +25266,7 @@
           <p:cNvPr id="2" name="">
             <a:extLst xmlns:a="http://schemas.openxmlformats.org/drawingml/2006/main">
               <a:ext uri="{FF2B5EF4-FFF2-40B4-BE49-F238E27FC236}">
-                <a16:creationId xmlns:a16="http://schemas.microsoft.com/office/drawing/2014/main" id="{335F9775-1075-43E9-999A-FF5CCEC62060}"/>
+                <a16:creationId xmlns:a16="http://schemas.microsoft.com/office/drawing/2014/main" id="{0A1043D3-FE57-4214-BFF3-0DE10741E00A}"/>
               </a:ext>
             </a:extLst>
           </p:cNvPr>
@@ -25323,7 +25323,7 @@
           <p:cNvPr id="3" name="">
             <a:extLst xmlns:a="http://schemas.openxmlformats.org/drawingml/2006/main">
               <a:ext uri="{FF2B5EF4-FFF2-40B4-BE49-F238E27FC236}">
-                <a16:creationId xmlns:a16="http://schemas.microsoft.com/office/drawing/2014/main" id="{5F29ABDC-E4A6-4906-BD29-EFE6003143F1}"/>
+                <a16:creationId xmlns:a16="http://schemas.microsoft.com/office/drawing/2014/main" id="{F5CCA8AB-29DB-4D35-A2B8-F420127F89EB}"/>
               </a:ext>
             </a:extLst>
           </p:cNvPr>
@@ -25353,7 +25353,7 @@
           <p:cNvPr id="4" name="">
             <a:extLst xmlns:a="http://schemas.openxmlformats.org/drawingml/2006/main">
               <a:ext uri="{FF2B5EF4-FFF2-40B4-BE49-F238E27FC236}">
-                <a16:creationId xmlns:a16="http://schemas.microsoft.com/office/drawing/2014/main" id="{4F742104-853C-4192-9233-151929B1C1F5}"/>
+                <a16:creationId xmlns:a16="http://schemas.microsoft.com/office/drawing/2014/main" id="{873529D5-48A2-45DA-A74B-001ECFCF6186}"/>
               </a:ext>
             </a:extLst>
           </p:cNvPr>
@@ -25410,7 +25410,7 @@
           <p:cNvPr id="5" name="">
             <a:extLst xmlns:a="http://schemas.openxmlformats.org/drawingml/2006/main">
               <a:ext uri="{FF2B5EF4-FFF2-40B4-BE49-F238E27FC236}">
-                <a16:creationId xmlns:a16="http://schemas.microsoft.com/office/drawing/2014/main" id="{DA0212D0-2CB6-4613-81E6-06299B507523}"/>
+                <a16:creationId xmlns:a16="http://schemas.microsoft.com/office/drawing/2014/main" id="{8206FAFD-F203-475D-9BB9-83A7E860E0B3}"/>
               </a:ext>
             </a:extLst>
           </p:cNvPr>
@@ -25467,7 +25467,7 @@
           <p:cNvPr id="6" name="">
             <a:extLst xmlns:a="http://schemas.openxmlformats.org/drawingml/2006/main">
               <a:ext uri="{FF2B5EF4-FFF2-40B4-BE49-F238E27FC236}">
-                <a16:creationId xmlns:a16="http://schemas.microsoft.com/office/drawing/2014/main" id="{A7AE5114-583D-45DE-80C7-0F2DE8AEC2B9}"/>
+                <a16:creationId xmlns:a16="http://schemas.microsoft.com/office/drawing/2014/main" id="{693B6BD7-9251-4A24-8E20-732D9D5C1100}"/>
               </a:ext>
             </a:extLst>
           </p:cNvPr>
@@ -25524,7 +25524,7 @@
           <p:cNvPr id="7" name="">
             <a:extLst xmlns:a="http://schemas.openxmlformats.org/drawingml/2006/main">
               <a:ext uri="{FF2B5EF4-FFF2-40B4-BE49-F238E27FC236}">
-                <a16:creationId xmlns:a16="http://schemas.microsoft.com/office/drawing/2014/main" id="{5AB4D160-4F19-487B-BB8C-CA90496192D1}"/>
+                <a16:creationId xmlns:a16="http://schemas.microsoft.com/office/drawing/2014/main" id="{574A10DA-EF56-431E-B2EB-251B5E816AC1}"/>
               </a:ext>
             </a:extLst>
           </p:cNvPr>
@@ -25554,7 +25554,7 @@
           <p:cNvPr id="8" name="">
             <a:extLst xmlns:a="http://schemas.openxmlformats.org/drawingml/2006/main">
               <a:ext uri="{FF2B5EF4-FFF2-40B4-BE49-F238E27FC236}">
-                <a16:creationId xmlns:a16="http://schemas.microsoft.com/office/drawing/2014/main" id="{732616BE-6351-4930-A174-9E2DDB46680C}"/>
+                <a16:creationId xmlns:a16="http://schemas.microsoft.com/office/drawing/2014/main" id="{FAE3DFF0-3ED3-4ECD-8008-C6C7BB915133}"/>
               </a:ext>
             </a:extLst>
           </p:cNvPr>
@@ -25584,7 +25584,7 @@
           <p:cNvPr id="9" name="">
             <a:extLst xmlns:a="http://schemas.openxmlformats.org/drawingml/2006/main">
               <a:ext uri="{FF2B5EF4-FFF2-40B4-BE49-F238E27FC236}">
-                <a16:creationId xmlns:a16="http://schemas.microsoft.com/office/drawing/2014/main" id="{36DEE841-60F7-46B8-8F91-EA3F1574D83F}"/>
+                <a16:creationId xmlns:a16="http://schemas.microsoft.com/office/drawing/2014/main" id="{680BDFAE-AC9A-49E3-839D-F81696C5816A}"/>
               </a:ext>
             </a:extLst>
           </p:cNvPr>
@@ -25641,7 +25641,7 @@
           <p:cNvPr id="10" name="">
             <a:extLst xmlns:a="http://schemas.openxmlformats.org/drawingml/2006/main">
               <a:ext uri="{FF2B5EF4-FFF2-40B4-BE49-F238E27FC236}">
-                <a16:creationId xmlns:a16="http://schemas.microsoft.com/office/drawing/2014/main" id="{11410F14-F2B7-4D58-B98B-D613EA1D5D32}"/>
+                <a16:creationId xmlns:a16="http://schemas.microsoft.com/office/drawing/2014/main" id="{37DE3803-6795-4D98-A571-2D771CE4E410}"/>
               </a:ext>
             </a:extLst>
           </p:cNvPr>
@@ -25671,7 +25671,7 @@
           <p:cNvPr id="11" name="">
             <a:extLst xmlns:a="http://schemas.openxmlformats.org/drawingml/2006/main">
               <a:ext uri="{FF2B5EF4-FFF2-40B4-BE49-F238E27FC236}">
-                <a16:creationId xmlns:a16="http://schemas.microsoft.com/office/drawing/2014/main" id="{9394F9C5-EBA7-49C6-81C1-B99D7649669C}"/>
+                <a16:creationId xmlns:a16="http://schemas.microsoft.com/office/drawing/2014/main" id="{64585AEE-1CAB-46D6-BEFB-5018E382CD5F}"/>
               </a:ext>
             </a:extLst>
           </p:cNvPr>
@@ -25728,7 +25728,7 @@
           <p:cNvPr id="12" name="">
             <a:extLst xmlns:a="http://schemas.openxmlformats.org/drawingml/2006/main">
               <a:ext uri="{FF2B5EF4-FFF2-40B4-BE49-F238E27FC236}">
-                <a16:creationId xmlns:a16="http://schemas.microsoft.com/office/drawing/2014/main" id="{B8210723-0883-4CB9-882D-B545EA53D094}"/>
+                <a16:creationId xmlns:a16="http://schemas.microsoft.com/office/drawing/2014/main" id="{A096DB52-D048-4BC1-BFBA-3C05EC175C69}"/>
               </a:ext>
             </a:extLst>
           </p:cNvPr>
@@ -25758,7 +25758,7 @@
           <p:cNvPr id="13" name="">
             <a:extLst xmlns:a="http://schemas.openxmlformats.org/drawingml/2006/main">
               <a:ext uri="{FF2B5EF4-FFF2-40B4-BE49-F238E27FC236}">
-                <a16:creationId xmlns:a16="http://schemas.microsoft.com/office/drawing/2014/main" id="{84C8F77A-707B-49B8-BE7F-29EAF4108B66}"/>
+                <a16:creationId xmlns:a16="http://schemas.microsoft.com/office/drawing/2014/main" id="{B87282B6-1BA9-4368-A3A7-33D753017A5D}"/>
               </a:ext>
             </a:extLst>
           </p:cNvPr>
@@ -25815,7 +25815,7 @@
           <p:cNvPr id="14" name="">
             <a:extLst xmlns:a="http://schemas.openxmlformats.org/drawingml/2006/main">
               <a:ext uri="{FF2B5EF4-FFF2-40B4-BE49-F238E27FC236}">
-                <a16:creationId xmlns:a16="http://schemas.microsoft.com/office/drawing/2014/main" id="{B6C41D0F-70C2-4297-9FCB-08D829EADAD0}"/>
+                <a16:creationId xmlns:a16="http://schemas.microsoft.com/office/drawing/2014/main" id="{3DC63468-5F5B-4389-A4A8-2E042C1F8765}"/>
               </a:ext>
             </a:extLst>
           </p:cNvPr>
@@ -25845,7 +25845,7 @@
           <p:cNvPr id="15" name="">
             <a:extLst xmlns:a="http://schemas.openxmlformats.org/drawingml/2006/main">
               <a:ext uri="{FF2B5EF4-FFF2-40B4-BE49-F238E27FC236}">
-                <a16:creationId xmlns:a16="http://schemas.microsoft.com/office/drawing/2014/main" id="{3B926101-8DD2-444D-8BED-0CC1141283CB}"/>
+                <a16:creationId xmlns:a16="http://schemas.microsoft.com/office/drawing/2014/main" id="{AB209508-6692-4E29-97F6-05BCE9F9E59D}"/>
               </a:ext>
             </a:extLst>
           </p:cNvPr>
@@ -25902,7 +25902,7 @@
           <p:cNvPr id="16" name="">
             <a:extLst xmlns:a="http://schemas.openxmlformats.org/drawingml/2006/main">
               <a:ext uri="{FF2B5EF4-FFF2-40B4-BE49-F238E27FC236}">
-                <a16:creationId xmlns:a16="http://schemas.microsoft.com/office/drawing/2014/main" id="{E3603495-B9F2-4B2A-B32B-332244D76C0B}"/>
+                <a16:creationId xmlns:a16="http://schemas.microsoft.com/office/drawing/2014/main" id="{506CF9F2-30D1-4F4A-B502-950F30CF4714}"/>
               </a:ext>
             </a:extLst>
           </p:cNvPr>
@@ -25932,7 +25932,7 @@
           <p:cNvPr id="17" name="">
             <a:extLst xmlns:a="http://schemas.openxmlformats.org/drawingml/2006/main">
               <a:ext uri="{FF2B5EF4-FFF2-40B4-BE49-F238E27FC236}">
-                <a16:creationId xmlns:a16="http://schemas.microsoft.com/office/drawing/2014/main" id="{8AE4699C-343C-4834-ABEE-0716FD99E91C}"/>
+                <a16:creationId xmlns:a16="http://schemas.microsoft.com/office/drawing/2014/main" id="{8B57E472-4585-4E3B-98BB-E9746BC3F8AF}"/>
               </a:ext>
             </a:extLst>
           </p:cNvPr>
@@ -25989,7 +25989,7 @@
           <p:cNvPr id="18" name="">
             <a:extLst xmlns:a="http://schemas.openxmlformats.org/drawingml/2006/main">
               <a:ext uri="{FF2B5EF4-FFF2-40B4-BE49-F238E27FC236}">
-                <a16:creationId xmlns:a16="http://schemas.microsoft.com/office/drawing/2014/main" id="{DABDAFBE-421C-4113-9F8B-AFD792A7E9B7}"/>
+                <a16:creationId xmlns:a16="http://schemas.microsoft.com/office/drawing/2014/main" id="{0CF11D95-C802-462C-9F69-19DCE03235B4}"/>
               </a:ext>
             </a:extLst>
           </p:cNvPr>
@@ -26019,7 +26019,7 @@
           <p:cNvPr id="19" name="">
             <a:extLst xmlns:a="http://schemas.openxmlformats.org/drawingml/2006/main">
               <a:ext uri="{FF2B5EF4-FFF2-40B4-BE49-F238E27FC236}">
-                <a16:creationId xmlns:a16="http://schemas.microsoft.com/office/drawing/2014/main" id="{7BC99808-E3E4-48CE-B88C-8DFFD11BBEDA}"/>
+                <a16:creationId xmlns:a16="http://schemas.microsoft.com/office/drawing/2014/main" id="{29A02EC0-39FA-4821-9A2E-ECA66557DBCB}"/>
               </a:ext>
             </a:extLst>
           </p:cNvPr>
@@ -26076,7 +26076,7 @@
           <p:cNvPr id="20" name="">
             <a:extLst xmlns:a="http://schemas.openxmlformats.org/drawingml/2006/main">
               <a:ext uri="{FF2B5EF4-FFF2-40B4-BE49-F238E27FC236}">
-                <a16:creationId xmlns:a16="http://schemas.microsoft.com/office/drawing/2014/main" id="{3028407E-2574-4ED0-8F1C-BD0719340A9F}"/>
+                <a16:creationId xmlns:a16="http://schemas.microsoft.com/office/drawing/2014/main" id="{4D923E28-87CD-41A8-A5FC-97AC1B610472}"/>
               </a:ext>
             </a:extLst>
           </p:cNvPr>
@@ -26133,7 +26133,7 @@
           <p:cNvPr id="21" name="">
             <a:extLst xmlns:a="http://schemas.openxmlformats.org/drawingml/2006/main">
               <a:ext uri="{FF2B5EF4-FFF2-40B4-BE49-F238E27FC236}">
-                <a16:creationId xmlns:a16="http://schemas.microsoft.com/office/drawing/2014/main" id="{BA765BB8-0008-4FD5-BFC2-B85C38FC3D78}"/>
+                <a16:creationId xmlns:a16="http://schemas.microsoft.com/office/drawing/2014/main" id="{F9EBB0D0-7ECE-45A6-8236-4EE40C8F2979}"/>
               </a:ext>
             </a:extLst>
           </p:cNvPr>
@@ -26163,7 +26163,7 @@
           <p:cNvPr id="22" name="">
             <a:extLst xmlns:a="http://schemas.openxmlformats.org/drawingml/2006/main">
               <a:ext uri="{FF2B5EF4-FFF2-40B4-BE49-F238E27FC236}">
-                <a16:creationId xmlns:a16="http://schemas.microsoft.com/office/drawing/2014/main" id="{FA577617-26EE-4F1D-8E78-9510E58ED74D}"/>
+                <a16:creationId xmlns:a16="http://schemas.microsoft.com/office/drawing/2014/main" id="{6F871387-2627-4C40-B9F5-3B2BE74F69FB}"/>
               </a:ext>
             </a:extLst>
           </p:cNvPr>
@@ -26193,7 +26193,7 @@
           <p:cNvPr id="23" name="">
             <a:extLst xmlns:a="http://schemas.openxmlformats.org/drawingml/2006/main">
               <a:ext uri="{FF2B5EF4-FFF2-40B4-BE49-F238E27FC236}">
-                <a16:creationId xmlns:a16="http://schemas.microsoft.com/office/drawing/2014/main" id="{1DD6CE25-CCD1-48B6-A25B-961BF5A7D4CF}"/>
+                <a16:creationId xmlns:a16="http://schemas.microsoft.com/office/drawing/2014/main" id="{3C8AE275-44E1-4F54-BB18-D8ABFA970280}"/>
               </a:ext>
             </a:extLst>
           </p:cNvPr>
@@ -26250,7 +26250,7 @@
           <p:cNvPr id="24" name="">
             <a:extLst xmlns:a="http://schemas.openxmlformats.org/drawingml/2006/main">
               <a:ext uri="{FF2B5EF4-FFF2-40B4-BE49-F238E27FC236}">
-                <a16:creationId xmlns:a16="http://schemas.microsoft.com/office/drawing/2014/main" id="{899C1733-4354-4C3E-802F-C96EEC2BA52B}"/>
+                <a16:creationId xmlns:a16="http://schemas.microsoft.com/office/drawing/2014/main" id="{C4C2FE14-105D-433E-8A08-202F70FD793F}"/>
               </a:ext>
             </a:extLst>
           </p:cNvPr>
@@ -26280,7 +26280,7 @@
           <p:cNvPr id="25" name="">
             <a:extLst xmlns:a="http://schemas.openxmlformats.org/drawingml/2006/main">
               <a:ext uri="{FF2B5EF4-FFF2-40B4-BE49-F238E27FC236}">
-                <a16:creationId xmlns:a16="http://schemas.microsoft.com/office/drawing/2014/main" id="{2F6FBB39-180A-4400-BF5F-95C6DFBE2185}"/>
+                <a16:creationId xmlns:a16="http://schemas.microsoft.com/office/drawing/2014/main" id="{252F874E-A97A-4E2D-A47B-3619C2127F64}"/>
               </a:ext>
             </a:extLst>
           </p:cNvPr>
@@ -26337,7 +26337,7 @@
           <p:cNvPr id="26" name="">
             <a:extLst xmlns:a="http://schemas.openxmlformats.org/drawingml/2006/main">
               <a:ext uri="{FF2B5EF4-FFF2-40B4-BE49-F238E27FC236}">
-                <a16:creationId xmlns:a16="http://schemas.microsoft.com/office/drawing/2014/main" id="{A7CE63B7-A071-4059-9D28-8066ECF1993B}"/>
+                <a16:creationId xmlns:a16="http://schemas.microsoft.com/office/drawing/2014/main" id="{5AA22BFE-44B0-4629-87AE-3435A0C375E5}"/>
               </a:ext>
             </a:extLst>
           </p:cNvPr>
@@ -26367,7 +26367,7 @@
           <p:cNvPr id="27" name="">
             <a:extLst xmlns:a="http://schemas.openxmlformats.org/drawingml/2006/main">
               <a:ext uri="{FF2B5EF4-FFF2-40B4-BE49-F238E27FC236}">
-                <a16:creationId xmlns:a16="http://schemas.microsoft.com/office/drawing/2014/main" id="{B351E499-5909-4C35-8D7B-B41132D065D0}"/>
+                <a16:creationId xmlns:a16="http://schemas.microsoft.com/office/drawing/2014/main" id="{206B612E-C114-4C87-A6C7-975C61ED7ABB}"/>
               </a:ext>
             </a:extLst>
           </p:cNvPr>
@@ -26424,7 +26424,7 @@
           <p:cNvPr id="28" name="">
             <a:extLst xmlns:a="http://schemas.openxmlformats.org/drawingml/2006/main">
               <a:ext uri="{FF2B5EF4-FFF2-40B4-BE49-F238E27FC236}">
-                <a16:creationId xmlns:a16="http://schemas.microsoft.com/office/drawing/2014/main" id="{44C56226-951A-46B5-9280-673C16EBA366}"/>
+                <a16:creationId xmlns:a16="http://schemas.microsoft.com/office/drawing/2014/main" id="{FD56850B-CDCD-4537-AB3F-07E7EBDEAB85}"/>
               </a:ext>
             </a:extLst>
           </p:cNvPr>
@@ -26454,7 +26454,7 @@
           <p:cNvPr id="29" name="">
             <a:extLst xmlns:a="http://schemas.openxmlformats.org/drawingml/2006/main">
               <a:ext uri="{FF2B5EF4-FFF2-40B4-BE49-F238E27FC236}">
-                <a16:creationId xmlns:a16="http://schemas.microsoft.com/office/drawing/2014/main" id="{B0CC5303-D7A8-40F9-970C-B1B4681FE6A6}"/>
+                <a16:creationId xmlns:a16="http://schemas.microsoft.com/office/drawing/2014/main" id="{A173A0F6-E81F-4CBF-A833-D2F2B2660E48}"/>
               </a:ext>
             </a:extLst>
           </p:cNvPr>
@@ -26511,7 +26511,7 @@
           <p:cNvPr id="30" name="">
             <a:extLst xmlns:a="http://schemas.openxmlformats.org/drawingml/2006/main">
               <a:ext uri="{FF2B5EF4-FFF2-40B4-BE49-F238E27FC236}">
-                <a16:creationId xmlns:a16="http://schemas.microsoft.com/office/drawing/2014/main" id="{C6853B3B-DE0F-4590-AB28-C6658D8E23BB}"/>
+                <a16:creationId xmlns:a16="http://schemas.microsoft.com/office/drawing/2014/main" id="{D48397DA-1C2D-444F-8BEB-C7F588C20A9F}"/>
               </a:ext>
             </a:extLst>
           </p:cNvPr>
@@ -26541,7 +26541,7 @@
           <p:cNvPr id="31" name="">
             <a:extLst xmlns:a="http://schemas.openxmlformats.org/drawingml/2006/main">
               <a:ext uri="{FF2B5EF4-FFF2-40B4-BE49-F238E27FC236}">
-                <a16:creationId xmlns:a16="http://schemas.microsoft.com/office/drawing/2014/main" id="{9039334F-D120-4579-BF75-DFF7A4E4C224}"/>
+                <a16:creationId xmlns:a16="http://schemas.microsoft.com/office/drawing/2014/main" id="{2F9FEDE0-0A06-43D7-8CAE-1437E1FCF648}"/>
               </a:ext>
             </a:extLst>
           </p:cNvPr>
@@ -26598,7 +26598,7 @@
           <p:cNvPr id="32" name="">
             <a:extLst xmlns:a="http://schemas.openxmlformats.org/drawingml/2006/main">
               <a:ext uri="{FF2B5EF4-FFF2-40B4-BE49-F238E27FC236}">
-                <a16:creationId xmlns:a16="http://schemas.microsoft.com/office/drawing/2014/main" id="{02BD7514-CD6C-4879-9AB6-E4270B355B64}"/>
+                <a16:creationId xmlns:a16="http://schemas.microsoft.com/office/drawing/2014/main" id="{861257E3-DC0F-42F5-B2B1-E34D419F25B1}"/>
               </a:ext>
             </a:extLst>
           </p:cNvPr>
@@ -26628,7 +26628,7 @@
           <p:cNvPr id="33" name="">
             <a:extLst xmlns:a="http://schemas.openxmlformats.org/drawingml/2006/main">
               <a:ext uri="{FF2B5EF4-FFF2-40B4-BE49-F238E27FC236}">
-                <a16:creationId xmlns:a16="http://schemas.microsoft.com/office/drawing/2014/main" id="{D4BCDDE1-21F7-4876-872D-81B88546CE86}"/>
+                <a16:creationId xmlns:a16="http://schemas.microsoft.com/office/drawing/2014/main" id="{D6CB4D38-8AF8-478F-8CD3-F40E198C55CA}"/>
               </a:ext>
             </a:extLst>
           </p:cNvPr>
@@ -26685,7 +26685,7 @@
           <p:cNvPr id="34" name="">
             <a:extLst xmlns:a="http://schemas.openxmlformats.org/drawingml/2006/main">
               <a:ext uri="{FF2B5EF4-FFF2-40B4-BE49-F238E27FC236}">
-                <a16:creationId xmlns:a16="http://schemas.microsoft.com/office/drawing/2014/main" id="{6FEAC83C-01B1-44D8-88BF-3DEDF5A8E0D5}"/>
+                <a16:creationId xmlns:a16="http://schemas.microsoft.com/office/drawing/2014/main" id="{73E9C47B-BBE9-486C-B337-8771E38A2517}"/>
               </a:ext>
             </a:extLst>
           </p:cNvPr>
@@ -26742,7 +26742,7 @@
           <p:cNvPr id="35" name="">
             <a:extLst xmlns:a="http://schemas.openxmlformats.org/drawingml/2006/main">
               <a:ext uri="{FF2B5EF4-FFF2-40B4-BE49-F238E27FC236}">
-                <a16:creationId xmlns:a16="http://schemas.microsoft.com/office/drawing/2014/main" id="{0967EA6B-FE37-41C7-BAFC-438E30AC4793}"/>
+                <a16:creationId xmlns:a16="http://schemas.microsoft.com/office/drawing/2014/main" id="{428CD00C-030B-406C-8F79-AC8B7668CBFA}"/>
               </a:ext>
             </a:extLst>
           </p:cNvPr>
@@ -26772,7 +26772,7 @@
           <p:cNvPr id="36" name="">
             <a:extLst xmlns:a="http://schemas.openxmlformats.org/drawingml/2006/main">
               <a:ext uri="{FF2B5EF4-FFF2-40B4-BE49-F238E27FC236}">
-                <a16:creationId xmlns:a16="http://schemas.microsoft.com/office/drawing/2014/main" id="{3AE477E9-C723-45E1-A46B-B90C6FEE4F90}"/>
+                <a16:creationId xmlns:a16="http://schemas.microsoft.com/office/drawing/2014/main" id="{4D49829C-A4A4-44F6-8C54-70F06B75B884}"/>
               </a:ext>
             </a:extLst>
           </p:cNvPr>
@@ -26802,7 +26802,7 @@
           <p:cNvPr id="37" name="">
             <a:extLst xmlns:a="http://schemas.openxmlformats.org/drawingml/2006/main">
               <a:ext uri="{FF2B5EF4-FFF2-40B4-BE49-F238E27FC236}">
-                <a16:creationId xmlns:a16="http://schemas.microsoft.com/office/drawing/2014/main" id="{CB4B6A68-0996-4942-8CA6-169EE376F6ED}"/>
+                <a16:creationId xmlns:a16="http://schemas.microsoft.com/office/drawing/2014/main" id="{EECFA505-832D-4E74-8A66-5F7C6D1ADF77}"/>
               </a:ext>
             </a:extLst>
           </p:cNvPr>
@@ -26859,7 +26859,7 @@
           <p:cNvPr id="38" name="">
             <a:extLst xmlns:a="http://schemas.openxmlformats.org/drawingml/2006/main">
               <a:ext uri="{FF2B5EF4-FFF2-40B4-BE49-F238E27FC236}">
-                <a16:creationId xmlns:a16="http://schemas.microsoft.com/office/drawing/2014/main" id="{3BFA777F-9BE2-4E14-91D2-D15FC2A2C98D}"/>
+                <a16:creationId xmlns:a16="http://schemas.microsoft.com/office/drawing/2014/main" id="{B97F346D-7837-48F8-856B-B47A78C1D3EC}"/>
               </a:ext>
             </a:extLst>
           </p:cNvPr>
@@ -26889,7 +26889,7 @@
           <p:cNvPr id="39" name="">
             <a:extLst xmlns:a="http://schemas.openxmlformats.org/drawingml/2006/main">
               <a:ext uri="{FF2B5EF4-FFF2-40B4-BE49-F238E27FC236}">
-                <a16:creationId xmlns:a16="http://schemas.microsoft.com/office/drawing/2014/main" id="{E10EC377-D582-42CA-B495-038D721B3610}"/>
+                <a16:creationId xmlns:a16="http://schemas.microsoft.com/office/drawing/2014/main" id="{C6BE258B-7A72-49F4-9B6F-1E004C77D5D8}"/>
               </a:ext>
             </a:extLst>
           </p:cNvPr>
@@ -26946,7 +26946,7 @@
           <p:cNvPr id="40" name="">
             <a:extLst xmlns:a="http://schemas.openxmlformats.org/drawingml/2006/main">
               <a:ext uri="{FF2B5EF4-FFF2-40B4-BE49-F238E27FC236}">
-                <a16:creationId xmlns:a16="http://schemas.microsoft.com/office/drawing/2014/main" id="{CAB976F2-AA0C-4EBC-8B4C-D54C49C44F67}"/>
+                <a16:creationId xmlns:a16="http://schemas.microsoft.com/office/drawing/2014/main" id="{32577D6C-D5F5-4766-8431-2E5A39743E27}"/>
               </a:ext>
             </a:extLst>
           </p:cNvPr>
@@ -26976,7 +26976,7 @@
           <p:cNvPr id="41" name="">
             <a:extLst xmlns:a="http://schemas.openxmlformats.org/drawingml/2006/main">
               <a:ext uri="{FF2B5EF4-FFF2-40B4-BE49-F238E27FC236}">
-                <a16:creationId xmlns:a16="http://schemas.microsoft.com/office/drawing/2014/main" id="{41409A7E-13BF-4B24-BE8B-A4FC43F193C2}"/>
+                <a16:creationId xmlns:a16="http://schemas.microsoft.com/office/drawing/2014/main" id="{2D0C99D6-DCFC-49CE-983A-0F2E73612DFC}"/>
               </a:ext>
             </a:extLst>
           </p:cNvPr>
@@ -27033,7 +27033,7 @@
           <p:cNvPr id="42" name="">
             <a:extLst xmlns:a="http://schemas.openxmlformats.org/drawingml/2006/main">
               <a:ext uri="{FF2B5EF4-FFF2-40B4-BE49-F238E27FC236}">
-                <a16:creationId xmlns:a16="http://schemas.microsoft.com/office/drawing/2014/main" id="{072FBA62-733B-46B6-ABD6-AAA40EE9988B}"/>
+                <a16:creationId xmlns:a16="http://schemas.microsoft.com/office/drawing/2014/main" id="{3B763551-094C-42A7-8F83-51BDD3328C53}"/>
               </a:ext>
             </a:extLst>
           </p:cNvPr>
@@ -27063,7 +27063,7 @@
           <p:cNvPr id="43" name="">
             <a:extLst xmlns:a="http://schemas.openxmlformats.org/drawingml/2006/main">
               <a:ext uri="{FF2B5EF4-FFF2-40B4-BE49-F238E27FC236}">
-                <a16:creationId xmlns:a16="http://schemas.microsoft.com/office/drawing/2014/main" id="{903E5EB4-8047-4051-BD79-DE88672035C4}"/>
+                <a16:creationId xmlns:a16="http://schemas.microsoft.com/office/drawing/2014/main" id="{AE8CD363-808C-4284-8B8D-947C54540CA2}"/>
               </a:ext>
             </a:extLst>
           </p:cNvPr>
@@ -27120,7 +27120,7 @@
           <p:cNvPr id="44" name="">
             <a:extLst xmlns:a="http://schemas.openxmlformats.org/drawingml/2006/main">
               <a:ext uri="{FF2B5EF4-FFF2-40B4-BE49-F238E27FC236}">
-                <a16:creationId xmlns:a16="http://schemas.microsoft.com/office/drawing/2014/main" id="{292BF6E8-3F76-419E-B0F0-D8C8861F4EB5}"/>
+                <a16:creationId xmlns:a16="http://schemas.microsoft.com/office/drawing/2014/main" id="{F47EBAFF-31FC-4624-8517-FCF23F57AF4C}"/>
               </a:ext>
             </a:extLst>
           </p:cNvPr>
@@ -27150,7 +27150,7 @@
           <p:cNvPr id="45" name="">
             <a:extLst xmlns:a="http://schemas.openxmlformats.org/drawingml/2006/main">
               <a:ext uri="{FF2B5EF4-FFF2-40B4-BE49-F238E27FC236}">
-                <a16:creationId xmlns:a16="http://schemas.microsoft.com/office/drawing/2014/main" id="{E22E0969-7F24-4E40-A817-E1608F6E96BD}"/>
+                <a16:creationId xmlns:a16="http://schemas.microsoft.com/office/drawing/2014/main" id="{956DACFD-8344-437F-AF83-C010D92501B3}"/>
               </a:ext>
             </a:extLst>
           </p:cNvPr>
@@ -27207,7 +27207,7 @@
           <p:cNvPr id="46" name="">
             <a:extLst xmlns:a="http://schemas.openxmlformats.org/drawingml/2006/main">
               <a:ext uri="{FF2B5EF4-FFF2-40B4-BE49-F238E27FC236}">
-                <a16:creationId xmlns:a16="http://schemas.microsoft.com/office/drawing/2014/main" id="{A3AAFB58-CD57-4CE9-8509-6D7BBE50B02E}"/>
+                <a16:creationId xmlns:a16="http://schemas.microsoft.com/office/drawing/2014/main" id="{3597B08A-7EDB-414F-A0C6-48A5B0BF8336}"/>
               </a:ext>
             </a:extLst>
           </p:cNvPr>
@@ -27237,7 +27237,7 @@
           <p:cNvPr id="47" name="">
             <a:extLst xmlns:a="http://schemas.openxmlformats.org/drawingml/2006/main">
               <a:ext uri="{FF2B5EF4-FFF2-40B4-BE49-F238E27FC236}">
-                <a16:creationId xmlns:a16="http://schemas.microsoft.com/office/drawing/2014/main" id="{3C66D322-6532-464F-B448-1DFA98832985}"/>
+                <a16:creationId xmlns:a16="http://schemas.microsoft.com/office/drawing/2014/main" id="{B1D535BE-C326-4084-B762-2D35EE8072D3}"/>
               </a:ext>
             </a:extLst>
           </p:cNvPr>
@@ -27294,7 +27294,7 @@
           <p:cNvPr id="48" name="">
             <a:extLst xmlns:a="http://schemas.openxmlformats.org/drawingml/2006/main">
               <a:ext uri="{FF2B5EF4-FFF2-40B4-BE49-F238E27FC236}">
-                <a16:creationId xmlns:a16="http://schemas.microsoft.com/office/drawing/2014/main" id="{358598F7-55AE-42C8-9DE1-8E7EC46D2300}"/>
+                <a16:creationId xmlns:a16="http://schemas.microsoft.com/office/drawing/2014/main" id="{E0AE69E9-4BFD-416C-AFCD-9B904C8A8165}"/>
               </a:ext>
             </a:extLst>
           </p:cNvPr>
@@ -27326,7 +27326,7 @@
           <p:cNvPr id="49" name="">
             <a:extLst xmlns:a="http://schemas.openxmlformats.org/drawingml/2006/main">
               <a:ext uri="{FF2B5EF4-FFF2-40B4-BE49-F238E27FC236}">
-                <a16:creationId xmlns:a16="http://schemas.microsoft.com/office/drawing/2014/main" id="{55182865-25AB-4126-8220-C9D10645ADBF}"/>
+                <a16:creationId xmlns:a16="http://schemas.microsoft.com/office/drawing/2014/main" id="{32001128-F402-4122-9F95-892F173C4E65}"/>
               </a:ext>
             </a:extLst>
           </p:cNvPr>
@@ -27381,7 +27381,7 @@
     </p:spTree>
     <p:extLst>
       <p:ext uri="{BB962C8B-B14F-4D97-AF65-F5344CB8AC3E}">
-        <p14:creationId xmlns:p14="http://schemas.microsoft.com/office/powerpoint/2010/main" val="556480620"/>
+        <p14:creationId xmlns:p14="http://schemas.microsoft.com/office/powerpoint/2010/main" val="87510094"/>
       </p:ext>
     </p:extLst>
   </p:cSld>
@@ -27412,7 +27412,7 @@
           <p:cNvPr id="8" name="">
             <a:extLst xmlns:a="http://schemas.openxmlformats.org/drawingml/2006/main">
               <a:ext uri="{FF2B5EF4-FFF2-40B4-BE49-F238E27FC236}">
-                <a16:creationId xmlns:a16="http://schemas.microsoft.com/office/drawing/2014/main" id="{36C48282-E256-4D1C-8E15-0A5096B583E4}"/>
+                <a16:creationId xmlns:a16="http://schemas.microsoft.com/office/drawing/2014/main" id="{C7C02308-2DA9-4A17-86FA-72B5FE358267}"/>
               </a:ext>
             </a:extLst>
           </p:cNvPr>
@@ -27469,7 +27469,7 @@
           <p:cNvPr id="2" name="">
             <a:extLst xmlns:a="http://schemas.openxmlformats.org/drawingml/2006/main">
               <a:ext uri="{FF2B5EF4-FFF2-40B4-BE49-F238E27FC236}">
-                <a16:creationId xmlns:a16="http://schemas.microsoft.com/office/drawing/2014/main" id="{6A1F1374-90B1-407B-AE22-F4B2D2578504}"/>
+                <a16:creationId xmlns:a16="http://schemas.microsoft.com/office/drawing/2014/main" id="{B8A4834C-50FC-4B24-B6D3-92228BB85FA0}"/>
               </a:ext>
             </a:extLst>
           </p:cNvPr>
@@ -27526,7 +27526,7 @@
           <p:cNvPr id="3" name="">
             <a:extLst xmlns:a="http://schemas.openxmlformats.org/drawingml/2006/main">
               <a:ext uri="{FF2B5EF4-FFF2-40B4-BE49-F238E27FC236}">
-                <a16:creationId xmlns:a16="http://schemas.microsoft.com/office/drawing/2014/main" id="{377DF5F5-EA1F-4DAB-AFA1-5A27146D33B7}"/>
+                <a16:creationId xmlns:a16="http://schemas.microsoft.com/office/drawing/2014/main" id="{728B6E20-5B41-4A64-B83D-EE2BFBCF6D54}"/>
               </a:ext>
             </a:extLst>
           </p:cNvPr>
@@ -27556,7 +27556,7 @@
           <p:cNvPr id="4" name="">
             <a:extLst xmlns:a="http://schemas.openxmlformats.org/drawingml/2006/main">
               <a:ext uri="{FF2B5EF4-FFF2-40B4-BE49-F238E27FC236}">
-                <a16:creationId xmlns:a16="http://schemas.microsoft.com/office/drawing/2014/main" id="{DC26A0B1-77B7-4AAB-AE73-13A73EB79234}"/>
+                <a16:creationId xmlns:a16="http://schemas.microsoft.com/office/drawing/2014/main" id="{ADF3E004-85D7-4E93-AF65-5F10C815CAE4}"/>
               </a:ext>
             </a:extLst>
           </p:cNvPr>
@@ -27613,7 +27613,7 @@
           <p:cNvPr id="5" name="">
             <a:extLst xmlns:a="http://schemas.openxmlformats.org/drawingml/2006/main">
               <a:ext uri="{FF2B5EF4-FFF2-40B4-BE49-F238E27FC236}">
-                <a16:creationId xmlns:a16="http://schemas.microsoft.com/office/drawing/2014/main" id="{6CDF0A6A-FBF0-4409-95C8-0014B6EAC731}"/>
+                <a16:creationId xmlns:a16="http://schemas.microsoft.com/office/drawing/2014/main" id="{D6EC20A8-3428-4044-8DAA-F7E6367D065E}"/>
               </a:ext>
             </a:extLst>
           </p:cNvPr>
@@ -27989,7 +27989,7 @@
           <p:cNvPr id="7" name="">
             <a:extLst xmlns:a="http://schemas.openxmlformats.org/drawingml/2006/main">
               <a:ext uri="{FF2B5EF4-FFF2-40B4-BE49-F238E27FC236}">
-                <a16:creationId xmlns:a16="http://schemas.microsoft.com/office/drawing/2014/main" id="{A2E1CD14-D3AE-4F39-9BD4-CD2A5F51E179}"/>
+                <a16:creationId xmlns:a16="http://schemas.microsoft.com/office/drawing/2014/main" id="{7C2FCA30-1AA4-4BB2-91A1-223AB7D7F789}"/>
               </a:ext>
             </a:extLst>
           </p:cNvPr>
@@ -28044,7 +28044,7 @@
     </p:spTree>
     <p:extLst>
       <p:ext uri="{BB962C8B-B14F-4D97-AF65-F5344CB8AC3E}">
-        <p14:creationId xmlns:p14="http://schemas.microsoft.com/office/powerpoint/2010/main" val="1407830559"/>
+        <p14:creationId xmlns:p14="http://schemas.microsoft.com/office/powerpoint/2010/main" val="2067830650"/>
       </p:ext>
     </p:extLst>
   </p:cSld>
@@ -28075,7 +28075,7 @@
           <p:cNvPr id="20" name="">
             <a:extLst xmlns:a="http://schemas.openxmlformats.org/drawingml/2006/main">
               <a:ext uri="{FF2B5EF4-FFF2-40B4-BE49-F238E27FC236}">
-                <a16:creationId xmlns:a16="http://schemas.microsoft.com/office/drawing/2014/main" id="{9D34DF71-4A93-4D75-8697-5E0896485251}"/>
+                <a16:creationId xmlns:a16="http://schemas.microsoft.com/office/drawing/2014/main" id="{70B1345C-8589-4451-8721-EE3CD7DA30E8}"/>
               </a:ext>
             </a:extLst>
           </p:cNvPr>
@@ -28132,7 +28132,7 @@
           <p:cNvPr id="2" name="">
             <a:extLst xmlns:a="http://schemas.openxmlformats.org/drawingml/2006/main">
               <a:ext uri="{FF2B5EF4-FFF2-40B4-BE49-F238E27FC236}">
-                <a16:creationId xmlns:a16="http://schemas.microsoft.com/office/drawing/2014/main" id="{5F3B76F8-42E0-42AF-8813-69304FC9CACA}"/>
+                <a16:creationId xmlns:a16="http://schemas.microsoft.com/office/drawing/2014/main" id="{6671D415-38A7-4C2D-81E1-05867E242E3D}"/>
               </a:ext>
             </a:extLst>
           </p:cNvPr>
@@ -28189,7 +28189,7 @@
           <p:cNvPr id="3" name="">
             <a:extLst xmlns:a="http://schemas.openxmlformats.org/drawingml/2006/main">
               <a:ext uri="{FF2B5EF4-FFF2-40B4-BE49-F238E27FC236}">
-                <a16:creationId xmlns:a16="http://schemas.microsoft.com/office/drawing/2014/main" id="{C837FEFD-2766-443C-A0CE-4C2BCC92D1FE}"/>
+                <a16:creationId xmlns:a16="http://schemas.microsoft.com/office/drawing/2014/main" id="{EA529246-520F-41C7-B99E-A133ED641B94}"/>
               </a:ext>
             </a:extLst>
           </p:cNvPr>
@@ -28219,7 +28219,7 @@
           <p:cNvPr id="4" name="">
             <a:extLst xmlns:a="http://schemas.openxmlformats.org/drawingml/2006/main">
               <a:ext uri="{FF2B5EF4-FFF2-40B4-BE49-F238E27FC236}">
-                <a16:creationId xmlns:a16="http://schemas.microsoft.com/office/drawing/2014/main" id="{02323BCC-7962-4357-8D91-35A575FBECA1}"/>
+                <a16:creationId xmlns:a16="http://schemas.microsoft.com/office/drawing/2014/main" id="{8EBC7D52-4131-4146-981F-8365AB960ACC}"/>
               </a:ext>
             </a:extLst>
           </p:cNvPr>
@@ -28276,7 +28276,7 @@
           <p:cNvPr id="5" name="">
             <a:extLst xmlns:a="http://schemas.openxmlformats.org/drawingml/2006/main">
               <a:ext uri="{FF2B5EF4-FFF2-40B4-BE49-F238E27FC236}">
-                <a16:creationId xmlns:a16="http://schemas.microsoft.com/office/drawing/2014/main" id="{C79AB40E-CC99-4A2C-A4E8-C4D23646C146}"/>
+                <a16:creationId xmlns:a16="http://schemas.microsoft.com/office/drawing/2014/main" id="{674232AA-700A-4B03-BEB8-9805597D508C}"/>
               </a:ext>
             </a:extLst>
           </p:cNvPr>
@@ -28333,7 +28333,7 @@
           <p:cNvPr id="6" name="">
             <a:extLst xmlns:a="http://schemas.openxmlformats.org/drawingml/2006/main">
               <a:ext uri="{FF2B5EF4-FFF2-40B4-BE49-F238E27FC236}">
-                <a16:creationId xmlns:a16="http://schemas.microsoft.com/office/drawing/2014/main" id="{CE8D4FA1-F278-49D9-9B49-E2F8EA9DEE66}"/>
+                <a16:creationId xmlns:a16="http://schemas.microsoft.com/office/drawing/2014/main" id="{BAE667B7-3AF7-4201-97F9-4292CE04DA39}"/>
               </a:ext>
             </a:extLst>
           </p:cNvPr>
@@ -28390,7 +28390,7 @@
           <p:cNvPr id="7" name="">
             <a:extLst xmlns:a="http://schemas.openxmlformats.org/drawingml/2006/main">
               <a:ext uri="{FF2B5EF4-FFF2-40B4-BE49-F238E27FC236}">
-                <a16:creationId xmlns:a16="http://schemas.microsoft.com/office/drawing/2014/main" id="{0CC96C6A-0A21-4FF2-86E6-3C7E53988D5A}"/>
+                <a16:creationId xmlns:a16="http://schemas.microsoft.com/office/drawing/2014/main" id="{0B2A5404-1AAB-4F99-80BE-E116D9BBE9D7}"/>
               </a:ext>
             </a:extLst>
           </p:cNvPr>
@@ -28447,7 +28447,7 @@
           <p:cNvPr id="8" name="">
             <a:extLst xmlns:a="http://schemas.openxmlformats.org/drawingml/2006/main">
               <a:ext uri="{FF2B5EF4-FFF2-40B4-BE49-F238E27FC236}">
-                <a16:creationId xmlns:a16="http://schemas.microsoft.com/office/drawing/2014/main" id="{26BAFFE7-F1D6-42AE-82B8-233219D2EEE5}"/>
+                <a16:creationId xmlns:a16="http://schemas.microsoft.com/office/drawing/2014/main" id="{B24803AA-ED5E-4986-B656-A4A314747B84}"/>
               </a:ext>
             </a:extLst>
           </p:cNvPr>
@@ -28504,7 +28504,7 @@
           <p:cNvPr id="9" name="">
             <a:extLst xmlns:a="http://schemas.openxmlformats.org/drawingml/2006/main">
               <a:ext uri="{FF2B5EF4-FFF2-40B4-BE49-F238E27FC236}">
-                <a16:creationId xmlns:a16="http://schemas.microsoft.com/office/drawing/2014/main" id="{7E2D33C6-71EA-4C83-B9F7-F5D4A29813D6}"/>
+                <a16:creationId xmlns:a16="http://schemas.microsoft.com/office/drawing/2014/main" id="{62B3B2C0-C73B-4F83-B54A-832E14C47E48}"/>
               </a:ext>
             </a:extLst>
           </p:cNvPr>
@@ -28534,7 +28534,7 @@
           <p:cNvPr id="10" name="">
             <a:extLst xmlns:a="http://schemas.openxmlformats.org/drawingml/2006/main">
               <a:ext uri="{FF2B5EF4-FFF2-40B4-BE49-F238E27FC236}">
-                <a16:creationId xmlns:a16="http://schemas.microsoft.com/office/drawing/2014/main" id="{48B9F9A0-C56A-4AB2-AAC5-2131FF12DFBC}"/>
+                <a16:creationId xmlns:a16="http://schemas.microsoft.com/office/drawing/2014/main" id="{9E262A6F-2C65-40A6-BAFA-FE14CB967E6E}"/>
               </a:ext>
             </a:extLst>
           </p:cNvPr>
@@ -28591,7 +28591,7 @@
           <p:cNvPr id="11" name="">
             <a:extLst xmlns:a="http://schemas.openxmlformats.org/drawingml/2006/main">
               <a:ext uri="{FF2B5EF4-FFF2-40B4-BE49-F238E27FC236}">
-                <a16:creationId xmlns:a16="http://schemas.microsoft.com/office/drawing/2014/main" id="{FF25BDB2-53A2-4DC2-8F58-3FFB28FB718E}"/>
+                <a16:creationId xmlns:a16="http://schemas.microsoft.com/office/drawing/2014/main" id="{8DC9651A-9333-462E-87D0-005374E8852C}"/>
               </a:ext>
             </a:extLst>
           </p:cNvPr>
@@ -28648,7 +28648,7 @@
           <p:cNvPr id="12" name="">
             <a:extLst xmlns:a="http://schemas.openxmlformats.org/drawingml/2006/main">
               <a:ext uri="{FF2B5EF4-FFF2-40B4-BE49-F238E27FC236}">
-                <a16:creationId xmlns:a16="http://schemas.microsoft.com/office/drawing/2014/main" id="{01FE3EAE-C908-498D-A760-174AF03F8ACC}"/>
+                <a16:creationId xmlns:a16="http://schemas.microsoft.com/office/drawing/2014/main" id="{149709FB-EAF2-4D55-9562-E56E48039621}"/>
               </a:ext>
             </a:extLst>
           </p:cNvPr>
@@ -28678,7 +28678,7 @@
           <p:cNvPr id="13" name="">
             <a:extLst xmlns:a="http://schemas.openxmlformats.org/drawingml/2006/main">
               <a:ext uri="{FF2B5EF4-FFF2-40B4-BE49-F238E27FC236}">
-                <a16:creationId xmlns:a16="http://schemas.microsoft.com/office/drawing/2014/main" id="{36FA4E58-D449-4C2A-9D07-30A3D50B9A72}"/>
+                <a16:creationId xmlns:a16="http://schemas.microsoft.com/office/drawing/2014/main" id="{EBE41041-AC46-4634-9ABD-79756F8DE901}"/>
               </a:ext>
             </a:extLst>
           </p:cNvPr>
@@ -28735,7 +28735,7 @@
           <p:cNvPr id="14" name="">
             <a:extLst xmlns:a="http://schemas.openxmlformats.org/drawingml/2006/main">
               <a:ext uri="{FF2B5EF4-FFF2-40B4-BE49-F238E27FC236}">
-                <a16:creationId xmlns:a16="http://schemas.microsoft.com/office/drawing/2014/main" id="{94B9ABB2-D01F-4C39-A605-A842E8F3B9EB}"/>
+                <a16:creationId xmlns:a16="http://schemas.microsoft.com/office/drawing/2014/main" id="{D1563E09-8752-4178-B01C-4827570548A5}"/>
               </a:ext>
             </a:extLst>
           </p:cNvPr>
@@ -28792,7 +28792,7 @@
           <p:cNvPr id="15" name="">
             <a:extLst xmlns:a="http://schemas.openxmlformats.org/drawingml/2006/main">
               <a:ext uri="{FF2B5EF4-FFF2-40B4-BE49-F238E27FC236}">
-                <a16:creationId xmlns:a16="http://schemas.microsoft.com/office/drawing/2014/main" id="{BE3226F3-421D-4F78-86D9-41E97DD3231F}"/>
+                <a16:creationId xmlns:a16="http://schemas.microsoft.com/office/drawing/2014/main" id="{6A05D858-367A-4A57-B3DE-BA6DAC80191A}"/>
               </a:ext>
             </a:extLst>
           </p:cNvPr>
@@ -28822,7 +28822,7 @@
           <p:cNvPr id="16" name="">
             <a:extLst xmlns:a="http://schemas.openxmlformats.org/drawingml/2006/main">
               <a:ext uri="{FF2B5EF4-FFF2-40B4-BE49-F238E27FC236}">
-                <a16:creationId xmlns:a16="http://schemas.microsoft.com/office/drawing/2014/main" id="{1CDD4989-156E-4BCE-ABD1-7581F5187C67}"/>
+                <a16:creationId xmlns:a16="http://schemas.microsoft.com/office/drawing/2014/main" id="{F181EEA1-FA53-4D79-8878-322F832E4E32}"/>
               </a:ext>
             </a:extLst>
           </p:cNvPr>
@@ -28879,7 +28879,7 @@
           <p:cNvPr id="17" name="">
             <a:extLst xmlns:a="http://schemas.openxmlformats.org/drawingml/2006/main">
               <a:ext uri="{FF2B5EF4-FFF2-40B4-BE49-F238E27FC236}">
-                <a16:creationId xmlns:a16="http://schemas.microsoft.com/office/drawing/2014/main" id="{85152EE3-7F2B-4A64-9449-7AA524E65806}"/>
+                <a16:creationId xmlns:a16="http://schemas.microsoft.com/office/drawing/2014/main" id="{6CD934DF-4C84-4493-9DF5-7517A46923A9}"/>
               </a:ext>
             </a:extLst>
           </p:cNvPr>
@@ -28936,7 +28936,7 @@
           <p:cNvPr id="18" name="">
             <a:extLst xmlns:a="http://schemas.openxmlformats.org/drawingml/2006/main">
               <a:ext uri="{FF2B5EF4-FFF2-40B4-BE49-F238E27FC236}">
-                <a16:creationId xmlns:a16="http://schemas.microsoft.com/office/drawing/2014/main" id="{6C827A85-917B-4BF5-858F-051185E23A55}"/>
+                <a16:creationId xmlns:a16="http://schemas.microsoft.com/office/drawing/2014/main" id="{CDC03904-E81A-48A4-957C-709F8962D0CC}"/>
               </a:ext>
             </a:extLst>
           </p:cNvPr>
@@ -28968,7 +28968,7 @@
           <p:cNvPr id="19" name="">
             <a:extLst xmlns:a="http://schemas.openxmlformats.org/drawingml/2006/main">
               <a:ext uri="{FF2B5EF4-FFF2-40B4-BE49-F238E27FC236}">
-                <a16:creationId xmlns:a16="http://schemas.microsoft.com/office/drawing/2014/main" id="{25AD5043-32F5-47D3-AADD-84EB2FF37FA1}"/>
+                <a16:creationId xmlns:a16="http://schemas.microsoft.com/office/drawing/2014/main" id="{70C5B741-15FB-494E-BFFE-21A5CB8DF43F}"/>
               </a:ext>
             </a:extLst>
           </p:cNvPr>
@@ -29023,7 +29023,7 @@
     </p:spTree>
     <p:extLst>
       <p:ext uri="{BB962C8B-B14F-4D97-AF65-F5344CB8AC3E}">
-        <p14:creationId xmlns:p14="http://schemas.microsoft.com/office/powerpoint/2010/main" val="933609610"/>
+        <p14:creationId xmlns:p14="http://schemas.microsoft.com/office/powerpoint/2010/main" val="417713868"/>
       </p:ext>
     </p:extLst>
   </p:cSld>
@@ -29054,7 +29054,7 @@
           <p:cNvPr id="20" name="">
             <a:extLst xmlns:a="http://schemas.openxmlformats.org/drawingml/2006/main">
               <a:ext uri="{FF2B5EF4-FFF2-40B4-BE49-F238E27FC236}">
-                <a16:creationId xmlns:a16="http://schemas.microsoft.com/office/drawing/2014/main" id="{9EED433A-A197-4E8F-9F4B-66F2E09D9587}"/>
+                <a16:creationId xmlns:a16="http://schemas.microsoft.com/office/drawing/2014/main" id="{104389F3-4FD3-479F-8BB8-E2E68CD4948A}"/>
               </a:ext>
             </a:extLst>
           </p:cNvPr>
@@ -29111,7 +29111,7 @@
           <p:cNvPr id="2" name="">
             <a:extLst xmlns:a="http://schemas.openxmlformats.org/drawingml/2006/main">
               <a:ext uri="{FF2B5EF4-FFF2-40B4-BE49-F238E27FC236}">
-                <a16:creationId xmlns:a16="http://schemas.microsoft.com/office/drawing/2014/main" id="{8A09A2F4-4ED6-48E6-92A8-F808D22CC4DB}"/>
+                <a16:creationId xmlns:a16="http://schemas.microsoft.com/office/drawing/2014/main" id="{4E4A36F4-18FD-4B9C-804D-F2CCFDBC2E1A}"/>
               </a:ext>
             </a:extLst>
           </p:cNvPr>
@@ -29168,7 +29168,7 @@
           <p:cNvPr id="3" name="">
             <a:extLst xmlns:a="http://schemas.openxmlformats.org/drawingml/2006/main">
               <a:ext uri="{FF2B5EF4-FFF2-40B4-BE49-F238E27FC236}">
-                <a16:creationId xmlns:a16="http://schemas.microsoft.com/office/drawing/2014/main" id="{B3C9D409-6E32-4D27-80E5-C211F74C11D1}"/>
+                <a16:creationId xmlns:a16="http://schemas.microsoft.com/office/drawing/2014/main" id="{7DFCBAF2-FE55-480D-B820-137AB3A53C20}"/>
               </a:ext>
             </a:extLst>
           </p:cNvPr>
@@ -29198,7 +29198,7 @@
           <p:cNvPr id="4" name="">
             <a:extLst xmlns:a="http://schemas.openxmlformats.org/drawingml/2006/main">
               <a:ext uri="{FF2B5EF4-FFF2-40B4-BE49-F238E27FC236}">
-                <a16:creationId xmlns:a16="http://schemas.microsoft.com/office/drawing/2014/main" id="{AC5111DB-8FF9-4FD4-88E5-0D239FB4B619}"/>
+                <a16:creationId xmlns:a16="http://schemas.microsoft.com/office/drawing/2014/main" id="{966C6ACF-8B85-4C8C-870C-9B3DE92B3332}"/>
               </a:ext>
             </a:extLst>
           </p:cNvPr>
@@ -29255,7 +29255,7 @@
           <p:cNvPr id="5" name="">
             <a:extLst xmlns:a="http://schemas.openxmlformats.org/drawingml/2006/main">
               <a:ext uri="{FF2B5EF4-FFF2-40B4-BE49-F238E27FC236}">
-                <a16:creationId xmlns:a16="http://schemas.microsoft.com/office/drawing/2014/main" id="{16B9D248-6D7F-4844-902A-FDCD5D73BBA5}"/>
+                <a16:creationId xmlns:a16="http://schemas.microsoft.com/office/drawing/2014/main" id="{B0585B79-3DB3-4110-8271-24BA4A8C1564}"/>
               </a:ext>
             </a:extLst>
           </p:cNvPr>
@@ -29312,7 +29312,7 @@
           <p:cNvPr id="6" name="">
             <a:extLst xmlns:a="http://schemas.openxmlformats.org/drawingml/2006/main">
               <a:ext uri="{FF2B5EF4-FFF2-40B4-BE49-F238E27FC236}">
-                <a16:creationId xmlns:a16="http://schemas.microsoft.com/office/drawing/2014/main" id="{16EEF7C8-0565-4328-BF9A-1BC713530BF2}"/>
+                <a16:creationId xmlns:a16="http://schemas.microsoft.com/office/drawing/2014/main" id="{DD58017B-ACE7-4F9B-BECC-1F770992DE81}"/>
               </a:ext>
             </a:extLst>
           </p:cNvPr>
@@ -29369,7 +29369,7 @@
           <p:cNvPr id="7" name="">
             <a:extLst xmlns:a="http://schemas.openxmlformats.org/drawingml/2006/main">
               <a:ext uri="{FF2B5EF4-FFF2-40B4-BE49-F238E27FC236}">
-                <a16:creationId xmlns:a16="http://schemas.microsoft.com/office/drawing/2014/main" id="{51F41F4B-DCD6-4F94-84DA-D7A358A40453}"/>
+                <a16:creationId xmlns:a16="http://schemas.microsoft.com/office/drawing/2014/main" id="{82E773CF-02F7-47E4-96A7-2ADD2814A145}"/>
               </a:ext>
             </a:extLst>
           </p:cNvPr>
@@ -29426,7 +29426,7 @@
           <p:cNvPr id="8" name="">
             <a:extLst xmlns:a="http://schemas.openxmlformats.org/drawingml/2006/main">
               <a:ext uri="{FF2B5EF4-FFF2-40B4-BE49-F238E27FC236}">
-                <a16:creationId xmlns:a16="http://schemas.microsoft.com/office/drawing/2014/main" id="{E4D2A0C4-AE55-4361-933F-A992248EBACD}"/>
+                <a16:creationId xmlns:a16="http://schemas.microsoft.com/office/drawing/2014/main" id="{E9802164-2BC3-4389-8905-7C81309B20FE}"/>
               </a:ext>
             </a:extLst>
           </p:cNvPr>
@@ -29483,7 +29483,7 @@
           <p:cNvPr id="9" name="">
             <a:extLst xmlns:a="http://schemas.openxmlformats.org/drawingml/2006/main">
               <a:ext uri="{FF2B5EF4-FFF2-40B4-BE49-F238E27FC236}">
-                <a16:creationId xmlns:a16="http://schemas.microsoft.com/office/drawing/2014/main" id="{F01C2681-7003-4823-9BCB-D70D53A6D9BE}"/>
+                <a16:creationId xmlns:a16="http://schemas.microsoft.com/office/drawing/2014/main" id="{8A9D162A-F7C2-4A33-851B-A85FB6DBF099}"/>
               </a:ext>
             </a:extLst>
           </p:cNvPr>
@@ -29513,7 +29513,7 @@
           <p:cNvPr id="10" name="">
             <a:extLst xmlns:a="http://schemas.openxmlformats.org/drawingml/2006/main">
               <a:ext uri="{FF2B5EF4-FFF2-40B4-BE49-F238E27FC236}">
-                <a16:creationId xmlns:a16="http://schemas.microsoft.com/office/drawing/2014/main" id="{C876D859-92B4-4081-A792-F6EEE82912FF}"/>
+                <a16:creationId xmlns:a16="http://schemas.microsoft.com/office/drawing/2014/main" id="{5985AE09-E77B-4A51-9CC0-244E4EAF5592}"/>
               </a:ext>
             </a:extLst>
           </p:cNvPr>
@@ -29570,7 +29570,7 @@
           <p:cNvPr id="11" name="">
             <a:extLst xmlns:a="http://schemas.openxmlformats.org/drawingml/2006/main">
               <a:ext uri="{FF2B5EF4-FFF2-40B4-BE49-F238E27FC236}">
-                <a16:creationId xmlns:a16="http://schemas.microsoft.com/office/drawing/2014/main" id="{15C7FF42-E7EF-4906-B6AB-698EB97F4D55}"/>
+                <a16:creationId xmlns:a16="http://schemas.microsoft.com/office/drawing/2014/main" id="{B7099BDF-F5A0-4238-AD63-34AD173C2EF2}"/>
               </a:ext>
             </a:extLst>
           </p:cNvPr>
@@ -29627,7 +29627,7 @@
           <p:cNvPr id="12" name="">
             <a:extLst xmlns:a="http://schemas.openxmlformats.org/drawingml/2006/main">
               <a:ext uri="{FF2B5EF4-FFF2-40B4-BE49-F238E27FC236}">
-                <a16:creationId xmlns:a16="http://schemas.microsoft.com/office/drawing/2014/main" id="{5A89767B-5E79-46DA-82A5-0A2CBC576066}"/>
+                <a16:creationId xmlns:a16="http://schemas.microsoft.com/office/drawing/2014/main" id="{04B03EC0-C722-4216-8936-DF3CFD1406B6}"/>
               </a:ext>
             </a:extLst>
           </p:cNvPr>
@@ -29657,7 +29657,7 @@
           <p:cNvPr id="13" name="">
             <a:extLst xmlns:a="http://schemas.openxmlformats.org/drawingml/2006/main">
               <a:ext uri="{FF2B5EF4-FFF2-40B4-BE49-F238E27FC236}">
-                <a16:creationId xmlns:a16="http://schemas.microsoft.com/office/drawing/2014/main" id="{7D91FE15-640E-428C-8F4A-1FA2E32B6499}"/>
+                <a16:creationId xmlns:a16="http://schemas.microsoft.com/office/drawing/2014/main" id="{71E8F230-9C89-4D05-BF9C-D7BE6E6A1983}"/>
               </a:ext>
             </a:extLst>
           </p:cNvPr>
@@ -29714,7 +29714,7 @@
           <p:cNvPr id="14" name="">
             <a:extLst xmlns:a="http://schemas.openxmlformats.org/drawingml/2006/main">
               <a:ext uri="{FF2B5EF4-FFF2-40B4-BE49-F238E27FC236}">
-                <a16:creationId xmlns:a16="http://schemas.microsoft.com/office/drawing/2014/main" id="{A548DDDC-4DB6-42D5-8379-0B301F0FD682}"/>
+                <a16:creationId xmlns:a16="http://schemas.microsoft.com/office/drawing/2014/main" id="{34AA3F88-2F5A-4316-9CEB-179237F9B85E}"/>
               </a:ext>
             </a:extLst>
           </p:cNvPr>
@@ -29771,7 +29771,7 @@
           <p:cNvPr id="15" name="">
             <a:extLst xmlns:a="http://schemas.openxmlformats.org/drawingml/2006/main">
               <a:ext uri="{FF2B5EF4-FFF2-40B4-BE49-F238E27FC236}">
-                <a16:creationId xmlns:a16="http://schemas.microsoft.com/office/drawing/2014/main" id="{43008ACD-5693-4CD3-8BBA-D2A380E574D2}"/>
+                <a16:creationId xmlns:a16="http://schemas.microsoft.com/office/drawing/2014/main" id="{9A1778F4-254A-4A0F-A35F-87FEB60B8F00}"/>
               </a:ext>
             </a:extLst>
           </p:cNvPr>
@@ -29801,7 +29801,7 @@
           <p:cNvPr id="16" name="">
             <a:extLst xmlns:a="http://schemas.openxmlformats.org/drawingml/2006/main">
               <a:ext uri="{FF2B5EF4-FFF2-40B4-BE49-F238E27FC236}">
-                <a16:creationId xmlns:a16="http://schemas.microsoft.com/office/drawing/2014/main" id="{A0131D2A-D28E-44DF-B0E4-786980CA160B}"/>
+                <a16:creationId xmlns:a16="http://schemas.microsoft.com/office/drawing/2014/main" id="{4E46388B-D8CA-4AA8-9D62-00718B919AFB}"/>
               </a:ext>
             </a:extLst>
           </p:cNvPr>
@@ -29858,7 +29858,7 @@
           <p:cNvPr id="17" name="">
             <a:extLst xmlns:a="http://schemas.openxmlformats.org/drawingml/2006/main">
               <a:ext uri="{FF2B5EF4-FFF2-40B4-BE49-F238E27FC236}">
-                <a16:creationId xmlns:a16="http://schemas.microsoft.com/office/drawing/2014/main" id="{03DDC3C2-7270-4035-BD2C-5D88DC863691}"/>
+                <a16:creationId xmlns:a16="http://schemas.microsoft.com/office/drawing/2014/main" id="{3BB30BC3-41F1-4B53-8C2E-698C15CAD000}"/>
               </a:ext>
             </a:extLst>
           </p:cNvPr>
@@ -29915,7 +29915,7 @@
           <p:cNvPr id="18" name="">
             <a:extLst xmlns:a="http://schemas.openxmlformats.org/drawingml/2006/main">
               <a:ext uri="{FF2B5EF4-FFF2-40B4-BE49-F238E27FC236}">
-                <a16:creationId xmlns:a16="http://schemas.microsoft.com/office/drawing/2014/main" id="{063B22BE-3AB3-4A13-BEB1-49CBA7F3A632}"/>
+                <a16:creationId xmlns:a16="http://schemas.microsoft.com/office/drawing/2014/main" id="{20FB2490-8969-48A9-942B-5B212973E2B9}"/>
               </a:ext>
             </a:extLst>
           </p:cNvPr>
@@ -29947,7 +29947,7 @@
           <p:cNvPr id="19" name="">
             <a:extLst xmlns:a="http://schemas.openxmlformats.org/drawingml/2006/main">
               <a:ext uri="{FF2B5EF4-FFF2-40B4-BE49-F238E27FC236}">
-                <a16:creationId xmlns:a16="http://schemas.microsoft.com/office/drawing/2014/main" id="{C24A265C-9EFD-47D3-9D79-4E2AB43AC195}"/>
+                <a16:creationId xmlns:a16="http://schemas.microsoft.com/office/drawing/2014/main" id="{99039644-4E5D-45CA-8331-FD60175EC87F}"/>
               </a:ext>
             </a:extLst>
           </p:cNvPr>
@@ -30002,7 +30002,7 @@
     </p:spTree>
     <p:extLst>
       <p:ext uri="{BB962C8B-B14F-4D97-AF65-F5344CB8AC3E}">
-        <p14:creationId xmlns:p14="http://schemas.microsoft.com/office/powerpoint/2010/main" val="798810007"/>
+        <p14:creationId xmlns:p14="http://schemas.microsoft.com/office/powerpoint/2010/main" val="495846908"/>
       </p:ext>
     </p:extLst>
   </p:cSld>
@@ -30033,7 +30033,7 @@
           <p:cNvPr id="9" name="">
             <a:extLst xmlns:a="http://schemas.openxmlformats.org/drawingml/2006/main">
               <a:ext uri="{FF2B5EF4-FFF2-40B4-BE49-F238E27FC236}">
-                <a16:creationId xmlns:a16="http://schemas.microsoft.com/office/drawing/2014/main" id="{52F9E498-0AEB-4B30-94E5-492234EF0D74}"/>
+                <a16:creationId xmlns:a16="http://schemas.microsoft.com/office/drawing/2014/main" id="{F47220C2-B96F-4EBE-904A-A1B56D67A723}"/>
               </a:ext>
             </a:extLst>
           </p:cNvPr>
@@ -30090,7 +30090,7 @@
           <p:cNvPr id="2" name="">
             <a:extLst xmlns:a="http://schemas.openxmlformats.org/drawingml/2006/main">
               <a:ext uri="{FF2B5EF4-FFF2-40B4-BE49-F238E27FC236}">
-                <a16:creationId xmlns:a16="http://schemas.microsoft.com/office/drawing/2014/main" id="{5DD7AAD0-B74C-480A-BBAE-CD2A4315151F}"/>
+                <a16:creationId xmlns:a16="http://schemas.microsoft.com/office/drawing/2014/main" id="{FAD5FFB6-4AD3-4DF6-9A1A-0E3B6A2370A6}"/>
               </a:ext>
             </a:extLst>
           </p:cNvPr>
@@ -30147,7 +30147,7 @@
           <p:cNvPr id="3" name="">
             <a:extLst xmlns:a="http://schemas.openxmlformats.org/drawingml/2006/main">
               <a:ext uri="{FF2B5EF4-FFF2-40B4-BE49-F238E27FC236}">
-                <a16:creationId xmlns:a16="http://schemas.microsoft.com/office/drawing/2014/main" id="{3B458D40-1EA6-4EE8-AB42-B19987F639F7}"/>
+                <a16:creationId xmlns:a16="http://schemas.microsoft.com/office/drawing/2014/main" id="{ABE178A8-7546-4CED-B824-8DD68EC57CD4}"/>
               </a:ext>
             </a:extLst>
           </p:cNvPr>
@@ -30177,7 +30177,7 @@
           <p:cNvPr id="4" name="">
             <a:extLst xmlns:a="http://schemas.openxmlformats.org/drawingml/2006/main">
               <a:ext uri="{FF2B5EF4-FFF2-40B4-BE49-F238E27FC236}">
-                <a16:creationId xmlns:a16="http://schemas.microsoft.com/office/drawing/2014/main" id="{95EA35C6-795A-4688-98F3-9C1A89140BAD}"/>
+                <a16:creationId xmlns:a16="http://schemas.microsoft.com/office/drawing/2014/main" id="{EBA3F64D-EF44-4924-801C-4F9E7FE61BD5}"/>
               </a:ext>
             </a:extLst>
           </p:cNvPr>
@@ -30234,7 +30234,7 @@
           <p:cNvPr id="5" name="">
             <a:extLst xmlns:a="http://schemas.openxmlformats.org/drawingml/2006/main">
               <a:ext uri="{FF2B5EF4-FFF2-40B4-BE49-F238E27FC236}">
-                <a16:creationId xmlns:a16="http://schemas.microsoft.com/office/drawing/2014/main" id="{5896047D-FC44-41EC-8B02-1F712F5958D5}"/>
+                <a16:creationId xmlns:a16="http://schemas.microsoft.com/office/drawing/2014/main" id="{631DDFD8-325E-4BAE-953B-18E1633A6CFB}"/>
               </a:ext>
             </a:extLst>
           </p:cNvPr>
@@ -30832,7 +30832,7 @@
           <p:cNvPr id="7" name="">
             <a:extLst xmlns:a="http://schemas.openxmlformats.org/drawingml/2006/main">
               <a:ext uri="{FF2B5EF4-FFF2-40B4-BE49-F238E27FC236}">
-                <a16:creationId xmlns:a16="http://schemas.microsoft.com/office/drawing/2014/main" id="{8148CAE2-7E35-42A6-8ED2-EB4E4025475D}"/>
+                <a16:creationId xmlns:a16="http://schemas.microsoft.com/office/drawing/2014/main" id="{A404B6A4-2362-4ECF-A78F-2A3D57FE0D0B}"/>
               </a:ext>
             </a:extLst>
           </p:cNvPr>
@@ -30864,7 +30864,7 @@
           <p:cNvPr id="8" name="">
             <a:extLst xmlns:a="http://schemas.openxmlformats.org/drawingml/2006/main">
               <a:ext uri="{FF2B5EF4-FFF2-40B4-BE49-F238E27FC236}">
-                <a16:creationId xmlns:a16="http://schemas.microsoft.com/office/drawing/2014/main" id="{A660612B-B9AF-4CEC-946B-068ABD112E80}"/>
+                <a16:creationId xmlns:a16="http://schemas.microsoft.com/office/drawing/2014/main" id="{4946DF1D-3539-4B99-8CED-5343211B6EB4}"/>
               </a:ext>
             </a:extLst>
           </p:cNvPr>
@@ -30919,7 +30919,7 @@
     </p:spTree>
     <p:extLst>
       <p:ext uri="{BB962C8B-B14F-4D97-AF65-F5344CB8AC3E}">
-        <p14:creationId xmlns:p14="http://schemas.microsoft.com/office/powerpoint/2010/main" val="1990575836"/>
+        <p14:creationId xmlns:p14="http://schemas.microsoft.com/office/powerpoint/2010/main" val="1147498113"/>
       </p:ext>
     </p:extLst>
   </p:cSld>
@@ -30950,7 +30950,7 @@
           <p:cNvPr id="21" name="">
             <a:extLst xmlns:a="http://schemas.openxmlformats.org/drawingml/2006/main">
               <a:ext uri="{FF2B5EF4-FFF2-40B4-BE49-F238E27FC236}">
-                <a16:creationId xmlns:a16="http://schemas.microsoft.com/office/drawing/2014/main" id="{5B3F7490-0A03-45D2-9536-EC91645A8522}"/>
+                <a16:creationId xmlns:a16="http://schemas.microsoft.com/office/drawing/2014/main" id="{ED96947F-B55F-424C-A9A1-31E29A6E62D0}"/>
               </a:ext>
             </a:extLst>
           </p:cNvPr>
@@ -31007,7 +31007,7 @@
           <p:cNvPr id="2" name="">
             <a:extLst xmlns:a="http://schemas.openxmlformats.org/drawingml/2006/main">
               <a:ext uri="{FF2B5EF4-FFF2-40B4-BE49-F238E27FC236}">
-                <a16:creationId xmlns:a16="http://schemas.microsoft.com/office/drawing/2014/main" id="{25F8CD71-20B2-49FA-AE4A-46B3003176B3}"/>
+                <a16:creationId xmlns:a16="http://schemas.microsoft.com/office/drawing/2014/main" id="{27D2804E-8FB0-443D-9229-10B0E0004A58}"/>
               </a:ext>
             </a:extLst>
           </p:cNvPr>
@@ -31064,7 +31064,7 @@
           <p:cNvPr id="3" name="">
             <a:extLst xmlns:a="http://schemas.openxmlformats.org/drawingml/2006/main">
               <a:ext uri="{FF2B5EF4-FFF2-40B4-BE49-F238E27FC236}">
-                <a16:creationId xmlns:a16="http://schemas.microsoft.com/office/drawing/2014/main" id="{3ADBCDF7-27DC-469D-AD0C-00F4B7C80EEA}"/>
+                <a16:creationId xmlns:a16="http://schemas.microsoft.com/office/drawing/2014/main" id="{04CDC952-449D-44FD-A850-0FAA57CD65EF}"/>
               </a:ext>
             </a:extLst>
           </p:cNvPr>
@@ -31094,7 +31094,7 @@
           <p:cNvPr id="4" name="">
             <a:extLst xmlns:a="http://schemas.openxmlformats.org/drawingml/2006/main">
               <a:ext uri="{FF2B5EF4-FFF2-40B4-BE49-F238E27FC236}">
-                <a16:creationId xmlns:a16="http://schemas.microsoft.com/office/drawing/2014/main" id="{B6A2BE56-C570-4886-A5CF-15E33371048C}"/>
+                <a16:creationId xmlns:a16="http://schemas.microsoft.com/office/drawing/2014/main" id="{D7329BA3-E246-4179-A500-A0B2C9A9ADC1}"/>
               </a:ext>
             </a:extLst>
           </p:cNvPr>
@@ -31151,7 +31151,7 @@
           <p:cNvPr id="5" name="">
             <a:extLst xmlns:a="http://schemas.openxmlformats.org/drawingml/2006/main">
               <a:ext uri="{FF2B5EF4-FFF2-40B4-BE49-F238E27FC236}">
-                <a16:creationId xmlns:a16="http://schemas.microsoft.com/office/drawing/2014/main" id="{EFC3F9E3-DE79-410C-8D48-8DCAB4A1DD68}"/>
+                <a16:creationId xmlns:a16="http://schemas.microsoft.com/office/drawing/2014/main" id="{C06A7F77-93BE-4AA9-888E-690255F0AF3F}"/>
               </a:ext>
             </a:extLst>
           </p:cNvPr>
@@ -31208,7 +31208,7 @@
           <p:cNvPr id="6" name="">
             <a:extLst xmlns:a="http://schemas.openxmlformats.org/drawingml/2006/main">
               <a:ext uri="{FF2B5EF4-FFF2-40B4-BE49-F238E27FC236}">
-                <a16:creationId xmlns:a16="http://schemas.microsoft.com/office/drawing/2014/main" id="{9A0BB547-C188-468A-89A8-37AF82049107}"/>
+                <a16:creationId xmlns:a16="http://schemas.microsoft.com/office/drawing/2014/main" id="{3D5279CB-F48D-42EE-9E9B-D25748977618}"/>
               </a:ext>
             </a:extLst>
           </p:cNvPr>
@@ -31265,7 +31265,7 @@
           <p:cNvPr id="7" name="">
             <a:extLst xmlns:a="http://schemas.openxmlformats.org/drawingml/2006/main">
               <a:ext uri="{FF2B5EF4-FFF2-40B4-BE49-F238E27FC236}">
-                <a16:creationId xmlns:a16="http://schemas.microsoft.com/office/drawing/2014/main" id="{C4C11052-D80E-42F2-A6B4-6ECA573B4FFA}"/>
+                <a16:creationId xmlns:a16="http://schemas.microsoft.com/office/drawing/2014/main" id="{D0732A21-76AF-4D9D-908D-1D2848BC9098}"/>
               </a:ext>
             </a:extLst>
           </p:cNvPr>
@@ -31299,7 +31299,7 @@
           <p:cNvPr id="8" name="">
             <a:extLst xmlns:a="http://schemas.openxmlformats.org/drawingml/2006/main">
               <a:ext uri="{FF2B5EF4-FFF2-40B4-BE49-F238E27FC236}">
-                <a16:creationId xmlns:a16="http://schemas.microsoft.com/office/drawing/2014/main" id="{B8364AD3-8588-4E1F-B317-6F8AA8E179EA}"/>
+                <a16:creationId xmlns:a16="http://schemas.microsoft.com/office/drawing/2014/main" id="{2821BE30-662B-4C9B-A7BD-058637B103B0}"/>
               </a:ext>
             </a:extLst>
           </p:cNvPr>
@@ -31356,7 +31356,7 @@
           <p:cNvPr id="9" name="">
             <a:extLst xmlns:a="http://schemas.openxmlformats.org/drawingml/2006/main">
               <a:ext uri="{FF2B5EF4-FFF2-40B4-BE49-F238E27FC236}">
-                <a16:creationId xmlns:a16="http://schemas.microsoft.com/office/drawing/2014/main" id="{E6214013-8A7C-49FB-8201-97B566CB9F6B}"/>
+                <a16:creationId xmlns:a16="http://schemas.microsoft.com/office/drawing/2014/main" id="{AFC30CA4-2D7F-4F98-AD74-F99FB995DA67}"/>
               </a:ext>
             </a:extLst>
           </p:cNvPr>
@@ -31390,7 +31390,7 @@
           <p:cNvPr id="10" name="">
             <a:extLst xmlns:a="http://schemas.openxmlformats.org/drawingml/2006/main">
               <a:ext uri="{FF2B5EF4-FFF2-40B4-BE49-F238E27FC236}">
-                <a16:creationId xmlns:a16="http://schemas.microsoft.com/office/drawing/2014/main" id="{6F13178F-8270-4796-AE7D-E270DD21B529}"/>
+                <a16:creationId xmlns:a16="http://schemas.microsoft.com/office/drawing/2014/main" id="{09585DCF-C0ED-4019-A669-471CA139E2DF}"/>
               </a:ext>
             </a:extLst>
           </p:cNvPr>
@@ -31447,7 +31447,7 @@
           <p:cNvPr id="11" name="">
             <a:extLst xmlns:a="http://schemas.openxmlformats.org/drawingml/2006/main">
               <a:ext uri="{FF2B5EF4-FFF2-40B4-BE49-F238E27FC236}">
-                <a16:creationId xmlns:a16="http://schemas.microsoft.com/office/drawing/2014/main" id="{E9930EE3-69C7-48D7-867D-DD42838100CB}"/>
+                <a16:creationId xmlns:a16="http://schemas.microsoft.com/office/drawing/2014/main" id="{6DF77D0D-475E-4E48-80BE-6C5D6CBD7702}"/>
               </a:ext>
             </a:extLst>
           </p:cNvPr>
@@ -31550,7 +31550,7 @@
           <p:cNvPr id="12" name="">
             <a:extLst xmlns:a="http://schemas.openxmlformats.org/drawingml/2006/main">
               <a:ext uri="{FF2B5EF4-FFF2-40B4-BE49-F238E27FC236}">
-                <a16:creationId xmlns:a16="http://schemas.microsoft.com/office/drawing/2014/main" id="{9E4F45EF-B70A-4E70-83C6-116D25B922E0}"/>
+                <a16:creationId xmlns:a16="http://schemas.microsoft.com/office/drawing/2014/main" id="{970EBE05-B5CF-4E5F-920E-AB72DC18084B}"/>
               </a:ext>
             </a:extLst>
           </p:cNvPr>
@@ -31584,7 +31584,7 @@
           <p:cNvPr id="13" name="">
             <a:extLst xmlns:a="http://schemas.openxmlformats.org/drawingml/2006/main">
               <a:ext uri="{FF2B5EF4-FFF2-40B4-BE49-F238E27FC236}">
-                <a16:creationId xmlns:a16="http://schemas.microsoft.com/office/drawing/2014/main" id="{03EE74C4-4F32-4FAE-BAB2-EBA1A7B70240}"/>
+                <a16:creationId xmlns:a16="http://schemas.microsoft.com/office/drawing/2014/main" id="{66E862B6-7009-4053-A70E-912B69D709FE}"/>
               </a:ext>
             </a:extLst>
           </p:cNvPr>
@@ -31691,7 +31691,7 @@
           <p:cNvPr id="16" name="">
             <a:extLst xmlns:a="http://schemas.openxmlformats.org/drawingml/2006/main">
               <a:ext uri="{FF2B5EF4-FFF2-40B4-BE49-F238E27FC236}">
-                <a16:creationId xmlns:a16="http://schemas.microsoft.com/office/drawing/2014/main" id="{E3A56AE8-1307-4E5A-9B29-437521450ABB}"/>
+                <a16:creationId xmlns:a16="http://schemas.microsoft.com/office/drawing/2014/main" id="{64554E0F-B26A-4594-8513-B788223968A6}"/>
               </a:ext>
             </a:extLst>
           </p:cNvPr>
@@ -31723,7 +31723,7 @@
           <p:cNvPr id="17" name="">
             <a:extLst xmlns:a="http://schemas.openxmlformats.org/drawingml/2006/main">
               <a:ext uri="{FF2B5EF4-FFF2-40B4-BE49-F238E27FC236}">
-                <a16:creationId xmlns:a16="http://schemas.microsoft.com/office/drawing/2014/main" id="{C9B0195A-707A-46D3-BF8D-C8BAF705C26D}"/>
+                <a16:creationId xmlns:a16="http://schemas.microsoft.com/office/drawing/2014/main" id="{3D7D0504-C2CB-4C94-A8D1-4EEC76AD5515}"/>
               </a:ext>
             </a:extLst>
           </p:cNvPr>
@@ -31780,7 +31780,7 @@
           <p:cNvPr id="18" name="">
             <a:extLst xmlns:a="http://schemas.openxmlformats.org/drawingml/2006/main">
               <a:ext uri="{FF2B5EF4-FFF2-40B4-BE49-F238E27FC236}">
-                <a16:creationId xmlns:a16="http://schemas.microsoft.com/office/drawing/2014/main" id="{54F20C84-D8E9-4127-93D5-E79DAAC90AE4}"/>
+                <a16:creationId xmlns:a16="http://schemas.microsoft.com/office/drawing/2014/main" id="{2DC10DF8-AB1C-4434-9DCF-D5E7F965170F}"/>
               </a:ext>
             </a:extLst>
           </p:cNvPr>
@@ -31812,7 +31812,7 @@
           <p:cNvPr id="19" name="">
             <a:extLst xmlns:a="http://schemas.openxmlformats.org/drawingml/2006/main">
               <a:ext uri="{FF2B5EF4-FFF2-40B4-BE49-F238E27FC236}">
-                <a16:creationId xmlns:a16="http://schemas.microsoft.com/office/drawing/2014/main" id="{BE2E4C71-50D5-4698-BB65-6F6DAF48550D}"/>
+                <a16:creationId xmlns:a16="http://schemas.microsoft.com/office/drawing/2014/main" id="{6B55ADDE-3644-433A-9530-01B4402ED6A7}"/>
               </a:ext>
             </a:extLst>
           </p:cNvPr>
@@ -31869,7 +31869,7 @@
           <p:cNvPr id="20" name="">
             <a:extLst xmlns:a="http://schemas.openxmlformats.org/drawingml/2006/main">
               <a:ext uri="{FF2B5EF4-FFF2-40B4-BE49-F238E27FC236}">
-                <a16:creationId xmlns:a16="http://schemas.microsoft.com/office/drawing/2014/main" id="{6E3B3ABA-955E-47AD-B3C4-31B1D7ADD821}"/>
+                <a16:creationId xmlns:a16="http://schemas.microsoft.com/office/drawing/2014/main" id="{0ACBDE89-0E27-4C79-BA0C-F228DDF6EC97}"/>
               </a:ext>
             </a:extLst>
           </p:cNvPr>
@@ -31924,7 +31924,7 @@
     </p:spTree>
     <p:extLst>
       <p:ext uri="{BB962C8B-B14F-4D97-AF65-F5344CB8AC3E}">
-        <p14:creationId xmlns:p14="http://schemas.microsoft.com/office/powerpoint/2010/main" val="1924060219"/>
+        <p14:creationId xmlns:p14="http://schemas.microsoft.com/office/powerpoint/2010/main" val="649537130"/>
       </p:ext>
     </p:extLst>
   </p:cSld>
@@ -31955,7 +31955,7 @@
           <p:cNvPr id="8" name="">
             <a:extLst xmlns:a="http://schemas.openxmlformats.org/drawingml/2006/main">
               <a:ext uri="{FF2B5EF4-FFF2-40B4-BE49-F238E27FC236}">
-                <a16:creationId xmlns:a16="http://schemas.microsoft.com/office/drawing/2014/main" id="{853D5119-7E36-4FF4-8489-97B906A9A6D7}"/>
+                <a16:creationId xmlns:a16="http://schemas.microsoft.com/office/drawing/2014/main" id="{E302C79A-817A-4660-B358-44999CA784A2}"/>
               </a:ext>
             </a:extLst>
           </p:cNvPr>
@@ -32012,7 +32012,7 @@
           <p:cNvPr id="2" name="">
             <a:extLst xmlns:a="http://schemas.openxmlformats.org/drawingml/2006/main">
               <a:ext uri="{FF2B5EF4-FFF2-40B4-BE49-F238E27FC236}">
-                <a16:creationId xmlns:a16="http://schemas.microsoft.com/office/drawing/2014/main" id="{7AEBE6E3-8084-475E-82DA-3CA5BADD1AB5}"/>
+                <a16:creationId xmlns:a16="http://schemas.microsoft.com/office/drawing/2014/main" id="{C4C09535-9B59-42A0-AD04-5E3C8C526E06}"/>
               </a:ext>
             </a:extLst>
           </p:cNvPr>
@@ -32069,7 +32069,7 @@
           <p:cNvPr id="3" name="">
             <a:extLst xmlns:a="http://schemas.openxmlformats.org/drawingml/2006/main">
               <a:ext uri="{FF2B5EF4-FFF2-40B4-BE49-F238E27FC236}">
-                <a16:creationId xmlns:a16="http://schemas.microsoft.com/office/drawing/2014/main" id="{80CBF210-D62D-4BA8-9F94-FCE937A7A325}"/>
+                <a16:creationId xmlns:a16="http://schemas.microsoft.com/office/drawing/2014/main" id="{22496BC2-5110-4556-A39D-29A7997EB609}"/>
               </a:ext>
             </a:extLst>
           </p:cNvPr>
@@ -32099,7 +32099,7 @@
           <p:cNvPr id="4" name="">
             <a:extLst xmlns:a="http://schemas.openxmlformats.org/drawingml/2006/main">
               <a:ext uri="{FF2B5EF4-FFF2-40B4-BE49-F238E27FC236}">
-                <a16:creationId xmlns:a16="http://schemas.microsoft.com/office/drawing/2014/main" id="{CB62BF59-B203-4980-92AD-366C570F82FA}"/>
+                <a16:creationId xmlns:a16="http://schemas.microsoft.com/office/drawing/2014/main" id="{F495FEFD-D60E-49F2-8AF5-A931E7371386}"/>
               </a:ext>
             </a:extLst>
           </p:cNvPr>
@@ -32156,7 +32156,7 @@
           <p:cNvPr id="5" name="">
             <a:extLst xmlns:a="http://schemas.openxmlformats.org/drawingml/2006/main">
               <a:ext uri="{FF2B5EF4-FFF2-40B4-BE49-F238E27FC236}">
-                <a16:creationId xmlns:a16="http://schemas.microsoft.com/office/drawing/2014/main" id="{DF9FCCB8-4E45-46A5-8717-59C773A3426C}"/>
+                <a16:creationId xmlns:a16="http://schemas.microsoft.com/office/drawing/2014/main" id="{33E08CCD-1627-4655-B9DD-155FC14D129C}"/>
               </a:ext>
             </a:extLst>
           </p:cNvPr>
@@ -32754,7 +32754,7 @@
           <p:cNvPr id="7" name="">
             <a:extLst xmlns:a="http://schemas.openxmlformats.org/drawingml/2006/main">
               <a:ext uri="{FF2B5EF4-FFF2-40B4-BE49-F238E27FC236}">
-                <a16:creationId xmlns:a16="http://schemas.microsoft.com/office/drawing/2014/main" id="{31CA3EF0-0475-4FB5-9F46-75C0C2597641}"/>
+                <a16:creationId xmlns:a16="http://schemas.microsoft.com/office/drawing/2014/main" id="{BFEA4468-734E-44DD-BE07-099AA63F95C1}"/>
               </a:ext>
             </a:extLst>
           </p:cNvPr>
@@ -32809,7 +32809,7 @@
     </p:spTree>
     <p:extLst>
       <p:ext uri="{BB962C8B-B14F-4D97-AF65-F5344CB8AC3E}">
-        <p14:creationId xmlns:p14="http://schemas.microsoft.com/office/powerpoint/2010/main" val="973681625"/>
+        <p14:creationId xmlns:p14="http://schemas.microsoft.com/office/powerpoint/2010/main" val="1705383697"/>
       </p:ext>
     </p:extLst>
   </p:cSld>
@@ -32840,7 +32840,7 @@
           <p:cNvPr id="29" name="">
             <a:extLst xmlns:a="http://schemas.openxmlformats.org/drawingml/2006/main">
               <a:ext uri="{FF2B5EF4-FFF2-40B4-BE49-F238E27FC236}">
-                <a16:creationId xmlns:a16="http://schemas.microsoft.com/office/drawing/2014/main" id="{11A498B2-1B5E-44F3-8EFB-B85D67AD1A9E}"/>
+                <a16:creationId xmlns:a16="http://schemas.microsoft.com/office/drawing/2014/main" id="{8A3BB3E1-4B96-4D2A-9B8E-89B5A8FA3D4C}"/>
               </a:ext>
             </a:extLst>
           </p:cNvPr>
@@ -32897,7 +32897,7 @@
           <p:cNvPr id="2" name="">
             <a:extLst xmlns:a="http://schemas.openxmlformats.org/drawingml/2006/main">
               <a:ext uri="{FF2B5EF4-FFF2-40B4-BE49-F238E27FC236}">
-                <a16:creationId xmlns:a16="http://schemas.microsoft.com/office/drawing/2014/main" id="{DED4A7FD-66DF-43C3-A0F6-FDB5BF4D86AA}"/>
+                <a16:creationId xmlns:a16="http://schemas.microsoft.com/office/drawing/2014/main" id="{8438B9B4-CC66-4B4A-81E2-FCE86F68F42C}"/>
               </a:ext>
             </a:extLst>
           </p:cNvPr>
@@ -32954,7 +32954,7 @@
           <p:cNvPr id="3" name="">
             <a:extLst xmlns:a="http://schemas.openxmlformats.org/drawingml/2006/main">
               <a:ext uri="{FF2B5EF4-FFF2-40B4-BE49-F238E27FC236}">
-                <a16:creationId xmlns:a16="http://schemas.microsoft.com/office/drawing/2014/main" id="{01E20BD1-A18E-4BAC-B037-8ACC94776081}"/>
+                <a16:creationId xmlns:a16="http://schemas.microsoft.com/office/drawing/2014/main" id="{6600E67B-B64B-4315-99C8-CCB839668F43}"/>
               </a:ext>
             </a:extLst>
           </p:cNvPr>
@@ -32984,7 +32984,7 @@
           <p:cNvPr id="4" name="">
             <a:extLst xmlns:a="http://schemas.openxmlformats.org/drawingml/2006/main">
               <a:ext uri="{FF2B5EF4-FFF2-40B4-BE49-F238E27FC236}">
-                <a16:creationId xmlns:a16="http://schemas.microsoft.com/office/drawing/2014/main" id="{BE85B331-40BD-40E5-8C14-44DA51E1BAB8}"/>
+                <a16:creationId xmlns:a16="http://schemas.microsoft.com/office/drawing/2014/main" id="{D97F9E3A-5AEC-4DF4-8BF5-09F314000507}"/>
               </a:ext>
             </a:extLst>
           </p:cNvPr>
@@ -33041,7 +33041,7 @@
           <p:cNvPr id="5" name="">
             <a:extLst xmlns:a="http://schemas.openxmlformats.org/drawingml/2006/main">
               <a:ext uri="{FF2B5EF4-FFF2-40B4-BE49-F238E27FC236}">
-                <a16:creationId xmlns:a16="http://schemas.microsoft.com/office/drawing/2014/main" id="{C4365CE5-79C0-45AA-825B-2C0B49CC73DF}"/>
+                <a16:creationId xmlns:a16="http://schemas.microsoft.com/office/drawing/2014/main" id="{CBDC713D-3533-4045-A896-89494C38EC6C}"/>
               </a:ext>
             </a:extLst>
           </p:cNvPr>
@@ -33098,7 +33098,7 @@
           <p:cNvPr id="6" name="">
             <a:extLst xmlns:a="http://schemas.openxmlformats.org/drawingml/2006/main">
               <a:ext uri="{FF2B5EF4-FFF2-40B4-BE49-F238E27FC236}">
-                <a16:creationId xmlns:a16="http://schemas.microsoft.com/office/drawing/2014/main" id="{D819FFDF-8488-48DE-8386-40BF73E4E912}"/>
+                <a16:creationId xmlns:a16="http://schemas.microsoft.com/office/drawing/2014/main" id="{449FEFD0-38B9-455C-B17F-CC56102A2B3A}"/>
               </a:ext>
             </a:extLst>
           </p:cNvPr>
@@ -33155,7 +33155,7 @@
           <p:cNvPr id="7" name="">
             <a:extLst xmlns:a="http://schemas.openxmlformats.org/drawingml/2006/main">
               <a:ext uri="{FF2B5EF4-FFF2-40B4-BE49-F238E27FC236}">
-                <a16:creationId xmlns:a16="http://schemas.microsoft.com/office/drawing/2014/main" id="{3ED83254-3796-4A12-82A5-AEB5FBF1C6E4}"/>
+                <a16:creationId xmlns:a16="http://schemas.microsoft.com/office/drawing/2014/main" id="{C353C542-AC72-44D4-94AD-561C46437C24}"/>
               </a:ext>
             </a:extLst>
           </p:cNvPr>
@@ -33189,7 +33189,7 @@
           <p:cNvPr id="8" name="">
             <a:extLst xmlns:a="http://schemas.openxmlformats.org/drawingml/2006/main">
               <a:ext uri="{FF2B5EF4-FFF2-40B4-BE49-F238E27FC236}">
-                <a16:creationId xmlns:a16="http://schemas.microsoft.com/office/drawing/2014/main" id="{95B03320-7C66-40B7-BBCB-F3C27328040C}"/>
+                <a16:creationId xmlns:a16="http://schemas.microsoft.com/office/drawing/2014/main" id="{5085F749-A9D6-402B-94A2-5375083A3D95}"/>
               </a:ext>
             </a:extLst>
           </p:cNvPr>
@@ -33269,7 +33269,7 @@
           <p:cNvPr id="9" name="">
             <a:extLst xmlns:a="http://schemas.openxmlformats.org/drawingml/2006/main">
               <a:ext uri="{FF2B5EF4-FFF2-40B4-BE49-F238E27FC236}">
-                <a16:creationId xmlns:a16="http://schemas.microsoft.com/office/drawing/2014/main" id="{AF1F3956-8E0E-4EC5-80C0-A295F0C3FFD6}"/>
+                <a16:creationId xmlns:a16="http://schemas.microsoft.com/office/drawing/2014/main" id="{037A1EA8-8E43-41AD-88C4-CADD20C7C0A0}"/>
               </a:ext>
             </a:extLst>
           </p:cNvPr>
@@ -33303,7 +33303,7 @@
           <p:cNvPr id="10" name="">
             <a:extLst xmlns:a="http://schemas.openxmlformats.org/drawingml/2006/main">
               <a:ext uri="{FF2B5EF4-FFF2-40B4-BE49-F238E27FC236}">
-                <a16:creationId xmlns:a16="http://schemas.microsoft.com/office/drawing/2014/main" id="{0560003A-80BC-4D7A-9C84-2EA4F81093C4}"/>
+                <a16:creationId xmlns:a16="http://schemas.microsoft.com/office/drawing/2014/main" id="{E40F4E95-A3D3-4775-8FCA-32F4604DB8EE}"/>
               </a:ext>
             </a:extLst>
           </p:cNvPr>
@@ -33383,7 +33383,7 @@
           <p:cNvPr id="11" name="">
             <a:extLst xmlns:a="http://schemas.openxmlformats.org/drawingml/2006/main">
               <a:ext uri="{FF2B5EF4-FFF2-40B4-BE49-F238E27FC236}">
-                <a16:creationId xmlns:a16="http://schemas.microsoft.com/office/drawing/2014/main" id="{827BE883-88AD-40B7-BF9E-D0E0587AC64F}"/>
+                <a16:creationId xmlns:a16="http://schemas.microsoft.com/office/drawing/2014/main" id="{37191BB6-D656-46EE-B392-1A2A85B3B8BB}"/>
               </a:ext>
             </a:extLst>
           </p:cNvPr>
@@ -33417,7 +33417,7 @@
           <p:cNvPr id="12" name="">
             <a:extLst xmlns:a="http://schemas.openxmlformats.org/drawingml/2006/main">
               <a:ext uri="{FF2B5EF4-FFF2-40B4-BE49-F238E27FC236}">
-                <a16:creationId xmlns:a16="http://schemas.microsoft.com/office/drawing/2014/main" id="{F6C88052-D872-42BC-9BDB-CEEC087668FE}"/>
+                <a16:creationId xmlns:a16="http://schemas.microsoft.com/office/drawing/2014/main" id="{C472C241-459E-49D7-AF97-24296C2AC1C1}"/>
               </a:ext>
             </a:extLst>
           </p:cNvPr>
@@ -33547,7 +33547,7 @@
           <p:cNvPr id="15" name="">
             <a:extLst xmlns:a="http://schemas.openxmlformats.org/drawingml/2006/main">
               <a:ext uri="{FF2B5EF4-FFF2-40B4-BE49-F238E27FC236}">
-                <a16:creationId xmlns:a16="http://schemas.microsoft.com/office/drawing/2014/main" id="{C7E04D6C-F4C1-44BA-8C2A-7810E89B567B}"/>
+                <a16:creationId xmlns:a16="http://schemas.microsoft.com/office/drawing/2014/main" id="{F8709B73-EE3F-4390-B010-99D5A78652B7}"/>
               </a:ext>
             </a:extLst>
           </p:cNvPr>
@@ -33604,7 +33604,7 @@
           <p:cNvPr id="16" name="">
             <a:extLst xmlns:a="http://schemas.openxmlformats.org/drawingml/2006/main">
               <a:ext uri="{FF2B5EF4-FFF2-40B4-BE49-F238E27FC236}">
-                <a16:creationId xmlns:a16="http://schemas.microsoft.com/office/drawing/2014/main" id="{EED40D73-51B3-4CAF-B0E2-E04FD64D8D9F}"/>
+                <a16:creationId xmlns:a16="http://schemas.microsoft.com/office/drawing/2014/main" id="{56BA2D10-E492-4E14-9A7C-C2EAF278546B}"/>
               </a:ext>
             </a:extLst>
           </p:cNvPr>
@@ -33638,7 +33638,7 @@
           <p:cNvPr id="17" name="">
             <a:extLst xmlns:a="http://schemas.openxmlformats.org/drawingml/2006/main">
               <a:ext uri="{FF2B5EF4-FFF2-40B4-BE49-F238E27FC236}">
-                <a16:creationId xmlns:a16="http://schemas.microsoft.com/office/drawing/2014/main" id="{BCC07D44-28F1-474A-ADFB-1EBAA31AD166}"/>
+                <a16:creationId xmlns:a16="http://schemas.microsoft.com/office/drawing/2014/main" id="{D0CF1930-4ECB-4ABE-8D12-9CEE19399EF2}"/>
               </a:ext>
             </a:extLst>
           </p:cNvPr>
@@ -33695,7 +33695,7 @@
           <p:cNvPr id="18" name="">
             <a:extLst xmlns:a="http://schemas.openxmlformats.org/drawingml/2006/main">
               <a:ext uri="{FF2B5EF4-FFF2-40B4-BE49-F238E27FC236}">
-                <a16:creationId xmlns:a16="http://schemas.microsoft.com/office/drawing/2014/main" id="{BF60F303-01C0-4033-B83D-84ECCA5090FE}"/>
+                <a16:creationId xmlns:a16="http://schemas.microsoft.com/office/drawing/2014/main" id="{A7CDB614-7335-43AB-A287-9F2A4E7CE680}"/>
               </a:ext>
             </a:extLst>
           </p:cNvPr>
@@ -33725,7 +33725,7 @@
           <p:cNvPr id="19" name="">
             <a:extLst xmlns:a="http://schemas.openxmlformats.org/drawingml/2006/main">
               <a:ext uri="{FF2B5EF4-FFF2-40B4-BE49-F238E27FC236}">
-                <a16:creationId xmlns:a16="http://schemas.microsoft.com/office/drawing/2014/main" id="{AA87E928-88EF-4626-939C-73FA373B3F8B}"/>
+                <a16:creationId xmlns:a16="http://schemas.microsoft.com/office/drawing/2014/main" id="{970F9362-C576-428F-99C2-DC0595A597CD}"/>
               </a:ext>
             </a:extLst>
           </p:cNvPr>
@@ -33782,7 +33782,7 @@
           <p:cNvPr id="20" name="">
             <a:extLst xmlns:a="http://schemas.openxmlformats.org/drawingml/2006/main">
               <a:ext uri="{FF2B5EF4-FFF2-40B4-BE49-F238E27FC236}">
-                <a16:creationId xmlns:a16="http://schemas.microsoft.com/office/drawing/2014/main" id="{F8D3DC34-8F23-4403-A323-719CB45EA9C2}"/>
+                <a16:creationId xmlns:a16="http://schemas.microsoft.com/office/drawing/2014/main" id="{BB83B70E-BD93-4467-80BC-C7E5D9030F36}"/>
               </a:ext>
             </a:extLst>
           </p:cNvPr>
@@ -33812,7 +33812,7 @@
           <p:cNvPr id="21" name="">
             <a:extLst xmlns:a="http://schemas.openxmlformats.org/drawingml/2006/main">
               <a:ext uri="{FF2B5EF4-FFF2-40B4-BE49-F238E27FC236}">
-                <a16:creationId xmlns:a16="http://schemas.microsoft.com/office/drawing/2014/main" id="{E13A56D7-DC78-4F00-AECA-43C97B5371C5}"/>
+                <a16:creationId xmlns:a16="http://schemas.microsoft.com/office/drawing/2014/main" id="{C6F9AD2F-EE91-450F-9063-78D2E8B9EC61}"/>
               </a:ext>
             </a:extLst>
           </p:cNvPr>
@@ -33869,7 +33869,7 @@
           <p:cNvPr id="22" name="">
             <a:extLst xmlns:a="http://schemas.openxmlformats.org/drawingml/2006/main">
               <a:ext uri="{FF2B5EF4-FFF2-40B4-BE49-F238E27FC236}">
-                <a16:creationId xmlns:a16="http://schemas.microsoft.com/office/drawing/2014/main" id="{C1E92E10-0444-4B06-ACE6-E4EC008DA02F}"/>
+                <a16:creationId xmlns:a16="http://schemas.microsoft.com/office/drawing/2014/main" id="{0AF6FE6C-54D6-43E9-86FB-3F302BA09B13}"/>
               </a:ext>
             </a:extLst>
           </p:cNvPr>
@@ -33899,7 +33899,7 @@
           <p:cNvPr id="23" name="">
             <a:extLst xmlns:a="http://schemas.openxmlformats.org/drawingml/2006/main">
               <a:ext uri="{FF2B5EF4-FFF2-40B4-BE49-F238E27FC236}">
-                <a16:creationId xmlns:a16="http://schemas.microsoft.com/office/drawing/2014/main" id="{D35AA147-4B5E-4576-8B78-43F25DF410BF}"/>
+                <a16:creationId xmlns:a16="http://schemas.microsoft.com/office/drawing/2014/main" id="{1FA97296-BC2A-4A90-93D0-7A8BCC9C5E72}"/>
               </a:ext>
             </a:extLst>
           </p:cNvPr>
@@ -33956,7 +33956,7 @@
           <p:cNvPr id="24" name="">
             <a:extLst xmlns:a="http://schemas.openxmlformats.org/drawingml/2006/main">
               <a:ext uri="{FF2B5EF4-FFF2-40B4-BE49-F238E27FC236}">
-                <a16:creationId xmlns:a16="http://schemas.microsoft.com/office/drawing/2014/main" id="{C98A3140-7710-4A03-952B-94176EA419BB}"/>
+                <a16:creationId xmlns:a16="http://schemas.microsoft.com/office/drawing/2014/main" id="{167F924B-9A9D-4A74-A0D5-6417DA18D359}"/>
               </a:ext>
             </a:extLst>
           </p:cNvPr>
@@ -33986,7 +33986,7 @@
           <p:cNvPr id="25" name="">
             <a:extLst xmlns:a="http://schemas.openxmlformats.org/drawingml/2006/main">
               <a:ext uri="{FF2B5EF4-FFF2-40B4-BE49-F238E27FC236}">
-                <a16:creationId xmlns:a16="http://schemas.microsoft.com/office/drawing/2014/main" id="{A903A44E-7017-4345-AEDD-7FDEE7AC4EA6}"/>
+                <a16:creationId xmlns:a16="http://schemas.microsoft.com/office/drawing/2014/main" id="{CB0CC790-204E-41EB-A7D6-AC8D205CABEC}"/>
               </a:ext>
             </a:extLst>
           </p:cNvPr>
@@ -34043,7 +34043,7 @@
           <p:cNvPr id="26" name="">
             <a:extLst xmlns:a="http://schemas.openxmlformats.org/drawingml/2006/main">
               <a:ext uri="{FF2B5EF4-FFF2-40B4-BE49-F238E27FC236}">
-                <a16:creationId xmlns:a16="http://schemas.microsoft.com/office/drawing/2014/main" id="{DFD7972B-89B9-476C-9832-63AB00CC0718}"/>
+                <a16:creationId xmlns:a16="http://schemas.microsoft.com/office/drawing/2014/main" id="{B845AC22-E18F-497C-A2E8-D446012DC5D3}"/>
               </a:ext>
             </a:extLst>
           </p:cNvPr>
@@ -34073,7 +34073,7 @@
           <p:cNvPr id="27" name="">
             <a:extLst xmlns:a="http://schemas.openxmlformats.org/drawingml/2006/main">
               <a:ext uri="{FF2B5EF4-FFF2-40B4-BE49-F238E27FC236}">
-                <a16:creationId xmlns:a16="http://schemas.microsoft.com/office/drawing/2014/main" id="{E664A000-CEB1-4B1F-B75B-B22247F925F1}"/>
+                <a16:creationId xmlns:a16="http://schemas.microsoft.com/office/drawing/2014/main" id="{BC38199E-E9D4-4B5B-9B47-A552CF33DB56}"/>
               </a:ext>
             </a:extLst>
           </p:cNvPr>
@@ -34130,7 +34130,7 @@
           <p:cNvPr id="28" name="">
             <a:extLst xmlns:a="http://schemas.openxmlformats.org/drawingml/2006/main">
               <a:ext uri="{FF2B5EF4-FFF2-40B4-BE49-F238E27FC236}">
-                <a16:creationId xmlns:a16="http://schemas.microsoft.com/office/drawing/2014/main" id="{678E8283-A8D3-4B72-BE30-9CF1866FCE8A}"/>
+                <a16:creationId xmlns:a16="http://schemas.microsoft.com/office/drawing/2014/main" id="{DB263AF9-D36B-42E8-BFCE-2E176D757FFA}"/>
               </a:ext>
             </a:extLst>
           </p:cNvPr>
@@ -34185,7 +34185,7 @@
     </p:spTree>
     <p:extLst>
       <p:ext uri="{BB962C8B-B14F-4D97-AF65-F5344CB8AC3E}">
-        <p14:creationId xmlns:p14="http://schemas.microsoft.com/office/powerpoint/2010/main" val="1761941058"/>
+        <p14:creationId xmlns:p14="http://schemas.microsoft.com/office/powerpoint/2010/main" val="484201919"/>
       </p:ext>
     </p:extLst>
   </p:cSld>
@@ -34213,10 +34213,10 @@
       </p:grpSpPr>
       <p:sp>
         <p:nvSpPr>
-          <p:cNvPr id="32" name="">
-            <a:extLst xmlns:a="http://schemas.openxmlformats.org/drawingml/2006/main">
-              <a:ext uri="{FF2B5EF4-FFF2-40B4-BE49-F238E27FC236}">
-                <a16:creationId xmlns:a16="http://schemas.microsoft.com/office/drawing/2014/main" id="{A8B50B98-A57E-487C-8A27-429AB87715D2}"/>
+          <p:cNvPr id="34" name="">
+            <a:extLst xmlns:a="http://schemas.openxmlformats.org/drawingml/2006/main">
+              <a:ext uri="{FF2B5EF4-FFF2-40B4-BE49-F238E27FC236}">
+                <a16:creationId xmlns:a16="http://schemas.microsoft.com/office/drawing/2014/main" id="{2F9F8546-04EF-4B12-A765-A56479D49800}"/>
               </a:ext>
             </a:extLst>
           </p:cNvPr>
@@ -34273,7 +34273,7 @@
           <p:cNvPr id="2" name="">
             <a:extLst xmlns:a="http://schemas.openxmlformats.org/drawingml/2006/main">
               <a:ext uri="{FF2B5EF4-FFF2-40B4-BE49-F238E27FC236}">
-                <a16:creationId xmlns:a16="http://schemas.microsoft.com/office/drawing/2014/main" id="{EDF352C4-50C7-402F-B3B5-A3EB762F212F}"/>
+                <a16:creationId xmlns:a16="http://schemas.microsoft.com/office/drawing/2014/main" id="{6253662E-8A5D-49A6-9768-3A2830B04ABC}"/>
               </a:ext>
             </a:extLst>
           </p:cNvPr>
@@ -34330,7 +34330,7 @@
           <p:cNvPr id="3" name="">
             <a:extLst xmlns:a="http://schemas.openxmlformats.org/drawingml/2006/main">
               <a:ext uri="{FF2B5EF4-FFF2-40B4-BE49-F238E27FC236}">
-                <a16:creationId xmlns:a16="http://schemas.microsoft.com/office/drawing/2014/main" id="{F222E2B7-0974-47C4-B8B5-C4A356BA74AB}"/>
+                <a16:creationId xmlns:a16="http://schemas.microsoft.com/office/drawing/2014/main" id="{C6C171E2-F4A9-40A5-AFBB-B36A55F63B25}"/>
               </a:ext>
             </a:extLst>
           </p:cNvPr>
@@ -34360,7 +34360,7 @@
           <p:cNvPr id="4" name="">
             <a:extLst xmlns:a="http://schemas.openxmlformats.org/drawingml/2006/main">
               <a:ext uri="{FF2B5EF4-FFF2-40B4-BE49-F238E27FC236}">
-                <a16:creationId xmlns:a16="http://schemas.microsoft.com/office/drawing/2014/main" id="{F3BCE225-BBB3-452D-A68E-C7C0D47C7ED8}"/>
+                <a16:creationId xmlns:a16="http://schemas.microsoft.com/office/drawing/2014/main" id="{1637DCFD-B6D5-4195-9693-DA34BD168328}"/>
               </a:ext>
             </a:extLst>
           </p:cNvPr>
@@ -34417,7 +34417,7 @@
           <p:cNvPr id="5" name="">
             <a:extLst xmlns:a="http://schemas.openxmlformats.org/drawingml/2006/main">
               <a:ext uri="{FF2B5EF4-FFF2-40B4-BE49-F238E27FC236}">
-                <a16:creationId xmlns:a16="http://schemas.microsoft.com/office/drawing/2014/main" id="{FB725693-BCE9-4CB4-8935-18288EA2C5BA}"/>
+                <a16:creationId xmlns:a16="http://schemas.microsoft.com/office/drawing/2014/main" id="{4D6B6A06-99E5-49DC-B798-F8B705BBA1F9}"/>
               </a:ext>
             </a:extLst>
           </p:cNvPr>
@@ -34474,7 +34474,7 @@
           <p:cNvPr id="6" name="">
             <a:extLst xmlns:a="http://schemas.openxmlformats.org/drawingml/2006/main">
               <a:ext uri="{FF2B5EF4-FFF2-40B4-BE49-F238E27FC236}">
-                <a16:creationId xmlns:a16="http://schemas.microsoft.com/office/drawing/2014/main" id="{C170AE82-129E-4029-ABCD-C79D1680A0ED}"/>
+                <a16:creationId xmlns:a16="http://schemas.microsoft.com/office/drawing/2014/main" id="{A37D5CE5-1173-4178-9A94-9BCDADE8BBD1}"/>
               </a:ext>
             </a:extLst>
           </p:cNvPr>
@@ -34531,7 +34531,7 @@
           <p:cNvPr id="7" name="">
             <a:extLst xmlns:a="http://schemas.openxmlformats.org/drawingml/2006/main">
               <a:ext uri="{FF2B5EF4-FFF2-40B4-BE49-F238E27FC236}">
-                <a16:creationId xmlns:a16="http://schemas.microsoft.com/office/drawing/2014/main" id="{39884A39-AF26-4085-8B3C-DF30D4DE18A3}"/>
+                <a16:creationId xmlns:a16="http://schemas.microsoft.com/office/drawing/2014/main" id="{4119F06D-7A6D-4C0F-BEEB-142AE6646329}"/>
               </a:ext>
             </a:extLst>
           </p:cNvPr>
@@ -34565,7 +34565,7 @@
           <p:cNvPr id="8" name="">
             <a:extLst xmlns:a="http://schemas.openxmlformats.org/drawingml/2006/main">
               <a:ext uri="{FF2B5EF4-FFF2-40B4-BE49-F238E27FC236}">
-                <a16:creationId xmlns:a16="http://schemas.microsoft.com/office/drawing/2014/main" id="{07986032-A290-412D-AB37-6843BECE1304}"/>
+                <a16:creationId xmlns:a16="http://schemas.microsoft.com/office/drawing/2014/main" id="{9D916E12-9AD4-472D-AF03-259598C989D7}"/>
               </a:ext>
             </a:extLst>
           </p:cNvPr>
@@ -34622,7 +34622,7 @@
           <p:cNvPr id="9" name="">
             <a:extLst xmlns:a="http://schemas.openxmlformats.org/drawingml/2006/main">
               <a:ext uri="{FF2B5EF4-FFF2-40B4-BE49-F238E27FC236}">
-                <a16:creationId xmlns:a16="http://schemas.microsoft.com/office/drawing/2014/main" id="{B019D895-E896-4922-B3F5-07B50DA381B4}"/>
+                <a16:creationId xmlns:a16="http://schemas.microsoft.com/office/drawing/2014/main" id="{AAEE4FAF-3A6C-437F-9DBB-7A9EE5710E5E}"/>
               </a:ext>
             </a:extLst>
           </p:cNvPr>
@@ -34656,7 +34656,7 @@
           <p:cNvPr id="10" name="">
             <a:extLst xmlns:a="http://schemas.openxmlformats.org/drawingml/2006/main">
               <a:ext uri="{FF2B5EF4-FFF2-40B4-BE49-F238E27FC236}">
-                <a16:creationId xmlns:a16="http://schemas.microsoft.com/office/drawing/2014/main" id="{D77721D3-CB8F-4EDA-BB33-48E525653452}"/>
+                <a16:creationId xmlns:a16="http://schemas.microsoft.com/office/drawing/2014/main" id="{24679107-D21E-481B-81A7-FFA2A0B207E5}"/>
               </a:ext>
             </a:extLst>
           </p:cNvPr>
@@ -34713,7 +34713,7 @@
           <p:cNvPr id="11" name="">
             <a:extLst xmlns:a="http://schemas.openxmlformats.org/drawingml/2006/main">
               <a:ext uri="{FF2B5EF4-FFF2-40B4-BE49-F238E27FC236}">
-                <a16:creationId xmlns:a16="http://schemas.microsoft.com/office/drawing/2014/main" id="{DFB46B8B-89AE-4E81-ADA1-D0CA06EBBD7B}"/>
+                <a16:creationId xmlns:a16="http://schemas.microsoft.com/office/drawing/2014/main" id="{CA26D7D9-93D8-4162-BC52-C667E628F9A2}"/>
               </a:ext>
             </a:extLst>
           </p:cNvPr>
@@ -34747,7 +34747,7 @@
           <p:cNvPr id="12" name="">
             <a:extLst xmlns:a="http://schemas.openxmlformats.org/drawingml/2006/main">
               <a:ext uri="{FF2B5EF4-FFF2-40B4-BE49-F238E27FC236}">
-                <a16:creationId xmlns:a16="http://schemas.microsoft.com/office/drawing/2014/main" id="{3F69DCCB-40F5-48A2-B62E-606DB9A6D62C}"/>
+                <a16:creationId xmlns:a16="http://schemas.microsoft.com/office/drawing/2014/main" id="{5CF9500D-3BB9-4CC8-82F3-E9282F736589}"/>
               </a:ext>
             </a:extLst>
           </p:cNvPr>
@@ -34804,7 +34804,7 @@
           <p:cNvPr id="13" name="">
             <a:extLst xmlns:a="http://schemas.openxmlformats.org/drawingml/2006/main">
               <a:ext uri="{FF2B5EF4-FFF2-40B4-BE49-F238E27FC236}">
-                <a16:creationId xmlns:a16="http://schemas.microsoft.com/office/drawing/2014/main" id="{EEA74BCF-1DC1-4154-8184-67C863CAEE6C}"/>
+                <a16:creationId xmlns:a16="http://schemas.microsoft.com/office/drawing/2014/main" id="{BDB46231-7D8F-4377-B5ED-2408E836229A}"/>
               </a:ext>
             </a:extLst>
           </p:cNvPr>
@@ -34838,7 +34838,7 @@
           <p:cNvPr id="14" name="">
             <a:extLst xmlns:a="http://schemas.openxmlformats.org/drawingml/2006/main">
               <a:ext uri="{FF2B5EF4-FFF2-40B4-BE49-F238E27FC236}">
-                <a16:creationId xmlns:a16="http://schemas.microsoft.com/office/drawing/2014/main" id="{82B4E4D4-4F5E-425A-A462-69B20307E8CA}"/>
+                <a16:creationId xmlns:a16="http://schemas.microsoft.com/office/drawing/2014/main" id="{EE64D1AF-3327-4815-9DB9-18BEFA0BF28C}"/>
               </a:ext>
             </a:extLst>
           </p:cNvPr>
@@ -34892,7 +34892,7 @@
       </p:sp>
       <p:cxnSp>
         <p:nvCxnSpPr>
-          <p:cNvPr id="46" name=""/>
+          <p:cNvPr id="48" name=""/>
           <p:cNvCxnSpPr>
             <a:stCxn xmlns:a="http://schemas.openxmlformats.org/drawingml/2006/main" id="7" idx="3"/>
             <a:endCxn xmlns:a="http://schemas.openxmlformats.org/drawingml/2006/main" id="9" idx="1"/>
@@ -34917,7 +34917,7 @@
       </p:cxnSp>
       <p:cxnSp>
         <p:nvCxnSpPr>
-          <p:cNvPr id="47" name=""/>
+          <p:cNvPr id="49" name=""/>
           <p:cNvCxnSpPr>
             <a:stCxn xmlns:a="http://schemas.openxmlformats.org/drawingml/2006/main" id="9" idx="3"/>
             <a:endCxn xmlns:a="http://schemas.openxmlformats.org/drawingml/2006/main" id="11" idx="1"/>
@@ -34942,7 +34942,7 @@
       </p:cxnSp>
       <p:cxnSp>
         <p:nvCxnSpPr>
-          <p:cNvPr id="48" name=""/>
+          <p:cNvPr id="50" name=""/>
           <p:cNvCxnSpPr>
             <a:stCxn xmlns:a="http://schemas.openxmlformats.org/drawingml/2006/main" id="11" idx="3"/>
             <a:endCxn xmlns:a="http://schemas.openxmlformats.org/drawingml/2006/main" id="13" idx="1"/>
@@ -34970,7 +34970,7 @@
           <p:cNvPr id="18" name="">
             <a:extLst xmlns:a="http://schemas.openxmlformats.org/drawingml/2006/main">
               <a:ext uri="{FF2B5EF4-FFF2-40B4-BE49-F238E27FC236}">
-                <a16:creationId xmlns:a16="http://schemas.microsoft.com/office/drawing/2014/main" id="{21E81FFC-7872-45BD-AD56-5FE5C6DC32CA}"/>
+                <a16:creationId xmlns:a16="http://schemas.microsoft.com/office/drawing/2014/main" id="{825A000C-830A-4BDC-B4BB-502BBB51AC09}"/>
               </a:ext>
             </a:extLst>
           </p:cNvPr>
@@ -35027,7 +35027,7 @@
           <p:cNvPr id="19" name="">
             <a:extLst xmlns:a="http://schemas.openxmlformats.org/drawingml/2006/main">
               <a:ext uri="{FF2B5EF4-FFF2-40B4-BE49-F238E27FC236}">
-                <a16:creationId xmlns:a16="http://schemas.microsoft.com/office/drawing/2014/main" id="{E652D0B6-A5BF-45BB-9CDF-157E17F76D31}"/>
+                <a16:creationId xmlns:a16="http://schemas.microsoft.com/office/drawing/2014/main" id="{DB41D38F-CA69-4974-839B-C0F83A2B6A69}"/>
               </a:ext>
             </a:extLst>
           </p:cNvPr>
@@ -35057,7 +35057,7 @@
           <p:cNvPr id="20" name="">
             <a:extLst xmlns:a="http://schemas.openxmlformats.org/drawingml/2006/main">
               <a:ext uri="{FF2B5EF4-FFF2-40B4-BE49-F238E27FC236}">
-                <a16:creationId xmlns:a16="http://schemas.microsoft.com/office/drawing/2014/main" id="{443C8052-E64F-44DB-A601-67BFCE4939A1}"/>
+                <a16:creationId xmlns:a16="http://schemas.microsoft.com/office/drawing/2014/main" id="{4CEDC32E-012D-4E57-8778-5233330C1D67}"/>
               </a:ext>
             </a:extLst>
           </p:cNvPr>
@@ -35114,7 +35114,7 @@
           <p:cNvPr id="21" name="">
             <a:extLst xmlns:a="http://schemas.openxmlformats.org/drawingml/2006/main">
               <a:ext uri="{FF2B5EF4-FFF2-40B4-BE49-F238E27FC236}">
-                <a16:creationId xmlns:a16="http://schemas.microsoft.com/office/drawing/2014/main" id="{48199A0A-6B57-4E51-AE76-1180C6100945}"/>
+                <a16:creationId xmlns:a16="http://schemas.microsoft.com/office/drawing/2014/main" id="{8C89F930-E7DD-429D-8FDA-3B85A81217B4}"/>
               </a:ext>
             </a:extLst>
           </p:cNvPr>
@@ -35144,7 +35144,7 @@
           <p:cNvPr id="22" name="">
             <a:extLst xmlns:a="http://schemas.openxmlformats.org/drawingml/2006/main">
               <a:ext uri="{FF2B5EF4-FFF2-40B4-BE49-F238E27FC236}">
-                <a16:creationId xmlns:a16="http://schemas.microsoft.com/office/drawing/2014/main" id="{C6359B0C-DA28-4A8D-BFC4-8C972D2C2E65}"/>
+                <a16:creationId xmlns:a16="http://schemas.microsoft.com/office/drawing/2014/main" id="{B397A60D-9082-4330-99F9-2536E1A61393}"/>
               </a:ext>
             </a:extLst>
           </p:cNvPr>
@@ -35201,7 +35201,7 @@
           <p:cNvPr id="23" name="">
             <a:extLst xmlns:a="http://schemas.openxmlformats.org/drawingml/2006/main">
               <a:ext uri="{FF2B5EF4-FFF2-40B4-BE49-F238E27FC236}">
-                <a16:creationId xmlns:a16="http://schemas.microsoft.com/office/drawing/2014/main" id="{8A566C4E-CC58-4D1C-BF4C-53A5C86DD4B2}"/>
+                <a16:creationId xmlns:a16="http://schemas.microsoft.com/office/drawing/2014/main" id="{AF738BD3-E38B-4173-B9C3-B202C7C4C142}"/>
               </a:ext>
             </a:extLst>
           </p:cNvPr>
@@ -35231,7 +35231,7 @@
           <p:cNvPr id="24" name="">
             <a:extLst xmlns:a="http://schemas.openxmlformats.org/drawingml/2006/main">
               <a:ext uri="{FF2B5EF4-FFF2-40B4-BE49-F238E27FC236}">
-                <a16:creationId xmlns:a16="http://schemas.microsoft.com/office/drawing/2014/main" id="{474D3C2D-348C-46FB-BC5A-E9A4ABA96A1B}"/>
+                <a16:creationId xmlns:a16="http://schemas.microsoft.com/office/drawing/2014/main" id="{44883122-1112-4F9C-A03C-3B3428EFE3E4}"/>
               </a:ext>
             </a:extLst>
           </p:cNvPr>
@@ -35288,7 +35288,7 @@
           <p:cNvPr id="25" name="">
             <a:extLst xmlns:a="http://schemas.openxmlformats.org/drawingml/2006/main">
               <a:ext uri="{FF2B5EF4-FFF2-40B4-BE49-F238E27FC236}">
-                <a16:creationId xmlns:a16="http://schemas.microsoft.com/office/drawing/2014/main" id="{F6A21451-0168-4E90-8AD3-A19AF696F218}"/>
+                <a16:creationId xmlns:a16="http://schemas.microsoft.com/office/drawing/2014/main" id="{DED494DB-1C93-4C6F-BDC0-13544E5BBE0B}"/>
               </a:ext>
             </a:extLst>
           </p:cNvPr>
@@ -35345,7 +35345,7 @@
           <p:cNvPr id="26" name="">
             <a:extLst xmlns:a="http://schemas.openxmlformats.org/drawingml/2006/main">
               <a:ext uri="{FF2B5EF4-FFF2-40B4-BE49-F238E27FC236}">
-                <a16:creationId xmlns:a16="http://schemas.microsoft.com/office/drawing/2014/main" id="{C7037265-8FC9-432F-8A44-6532F861A968}"/>
+                <a16:creationId xmlns:a16="http://schemas.microsoft.com/office/drawing/2014/main" id="{2E43CAF1-FE3B-4EB6-A523-7E3E1234227D}"/>
               </a:ext>
             </a:extLst>
           </p:cNvPr>
@@ -35375,7 +35375,7 @@
           <p:cNvPr id="27" name="">
             <a:extLst xmlns:a="http://schemas.openxmlformats.org/drawingml/2006/main">
               <a:ext uri="{FF2B5EF4-FFF2-40B4-BE49-F238E27FC236}">
-                <a16:creationId xmlns:a16="http://schemas.microsoft.com/office/drawing/2014/main" id="{3F4BB93D-FAAC-4DCC-8D0B-B749596E3107}"/>
+                <a16:creationId xmlns:a16="http://schemas.microsoft.com/office/drawing/2014/main" id="{A5835B53-107C-44A1-A416-9835CF406A77}"/>
               </a:ext>
             </a:extLst>
           </p:cNvPr>
@@ -35432,7 +35432,7 @@
           <p:cNvPr id="28" name="">
             <a:extLst xmlns:a="http://schemas.openxmlformats.org/drawingml/2006/main">
               <a:ext uri="{FF2B5EF4-FFF2-40B4-BE49-F238E27FC236}">
-                <a16:creationId xmlns:a16="http://schemas.microsoft.com/office/drawing/2014/main" id="{87E52740-F5DF-4781-B303-8C0824831480}"/>
+                <a16:creationId xmlns:a16="http://schemas.microsoft.com/office/drawing/2014/main" id="{F4D51A48-87CA-475A-ADE7-5D82D73393F0}"/>
               </a:ext>
             </a:extLst>
           </p:cNvPr>
@@ -35462,7 +35462,7 @@
           <p:cNvPr id="29" name="">
             <a:extLst xmlns:a="http://schemas.openxmlformats.org/drawingml/2006/main">
               <a:ext uri="{FF2B5EF4-FFF2-40B4-BE49-F238E27FC236}">
-                <a16:creationId xmlns:a16="http://schemas.microsoft.com/office/drawing/2014/main" id="{B1478E60-C0D9-4794-96F0-7AE8BAE67283}"/>
+                <a16:creationId xmlns:a16="http://schemas.microsoft.com/office/drawing/2014/main" id="{4BCB12B6-5A9A-4188-97A4-D110F22E6AA4}"/>
               </a:ext>
             </a:extLst>
           </p:cNvPr>
@@ -35519,7 +35519,7 @@
           <p:cNvPr id="30" name="">
             <a:extLst xmlns:a="http://schemas.openxmlformats.org/drawingml/2006/main">
               <a:ext uri="{FF2B5EF4-FFF2-40B4-BE49-F238E27FC236}">
-                <a16:creationId xmlns:a16="http://schemas.microsoft.com/office/drawing/2014/main" id="{21EFB9E7-2DE2-4BDB-86DD-1BE8B67428B8}"/>
+                <a16:creationId xmlns:a16="http://schemas.microsoft.com/office/drawing/2014/main" id="{A9C1C347-862E-4DED-BB98-019778FD4CDA}"/>
               </a:ext>
             </a:extLst>
           </p:cNvPr>
@@ -35549,7 +35549,7 @@
           <p:cNvPr id="31" name="">
             <a:extLst xmlns:a="http://schemas.openxmlformats.org/drawingml/2006/main">
               <a:ext uri="{FF2B5EF4-FFF2-40B4-BE49-F238E27FC236}">
-                <a16:creationId xmlns:a16="http://schemas.microsoft.com/office/drawing/2014/main" id="{EEB94249-A1A9-4462-87DE-80155FDFC0EF}"/>
+                <a16:creationId xmlns:a16="http://schemas.microsoft.com/office/drawing/2014/main" id="{865BAE8E-EDF0-4F14-BE39-DE63AA688C2D}"/>
               </a:ext>
             </a:extLst>
           </p:cNvPr>
@@ -35597,6 +35597,95 @@
                 <a:cs typeface="Segoe UI"/>
               </a:rPr>
               <a:t>No milestone or Retainage Release behavior</a:t>
+            </a:r>
+          </a:p>
+        </p:txBody>
+      </p:sp>
+      <p:sp>
+        <p:nvSpPr>
+          <p:cNvPr id="32" name="">
+            <a:extLst xmlns:a="http://schemas.openxmlformats.org/drawingml/2006/main">
+              <a:ext uri="{FF2B5EF4-FFF2-40B4-BE49-F238E27FC236}">
+                <a16:creationId xmlns:a16="http://schemas.microsoft.com/office/drawing/2014/main" id="{6757B999-D811-4EB9-906F-8D42F53E9A92}"/>
+              </a:ext>
+            </a:extLst>
+          </p:cNvPr>
+          <p:cNvSpPr>
+            <a:spLocks xmlns:a="http://schemas.openxmlformats.org/drawingml/2006/main" noGrp="1"/>
+          </p:cNvSpPr>
+          <p:nvPr/>
+        </p:nvSpPr>
+        <p:spPr>
+          <a:xfrm xmlns:a="http://schemas.openxmlformats.org/drawingml/2006/main">
+            <a:off x="609600" y="5715000"/>
+            <a:ext cx="10972800" cy="514350"/>
+          </a:xfrm>
+          <a:prstGeom xmlns:a="http://schemas.openxmlformats.org/drawingml/2006/main" prst="roundRect">
+            <a:avLst>
+              <a:gd name="adj" fmla="val 14815"/>
+            </a:avLst>
+          </a:prstGeom>
+          <a:solidFill xmlns:a="http://schemas.openxmlformats.org/drawingml/2006/main">
+            <a:srgbClr val="E9F0FF"/>
+          </a:solidFill>
+          <a:ln xmlns:a="http://schemas.openxmlformats.org/drawingml/2006/main" w="0">
+            <a:noFill/>
+          </a:ln>
+        </p:spPr>
+      </p:sp>
+      <p:sp>
+        <p:nvSpPr>
+          <p:cNvPr id="33" name="">
+            <a:extLst xmlns:a="http://schemas.openxmlformats.org/drawingml/2006/main">
+              <a:ext uri="{FF2B5EF4-FFF2-40B4-BE49-F238E27FC236}">
+                <a16:creationId xmlns:a16="http://schemas.microsoft.com/office/drawing/2014/main" id="{C04FD4C8-7B59-4D2B-A843-1201AC1C06F5}"/>
+              </a:ext>
+            </a:extLst>
+          </p:cNvPr>
+          <p:cNvSpPr>
+            <a:spLocks xmlns:a="http://schemas.openxmlformats.org/drawingml/2006/main" noGrp="1"/>
+          </p:cNvSpPr>
+          <p:nvPr/>
+        </p:nvSpPr>
+        <p:spPr>
+          <a:xfrm xmlns:a="http://schemas.openxmlformats.org/drawingml/2006/main">
+            <a:off x="800100" y="5829300"/>
+            <a:ext cx="10591800" cy="285750"/>
+          </a:xfrm>
+          <a:prstGeom xmlns:a="http://schemas.openxmlformats.org/drawingml/2006/main" prst="rect">
+            <a:avLst/>
+          </a:prstGeom>
+          <a:noFill xmlns:a="http://schemas.openxmlformats.org/drawingml/2006/main"/>
+          <a:ln xmlns:a="http://schemas.openxmlformats.org/drawingml/2006/main" w="0">
+            <a:noFill/>
+          </a:ln>
+        </p:spPr>
+        <p:txBody>
+          <a:bodyPr xmlns:a="http://schemas.openxmlformats.org/drawingml/2006/main" anchor="ctr">
+            <a:noAutofit/>
+          </a:bodyPr>
+          <a:lstStyle xmlns:a="http://schemas.openxmlformats.org/drawingml/2006/main"/>
+          <a:p xmlns:a="http://schemas.openxmlformats.org/drawingml/2006/main">
+            <a:pPr algn="l">
+              <a:defRPr sz="1350" b="1">
+                <a:solidFill>
+                  <a:srgbClr val="2F6FED"/>
+                </a:solidFill>
+                <a:latin typeface="Segoe UI"/>
+                <a:ea typeface="Segoe UI"/>
+                <a:cs typeface="Segoe UI"/>
+              </a:defRPr>
+            </a:pPr>
+            <a:r>
+              <a:rPr sz="1350" b="1">
+                <a:solidFill>
+                  <a:srgbClr val="2F6FED"/>
+                </a:solidFill>
+                <a:latin typeface="Segoe UI"/>
+                <a:ea typeface="Segoe UI"/>
+                <a:cs typeface="Segoe UI"/>
+              </a:rPr>
+              <a:t>One active Standard Invoice per Estimate; unavailable after tracked Progress history — enforce across creation, linking, API, import, and automation.</a:t>
             </a:r>
           </a:p>
         </p:txBody>
@@ -35604,7 +35693,7 @@
     </p:spTree>
     <p:extLst>
       <p:ext uri="{BB962C8B-B14F-4D97-AF65-F5344CB8AC3E}">
-        <p14:creationId xmlns:p14="http://schemas.microsoft.com/office/powerpoint/2010/main" val="1161117995"/>
+        <p14:creationId xmlns:p14="http://schemas.microsoft.com/office/powerpoint/2010/main" val="653929150"/>
       </p:ext>
     </p:extLst>
   </p:cSld>
@@ -35635,7 +35724,7 @@
           <p:cNvPr id="36" name="">
             <a:extLst xmlns:a="http://schemas.openxmlformats.org/drawingml/2006/main">
               <a:ext uri="{FF2B5EF4-FFF2-40B4-BE49-F238E27FC236}">
-                <a16:creationId xmlns:a16="http://schemas.microsoft.com/office/drawing/2014/main" id="{491FB996-1520-461E-82BA-3D83197C6918}"/>
+                <a16:creationId xmlns:a16="http://schemas.microsoft.com/office/drawing/2014/main" id="{84425024-C383-4C2B-AC25-F3E7071A23B4}"/>
               </a:ext>
             </a:extLst>
           </p:cNvPr>
@@ -35692,7 +35781,7 @@
           <p:cNvPr id="2" name="">
             <a:extLst xmlns:a="http://schemas.openxmlformats.org/drawingml/2006/main">
               <a:ext uri="{FF2B5EF4-FFF2-40B4-BE49-F238E27FC236}">
-                <a16:creationId xmlns:a16="http://schemas.microsoft.com/office/drawing/2014/main" id="{E76B9C09-8AAA-47D7-B248-B0467035CC50}"/>
+                <a16:creationId xmlns:a16="http://schemas.microsoft.com/office/drawing/2014/main" id="{70BE97A2-D116-4CE4-A859-D4B40F9C2C11}"/>
               </a:ext>
             </a:extLst>
           </p:cNvPr>
@@ -35749,7 +35838,7 @@
           <p:cNvPr id="3" name="">
             <a:extLst xmlns:a="http://schemas.openxmlformats.org/drawingml/2006/main">
               <a:ext uri="{FF2B5EF4-FFF2-40B4-BE49-F238E27FC236}">
-                <a16:creationId xmlns:a16="http://schemas.microsoft.com/office/drawing/2014/main" id="{12F675C2-949B-48C6-9747-8BA12AA5AC05}"/>
+                <a16:creationId xmlns:a16="http://schemas.microsoft.com/office/drawing/2014/main" id="{1FC9F751-E9B6-44F1-99CE-D337B3478CC9}"/>
               </a:ext>
             </a:extLst>
           </p:cNvPr>
@@ -35779,7 +35868,7 @@
           <p:cNvPr id="4" name="">
             <a:extLst xmlns:a="http://schemas.openxmlformats.org/drawingml/2006/main">
               <a:ext uri="{FF2B5EF4-FFF2-40B4-BE49-F238E27FC236}">
-                <a16:creationId xmlns:a16="http://schemas.microsoft.com/office/drawing/2014/main" id="{38F37655-0F6C-4303-AC57-5C079B69E88F}"/>
+                <a16:creationId xmlns:a16="http://schemas.microsoft.com/office/drawing/2014/main" id="{7AF52637-8852-45DC-87A9-F77BD3C873C2}"/>
               </a:ext>
             </a:extLst>
           </p:cNvPr>
@@ -35836,7 +35925,7 @@
           <p:cNvPr id="5" name="">
             <a:extLst xmlns:a="http://schemas.openxmlformats.org/drawingml/2006/main">
               <a:ext uri="{FF2B5EF4-FFF2-40B4-BE49-F238E27FC236}">
-                <a16:creationId xmlns:a16="http://schemas.microsoft.com/office/drawing/2014/main" id="{1BA79B0E-A7F2-44FF-BC66-9CB7F0E7DC3E}"/>
+                <a16:creationId xmlns:a16="http://schemas.microsoft.com/office/drawing/2014/main" id="{0999865B-43A3-488D-BBAB-CFE05BA58378}"/>
               </a:ext>
             </a:extLst>
           </p:cNvPr>
@@ -35893,7 +35982,7 @@
           <p:cNvPr id="6" name="">
             <a:extLst xmlns:a="http://schemas.openxmlformats.org/drawingml/2006/main">
               <a:ext uri="{FF2B5EF4-FFF2-40B4-BE49-F238E27FC236}">
-                <a16:creationId xmlns:a16="http://schemas.microsoft.com/office/drawing/2014/main" id="{A645C695-0F45-4218-97A5-44E8A538B709}"/>
+                <a16:creationId xmlns:a16="http://schemas.microsoft.com/office/drawing/2014/main" id="{D4FE2F4A-2E04-4F8F-81F7-914EB7B53958}"/>
               </a:ext>
             </a:extLst>
           </p:cNvPr>
@@ -35927,7 +36016,7 @@
           <p:cNvPr id="7" name="">
             <a:extLst xmlns:a="http://schemas.openxmlformats.org/drawingml/2006/main">
               <a:ext uri="{FF2B5EF4-FFF2-40B4-BE49-F238E27FC236}">
-                <a16:creationId xmlns:a16="http://schemas.microsoft.com/office/drawing/2014/main" id="{F7F4C1EA-8C02-49F8-8C69-B347CD805A3E}"/>
+                <a16:creationId xmlns:a16="http://schemas.microsoft.com/office/drawing/2014/main" id="{8BD0C65B-FAB0-4881-ABF0-8F8D98ABF2E7}"/>
               </a:ext>
             </a:extLst>
           </p:cNvPr>
@@ -35984,7 +36073,7 @@
           <p:cNvPr id="8" name="">
             <a:extLst xmlns:a="http://schemas.openxmlformats.org/drawingml/2006/main">
               <a:ext uri="{FF2B5EF4-FFF2-40B4-BE49-F238E27FC236}">
-                <a16:creationId xmlns:a16="http://schemas.microsoft.com/office/drawing/2014/main" id="{A7AEBA2D-FD80-4BF2-B908-7A65ADC5A76C}"/>
+                <a16:creationId xmlns:a16="http://schemas.microsoft.com/office/drawing/2014/main" id="{443B8227-0321-4C13-8146-E6D24C0311BF}"/>
               </a:ext>
             </a:extLst>
           </p:cNvPr>
@@ -36018,7 +36107,7 @@
           <p:cNvPr id="9" name="">
             <a:extLst xmlns:a="http://schemas.openxmlformats.org/drawingml/2006/main">
               <a:ext uri="{FF2B5EF4-FFF2-40B4-BE49-F238E27FC236}">
-                <a16:creationId xmlns:a16="http://schemas.microsoft.com/office/drawing/2014/main" id="{A803DB22-8FCB-4F06-9D46-77FCD1EFAA06}"/>
+                <a16:creationId xmlns:a16="http://schemas.microsoft.com/office/drawing/2014/main" id="{6749A75F-7573-4E1D-BD56-357EB1AE1A4E}"/>
               </a:ext>
             </a:extLst>
           </p:cNvPr>
@@ -36075,7 +36164,7 @@
           <p:cNvPr id="10" name="">
             <a:extLst xmlns:a="http://schemas.openxmlformats.org/drawingml/2006/main">
               <a:ext uri="{FF2B5EF4-FFF2-40B4-BE49-F238E27FC236}">
-                <a16:creationId xmlns:a16="http://schemas.microsoft.com/office/drawing/2014/main" id="{F46F9FC1-F9D4-41A5-AFEE-9365F4583B9F}"/>
+                <a16:creationId xmlns:a16="http://schemas.microsoft.com/office/drawing/2014/main" id="{65C6816F-1983-471D-81CA-585A3AB732E9}"/>
               </a:ext>
             </a:extLst>
           </p:cNvPr>
@@ -36109,7 +36198,7 @@
           <p:cNvPr id="11" name="">
             <a:extLst xmlns:a="http://schemas.openxmlformats.org/drawingml/2006/main">
               <a:ext uri="{FF2B5EF4-FFF2-40B4-BE49-F238E27FC236}">
-                <a16:creationId xmlns:a16="http://schemas.microsoft.com/office/drawing/2014/main" id="{FF6D6BAF-5025-4057-B7C5-CE0E2BD191B2}"/>
+                <a16:creationId xmlns:a16="http://schemas.microsoft.com/office/drawing/2014/main" id="{9391628E-3D9B-4144-8F29-3EB0F73FDD1C}"/>
               </a:ext>
             </a:extLst>
           </p:cNvPr>
@@ -36166,7 +36255,7 @@
           <p:cNvPr id="12" name="">
             <a:extLst xmlns:a="http://schemas.openxmlformats.org/drawingml/2006/main">
               <a:ext uri="{FF2B5EF4-FFF2-40B4-BE49-F238E27FC236}">
-                <a16:creationId xmlns:a16="http://schemas.microsoft.com/office/drawing/2014/main" id="{28535C3E-DE77-46A2-AF43-3932B39F6725}"/>
+                <a16:creationId xmlns:a16="http://schemas.microsoft.com/office/drawing/2014/main" id="{DDECC681-5DBD-463C-A336-FEDAD4D57CE9}"/>
               </a:ext>
             </a:extLst>
           </p:cNvPr>
@@ -36200,7 +36289,7 @@
           <p:cNvPr id="13" name="">
             <a:extLst xmlns:a="http://schemas.openxmlformats.org/drawingml/2006/main">
               <a:ext uri="{FF2B5EF4-FFF2-40B4-BE49-F238E27FC236}">
-                <a16:creationId xmlns:a16="http://schemas.microsoft.com/office/drawing/2014/main" id="{4BE619C1-5D3B-4373-82E1-4E9DD2733A51}"/>
+                <a16:creationId xmlns:a16="http://schemas.microsoft.com/office/drawing/2014/main" id="{85109D9A-7C01-459F-A432-2D39E9981891}"/>
               </a:ext>
             </a:extLst>
           </p:cNvPr>
@@ -36257,7 +36346,7 @@
           <p:cNvPr id="14" name="">
             <a:extLst xmlns:a="http://schemas.openxmlformats.org/drawingml/2006/main">
               <a:ext uri="{FF2B5EF4-FFF2-40B4-BE49-F238E27FC236}">
-                <a16:creationId xmlns:a16="http://schemas.microsoft.com/office/drawing/2014/main" id="{D0192B5B-D448-4EBB-8F4F-C8BE7C4A1670}"/>
+                <a16:creationId xmlns:a16="http://schemas.microsoft.com/office/drawing/2014/main" id="{9B761E9E-6D6B-4A4A-B9DA-CBEF11FFA259}"/>
               </a:ext>
             </a:extLst>
           </p:cNvPr>
@@ -36291,7 +36380,7 @@
           <p:cNvPr id="15" name="">
             <a:extLst xmlns:a="http://schemas.openxmlformats.org/drawingml/2006/main">
               <a:ext uri="{FF2B5EF4-FFF2-40B4-BE49-F238E27FC236}">
-                <a16:creationId xmlns:a16="http://schemas.microsoft.com/office/drawing/2014/main" id="{8A11D67A-CE54-4C43-823B-7828467A4497}"/>
+                <a16:creationId xmlns:a16="http://schemas.microsoft.com/office/drawing/2014/main" id="{8DA2D4D3-1CEF-4079-B699-0DB6E2B3DC00}"/>
               </a:ext>
             </a:extLst>
           </p:cNvPr>
@@ -36448,7 +36537,7 @@
           <p:cNvPr id="20" name="">
             <a:extLst xmlns:a="http://schemas.openxmlformats.org/drawingml/2006/main">
               <a:ext uri="{FF2B5EF4-FFF2-40B4-BE49-F238E27FC236}">
-                <a16:creationId xmlns:a16="http://schemas.microsoft.com/office/drawing/2014/main" id="{E3C0E3DA-F23B-4E64-8DE8-4889967F2744}"/>
+                <a16:creationId xmlns:a16="http://schemas.microsoft.com/office/drawing/2014/main" id="{7A384E44-27E7-44C1-B917-A6C02494D22B}"/>
               </a:ext>
             </a:extLst>
           </p:cNvPr>
@@ -36505,7 +36594,7 @@
           <p:cNvPr id="21" name="">
             <a:extLst xmlns:a="http://schemas.openxmlformats.org/drawingml/2006/main">
               <a:ext uri="{FF2B5EF4-FFF2-40B4-BE49-F238E27FC236}">
-                <a16:creationId xmlns:a16="http://schemas.microsoft.com/office/drawing/2014/main" id="{8C3DAA68-85C6-41D4-84C3-8D0050264681}"/>
+                <a16:creationId xmlns:a16="http://schemas.microsoft.com/office/drawing/2014/main" id="{FF35AEDA-F5CB-43BF-82AB-92334E757393}"/>
               </a:ext>
             </a:extLst>
           </p:cNvPr>
@@ -36535,7 +36624,7 @@
           <p:cNvPr id="22" name="">
             <a:extLst xmlns:a="http://schemas.openxmlformats.org/drawingml/2006/main">
               <a:ext uri="{FF2B5EF4-FFF2-40B4-BE49-F238E27FC236}">
-                <a16:creationId xmlns:a16="http://schemas.microsoft.com/office/drawing/2014/main" id="{87F1EE82-9556-4A28-A12A-E22BBBBAF37D}"/>
+                <a16:creationId xmlns:a16="http://schemas.microsoft.com/office/drawing/2014/main" id="{637C208F-6764-4C44-80AC-4814BE3BC5FA}"/>
               </a:ext>
             </a:extLst>
           </p:cNvPr>
@@ -36592,7 +36681,7 @@
           <p:cNvPr id="23" name="">
             <a:extLst xmlns:a="http://schemas.openxmlformats.org/drawingml/2006/main">
               <a:ext uri="{FF2B5EF4-FFF2-40B4-BE49-F238E27FC236}">
-                <a16:creationId xmlns:a16="http://schemas.microsoft.com/office/drawing/2014/main" id="{E6FEA2BE-CDB6-4DD1-B171-715A4947BC0D}"/>
+                <a16:creationId xmlns:a16="http://schemas.microsoft.com/office/drawing/2014/main" id="{BB4543C7-CBFC-48FA-83FD-76C88535B311}"/>
               </a:ext>
             </a:extLst>
           </p:cNvPr>
@@ -36622,7 +36711,7 @@
           <p:cNvPr id="24" name="">
             <a:extLst xmlns:a="http://schemas.openxmlformats.org/drawingml/2006/main">
               <a:ext uri="{FF2B5EF4-FFF2-40B4-BE49-F238E27FC236}">
-                <a16:creationId xmlns:a16="http://schemas.microsoft.com/office/drawing/2014/main" id="{9BB1D43A-B762-424A-A510-BDC4DEB7F021}"/>
+                <a16:creationId xmlns:a16="http://schemas.microsoft.com/office/drawing/2014/main" id="{22E2556B-F362-4C1A-85D2-979A93C1FF8F}"/>
               </a:ext>
             </a:extLst>
           </p:cNvPr>
@@ -36679,7 +36768,7 @@
           <p:cNvPr id="25" name="">
             <a:extLst xmlns:a="http://schemas.openxmlformats.org/drawingml/2006/main">
               <a:ext uri="{FF2B5EF4-FFF2-40B4-BE49-F238E27FC236}">
-                <a16:creationId xmlns:a16="http://schemas.microsoft.com/office/drawing/2014/main" id="{7324CFF5-98A1-40CB-9D8C-B7A42B79B7AA}"/>
+                <a16:creationId xmlns:a16="http://schemas.microsoft.com/office/drawing/2014/main" id="{81CB6883-71F6-4DB7-9A3C-838FF702D80E}"/>
               </a:ext>
             </a:extLst>
           </p:cNvPr>
@@ -36709,7 +36798,7 @@
           <p:cNvPr id="26" name="">
             <a:extLst xmlns:a="http://schemas.openxmlformats.org/drawingml/2006/main">
               <a:ext uri="{FF2B5EF4-FFF2-40B4-BE49-F238E27FC236}">
-                <a16:creationId xmlns:a16="http://schemas.microsoft.com/office/drawing/2014/main" id="{72F07DE7-516F-410E-A48A-91E6238DC933}"/>
+                <a16:creationId xmlns:a16="http://schemas.microsoft.com/office/drawing/2014/main" id="{6C0D0A1A-E764-43F2-8EA3-DA9B9F1E7F57}"/>
               </a:ext>
             </a:extLst>
           </p:cNvPr>
@@ -36766,7 +36855,7 @@
           <p:cNvPr id="27" name="">
             <a:extLst xmlns:a="http://schemas.openxmlformats.org/drawingml/2006/main">
               <a:ext uri="{FF2B5EF4-FFF2-40B4-BE49-F238E27FC236}">
-                <a16:creationId xmlns:a16="http://schemas.microsoft.com/office/drawing/2014/main" id="{E76147E7-A3DC-4DCB-9CB5-38836E264919}"/>
+                <a16:creationId xmlns:a16="http://schemas.microsoft.com/office/drawing/2014/main" id="{12DAA15D-7ACF-4D87-A70E-7BCA9ECB850C}"/>
               </a:ext>
             </a:extLst>
           </p:cNvPr>
@@ -36823,7 +36912,7 @@
           <p:cNvPr id="28" name="">
             <a:extLst xmlns:a="http://schemas.openxmlformats.org/drawingml/2006/main">
               <a:ext uri="{FF2B5EF4-FFF2-40B4-BE49-F238E27FC236}">
-                <a16:creationId xmlns:a16="http://schemas.microsoft.com/office/drawing/2014/main" id="{9A19E4D0-C5C2-40B7-B3A2-696D2053C74D}"/>
+                <a16:creationId xmlns:a16="http://schemas.microsoft.com/office/drawing/2014/main" id="{631539A0-EB8B-439A-B26A-E32CC48283E0}"/>
               </a:ext>
             </a:extLst>
           </p:cNvPr>
@@ -36853,7 +36942,7 @@
           <p:cNvPr id="29" name="">
             <a:extLst xmlns:a="http://schemas.openxmlformats.org/drawingml/2006/main">
               <a:ext uri="{FF2B5EF4-FFF2-40B4-BE49-F238E27FC236}">
-                <a16:creationId xmlns:a16="http://schemas.microsoft.com/office/drawing/2014/main" id="{165D620B-932B-4E52-B6E3-FFBDC9D3B9A5}"/>
+                <a16:creationId xmlns:a16="http://schemas.microsoft.com/office/drawing/2014/main" id="{A47F1F54-1BB6-4597-9AA8-9F21F498BBE6}"/>
               </a:ext>
             </a:extLst>
           </p:cNvPr>
@@ -36910,7 +36999,7 @@
           <p:cNvPr id="30" name="">
             <a:extLst xmlns:a="http://schemas.openxmlformats.org/drawingml/2006/main">
               <a:ext uri="{FF2B5EF4-FFF2-40B4-BE49-F238E27FC236}">
-                <a16:creationId xmlns:a16="http://schemas.microsoft.com/office/drawing/2014/main" id="{995A6852-AABE-4154-B2E4-26880CB77CB2}"/>
+                <a16:creationId xmlns:a16="http://schemas.microsoft.com/office/drawing/2014/main" id="{DFE9AAC3-8524-4FA8-8BD2-36744D1FC006}"/>
               </a:ext>
             </a:extLst>
           </p:cNvPr>
@@ -36940,7 +37029,7 @@
           <p:cNvPr id="31" name="">
             <a:extLst xmlns:a="http://schemas.openxmlformats.org/drawingml/2006/main">
               <a:ext uri="{FF2B5EF4-FFF2-40B4-BE49-F238E27FC236}">
-                <a16:creationId xmlns:a16="http://schemas.microsoft.com/office/drawing/2014/main" id="{B2A2A4BB-CCCC-47CD-9E76-8717C9128782}"/>
+                <a16:creationId xmlns:a16="http://schemas.microsoft.com/office/drawing/2014/main" id="{C70EACF0-9300-4F7F-BFD5-67BA909B5BD2}"/>
               </a:ext>
             </a:extLst>
           </p:cNvPr>
@@ -36997,7 +37086,7 @@
           <p:cNvPr id="32" name="">
             <a:extLst xmlns:a="http://schemas.openxmlformats.org/drawingml/2006/main">
               <a:ext uri="{FF2B5EF4-FFF2-40B4-BE49-F238E27FC236}">
-                <a16:creationId xmlns:a16="http://schemas.microsoft.com/office/drawing/2014/main" id="{BB9853BC-5D9D-41F1-9DC8-BD238CD8C480}"/>
+                <a16:creationId xmlns:a16="http://schemas.microsoft.com/office/drawing/2014/main" id="{A727702A-A7E3-48AA-A7D8-57C9E4B07476}"/>
               </a:ext>
             </a:extLst>
           </p:cNvPr>
@@ -37027,7 +37116,7 @@
           <p:cNvPr id="33" name="">
             <a:extLst xmlns:a="http://schemas.openxmlformats.org/drawingml/2006/main">
               <a:ext uri="{FF2B5EF4-FFF2-40B4-BE49-F238E27FC236}">
-                <a16:creationId xmlns:a16="http://schemas.microsoft.com/office/drawing/2014/main" id="{6AF0D842-40E3-4AFD-B2A6-4B6D223BC47A}"/>
+                <a16:creationId xmlns:a16="http://schemas.microsoft.com/office/drawing/2014/main" id="{514E3EE4-CB04-4885-9802-300F4BE1786A}"/>
               </a:ext>
             </a:extLst>
           </p:cNvPr>
@@ -37084,7 +37173,7 @@
           <p:cNvPr id="34" name="">
             <a:extLst xmlns:a="http://schemas.openxmlformats.org/drawingml/2006/main">
               <a:ext uri="{FF2B5EF4-FFF2-40B4-BE49-F238E27FC236}">
-                <a16:creationId xmlns:a16="http://schemas.microsoft.com/office/drawing/2014/main" id="{47BF8A51-CC9D-44C1-B20C-AAFB50E03802}"/>
+                <a16:creationId xmlns:a16="http://schemas.microsoft.com/office/drawing/2014/main" id="{B10C31FE-BBB6-4F0C-8A6A-50566F76A8B8}"/>
               </a:ext>
             </a:extLst>
           </p:cNvPr>
@@ -37116,7 +37205,7 @@
           <p:cNvPr id="35" name="">
             <a:extLst xmlns:a="http://schemas.openxmlformats.org/drawingml/2006/main">
               <a:ext uri="{FF2B5EF4-FFF2-40B4-BE49-F238E27FC236}">
-                <a16:creationId xmlns:a16="http://schemas.microsoft.com/office/drawing/2014/main" id="{74FD6DA4-D319-4ADB-9EBF-C0B9B7D67110}"/>
+                <a16:creationId xmlns:a16="http://schemas.microsoft.com/office/drawing/2014/main" id="{CEF0148E-426E-48F2-A014-0E831FAC6985}"/>
               </a:ext>
             </a:extLst>
           </p:cNvPr>
@@ -37171,7 +37260,7 @@
     </p:spTree>
     <p:extLst>
       <p:ext uri="{BB962C8B-B14F-4D97-AF65-F5344CB8AC3E}">
-        <p14:creationId xmlns:p14="http://schemas.microsoft.com/office/powerpoint/2010/main" val="778676228"/>
+        <p14:creationId xmlns:p14="http://schemas.microsoft.com/office/powerpoint/2010/main" val="558403638"/>
       </p:ext>
     </p:extLst>
   </p:cSld>
@@ -37202,7 +37291,7 @@
           <p:cNvPr id="25" name="">
             <a:extLst xmlns:a="http://schemas.openxmlformats.org/drawingml/2006/main">
               <a:ext uri="{FF2B5EF4-FFF2-40B4-BE49-F238E27FC236}">
-                <a16:creationId xmlns:a16="http://schemas.microsoft.com/office/drawing/2014/main" id="{0E321E08-EEC6-4827-9D0F-FE6C77584054}"/>
+                <a16:creationId xmlns:a16="http://schemas.microsoft.com/office/drawing/2014/main" id="{1304B719-9816-4F3F-B1E5-AAB851F73CAA}"/>
               </a:ext>
             </a:extLst>
           </p:cNvPr>
@@ -37259,7 +37348,7 @@
           <p:cNvPr id="2" name="">
             <a:extLst xmlns:a="http://schemas.openxmlformats.org/drawingml/2006/main">
               <a:ext uri="{FF2B5EF4-FFF2-40B4-BE49-F238E27FC236}">
-                <a16:creationId xmlns:a16="http://schemas.microsoft.com/office/drawing/2014/main" id="{5172263A-5E39-45A8-BDD3-E338AE8D9832}"/>
+                <a16:creationId xmlns:a16="http://schemas.microsoft.com/office/drawing/2014/main" id="{C871BC63-D12B-4A19-80D4-2D1AD1C038D9}"/>
               </a:ext>
             </a:extLst>
           </p:cNvPr>
@@ -37316,7 +37405,7 @@
           <p:cNvPr id="3" name="">
             <a:extLst xmlns:a="http://schemas.openxmlformats.org/drawingml/2006/main">
               <a:ext uri="{FF2B5EF4-FFF2-40B4-BE49-F238E27FC236}">
-                <a16:creationId xmlns:a16="http://schemas.microsoft.com/office/drawing/2014/main" id="{3CBBDBD0-405B-4EC2-8355-CE86C5CFA0D8}"/>
+                <a16:creationId xmlns:a16="http://schemas.microsoft.com/office/drawing/2014/main" id="{6932C5E7-38EA-441B-9A4F-EE64C15DF2F0}"/>
               </a:ext>
             </a:extLst>
           </p:cNvPr>
@@ -37346,7 +37435,7 @@
           <p:cNvPr id="4" name="">
             <a:extLst xmlns:a="http://schemas.openxmlformats.org/drawingml/2006/main">
               <a:ext uri="{FF2B5EF4-FFF2-40B4-BE49-F238E27FC236}">
-                <a16:creationId xmlns:a16="http://schemas.microsoft.com/office/drawing/2014/main" id="{441B58FA-B141-4A56-80E6-5E49380DB2C3}"/>
+                <a16:creationId xmlns:a16="http://schemas.microsoft.com/office/drawing/2014/main" id="{102F4448-3191-420B-8BA9-3848AE6A868A}"/>
               </a:ext>
             </a:extLst>
           </p:cNvPr>
@@ -37403,7 +37492,7 @@
           <p:cNvPr id="5" name="">
             <a:extLst xmlns:a="http://schemas.openxmlformats.org/drawingml/2006/main">
               <a:ext uri="{FF2B5EF4-FFF2-40B4-BE49-F238E27FC236}">
-                <a16:creationId xmlns:a16="http://schemas.microsoft.com/office/drawing/2014/main" id="{DCF81A31-D833-4C4D-8A5D-E2641B87A3C7}"/>
+                <a16:creationId xmlns:a16="http://schemas.microsoft.com/office/drawing/2014/main" id="{3A21F05C-623A-4493-9B22-A0257443AE53}"/>
               </a:ext>
             </a:extLst>
           </p:cNvPr>
@@ -37460,7 +37549,7 @@
           <p:cNvPr id="6" name="">
             <a:extLst xmlns:a="http://schemas.openxmlformats.org/drawingml/2006/main">
               <a:ext uri="{FF2B5EF4-FFF2-40B4-BE49-F238E27FC236}">
-                <a16:creationId xmlns:a16="http://schemas.microsoft.com/office/drawing/2014/main" id="{D3A3B3A5-93EA-4A94-AAD5-10D885059ADF}"/>
+                <a16:creationId xmlns:a16="http://schemas.microsoft.com/office/drawing/2014/main" id="{7C399330-A4C7-4595-8E1F-2AEFB3AEFF34}"/>
               </a:ext>
             </a:extLst>
           </p:cNvPr>
@@ -37517,7 +37606,7 @@
           <p:cNvPr id="7" name="">
             <a:extLst xmlns:a="http://schemas.openxmlformats.org/drawingml/2006/main">
               <a:ext uri="{FF2B5EF4-FFF2-40B4-BE49-F238E27FC236}">
-                <a16:creationId xmlns:a16="http://schemas.microsoft.com/office/drawing/2014/main" id="{B07633E9-766D-44FD-A2B0-710F74ED6E3A}"/>
+                <a16:creationId xmlns:a16="http://schemas.microsoft.com/office/drawing/2014/main" id="{03192619-A0C2-49CC-B7E1-0CB14047B83B}"/>
               </a:ext>
             </a:extLst>
           </p:cNvPr>
@@ -37574,7 +37663,7 @@
           <p:cNvPr id="8" name="">
             <a:extLst xmlns:a="http://schemas.openxmlformats.org/drawingml/2006/main">
               <a:ext uri="{FF2B5EF4-FFF2-40B4-BE49-F238E27FC236}">
-                <a16:creationId xmlns:a16="http://schemas.microsoft.com/office/drawing/2014/main" id="{055D3EC7-DB02-4894-B3F3-508B8F669EA7}"/>
+                <a16:creationId xmlns:a16="http://schemas.microsoft.com/office/drawing/2014/main" id="{DA7526D1-3E51-40BB-89CB-A854A5FB6561}"/>
               </a:ext>
             </a:extLst>
           </p:cNvPr>
@@ -37631,7 +37720,7 @@
           <p:cNvPr id="9" name="">
             <a:extLst xmlns:a="http://schemas.openxmlformats.org/drawingml/2006/main">
               <a:ext uri="{FF2B5EF4-FFF2-40B4-BE49-F238E27FC236}">
-                <a16:creationId xmlns:a16="http://schemas.microsoft.com/office/drawing/2014/main" id="{2A30D395-007C-402D-A1F2-48555E6DF986}"/>
+                <a16:creationId xmlns:a16="http://schemas.microsoft.com/office/drawing/2014/main" id="{D7F54C78-32D0-4BB5-B259-5B8519CD477C}"/>
               </a:ext>
             </a:extLst>
           </p:cNvPr>
@@ -37688,7 +37777,7 @@
           <p:cNvPr id="10" name="">
             <a:extLst xmlns:a="http://schemas.openxmlformats.org/drawingml/2006/main">
               <a:ext uri="{FF2B5EF4-FFF2-40B4-BE49-F238E27FC236}">
-                <a16:creationId xmlns:a16="http://schemas.microsoft.com/office/drawing/2014/main" id="{06732F78-4A45-4ADA-891E-95E8EB651D85}"/>
+                <a16:creationId xmlns:a16="http://schemas.microsoft.com/office/drawing/2014/main" id="{0770C2A3-F6B5-4609-89C7-650588D5B0D4}"/>
               </a:ext>
             </a:extLst>
           </p:cNvPr>
@@ -37718,7 +37807,7 @@
           <p:cNvPr id="11" name="">
             <a:extLst xmlns:a="http://schemas.openxmlformats.org/drawingml/2006/main">
               <a:ext uri="{FF2B5EF4-FFF2-40B4-BE49-F238E27FC236}">
-                <a16:creationId xmlns:a16="http://schemas.microsoft.com/office/drawing/2014/main" id="{D368E023-59EB-4123-B0DE-BF71AC034620}"/>
+                <a16:creationId xmlns:a16="http://schemas.microsoft.com/office/drawing/2014/main" id="{162444C2-D26F-449C-96B4-3B514F1720AB}"/>
               </a:ext>
             </a:extLst>
           </p:cNvPr>
@@ -37775,7 +37864,7 @@
           <p:cNvPr id="12" name="">
             <a:extLst xmlns:a="http://schemas.openxmlformats.org/drawingml/2006/main">
               <a:ext uri="{FF2B5EF4-FFF2-40B4-BE49-F238E27FC236}">
-                <a16:creationId xmlns:a16="http://schemas.microsoft.com/office/drawing/2014/main" id="{BA15E241-F26B-4D3C-A9FB-E59B5CA0C715}"/>
+                <a16:creationId xmlns:a16="http://schemas.microsoft.com/office/drawing/2014/main" id="{E71845A9-FC5F-4ABC-94FF-528327836EA3}"/>
               </a:ext>
             </a:extLst>
           </p:cNvPr>
@@ -37832,7 +37921,7 @@
           <p:cNvPr id="13" name="">
             <a:extLst xmlns:a="http://schemas.openxmlformats.org/drawingml/2006/main">
               <a:ext uri="{FF2B5EF4-FFF2-40B4-BE49-F238E27FC236}">
-                <a16:creationId xmlns:a16="http://schemas.microsoft.com/office/drawing/2014/main" id="{7927067A-D6DA-4F77-B28E-E3BDD2B0BABF}"/>
+                <a16:creationId xmlns:a16="http://schemas.microsoft.com/office/drawing/2014/main" id="{127D8A67-F223-4193-9FB0-BA6EACAFE477}"/>
               </a:ext>
             </a:extLst>
           </p:cNvPr>
@@ -37889,7 +37978,7 @@
           <p:cNvPr id="14" name="">
             <a:extLst xmlns:a="http://schemas.openxmlformats.org/drawingml/2006/main">
               <a:ext uri="{FF2B5EF4-FFF2-40B4-BE49-F238E27FC236}">
-                <a16:creationId xmlns:a16="http://schemas.microsoft.com/office/drawing/2014/main" id="{C8513066-BCD2-467C-A8E3-AC47CF3973B5}"/>
+                <a16:creationId xmlns:a16="http://schemas.microsoft.com/office/drawing/2014/main" id="{CA76F5BA-CA9D-47B0-8B2F-3FB5EA39EFAF}"/>
               </a:ext>
             </a:extLst>
           </p:cNvPr>
@@ -37919,7 +38008,7 @@
           <p:cNvPr id="15" name="">
             <a:extLst xmlns:a="http://schemas.openxmlformats.org/drawingml/2006/main">
               <a:ext uri="{FF2B5EF4-FFF2-40B4-BE49-F238E27FC236}">
-                <a16:creationId xmlns:a16="http://schemas.microsoft.com/office/drawing/2014/main" id="{8E94F308-A2E1-43C7-AAB0-B000D96F3578}"/>
+                <a16:creationId xmlns:a16="http://schemas.microsoft.com/office/drawing/2014/main" id="{EA7010E3-6D16-42B2-9A52-35FA0ED327B4}"/>
               </a:ext>
             </a:extLst>
           </p:cNvPr>
@@ -37976,7 +38065,7 @@
           <p:cNvPr id="16" name="">
             <a:extLst xmlns:a="http://schemas.openxmlformats.org/drawingml/2006/main">
               <a:ext uri="{FF2B5EF4-FFF2-40B4-BE49-F238E27FC236}">
-                <a16:creationId xmlns:a16="http://schemas.microsoft.com/office/drawing/2014/main" id="{DAA4EEE1-9407-48C9-B3B8-DCE6D39A0B89}"/>
+                <a16:creationId xmlns:a16="http://schemas.microsoft.com/office/drawing/2014/main" id="{629D6D60-31DF-41D5-BF98-FCC0F9A2ED05}"/>
               </a:ext>
             </a:extLst>
           </p:cNvPr>
@@ -38033,7 +38122,7 @@
           <p:cNvPr id="17" name="">
             <a:extLst xmlns:a="http://schemas.openxmlformats.org/drawingml/2006/main">
               <a:ext uri="{FF2B5EF4-FFF2-40B4-BE49-F238E27FC236}">
-                <a16:creationId xmlns:a16="http://schemas.microsoft.com/office/drawing/2014/main" id="{E29DEF34-2EB4-4540-A024-91D2429F407F}"/>
+                <a16:creationId xmlns:a16="http://schemas.microsoft.com/office/drawing/2014/main" id="{AD4099DF-78C6-4403-B040-833324948563}"/>
               </a:ext>
             </a:extLst>
           </p:cNvPr>
@@ -38090,7 +38179,7 @@
           <p:cNvPr id="18" name="">
             <a:extLst xmlns:a="http://schemas.openxmlformats.org/drawingml/2006/main">
               <a:ext uri="{FF2B5EF4-FFF2-40B4-BE49-F238E27FC236}">
-                <a16:creationId xmlns:a16="http://schemas.microsoft.com/office/drawing/2014/main" id="{B80C2BD1-1AE9-4498-A1B2-08D3725CEE4B}"/>
+                <a16:creationId xmlns:a16="http://schemas.microsoft.com/office/drawing/2014/main" id="{893C41AA-F6AD-423C-9BCA-7B7E05C8FCA3}"/>
               </a:ext>
             </a:extLst>
           </p:cNvPr>
@@ -38120,7 +38209,7 @@
           <p:cNvPr id="19" name="">
             <a:extLst xmlns:a="http://schemas.openxmlformats.org/drawingml/2006/main">
               <a:ext uri="{FF2B5EF4-FFF2-40B4-BE49-F238E27FC236}">
-                <a16:creationId xmlns:a16="http://schemas.microsoft.com/office/drawing/2014/main" id="{ED556929-1BFF-4712-89F9-57B531CBFBE3}"/>
+                <a16:creationId xmlns:a16="http://schemas.microsoft.com/office/drawing/2014/main" id="{800C8846-E865-44A7-9624-28D2A718ACBF}"/>
               </a:ext>
             </a:extLst>
           </p:cNvPr>
@@ -38177,7 +38266,7 @@
           <p:cNvPr id="20" name="">
             <a:extLst xmlns:a="http://schemas.openxmlformats.org/drawingml/2006/main">
               <a:ext uri="{FF2B5EF4-FFF2-40B4-BE49-F238E27FC236}">
-                <a16:creationId xmlns:a16="http://schemas.microsoft.com/office/drawing/2014/main" id="{30239E93-DFE8-438F-AFC9-465F6CED2A36}"/>
+                <a16:creationId xmlns:a16="http://schemas.microsoft.com/office/drawing/2014/main" id="{05F0C157-69D9-4862-8B64-5D03F06E0221}"/>
               </a:ext>
             </a:extLst>
           </p:cNvPr>
@@ -38234,7 +38323,7 @@
           <p:cNvPr id="21" name="">
             <a:extLst xmlns:a="http://schemas.openxmlformats.org/drawingml/2006/main">
               <a:ext uri="{FF2B5EF4-FFF2-40B4-BE49-F238E27FC236}">
-                <a16:creationId xmlns:a16="http://schemas.microsoft.com/office/drawing/2014/main" id="{51088E85-493E-4AB5-BBAC-AE2DAD0686BD}"/>
+                <a16:creationId xmlns:a16="http://schemas.microsoft.com/office/drawing/2014/main" id="{4385E698-A874-402D-A94E-B2167756F174}"/>
               </a:ext>
             </a:extLst>
           </p:cNvPr>
@@ -38291,7 +38380,7 @@
           <p:cNvPr id="22" name="">
             <a:extLst xmlns:a="http://schemas.openxmlformats.org/drawingml/2006/main">
               <a:ext uri="{FF2B5EF4-FFF2-40B4-BE49-F238E27FC236}">
-                <a16:creationId xmlns:a16="http://schemas.microsoft.com/office/drawing/2014/main" id="{E1B54D60-FB02-4832-AF84-ED71390E59F2}"/>
+                <a16:creationId xmlns:a16="http://schemas.microsoft.com/office/drawing/2014/main" id="{1364CFF5-2F0B-4CB8-8F24-3AD357C9F998}"/>
               </a:ext>
             </a:extLst>
           </p:cNvPr>
@@ -38323,7 +38412,7 @@
           <p:cNvPr id="23" name="">
             <a:extLst xmlns:a="http://schemas.openxmlformats.org/drawingml/2006/main">
               <a:ext uri="{FF2B5EF4-FFF2-40B4-BE49-F238E27FC236}">
-                <a16:creationId xmlns:a16="http://schemas.microsoft.com/office/drawing/2014/main" id="{99DB5D0F-3302-4CAA-828B-71B0FAAE0354}"/>
+                <a16:creationId xmlns:a16="http://schemas.microsoft.com/office/drawing/2014/main" id="{D888558F-C724-435D-9237-BE744B8262C8}"/>
               </a:ext>
             </a:extLst>
           </p:cNvPr>
@@ -38380,7 +38469,7 @@
           <p:cNvPr id="24" name="">
             <a:extLst xmlns:a="http://schemas.openxmlformats.org/drawingml/2006/main">
               <a:ext uri="{FF2B5EF4-FFF2-40B4-BE49-F238E27FC236}">
-                <a16:creationId xmlns:a16="http://schemas.microsoft.com/office/drawing/2014/main" id="{AD433FFB-BC1E-43BF-AAD3-F930CFBE02EC}"/>
+                <a16:creationId xmlns:a16="http://schemas.microsoft.com/office/drawing/2014/main" id="{CB2EFA49-4562-460F-B39A-45708E12D022}"/>
               </a:ext>
             </a:extLst>
           </p:cNvPr>
@@ -38435,7 +38524,7 @@
     </p:spTree>
     <p:extLst>
       <p:ext uri="{BB962C8B-B14F-4D97-AF65-F5344CB8AC3E}">
-        <p14:creationId xmlns:p14="http://schemas.microsoft.com/office/powerpoint/2010/main" val="793898631"/>
+        <p14:creationId xmlns:p14="http://schemas.microsoft.com/office/powerpoint/2010/main" val="1891163117"/>
       </p:ext>
     </p:extLst>
   </p:cSld>
@@ -38466,7 +38555,7 @@
           <p:cNvPr id="19" name="">
             <a:extLst xmlns:a="http://schemas.openxmlformats.org/drawingml/2006/main">
               <a:ext uri="{FF2B5EF4-FFF2-40B4-BE49-F238E27FC236}">
-                <a16:creationId xmlns:a16="http://schemas.microsoft.com/office/drawing/2014/main" id="{736115C6-3034-4853-B905-ED28FF58B355}"/>
+                <a16:creationId xmlns:a16="http://schemas.microsoft.com/office/drawing/2014/main" id="{0CAA190B-CE61-462A-B7D0-276FB454573E}"/>
               </a:ext>
             </a:extLst>
           </p:cNvPr>
@@ -38523,7 +38612,7 @@
           <p:cNvPr id="2" name="">
             <a:extLst xmlns:a="http://schemas.openxmlformats.org/drawingml/2006/main">
               <a:ext uri="{FF2B5EF4-FFF2-40B4-BE49-F238E27FC236}">
-                <a16:creationId xmlns:a16="http://schemas.microsoft.com/office/drawing/2014/main" id="{E0337664-EC6E-4A45-88FE-C894E9437418}"/>
+                <a16:creationId xmlns:a16="http://schemas.microsoft.com/office/drawing/2014/main" id="{7524E7F8-0F06-47E6-B554-9C0EB88D58FC}"/>
               </a:ext>
             </a:extLst>
           </p:cNvPr>
@@ -38580,7 +38669,7 @@
           <p:cNvPr id="3" name="">
             <a:extLst xmlns:a="http://schemas.openxmlformats.org/drawingml/2006/main">
               <a:ext uri="{FF2B5EF4-FFF2-40B4-BE49-F238E27FC236}">
-                <a16:creationId xmlns:a16="http://schemas.microsoft.com/office/drawing/2014/main" id="{BCBD129A-0529-4A62-B6F4-12166F29761B}"/>
+                <a16:creationId xmlns:a16="http://schemas.microsoft.com/office/drawing/2014/main" id="{A7D55A0D-4042-4D3D-B22A-1450A6FA852D}"/>
               </a:ext>
             </a:extLst>
           </p:cNvPr>
@@ -38610,7 +38699,7 @@
           <p:cNvPr id="4" name="">
             <a:extLst xmlns:a="http://schemas.openxmlformats.org/drawingml/2006/main">
               <a:ext uri="{FF2B5EF4-FFF2-40B4-BE49-F238E27FC236}">
-                <a16:creationId xmlns:a16="http://schemas.microsoft.com/office/drawing/2014/main" id="{E7F09043-AB26-40B5-A18D-AE15CFC3F96E}"/>
+                <a16:creationId xmlns:a16="http://schemas.microsoft.com/office/drawing/2014/main" id="{166FB392-283D-40B3-9EC9-445226A55E0E}"/>
               </a:ext>
             </a:extLst>
           </p:cNvPr>
@@ -38667,7 +38756,7 @@
           <p:cNvPr id="5" name="">
             <a:extLst xmlns:a="http://schemas.openxmlformats.org/drawingml/2006/main">
               <a:ext uri="{FF2B5EF4-FFF2-40B4-BE49-F238E27FC236}">
-                <a16:creationId xmlns:a16="http://schemas.microsoft.com/office/drawing/2014/main" id="{5555C6EF-0D39-4254-9EB1-F0D6F59F5074}"/>
+                <a16:creationId xmlns:a16="http://schemas.microsoft.com/office/drawing/2014/main" id="{F2A6ED39-FD44-49F5-9C43-6C15E912AC43}"/>
               </a:ext>
             </a:extLst>
           </p:cNvPr>
@@ -38724,7 +38813,7 @@
           <p:cNvPr id="6" name="">
             <a:extLst xmlns:a="http://schemas.openxmlformats.org/drawingml/2006/main">
               <a:ext uri="{FF2B5EF4-FFF2-40B4-BE49-F238E27FC236}">
-                <a16:creationId xmlns:a16="http://schemas.microsoft.com/office/drawing/2014/main" id="{D10D4944-FA4F-4A2E-9E35-A5B5E9C3FCD9}"/>
+                <a16:creationId xmlns:a16="http://schemas.microsoft.com/office/drawing/2014/main" id="{73F64106-FDE1-4B76-B2E9-9B5BF29B775E}"/>
               </a:ext>
             </a:extLst>
           </p:cNvPr>
@@ -38781,7 +38870,7 @@
           <p:cNvPr id="7" name="">
             <a:extLst xmlns:a="http://schemas.openxmlformats.org/drawingml/2006/main">
               <a:ext uri="{FF2B5EF4-FFF2-40B4-BE49-F238E27FC236}">
-                <a16:creationId xmlns:a16="http://schemas.microsoft.com/office/drawing/2014/main" id="{3A7AA966-69E6-4AA2-B946-E11369DD0C08}"/>
+                <a16:creationId xmlns:a16="http://schemas.microsoft.com/office/drawing/2014/main" id="{4253D003-89F0-4DC5-88DA-E7B20E525015}"/>
               </a:ext>
             </a:extLst>
           </p:cNvPr>
@@ -38815,7 +38904,7 @@
           <p:cNvPr id="8" name="">
             <a:extLst xmlns:a="http://schemas.openxmlformats.org/drawingml/2006/main">
               <a:ext uri="{FF2B5EF4-FFF2-40B4-BE49-F238E27FC236}">
-                <a16:creationId xmlns:a16="http://schemas.microsoft.com/office/drawing/2014/main" id="{B9D7F8D1-6F41-40F9-A994-48015EDC2401}"/>
+                <a16:creationId xmlns:a16="http://schemas.microsoft.com/office/drawing/2014/main" id="{410D0694-3EB0-4927-84EA-A9E9C2AFA568}"/>
               </a:ext>
             </a:extLst>
           </p:cNvPr>
@@ -38872,7 +38961,7 @@
           <p:cNvPr id="9" name="">
             <a:extLst xmlns:a="http://schemas.openxmlformats.org/drawingml/2006/main">
               <a:ext uri="{FF2B5EF4-FFF2-40B4-BE49-F238E27FC236}">
-                <a16:creationId xmlns:a16="http://schemas.microsoft.com/office/drawing/2014/main" id="{0860B4E9-D641-4629-8A8E-5666A6D902EC}"/>
+                <a16:creationId xmlns:a16="http://schemas.microsoft.com/office/drawing/2014/main" id="{C51FEA46-37BE-4766-925C-603BCD940CE6}"/>
               </a:ext>
             </a:extLst>
           </p:cNvPr>
@@ -38975,7 +39064,7 @@
           <p:cNvPr id="10" name="">
             <a:extLst xmlns:a="http://schemas.openxmlformats.org/drawingml/2006/main">
               <a:ext uri="{FF2B5EF4-FFF2-40B4-BE49-F238E27FC236}">
-                <a16:creationId xmlns:a16="http://schemas.microsoft.com/office/drawing/2014/main" id="{1FC07960-CD0A-4B52-8C8D-0706DB3E8B8E}"/>
+                <a16:creationId xmlns:a16="http://schemas.microsoft.com/office/drawing/2014/main" id="{E3DD4046-F23F-4D96-8563-57664200E689}"/>
               </a:ext>
             </a:extLst>
           </p:cNvPr>
@@ -39032,7 +39121,7 @@
           <p:cNvPr id="11" name="">
             <a:extLst xmlns:a="http://schemas.openxmlformats.org/drawingml/2006/main">
               <a:ext uri="{FF2B5EF4-FFF2-40B4-BE49-F238E27FC236}">
-                <a16:creationId xmlns:a16="http://schemas.microsoft.com/office/drawing/2014/main" id="{D93FAAAE-9893-42D9-AFB6-A2EB2BE1B766}"/>
+                <a16:creationId xmlns:a16="http://schemas.microsoft.com/office/drawing/2014/main" id="{FAF70426-7801-4CDA-BB1D-4C7174B4C4CD}"/>
               </a:ext>
             </a:extLst>
           </p:cNvPr>
@@ -39066,7 +39155,7 @@
           <p:cNvPr id="12" name="">
             <a:extLst xmlns:a="http://schemas.openxmlformats.org/drawingml/2006/main">
               <a:ext uri="{FF2B5EF4-FFF2-40B4-BE49-F238E27FC236}">
-                <a16:creationId xmlns:a16="http://schemas.microsoft.com/office/drawing/2014/main" id="{9637D76A-6FC8-4A9A-A85D-E27CFCF1124C}"/>
+                <a16:creationId xmlns:a16="http://schemas.microsoft.com/office/drawing/2014/main" id="{A3010EE0-B292-43CC-AD69-3F3A9B0008AB}"/>
               </a:ext>
             </a:extLst>
           </p:cNvPr>
@@ -39123,7 +39212,7 @@
           <p:cNvPr id="13" name="">
             <a:extLst xmlns:a="http://schemas.openxmlformats.org/drawingml/2006/main">
               <a:ext uri="{FF2B5EF4-FFF2-40B4-BE49-F238E27FC236}">
-                <a16:creationId xmlns:a16="http://schemas.microsoft.com/office/drawing/2014/main" id="{4D7AD470-ADC3-4798-BF3C-7A972A8FCC8A}"/>
+                <a16:creationId xmlns:a16="http://schemas.microsoft.com/office/drawing/2014/main" id="{719AF685-CC2E-4DF5-8EA6-0696A2117F8C}"/>
               </a:ext>
             </a:extLst>
           </p:cNvPr>
@@ -39226,7 +39315,7 @@
           <p:cNvPr id="14" name="">
             <a:extLst xmlns:a="http://schemas.openxmlformats.org/drawingml/2006/main">
               <a:ext uri="{FF2B5EF4-FFF2-40B4-BE49-F238E27FC236}">
-                <a16:creationId xmlns:a16="http://schemas.microsoft.com/office/drawing/2014/main" id="{1A0A4839-23E4-41A3-B4CD-5664DA61D6B9}"/>
+                <a16:creationId xmlns:a16="http://schemas.microsoft.com/office/drawing/2014/main" id="{96267F63-DAE6-4EE1-B676-3BB13167E689}"/>
               </a:ext>
             </a:extLst>
           </p:cNvPr>
@@ -39283,7 +39372,7 @@
           <p:cNvPr id="15" name="">
             <a:extLst xmlns:a="http://schemas.openxmlformats.org/drawingml/2006/main">
               <a:ext uri="{FF2B5EF4-FFF2-40B4-BE49-F238E27FC236}">
-                <a16:creationId xmlns:a16="http://schemas.microsoft.com/office/drawing/2014/main" id="{8E3BE7BF-9F48-4DC4-8FFB-A3CF4A12A34A}"/>
+                <a16:creationId xmlns:a16="http://schemas.microsoft.com/office/drawing/2014/main" id="{6B6D2CD7-0892-48FE-90C5-08D21EC6AB0C}"/>
               </a:ext>
             </a:extLst>
           </p:cNvPr>
@@ -39317,7 +39406,7 @@
           <p:cNvPr id="16" name="">
             <a:extLst xmlns:a="http://schemas.openxmlformats.org/drawingml/2006/main">
               <a:ext uri="{FF2B5EF4-FFF2-40B4-BE49-F238E27FC236}">
-                <a16:creationId xmlns:a16="http://schemas.microsoft.com/office/drawing/2014/main" id="{3B66E850-C54E-437E-B85A-592EB3EC1991}"/>
+                <a16:creationId xmlns:a16="http://schemas.microsoft.com/office/drawing/2014/main" id="{3B8FD772-7A72-4AEF-89E9-5AB141AC01C0}"/>
               </a:ext>
             </a:extLst>
           </p:cNvPr>
@@ -39374,7 +39463,7 @@
           <p:cNvPr id="17" name="">
             <a:extLst xmlns:a="http://schemas.openxmlformats.org/drawingml/2006/main">
               <a:ext uri="{FF2B5EF4-FFF2-40B4-BE49-F238E27FC236}">
-                <a16:creationId xmlns:a16="http://schemas.microsoft.com/office/drawing/2014/main" id="{32148979-0A4B-49CB-B763-F62F32194F70}"/>
+                <a16:creationId xmlns:a16="http://schemas.microsoft.com/office/drawing/2014/main" id="{E440861A-C935-4083-A8BD-EB78F7D3E2C7}"/>
               </a:ext>
             </a:extLst>
           </p:cNvPr>
@@ -39477,7 +39566,7 @@
           <p:cNvPr id="18" name="">
             <a:extLst xmlns:a="http://schemas.openxmlformats.org/drawingml/2006/main">
               <a:ext uri="{FF2B5EF4-FFF2-40B4-BE49-F238E27FC236}">
-                <a16:creationId xmlns:a16="http://schemas.microsoft.com/office/drawing/2014/main" id="{FA24652F-1ACF-4183-B403-F432929EFC8E}"/>
+                <a16:creationId xmlns:a16="http://schemas.microsoft.com/office/drawing/2014/main" id="{CB8C8BA6-FF5C-4A3B-967C-5F82E2D79434}"/>
               </a:ext>
             </a:extLst>
           </p:cNvPr>
@@ -39532,7 +39621,7 @@
     </p:spTree>
     <p:extLst>
       <p:ext uri="{BB962C8B-B14F-4D97-AF65-F5344CB8AC3E}">
-        <p14:creationId xmlns:p14="http://schemas.microsoft.com/office/powerpoint/2010/main" val="1009616505"/>
+        <p14:creationId xmlns:p14="http://schemas.microsoft.com/office/powerpoint/2010/main" val="648865774"/>
       </p:ext>
     </p:extLst>
   </p:cSld>
